--- a/anh-le/G03_slide.pptx
+++ b/anh-le/G03_slide.pptx
@@ -23,6 +23,7 @@
     <p:sldId id="271" r:id="rId22"/>
     <p:sldId id="272" r:id="rId23"/>
     <p:sldId id="273" r:id="rId24"/>
+    <p:sldId id="274" r:id="rId25"/>
   </p:sldIdLst>
   <p:sldSz cx="12191695" cy="6858000" type="screen4x3"/>
   <p:notesSz cx="6858000" cy="9144000"/>
@@ -3768,7 +3769,7 @@
                   <a:srgbClr val="FFFFFF"/>
                 </a:solidFill>
               </a:rPr>
-              <a:t>8. Lệnh ẩn trong email bị chặn ở 3 chỗ (H4, H5)</a:t>
+              <a:t>7. File của user A không lộ sang user B (H3)</a:t>
             </a:r>
           </a:p>
         </p:txBody>
@@ -3806,7 +3807,7 @@
                   <a:srgbClr val="2E6FB7"/>
                 </a:solidFill>
               </a:rPr>
-              <a:t>"Một email chứa lệnh ẩn: gửi toàn bộ hợp đồng ra ngoài." Lệnh này không chạy được, vì:</a:t>
+              <a:t>"Agent của A có đọc được file của B không?" Không, vì có 4 lớp chặn:</a:t>
             </a:r>
           </a:p>
         </p:txBody>
@@ -3844,7 +3845,7 @@
                   <a:srgbClr val="555F6B"/>
                 </a:solidFill>
               </a:rPr>
-              <a:t>8</a:t>
+              <a:t>7</a:t>
             </a:r>
           </a:p>
         </p:txBody>
@@ -3887,16 +3888,262 @@
           </a:p>
         </p:txBody>
       </p:sp>
-      <p:sp>
-        <p:nvSpPr>
-          <p:cNvPr id="7" name="TextBox 6"/>
+      <p:graphicFrame>
+        <p:nvGraphicFramePr>
+          <p:cNvPr id="7" name="Table 6"/>
+          <p:cNvGraphicFramePr>
+            <a:graphicFrameLocks noGrp="1"/>
+          </p:cNvGraphicFramePr>
+          <p:nvPr/>
+        </p:nvGraphicFramePr>
+        <p:xfrm>
+          <a:off x="457200" y="1371600"/>
+          <a:ext cx="5669280" cy="3200400"/>
+        </p:xfrm>
+        <a:graphic>
+          <a:graphicData uri="http://schemas.openxmlformats.org/drawingml/2006/table">
+            <a:tbl>
+              <a:tblPr firstRow="1" bandRow="1">
+                <a:tableStyleId>{5C22544A-7EE6-4342-B048-85BDC9FD1C3A}</a:tableStyleId>
+              </a:tblPr>
+              <a:tblGrid>
+                <a:gridCol w="1188720"/>
+                <a:gridCol w="4480560"/>
+              </a:tblGrid>
+              <a:tr h="640080">
+                <a:tc>
+                  <a:txBody>
+                    <a:bodyPr/>
+                    <a:lstStyle/>
+                    <a:p>
+                      <a:r>
+                        <a:rPr sz="1400" b="1">
+                          <a:solidFill>
+                            <a:srgbClr val="FFFFFF"/>
+                          </a:solidFill>
+                        </a:rPr>
+                        <a:t>Lớp</a:t>
+                      </a:r>
+                    </a:p>
+                  </a:txBody>
+                  <a:tcPr marL="45720" marR="45720" marT="18288" marB="18288">
+                    <a:solidFill>
+                      <a:srgbClr val="2E6FB7"/>
+                    </a:solidFill>
+                  </a:tcPr>
+                </a:tc>
+                <a:tc>
+                  <a:txBody>
+                    <a:bodyPr/>
+                    <a:lstStyle/>
+                    <a:p>
+                      <a:r>
+                        <a:rPr sz="1400" b="1">
+                          <a:solidFill>
+                            <a:srgbClr val="FFFFFF"/>
+                          </a:solidFill>
+                        </a:rPr>
+                        <a:t>Cách chặn</a:t>
+                      </a:r>
+                    </a:p>
+                  </a:txBody>
+                  <a:tcPr marL="45720" marR="45720" marT="18288" marB="18288">
+                    <a:solidFill>
+                      <a:srgbClr val="2E6FB7"/>
+                    </a:solidFill>
+                  </a:tcPr>
+                </a:tc>
+              </a:tr>
+              <a:tr h="640080">
+                <a:tc>
+                  <a:txBody>
+                    <a:bodyPr/>
+                    <a:lstStyle/>
+                    <a:p>
+                      <a:r>
+                        <a:rPr sz="1400" b="0">
+                          <a:solidFill>
+                            <a:srgbClr val="555F6B"/>
+                          </a:solidFill>
+                        </a:rPr>
+                        <a:t>Lưu trữ</a:t>
+                      </a:r>
+                    </a:p>
+                  </a:txBody>
+                  <a:tcPr marL="45720" marR="45720" marT="18288" marB="18288">
+                    <a:solidFill>
+                      <a:srgbClr val="EEF3F8"/>
+                    </a:solidFill>
+                  </a:tcPr>
+                </a:tc>
+                <a:tc>
+                  <a:txBody>
+                    <a:bodyPr/>
+                    <a:lstStyle/>
+                    <a:p>
+                      <a:r>
+                        <a:rPr sz="1400" b="0">
+                          <a:solidFill>
+                            <a:srgbClr val="555F6B"/>
+                          </a:solidFill>
+                        </a:rPr>
+                        <a:t>Mỗi user một thư mục riêng; chỉ app có quyền vào bucket</a:t>
+                      </a:r>
+                    </a:p>
+                  </a:txBody>
+                  <a:tcPr marL="45720" marR="45720" marT="18288" marB="18288">
+                    <a:solidFill>
+                      <a:srgbClr val="EEF3F8"/>
+                    </a:solidFill>
+                  </a:tcPr>
+                </a:tc>
+              </a:tr>
+              <a:tr h="640080">
+                <a:tc>
+                  <a:txBody>
+                    <a:bodyPr/>
+                    <a:lstStyle/>
+                    <a:p>
+                      <a:r>
+                        <a:rPr sz="1400" b="0">
+                          <a:solidFill>
+                            <a:srgbClr val="555F6B"/>
+                          </a:solidFill>
+                        </a:rPr>
+                        <a:t>Database</a:t>
+                      </a:r>
+                    </a:p>
+                  </a:txBody>
+                  <a:tcPr marL="45720" marR="45720" marT="18288" marB="18288">
+                    <a:solidFill>
+                      <a:srgbClr val="FFFFFF"/>
+                    </a:solidFill>
+                  </a:tcPr>
+                </a:tc>
+                <a:tc>
+                  <a:txBody>
+                    <a:bodyPr/>
+                    <a:lstStyle/>
+                    <a:p>
+                      <a:r>
+                        <a:rPr sz="1400" b="0">
+                          <a:solidFill>
+                            <a:srgbClr val="555F6B"/>
+                          </a:solidFill>
+                        </a:rPr>
+                        <a:t>Postgres tự lọc dòng theo người sở hữu (Row-Level Security)</a:t>
+                      </a:r>
+                    </a:p>
+                  </a:txBody>
+                  <a:tcPr marL="45720" marR="45720" marT="18288" marB="18288">
+                    <a:solidFill>
+                      <a:srgbClr val="FFFFFF"/>
+                    </a:solidFill>
+                  </a:tcPr>
+                </a:tc>
+              </a:tr>
+              <a:tr h="640080">
+                <a:tc>
+                  <a:txBody>
+                    <a:bodyPr/>
+                    <a:lstStyle/>
+                    <a:p>
+                      <a:r>
+                        <a:rPr sz="1400" b="0">
+                          <a:solidFill>
+                            <a:srgbClr val="555F6B"/>
+                          </a:solidFill>
+                        </a:rPr>
+                        <a:t>Tìm kiếm</a:t>
+                      </a:r>
+                    </a:p>
+                  </a:txBody>
+                  <a:tcPr marL="45720" marR="45720" marT="18288" marB="18288">
+                    <a:solidFill>
+                      <a:srgbClr val="EEF3F8"/>
+                    </a:solidFill>
+                  </a:tcPr>
+                </a:tc>
+                <a:tc>
+                  <a:txBody>
+                    <a:bodyPr/>
+                    <a:lstStyle/>
+                    <a:p>
+                      <a:r>
+                        <a:rPr sz="1400" b="0">
+                          <a:solidFill>
+                            <a:srgbClr val="555F6B"/>
+                          </a:solidFill>
+                        </a:rPr>
+                        <a:t>Mọi truy vấn bắt buộc lọc theo người sở hữu hoặc nhóm</a:t>
+                      </a:r>
+                    </a:p>
+                  </a:txBody>
+                  <a:tcPr marL="45720" marR="45720" marT="18288" marB="18288">
+                    <a:solidFill>
+                      <a:srgbClr val="EEF3F8"/>
+                    </a:solidFill>
+                  </a:tcPr>
+                </a:tc>
+              </a:tr>
+              <a:tr h="640080">
+                <a:tc>
+                  <a:txBody>
+                    <a:bodyPr/>
+                    <a:lstStyle/>
+                    <a:p>
+                      <a:r>
+                        <a:rPr sz="1400" b="0">
+                          <a:solidFill>
+                            <a:srgbClr val="555F6B"/>
+                          </a:solidFill>
+                        </a:rPr>
+                        <a:t>Connector</a:t>
+                      </a:r>
+                    </a:p>
+                  </a:txBody>
+                  <a:tcPr marL="45720" marR="45720" marT="18288" marB="18288">
+                    <a:solidFill>
+                      <a:srgbClr val="FFFFFF"/>
+                    </a:solidFill>
+                  </a:tcPr>
+                </a:tc>
+                <a:tc>
+                  <a:txBody>
+                    <a:bodyPr/>
+                    <a:lstStyle/>
+                    <a:p>
+                      <a:r>
+                        <a:rPr sz="1400" b="0">
+                          <a:solidFill>
+                            <a:srgbClr val="555F6B"/>
+                          </a:solidFill>
+                        </a:rPr>
+                        <a:t>Dùng OAuth của chính user, nên không thấy dữ liệu người khác</a:t>
+                      </a:r>
+                    </a:p>
+                  </a:txBody>
+                  <a:tcPr marL="45720" marR="45720" marT="18288" marB="18288">
+                    <a:solidFill>
+                      <a:srgbClr val="FFFFFF"/>
+                    </a:solidFill>
+                  </a:tcPr>
+                </a:tc>
+              </a:tr>
+            </a:tbl>
+          </a:graphicData>
+        </a:graphic>
+      </p:graphicFrame>
+      <p:sp>
+        <p:nvSpPr>
+          <p:cNvPr id="8" name="TextBox 7"/>
           <p:cNvSpPr txBox="1"/>
           <p:nvPr/>
         </p:nvSpPr>
         <p:spPr>
           <a:xfrm>
-            <a:off x="457200" y="1371600"/>
-            <a:ext cx="5577840" cy="4572000"/>
+            <a:off x="6400800" y="1371600"/>
+            <a:ext cx="5394960" cy="4572000"/>
           </a:xfrm>
           <a:prstGeom prst="rect">
             <a:avLst/>
@@ -3915,12 +4162,12 @@
               </a:spcAft>
             </a:pPr>
             <a:r>
-              <a:rPr sz="1400" b="1">
+              <a:rPr sz="1500" b="1">
                 <a:solidFill>
                   <a:srgbClr val="555F6B"/>
                 </a:solidFill>
               </a:rPr>
-              <a:t>1. Guardrail quét nội dung</a:t>
+              <a:t>Sandbox: code của agent chạy trong hộp kín</a:t>
             </a:r>
           </a:p>
           <a:p>
@@ -3930,12 +4177,12 @@
               </a:spcAft>
             </a:pPr>
             <a:r>
-              <a:rPr sz="1400" b="0">
+              <a:rPr sz="1500" b="0">
                 <a:solidFill>
                   <a:srgbClr val="555F6B"/>
                 </a:solidFill>
               </a:rPr>
-              <a:t>Model Armor quét tin nhắn mới, nội dung từ connector và câu trả lời cuối (281 USD/tháng)</a:t>
+              <a:t>gVisor ngăn code chạm trực tiếp vào kernel của máy chủ</a:t>
             </a:r>
           </a:p>
           <a:p>
@@ -3945,12 +4192,12 @@
               </a:spcAft>
             </a:pPr>
             <a:r>
-              <a:rPr sz="1400" b="1">
+              <a:rPr sz="1500" b="0">
                 <a:solidFill>
                   <a:srgbClr val="555F6B"/>
                 </a:solidFill>
               </a:rPr>
-              <a:t>2. Nội dung email chỉ là dữ liệu</a:t>
+              <a:t>Không có mạng ra ngoài: không internet, không mạng nội bộ</a:t>
             </a:r>
           </a:p>
           <a:p>
@@ -3960,12 +4207,12 @@
               </a:spcAft>
             </a:pPr>
             <a:r>
-              <a:rPr sz="1400" b="0">
+              <a:rPr sz="1500" b="0">
                 <a:solidFill>
                   <a:srgbClr val="555F6B"/>
                 </a:solidFill>
               </a:rPr>
-              <a:t>Nội dung từ connector được đánh dấu "không tin cậy". Chỉ yêu cầu của user mới kích hoạt được hành động ghi</a:t>
+              <a:t>Chỉ thấy thư mục workspace của đúng user đó</a:t>
             </a:r>
           </a:p>
           <a:p>
@@ -3975,12 +4222,12 @@
               </a:spcAft>
             </a:pPr>
             <a:r>
-              <a:rPr sz="1400" b="1">
+              <a:rPr sz="1500" b="0">
                 <a:solidFill>
                   <a:srgbClr val="555F6B"/>
                 </a:solidFill>
               </a:rPr>
-              <a:t>3. User xác nhận trước khi ghi</a:t>
+              <a:t>Tối đa 2 phút (hạng lớn 10 phút); chạy xong hoặc hết giờ thì hủy pod</a:t>
             </a:r>
           </a:p>
           <a:p>
@@ -3990,12 +4237,12 @@
               </a:spcAft>
             </a:pPr>
             <a:r>
-              <a:rPr sz="1400" b="0">
+              <a:rPr sz="1500" b="1">
                 <a:solidFill>
                   <a:srgbClr val="555F6B"/>
                 </a:solidFill>
               </a:rPr>
-              <a:t>Gửi ra ngoài, xóa, chia sẻ quyền: xác nhận từng việc. Ticket, email nháp: duyệt một lần cho cả nhóm</a:t>
+              <a:t>Code cố thoát ra máy chủ?</a:t>
             </a:r>
           </a:p>
           <a:p>
@@ -4005,178 +4252,12 @@
               </a:spcAft>
             </a:pPr>
             <a:r>
-              <a:rPr sz="1400" b="0">
+              <a:rPr sz="1500" b="0">
                 <a:solidFill>
                   <a:srgbClr val="555F6B"/>
                 </a:solidFill>
               </a:rPr>
-              <a:t>Thêm nữa: sandbox không có mạng ra ngoài, nên code cũng không gửi được dữ liệu</a:t>
-            </a:r>
-          </a:p>
-        </p:txBody>
-      </p:sp>
-      <p:sp>
-        <p:nvSpPr>
-          <p:cNvPr id="8" name="TextBox 7"/>
-          <p:cNvSpPr txBox="1"/>
-          <p:nvPr/>
-        </p:nvSpPr>
-        <p:spPr>
-          <a:xfrm>
-            <a:off x="6309360" y="1371600"/>
-            <a:ext cx="5486400" cy="4572000"/>
-          </a:xfrm>
-          <a:prstGeom prst="rect">
-            <a:avLst/>
-          </a:prstGeom>
-          <a:noFill/>
-        </p:spPr>
-        <p:txBody>
-          <a:bodyPr wrap="square">
-            <a:spAutoFit/>
-          </a:bodyPr>
-          <a:lstStyle/>
-          <a:p>
-            <a:pPr algn="l">
-              <a:spcAft>
-                <a:spcPts val="400"/>
-              </a:spcAft>
-            </a:pPr>
-            <a:r>
-              <a:rPr sz="1400" b="1">
-                <a:solidFill>
-                  <a:srgbClr val="555F6B"/>
-                </a:solidFill>
-              </a:rPr>
-              <a:t>Bảo vệ dữ liệu</a:t>
-            </a:r>
-          </a:p>
-          <a:p>
-            <a:pPr algn="l">
-              <a:spcAft>
-                <a:spcPts val="400"/>
-              </a:spcAft>
-            </a:pPr>
-            <a:r>
-              <a:rPr sz="1400" b="0">
-                <a:solidFill>
-                  <a:srgbClr val="555F6B"/>
-                </a:solidFill>
-              </a:rPr>
-              <a:t>Mã hóa khi lưu và khi truyền</a:t>
-            </a:r>
-          </a:p>
-          <a:p>
-            <a:pPr algn="l">
-              <a:spcAft>
-                <a:spcPts val="400"/>
-              </a:spcAft>
-            </a:pPr>
-            <a:r>
-              <a:rPr sz="1400" b="0">
-                <a:solidFill>
-                  <a:srgbClr val="555F6B"/>
-                </a:solidFill>
-              </a:rPr>
-              <a:t>Che dữ liệu cá nhân (PII) trước khi gửi cho model</a:t>
-            </a:r>
-          </a:p>
-          <a:p>
-            <a:pPr algn="l">
-              <a:spcAft>
-                <a:spcPts val="400"/>
-              </a:spcAft>
-            </a:pPr>
-            <a:r>
-              <a:rPr sz="1400" b="0">
-                <a:solidFill>
-                  <a:srgbClr val="555F6B"/>
-                </a:solidFill>
-              </a:rPr>
-              <a:t>Vertex AI không lưu và không dùng dữ liệu để huấn luyện</a:t>
-            </a:r>
-          </a:p>
-          <a:p>
-            <a:pPr algn="l">
-              <a:spcAft>
-                <a:spcPts val="400"/>
-              </a:spcAft>
-            </a:pPr>
-            <a:r>
-              <a:rPr sz="1400" b="0">
-                <a:solidFill>
-                  <a:srgbClr val="555F6B"/>
-                </a:solidFill>
-              </a:rPr>
-              <a:t>Audit log 12 tháng: ai, lúc nào, dùng tool nào, xác nhận hành động gì</a:t>
-            </a:r>
-          </a:p>
-          <a:p>
-            <a:pPr algn="l">
-              <a:spcAft>
-                <a:spcPts val="400"/>
-              </a:spcAft>
-            </a:pPr>
-            <a:r>
-              <a:rPr sz="1400" b="1">
-                <a:solidFill>
-                  <a:srgbClr val="555F6B"/>
-                </a:solidFill>
-              </a:rPr>
-              <a:t>Eval gate</a:t>
-            </a:r>
-          </a:p>
-          <a:p>
-            <a:pPr algn="l">
-              <a:spcAft>
-                <a:spcPts val="400"/>
-              </a:spcAft>
-            </a:pPr>
-            <a:r>
-              <a:rPr sz="1400" b="0">
-                <a:solidFill>
-                  <a:srgbClr val="555F6B"/>
-                </a:solidFill>
-              </a:rPr>
-              <a:t>Đổi model hoặc prompt phải chạy lại bộ kiểm tra; dưới 95% thì không deploy (525 USD/tháng)</a:t>
-            </a:r>
-          </a:p>
-        </p:txBody>
-      </p:sp>
-      <p:sp>
-        <p:nvSpPr>
-          <p:cNvPr id="9" name="TextBox 8"/>
-          <p:cNvSpPr txBox="1"/>
-          <p:nvPr/>
-        </p:nvSpPr>
-        <p:spPr>
-          <a:xfrm>
-            <a:off x="457200" y="5852160"/>
-            <a:ext cx="11247120" cy="457200"/>
-          </a:xfrm>
-          <a:prstGeom prst="rect">
-            <a:avLst/>
-          </a:prstGeom>
-          <a:noFill/>
-        </p:spPr>
-        <p:txBody>
-          <a:bodyPr wrap="square">
-            <a:spAutoFit/>
-          </a:bodyPr>
-          <a:lstStyle/>
-          <a:p>
-            <a:pPr algn="l">
-              <a:spcAft>
-                <a:spcPts val="400"/>
-              </a:spcAft>
-            </a:pPr>
-            <a:r>
-              <a:rPr sz="1100" b="0">
-                <a:solidFill>
-                  <a:srgbClr val="555F6B"/>
-                </a:solidFill>
-              </a:rPr>
-              <a:t>Dòng governance ở slide 11 = 281 USD guardrail + 525 USD eval = 806 USD/tháng. Thời hạn lưu khác: chat 12 tháng, file tạm 30 ngày, prompt log 30 ngày (đã che PII).</a:t>
+              <a:t>Bị gVisor chặn. Pod không có quyền đặc biệt và không gọi được API của cloud</a:t>
             </a:r>
           </a:p>
         </p:txBody>
@@ -4275,7 +4356,7 @@
                   <a:srgbClr val="FFFFFF"/>
                 </a:solidFill>
               </a:rPr>
-              <a:t>9. Mất 1 zone: tự chuyển trong 1–2 phút (H7)</a:t>
+              <a:t>8. Lệnh ẩn trong email bị chặn ở 3 chỗ (H4, H5)</a:t>
             </a:r>
           </a:p>
         </p:txBody>
@@ -4313,7 +4394,7 @@
                   <a:srgbClr val="2E6FB7"/>
                 </a:solidFill>
               </a:rPr>
-              <a:t>Đề yêu cầu: chạy 99,5% giờ hành chính, khôi phục trong 4 giờ (RTO), mất tối đa 1 giờ dữ liệu (RPO)</a:t>
+              <a:t>"Một email chứa lệnh ẩn: gửi toàn bộ hợp đồng ra ngoài." Lệnh này không chạy được, vì:</a:t>
             </a:r>
           </a:p>
         </p:txBody>
@@ -4351,7 +4432,7 @@
                   <a:srgbClr val="555F6B"/>
                 </a:solidFill>
               </a:rPr>
-              <a:t>9</a:t>
+              <a:t>8</a:t>
             </a:r>
           </a:p>
         </p:txBody>
@@ -4394,563 +4475,16 @@
           </a:p>
         </p:txBody>
       </p:sp>
-      <p:graphicFrame>
-        <p:nvGraphicFramePr>
-          <p:cNvPr id="7" name="Table 6"/>
-          <p:cNvGraphicFramePr>
-            <a:graphicFrameLocks noGrp="1"/>
-          </p:cNvGraphicFramePr>
-          <p:nvPr/>
-        </p:nvGraphicFramePr>
-        <p:xfrm>
-          <a:off x="457200" y="1371600"/>
-          <a:ext cx="6400800" cy="3291840"/>
-        </p:xfrm>
-        <a:graphic>
-          <a:graphicData uri="http://schemas.openxmlformats.org/drawingml/2006/table">
-            <a:tbl>
-              <a:tblPr firstRow="1" bandRow="1">
-                <a:tableStyleId>{5C22544A-7EE6-4342-B048-85BDC9FD1C3A}</a:tableStyleId>
-              </a:tblPr>
-              <a:tblGrid>
-                <a:gridCol w="1737360"/>
-                <a:gridCol w="2194560"/>
-                <a:gridCol w="2468880"/>
-              </a:tblGrid>
-              <a:tr h="411480">
-                <a:tc>
-                  <a:txBody>
-                    <a:bodyPr/>
-                    <a:lstStyle/>
-                    <a:p>
-                      <a:r>
-                        <a:rPr sz="1100" b="1">
-                          <a:solidFill>
-                            <a:srgbClr val="FFFFFF"/>
-                          </a:solidFill>
-                        </a:rPr>
-                        <a:t>Thành phần</a:t>
-                      </a:r>
-                    </a:p>
-                  </a:txBody>
-                  <a:tcPr marL="45720" marR="45720" marT="18288" marB="18288">
-                    <a:solidFill>
-                      <a:srgbClr val="2E6FB7"/>
-                    </a:solidFill>
-                  </a:tcPr>
-                </a:tc>
-                <a:tc>
-                  <a:txBody>
-                    <a:bodyPr/>
-                    <a:lstStyle/>
-                    <a:p>
-                      <a:r>
-                        <a:rPr sz="1100" b="1">
-                          <a:solidFill>
-                            <a:srgbClr val="FFFFFF"/>
-                          </a:solidFill>
-                        </a:rPr>
-                        <a:t>Chạy liên tục (HA)</a:t>
-                      </a:r>
-                    </a:p>
-                  </a:txBody>
-                  <a:tcPr marL="45720" marR="45720" marT="18288" marB="18288">
-                    <a:solidFill>
-                      <a:srgbClr val="2E6FB7"/>
-                    </a:solidFill>
-                  </a:tcPr>
-                </a:tc>
-                <a:tc>
-                  <a:txBody>
-                    <a:bodyPr/>
-                    <a:lstStyle/>
-                    <a:p>
-                      <a:r>
-                        <a:rPr sz="1100" b="1">
-                          <a:solidFill>
-                            <a:srgbClr val="FFFFFF"/>
-                          </a:solidFill>
-                        </a:rPr>
-                        <a:t>Backup, khôi phục (DR)</a:t>
-                      </a:r>
-                    </a:p>
-                  </a:txBody>
-                  <a:tcPr marL="45720" marR="45720" marT="18288" marB="18288">
-                    <a:solidFill>
-                      <a:srgbClr val="2E6FB7"/>
-                    </a:solidFill>
-                  </a:tcPr>
-                </a:tc>
-              </a:tr>
-              <a:tr h="411480">
-                <a:tc>
-                  <a:txBody>
-                    <a:bodyPr/>
-                    <a:lstStyle/>
-                    <a:p>
-                      <a:r>
-                        <a:rPr sz="1100" b="0">
-                          <a:solidFill>
-                            <a:srgbClr val="555F6B"/>
-                          </a:solidFill>
-                        </a:rPr>
-                        <a:t>Tường lửa, cân bằng tải</a:t>
-                      </a:r>
-                    </a:p>
-                  </a:txBody>
-                  <a:tcPr marL="45720" marR="45720" marT="18288" marB="18288">
-                    <a:solidFill>
-                      <a:srgbClr val="EEF3F8"/>
-                    </a:solidFill>
-                  </a:tcPr>
-                </a:tc>
-                <a:tc>
-                  <a:txBody>
-                    <a:bodyPr/>
-                    <a:lstStyle/>
-                    <a:p>
-                      <a:r>
-                        <a:rPr sz="1100" b="0">
-                          <a:solidFill>
-                            <a:srgbClr val="555F6B"/>
-                          </a:solidFill>
-                        </a:rPr>
-                        <a:t>Managed, đa zone</a:t>
-                      </a:r>
-                    </a:p>
-                  </a:txBody>
-                  <a:tcPr marL="45720" marR="45720" marT="18288" marB="18288">
-                    <a:solidFill>
-                      <a:srgbClr val="EEF3F8"/>
-                    </a:solidFill>
-                  </a:tcPr>
-                </a:tc>
-                <a:tc>
-                  <a:txBody>
-                    <a:bodyPr/>
-                    <a:lstStyle/>
-                    <a:p>
-                      <a:r>
-                        <a:rPr sz="1100" b="0">
-                          <a:solidFill>
-                            <a:srgbClr val="555F6B"/>
-                          </a:solidFill>
-                        </a:rPr>
-                        <a:t>—</a:t>
-                      </a:r>
-                    </a:p>
-                  </a:txBody>
-                  <a:tcPr marL="45720" marR="45720" marT="18288" marB="18288">
-                    <a:solidFill>
-                      <a:srgbClr val="EEF3F8"/>
-                    </a:solidFill>
-                  </a:tcPr>
-                </a:tc>
-              </a:tr>
-              <a:tr h="411480">
-                <a:tc>
-                  <a:txBody>
-                    <a:bodyPr/>
-                    <a:lstStyle/>
-                    <a:p>
-                      <a:r>
-                        <a:rPr sz="1100" b="0">
-                          <a:solidFill>
-                            <a:srgbClr val="555F6B"/>
-                          </a:solidFill>
-                        </a:rPr>
-                        <a:t>Cụm GKE</a:t>
-                      </a:r>
-                    </a:p>
-                  </a:txBody>
-                  <a:tcPr marL="45720" marR="45720" marT="18288" marB="18288">
-                    <a:solidFill>
-                      <a:srgbClr val="FFFFFF"/>
-                    </a:solidFill>
-                  </a:tcPr>
-                </a:tc>
-                <a:tc>
-                  <a:txBody>
-                    <a:bodyPr/>
-                    <a:lstStyle/>
-                    <a:p>
-                      <a:r>
-                        <a:rPr sz="1100" b="0">
-                          <a:solidFill>
-                            <a:srgbClr val="555F6B"/>
-                          </a:solidFill>
-                        </a:rPr>
-                        <a:t>Mỗi pod 2 bản ở 2 zone</a:t>
-                      </a:r>
-                    </a:p>
-                  </a:txBody>
-                  <a:tcPr marL="45720" marR="45720" marT="18288" marB="18288">
-                    <a:solidFill>
-                      <a:srgbClr val="FFFFFF"/>
-                    </a:solidFill>
-                  </a:tcPr>
-                </a:tc>
-                <a:tc>
-                  <a:txBody>
-                    <a:bodyPr/>
-                    <a:lstStyle/>
-                    <a:p>
-                      <a:r>
-                        <a:rPr sz="1100" b="0">
-                          <a:solidFill>
-                            <a:srgbClr val="555F6B"/>
-                          </a:solidFill>
-                        </a:rPr>
-                        <a:t>Dựng lại bằng Terraform</a:t>
-                      </a:r>
-                    </a:p>
-                  </a:txBody>
-                  <a:tcPr marL="45720" marR="45720" marT="18288" marB="18288">
-                    <a:solidFill>
-                      <a:srgbClr val="FFFFFF"/>
-                    </a:solidFill>
-                  </a:tcPr>
-                </a:tc>
-              </a:tr>
-              <a:tr h="411480">
-                <a:tc>
-                  <a:txBody>
-                    <a:bodyPr/>
-                    <a:lstStyle/>
-                    <a:p>
-                      <a:r>
-                        <a:rPr sz="1100" b="0">
-                          <a:solidFill>
-                            <a:srgbClr val="555F6B"/>
-                          </a:solidFill>
-                        </a:rPr>
-                        <a:t>LiteLLM, web, worker</a:t>
-                      </a:r>
-                    </a:p>
-                  </a:txBody>
-                  <a:tcPr marL="45720" marR="45720" marT="18288" marB="18288">
-                    <a:solidFill>
-                      <a:srgbClr val="EEF3F8"/>
-                    </a:solidFill>
-                  </a:tcPr>
-                </a:tc>
-                <a:tc>
-                  <a:txBody>
-                    <a:bodyPr/>
-                    <a:lstStyle/>
-                    <a:p>
-                      <a:r>
-                        <a:rPr sz="1100" b="0">
-                          <a:solidFill>
-                            <a:srgbClr val="555F6B"/>
-                          </a:solidFill>
-                        </a:rPr>
-                        <a:t>2 bản, 2 zone</a:t>
-                      </a:r>
-                    </a:p>
-                  </a:txBody>
-                  <a:tcPr marL="45720" marR="45720" marT="18288" marB="18288">
-                    <a:solidFill>
-                      <a:srgbClr val="EEF3F8"/>
-                    </a:solidFill>
-                  </a:tcPr>
-                </a:tc>
-                <a:tc>
-                  <a:txBody>
-                    <a:bodyPr/>
-                    <a:lstStyle/>
-                    <a:p>
-                      <a:r>
-                        <a:rPr sz="1100" b="0">
-                          <a:solidFill>
-                            <a:srgbClr val="555F6B"/>
-                          </a:solidFill>
-                        </a:rPr>
-                        <a:t>Image lưu trong Artifact Registry</a:t>
-                      </a:r>
-                    </a:p>
-                  </a:txBody>
-                  <a:tcPr marL="45720" marR="45720" marT="18288" marB="18288">
-                    <a:solidFill>
-                      <a:srgbClr val="EEF3F8"/>
-                    </a:solidFill>
-                  </a:tcPr>
-                </a:tc>
-              </a:tr>
-              <a:tr h="411480">
-                <a:tc>
-                  <a:txBody>
-                    <a:bodyPr/>
-                    <a:lstStyle/>
-                    <a:p>
-                      <a:r>
-                        <a:rPr sz="1100" b="0">
-                          <a:solidFill>
-                            <a:srgbClr val="555F6B"/>
-                          </a:solidFill>
-                        </a:rPr>
-                        <a:t>Postgres (Cloud SQL)</a:t>
-                      </a:r>
-                    </a:p>
-                  </a:txBody>
-                  <a:tcPr marL="45720" marR="45720" marT="18288" marB="18288">
-                    <a:solidFill>
-                      <a:srgbClr val="FFFFFF"/>
-                    </a:solidFill>
-                  </a:tcPr>
-                </a:tc>
-                <a:tc>
-                  <a:txBody>
-                    <a:bodyPr/>
-                    <a:lstStyle/>
-                    <a:p>
-                      <a:r>
-                        <a:rPr sz="1100" b="0">
-                          <a:solidFill>
-                            <a:srgbClr val="555F6B"/>
-                          </a:solidFill>
-                        </a:rPr>
-                        <a:t>Bản dự phòng ở zone khác, tự chuyển</a:t>
-                      </a:r>
-                    </a:p>
-                  </a:txBody>
-                  <a:tcPr marL="45720" marR="45720" marT="18288" marB="18288">
-                    <a:solidFill>
-                      <a:srgbClr val="FFFFFF"/>
-                    </a:solidFill>
-                  </a:tcPr>
-                </a:tc>
-                <a:tc>
-                  <a:txBody>
-                    <a:bodyPr/>
-                    <a:lstStyle/>
-                    <a:p>
-                      <a:r>
-                        <a:rPr sz="1100" b="0">
-                          <a:solidFill>
-                            <a:srgbClr val="555F6B"/>
-                          </a:solidFill>
-                        </a:rPr>
-                        <a:t>Backup hằng ngày, khôi phục về thời điểm bất kỳ; bản sao ở Jakarta</a:t>
-                      </a:r>
-                    </a:p>
-                  </a:txBody>
-                  <a:tcPr marL="45720" marR="45720" marT="18288" marB="18288">
-                    <a:solidFill>
-                      <a:srgbClr val="FFFFFF"/>
-                    </a:solidFill>
-                  </a:tcPr>
-                </a:tc>
-              </a:tr>
-              <a:tr h="411480">
-                <a:tc>
-                  <a:txBody>
-                    <a:bodyPr/>
-                    <a:lstStyle/>
-                    <a:p>
-                      <a:r>
-                        <a:rPr sz="1100" b="0">
-                          <a:solidFill>
-                            <a:srgbClr val="555F6B"/>
-                          </a:solidFill>
-                        </a:rPr>
-                        <a:t>Cache</a:t>
-                      </a:r>
-                    </a:p>
-                  </a:txBody>
-                  <a:tcPr marL="45720" marR="45720" marT="18288" marB="18288">
-                    <a:solidFill>
-                      <a:srgbClr val="EEF3F8"/>
-                    </a:solidFill>
-                  </a:tcPr>
-                </a:tc>
-                <a:tc>
-                  <a:txBody>
-                    <a:bodyPr/>
-                    <a:lstStyle/>
-                    <a:p>
-                      <a:r>
-                        <a:rPr sz="1100" b="0">
-                          <a:solidFill>
-                            <a:srgbClr val="555F6B"/>
-                          </a:solidFill>
-                        </a:rPr>
-                        <a:t>Bản chính + bản phụ</a:t>
-                      </a:r>
-                    </a:p>
-                  </a:txBody>
-                  <a:tcPr marL="45720" marR="45720" marT="18288" marB="18288">
-                    <a:solidFill>
-                      <a:srgbClr val="EEF3F8"/>
-                    </a:solidFill>
-                  </a:tcPr>
-                </a:tc>
-                <a:tc>
-                  <a:txBody>
-                    <a:bodyPr/>
-                    <a:lstStyle/>
-                    <a:p>
-                      <a:r>
-                        <a:rPr sz="1100" b="0">
-                          <a:solidFill>
-                            <a:srgbClr val="555F6B"/>
-                          </a:solidFill>
-                        </a:rPr>
-                        <a:t>Không cần (chỉ dữ liệu tạm)</a:t>
-                      </a:r>
-                    </a:p>
-                  </a:txBody>
-                  <a:tcPr marL="45720" marR="45720" marT="18288" marB="18288">
-                    <a:solidFill>
-                      <a:srgbClr val="EEF3F8"/>
-                    </a:solidFill>
-                  </a:tcPr>
-                </a:tc>
-              </a:tr>
-              <a:tr h="411480">
-                <a:tc>
-                  <a:txBody>
-                    <a:bodyPr/>
-                    <a:lstStyle/>
-                    <a:p>
-                      <a:r>
-                        <a:rPr sz="1100" b="0">
-                          <a:solidFill>
-                            <a:srgbClr val="555F6B"/>
-                          </a:solidFill>
-                        </a:rPr>
-                        <a:t>File workspace</a:t>
-                      </a:r>
-                    </a:p>
-                  </a:txBody>
-                  <a:tcPr marL="45720" marR="45720" marT="18288" marB="18288">
-                    <a:solidFill>
-                      <a:srgbClr val="FFFFFF"/>
-                    </a:solidFill>
-                  </a:tcPr>
-                </a:tc>
-                <a:tc>
-                  <a:txBody>
-                    <a:bodyPr/>
-                    <a:lstStyle/>
-                    <a:p>
-                      <a:r>
-                        <a:rPr sz="1100" b="0">
-                          <a:solidFill>
-                            <a:srgbClr val="555F6B"/>
-                          </a:solidFill>
-                        </a:rPr>
-                        <a:t>Đa zone</a:t>
-                      </a:r>
-                    </a:p>
-                  </a:txBody>
-                  <a:tcPr marL="45720" marR="45720" marT="18288" marB="18288">
-                    <a:solidFill>
-                      <a:srgbClr val="FFFFFF"/>
-                    </a:solidFill>
-                  </a:tcPr>
-                </a:tc>
-                <a:tc>
-                  <a:txBody>
-                    <a:bodyPr/>
-                    <a:lstStyle/>
-                    <a:p>
-                      <a:r>
-                        <a:rPr sz="1100" b="0">
-                          <a:solidFill>
-                            <a:srgbClr val="555F6B"/>
-                          </a:solidFill>
-                        </a:rPr>
-                        <a:t>Lưu ở 2 region</a:t>
-                      </a:r>
-                    </a:p>
-                  </a:txBody>
-                  <a:tcPr marL="45720" marR="45720" marT="18288" marB="18288">
-                    <a:solidFill>
-                      <a:srgbClr val="FFFFFF"/>
-                    </a:solidFill>
-                  </a:tcPr>
-                </a:tc>
-              </a:tr>
-              <a:tr h="411480">
-                <a:tc>
-                  <a:txBody>
-                    <a:bodyPr/>
-                    <a:lstStyle/>
-                    <a:p>
-                      <a:r>
-                        <a:rPr sz="1100" b="0">
-                          <a:solidFill>
-                            <a:srgbClr val="555F6B"/>
-                          </a:solidFill>
-                        </a:rPr>
-                        <a:t>Vertex AI</a:t>
-                      </a:r>
-                    </a:p>
-                  </a:txBody>
-                  <a:tcPr marL="45720" marR="45720" marT="18288" marB="18288">
-                    <a:solidFill>
-                      <a:srgbClr val="EEF3F8"/>
-                    </a:solidFill>
-                  </a:tcPr>
-                </a:tc>
-                <a:tc>
-                  <a:txBody>
-                    <a:bodyPr/>
-                    <a:lstStyle/>
-                    <a:p>
-                      <a:r>
-                        <a:rPr sz="1100" b="0">
-                          <a:solidFill>
-                            <a:srgbClr val="555F6B"/>
-                          </a:solidFill>
-                        </a:rPr>
-                        <a:t>Endpoint global</a:t>
-                      </a:r>
-                    </a:p>
-                  </a:txBody>
-                  <a:tcPr marL="45720" marR="45720" marT="18288" marB="18288">
-                    <a:solidFill>
-                      <a:srgbClr val="EEF3F8"/>
-                    </a:solidFill>
-                  </a:tcPr>
-                </a:tc>
-                <a:tc>
-                  <a:txBody>
-                    <a:bodyPr/>
-                    <a:lstStyle/>
-                    <a:p>
-                      <a:r>
-                        <a:rPr sz="1100" b="0">
-                          <a:solidFill>
-                            <a:srgbClr val="555F6B"/>
-                          </a:solidFill>
-                        </a:rPr>
-                        <a:t>Model dự phòng qua LiteLLM</a:t>
-                      </a:r>
-                    </a:p>
-                  </a:txBody>
-                  <a:tcPr marL="45720" marR="45720" marT="18288" marB="18288">
-                    <a:solidFill>
-                      <a:srgbClr val="EEF3F8"/>
-                    </a:solidFill>
-                  </a:tcPr>
-                </a:tc>
-              </a:tr>
-            </a:tbl>
-          </a:graphicData>
-        </a:graphic>
-      </p:graphicFrame>
-      <p:sp>
-        <p:nvSpPr>
-          <p:cNvPr id="8" name="TextBox 7"/>
+      <p:sp>
+        <p:nvSpPr>
+          <p:cNvPr id="7" name="TextBox 6"/>
           <p:cNvSpPr txBox="1"/>
           <p:nvPr/>
         </p:nvSpPr>
         <p:spPr>
           <a:xfrm>
-            <a:off x="7132320" y="1371600"/>
-            <a:ext cx="4663440" cy="4754880"/>
+            <a:off x="457200" y="1371600"/>
+            <a:ext cx="5577840" cy="4572000"/>
           </a:xfrm>
           <a:prstGeom prst="rect">
             <a:avLst/>
@@ -4969,12 +4503,12 @@
               </a:spcAft>
             </a:pPr>
             <a:r>
-              <a:rPr sz="1200" b="1">
+              <a:rPr sz="1400" b="1">
                 <a:solidFill>
                   <a:srgbClr val="555F6B"/>
                 </a:solidFill>
               </a:rPr>
-              <a:t>Khi mất 1 zone lúc 10:00</a:t>
+              <a:t>1. Guardrail quét nội dung</a:t>
             </a:r>
           </a:p>
           <a:p>
@@ -4984,12 +4518,12 @@
               </a:spcAft>
             </a:pPr>
             <a:r>
-              <a:rPr sz="1200" b="0">
+              <a:rPr sz="1400" b="0">
                 <a:solidFill>
                   <a:srgbClr val="555F6B"/>
                 </a:solidFill>
               </a:rPr>
-              <a:t>Cân bằng tải chuyển traffic sang zone còn lại; GKE tạo thêm pod</a:t>
+              <a:t>Model Armor quét tin nhắn mới, nội dung từ connector và câu trả lời cuối (281 USD/tháng)</a:t>
             </a:r>
           </a:p>
           <a:p>
@@ -4999,12 +4533,12 @@
               </a:spcAft>
             </a:pPr>
             <a:r>
-              <a:rPr sz="1200" b="0">
+              <a:rPr sz="1400" b="1">
                 <a:solidFill>
                   <a:srgbClr val="555F6B"/>
                 </a:solidFill>
               </a:rPr>
-              <a:t>Postgres tự chuyển sang bản dự phòng trong vài chục giây đến 1–2 phút</a:t>
+              <a:t>2. Nội dung email chỉ là dữ liệu</a:t>
             </a:r>
           </a:p>
           <a:p>
@@ -5014,12 +4548,12 @@
               </a:spcAft>
             </a:pPr>
             <a:r>
-              <a:rPr sz="1200" b="0">
+              <a:rPr sz="1400" b="0">
                 <a:solidFill>
                   <a:srgbClr val="555F6B"/>
                 </a:solidFill>
               </a:rPr>
-              <a:t>Vài request lỗi, user gửi lại được; dữ liệu đã lưu không mất</a:t>
+              <a:t>Nội dung từ connector được đánh dấu "không tin cậy". Chỉ yêu cầu của user mới kích hoạt được hành động ghi</a:t>
             </a:r>
           </a:p>
           <a:p>
@@ -5029,12 +4563,12 @@
               </a:spcAft>
             </a:pPr>
             <a:r>
-              <a:rPr sz="1200" b="1">
+              <a:rPr sz="1400" b="1">
                 <a:solidFill>
                   <a:srgbClr val="555F6B"/>
                 </a:solidFill>
               </a:rPr>
-              <a:t>Khi mất cả region Singapore</a:t>
+              <a:t>3. User xác nhận trước khi ghi</a:t>
             </a:r>
           </a:p>
           <a:p>
@@ -5044,12 +4578,12 @@
               </a:spcAft>
             </a:pPr>
             <a:r>
-              <a:rPr sz="1200" b="0">
+              <a:rPr sz="1400" b="0">
                 <a:solidFill>
                   <a:srgbClr val="555F6B"/>
                 </a:solidFill>
               </a:rPr>
-              <a:t>Dựng lại ở Jakarta bằng Terraform và backup đã sao chép: ≤ 4 giờ, mất ≤ 1 giờ dữ liệu</a:t>
+              <a:t>Gửi ra ngoài, xóa, chia sẻ quyền: xác nhận từng việc. Ticket, email nháp: duyệt một lần cho cả nhóm</a:t>
             </a:r>
           </a:p>
           <a:p>
@@ -5059,14 +4593,37 @@
               </a:spcAft>
             </a:pPr>
             <a:r>
-              <a:rPr sz="1200" b="1">
+              <a:rPr sz="1400" b="0">
                 <a:solidFill>
                   <a:srgbClr val="555F6B"/>
                 </a:solidFill>
               </a:rPr>
-              <a:t>Diễn tập và chi phí</a:t>
-            </a:r>
-          </a:p>
+              <a:t>Thêm nữa: sandbox không có mạng ra ngoài, nên code cũng không gửi được dữ liệu</a:t>
+            </a:r>
+          </a:p>
+        </p:txBody>
+      </p:sp>
+      <p:sp>
+        <p:nvSpPr>
+          <p:cNvPr id="8" name="TextBox 7"/>
+          <p:cNvSpPr txBox="1"/>
+          <p:nvPr/>
+        </p:nvSpPr>
+        <p:spPr>
+          <a:xfrm>
+            <a:off x="6309360" y="1371600"/>
+            <a:ext cx="5486400" cy="4572000"/>
+          </a:xfrm>
+          <a:prstGeom prst="rect">
+            <a:avLst/>
+          </a:prstGeom>
+          <a:noFill/>
+        </p:spPr>
+        <p:txBody>
+          <a:bodyPr wrap="square">
+            <a:spAutoFit/>
+          </a:bodyPr>
+          <a:lstStyle/>
           <a:p>
             <a:pPr algn="l">
               <a:spcAft>
@@ -5074,12 +4631,140 @@
               </a:spcAft>
             </a:pPr>
             <a:r>
-              <a:rPr sz="1200" b="0">
+              <a:rPr sz="1400" b="1">
                 <a:solidFill>
                   <a:srgbClr val="555F6B"/>
                 </a:solidFill>
               </a:rPr>
-              <a:t>Thử khôi phục DB mỗi quý, dựng region DR mỗi 6 tháng. backup_dr: 164 USD/tháng</a:t>
+              <a:t>Bảo vệ dữ liệu</a:t>
+            </a:r>
+          </a:p>
+          <a:p>
+            <a:pPr algn="l">
+              <a:spcAft>
+                <a:spcPts val="400"/>
+              </a:spcAft>
+            </a:pPr>
+            <a:r>
+              <a:rPr sz="1400" b="0">
+                <a:solidFill>
+                  <a:srgbClr val="555F6B"/>
+                </a:solidFill>
+              </a:rPr>
+              <a:t>Mã hóa khi lưu và khi truyền</a:t>
+            </a:r>
+          </a:p>
+          <a:p>
+            <a:pPr algn="l">
+              <a:spcAft>
+                <a:spcPts val="400"/>
+              </a:spcAft>
+            </a:pPr>
+            <a:r>
+              <a:rPr sz="1400" b="0">
+                <a:solidFill>
+                  <a:srgbClr val="555F6B"/>
+                </a:solidFill>
+              </a:rPr>
+              <a:t>Che dữ liệu cá nhân (PII) trước khi gửi cho model</a:t>
+            </a:r>
+          </a:p>
+          <a:p>
+            <a:pPr algn="l">
+              <a:spcAft>
+                <a:spcPts val="400"/>
+              </a:spcAft>
+            </a:pPr>
+            <a:r>
+              <a:rPr sz="1400" b="0">
+                <a:solidFill>
+                  <a:srgbClr val="555F6B"/>
+                </a:solidFill>
+              </a:rPr>
+              <a:t>Vertex AI không lưu và không dùng dữ liệu để huấn luyện</a:t>
+            </a:r>
+          </a:p>
+          <a:p>
+            <a:pPr algn="l">
+              <a:spcAft>
+                <a:spcPts val="400"/>
+              </a:spcAft>
+            </a:pPr>
+            <a:r>
+              <a:rPr sz="1400" b="0">
+                <a:solidFill>
+                  <a:srgbClr val="555F6B"/>
+                </a:solidFill>
+              </a:rPr>
+              <a:t>Audit log 12 tháng: ai, lúc nào, dùng tool nào, xác nhận hành động gì</a:t>
+            </a:r>
+          </a:p>
+          <a:p>
+            <a:pPr algn="l">
+              <a:spcAft>
+                <a:spcPts val="400"/>
+              </a:spcAft>
+            </a:pPr>
+            <a:r>
+              <a:rPr sz="1400" b="1">
+                <a:solidFill>
+                  <a:srgbClr val="555F6B"/>
+                </a:solidFill>
+              </a:rPr>
+              <a:t>Eval gate</a:t>
+            </a:r>
+          </a:p>
+          <a:p>
+            <a:pPr algn="l">
+              <a:spcAft>
+                <a:spcPts val="400"/>
+              </a:spcAft>
+            </a:pPr>
+            <a:r>
+              <a:rPr sz="1400" b="0">
+                <a:solidFill>
+                  <a:srgbClr val="555F6B"/>
+                </a:solidFill>
+              </a:rPr>
+              <a:t>Đổi model hoặc prompt phải chạy lại bộ kiểm tra; dưới 95% thì không deploy (525 USD/tháng)</a:t>
+            </a:r>
+          </a:p>
+        </p:txBody>
+      </p:sp>
+      <p:sp>
+        <p:nvSpPr>
+          <p:cNvPr id="9" name="TextBox 8"/>
+          <p:cNvSpPr txBox="1"/>
+          <p:nvPr/>
+        </p:nvSpPr>
+        <p:spPr>
+          <a:xfrm>
+            <a:off x="457200" y="5852160"/>
+            <a:ext cx="11247120" cy="457200"/>
+          </a:xfrm>
+          <a:prstGeom prst="rect">
+            <a:avLst/>
+          </a:prstGeom>
+          <a:noFill/>
+        </p:spPr>
+        <p:txBody>
+          <a:bodyPr wrap="square">
+            <a:spAutoFit/>
+          </a:bodyPr>
+          <a:lstStyle/>
+          <a:p>
+            <a:pPr algn="l">
+              <a:spcAft>
+                <a:spcPts val="400"/>
+              </a:spcAft>
+            </a:pPr>
+            <a:r>
+              <a:rPr sz="1100" b="0">
+                <a:solidFill>
+                  <a:srgbClr val="555F6B"/>
+                </a:solidFill>
+              </a:rPr>
+              <a:t>Dòng governance ở slide 11 = 281 USD guardrail + 525 USD eval = 806 USD/tháng. Thời hạn lưu khác: chat 12 tháng, file tạm 30 ngày, prompt log 30 ngày (đã che PII).</a:t>
             </a:r>
           </a:p>
         </p:txBody>
@@ -5178,7 +4863,7 @@
                   <a:srgbClr val="FFFFFF"/>
                 </a:solidFill>
               </a:rPr>
-              <a:t>10. Mỗi user có quota USD; vượt thì hạ cấp (H8)</a:t>
+              <a:t>9. Mất 1 zone: tự chuyển trong 1–2 phút (H7)</a:t>
             </a:r>
           </a:p>
         </p:txBody>
@@ -5216,7 +4901,7 @@
                   <a:srgbClr val="2E6FB7"/>
                 </a:solidFill>
               </a:rPr>
-              <a:t>LiteLLM ghi chi phí của từng user và phòng ban, nên mỗi tháng biết ai tiêu bao nhiêu và chặn được khi vượt</a:t>
+              <a:t>Đề yêu cầu: chạy 99,5% giờ hành chính, khôi phục trong 4 giờ (RTO), mất tối đa 1 giờ dữ liệu (RPO)</a:t>
             </a:r>
           </a:p>
         </p:txBody>
@@ -5254,7 +4939,7 @@
                   <a:srgbClr val="555F6B"/>
                 </a:solidFill>
               </a:rPr>
-              <a:t>10</a:t>
+              <a:t>9</a:t>
             </a:r>
           </a:p>
         </p:txBody>
@@ -5297,160 +4982,17 @@
           </a:p>
         </p:txBody>
       </p:sp>
-      <p:sp>
-        <p:nvSpPr>
-          <p:cNvPr id="7" name="TextBox 6"/>
-          <p:cNvSpPr txBox="1"/>
-          <p:nvPr/>
-        </p:nvSpPr>
-        <p:spPr>
-          <a:xfrm>
-            <a:off x="457200" y="1371600"/>
-            <a:ext cx="5577840" cy="4572000"/>
-          </a:xfrm>
-          <a:prstGeom prst="rect">
-            <a:avLst/>
-          </a:prstGeom>
-          <a:noFill/>
-        </p:spPr>
-        <p:txBody>
-          <a:bodyPr wrap="square">
-            <a:spAutoFit/>
-          </a:bodyPr>
-          <a:lstStyle/>
-          <a:p>
-            <a:pPr algn="l">
-              <a:spcAft>
-                <a:spcPts val="400"/>
-              </a:spcAft>
-            </a:pPr>
-            <a:r>
-              <a:rPr sz="1300" b="1">
-                <a:solidFill>
-                  <a:srgbClr val="555F6B"/>
-                </a:solidFill>
-              </a:rPr>
-              <a:t>Cảnh báo chính</a:t>
-            </a:r>
-          </a:p>
-          <a:p>
-            <a:pPr algn="l">
-              <a:spcAft>
-                <a:spcPts val="400"/>
-              </a:spcAft>
-            </a:pPr>
-            <a:r>
-              <a:rPr sz="1300" b="0">
-                <a:solidFill>
-                  <a:srgbClr val="555F6B"/>
-                </a:solidFill>
-              </a:rPr>
-              <a:t>Chậm: p95 thời gian tới token đầu tiên &gt; 3 giây trong 10 phút</a:t>
-            </a:r>
-          </a:p>
-          <a:p>
-            <a:pPr algn="l">
-              <a:spcAft>
-                <a:spcPts val="400"/>
-              </a:spcAft>
-            </a:pPr>
-            <a:r>
-              <a:rPr sz="1300" b="0">
-                <a:solidFill>
-                  <a:srgbClr val="555F6B"/>
-                </a:solidFill>
-              </a:rPr>
-              <a:t>Agent chạy quá 10 phút; tỉ lệ lỗi &gt; 2%</a:t>
-            </a:r>
-          </a:p>
-          <a:p>
-            <a:pPr algn="l">
-              <a:spcAft>
-                <a:spcPts val="400"/>
-              </a:spcAft>
-            </a:pPr>
-            <a:r>
-              <a:rPr sz="1300" b="0">
-                <a:solidFill>
-                  <a:srgbClr val="555F6B"/>
-                </a:solidFill>
-              </a:rPr>
-              <a:t>Cache hit &lt; 50%, tức chi phí LLM sắp tăng</a:t>
-            </a:r>
-          </a:p>
-          <a:p>
-            <a:pPr algn="l">
-              <a:spcAft>
-                <a:spcPts val="400"/>
-              </a:spcAft>
-            </a:pPr>
-            <a:r>
-              <a:rPr sz="1300" b="0">
-                <a:solidFill>
-                  <a:srgbClr val="555F6B"/>
-                </a:solidFill>
-              </a:rPr>
-              <a:t>Chi tiêu trong ngày vượt dự báo 20%</a:t>
-            </a:r>
-          </a:p>
-          <a:p>
-            <a:pPr algn="l">
-              <a:spcAft>
-                <a:spcPts val="400"/>
-              </a:spcAft>
-            </a:pPr>
-            <a:r>
-              <a:rPr sz="1300" b="1">
-                <a:solidFill>
-                  <a:srgbClr val="555F6B"/>
-                </a:solidFill>
-              </a:rPr>
-              <a:t>Dashboard</a:t>
-            </a:r>
-          </a:p>
-          <a:p>
-            <a:pPr algn="l">
-              <a:spcAft>
-                <a:spcPts val="400"/>
-              </a:spcAft>
-            </a:pPr>
-            <a:r>
-              <a:rPr sz="1300" b="0">
-                <a:solidFill>
-                  <a:srgbClr val="555F6B"/>
-                </a:solidFill>
-              </a:rPr>
-              <a:t>Token và USD theo user, phòng ban, model, cấp</a:t>
-            </a:r>
-          </a:p>
-          <a:p>
-            <a:pPr algn="l">
-              <a:spcAft>
-                <a:spcPts val="400"/>
-              </a:spcAft>
-            </a:pPr>
-            <a:r>
-              <a:rPr sz="1300" b="0">
-                <a:solidFill>
-                  <a:srgbClr val="555F6B"/>
-                </a:solidFill>
-              </a:rPr>
-              <a:t>Số lần guardrail chặn, số hành động ghi bị user từ chối</a:t>
-            </a:r>
-          </a:p>
-        </p:txBody>
-      </p:sp>
       <p:graphicFrame>
         <p:nvGraphicFramePr>
-          <p:cNvPr id="8" name="Table 7"/>
+          <p:cNvPr id="7" name="Table 6"/>
           <p:cNvGraphicFramePr>
             <a:graphicFrameLocks noGrp="1"/>
           </p:cNvGraphicFramePr>
           <p:nvPr/>
         </p:nvGraphicFramePr>
         <p:xfrm>
-          <a:off x="6309360" y="1371600"/>
-          <a:ext cx="5486400" cy="2286000"/>
+          <a:off x="457200" y="1371600"/>
+          <a:ext cx="6400800" cy="3291840"/>
         </p:xfrm>
         <a:graphic>
           <a:graphicData uri="http://schemas.openxmlformats.org/drawingml/2006/table">
@@ -5459,22 +5001,23 @@
                 <a:tableStyleId>{5C22544A-7EE6-4342-B048-85BDC9FD1C3A}</a:tableStyleId>
               </a:tblPr>
               <a:tblGrid>
-                <a:gridCol w="2011680"/>
-                <a:gridCol w="3474720"/>
+                <a:gridCol w="1737360"/>
+                <a:gridCol w="2194560"/>
+                <a:gridCol w="2468880"/>
               </a:tblGrid>
-              <a:tr h="457200">
-                <a:tc>
-                  <a:txBody>
-                    <a:bodyPr/>
-                    <a:lstStyle/>
-                    <a:p>
-                      <a:r>
-                        <a:rPr sz="1200" b="1">
+              <a:tr h="411480">
+                <a:tc>
+                  <a:txBody>
+                    <a:bodyPr/>
+                    <a:lstStyle/>
+                    <a:p>
+                      <a:r>
+                        <a:rPr sz="1100" b="1">
                           <a:solidFill>
                             <a:srgbClr val="FFFFFF"/>
                           </a:solidFill>
                         </a:rPr>
-                        <a:t>Mức dùng quota tháng</a:t>
+                        <a:t>Thành phần</a:t>
                       </a:r>
                     </a:p>
                   </a:txBody>
@@ -5490,12 +5033,12 @@
                     <a:lstStyle/>
                     <a:p>
                       <a:r>
-                        <a:rPr sz="1200" b="1">
+                        <a:rPr sz="1100" b="1">
                           <a:solidFill>
                             <a:srgbClr val="FFFFFF"/>
                           </a:solidFill>
                         </a:rPr>
-                        <a:t>Hành động</a:t>
+                        <a:t>Chạy liên tục (HA)</a:t>
                       </a:r>
                     </a:p>
                   </a:txBody>
@@ -5505,20 +5048,41 @@
                     </a:solidFill>
                   </a:tcPr>
                 </a:tc>
+                <a:tc>
+                  <a:txBody>
+                    <a:bodyPr/>
+                    <a:lstStyle/>
+                    <a:p>
+                      <a:r>
+                        <a:rPr sz="1100" b="1">
+                          <a:solidFill>
+                            <a:srgbClr val="FFFFFF"/>
+                          </a:solidFill>
+                        </a:rPr>
+                        <a:t>Backup, khôi phục (DR)</a:t>
+                      </a:r>
+                    </a:p>
+                  </a:txBody>
+                  <a:tcPr marL="45720" marR="45720" marT="18288" marB="18288">
+                    <a:solidFill>
+                      <a:srgbClr val="2E6FB7"/>
+                    </a:solidFill>
+                  </a:tcPr>
+                </a:tc>
               </a:tr>
-              <a:tr h="457200">
-                <a:tc>
-                  <a:txBody>
-                    <a:bodyPr/>
-                    <a:lstStyle/>
-                    <a:p>
-                      <a:r>
-                        <a:rPr sz="1200" b="0">
-                          <a:solidFill>
-                            <a:srgbClr val="555F6B"/>
-                          </a:solidFill>
-                        </a:rPr>
-                        <a:t>80%</a:t>
+              <a:tr h="411480">
+                <a:tc>
+                  <a:txBody>
+                    <a:bodyPr/>
+                    <a:lstStyle/>
+                    <a:p>
+                      <a:r>
+                        <a:rPr sz="1100" b="0">
+                          <a:solidFill>
+                            <a:srgbClr val="555F6B"/>
+                          </a:solidFill>
+                        </a:rPr>
+                        <a:t>Tường lửa, cân bằng tải</a:t>
                       </a:r>
                     </a:p>
                   </a:txBody>
@@ -5534,12 +5098,12 @@
                     <a:lstStyle/>
                     <a:p>
                       <a:r>
-                        <a:rPr sz="1200" b="0">
-                          <a:solidFill>
-                            <a:srgbClr val="555F6B"/>
-                          </a:solidFill>
-                        </a:rPr>
-                        <a:t>Cảnh báo user; báo trưởng phòng nếu là quota phòng</a:t>
+                        <a:rPr sz="1100" b="0">
+                          <a:solidFill>
+                            <a:srgbClr val="555F6B"/>
+                          </a:solidFill>
+                        </a:rPr>
+                        <a:t>Managed, đa zone</a:t>
                       </a:r>
                     </a:p>
                   </a:txBody>
@@ -5549,20 +5113,41 @@
                     </a:solidFill>
                   </a:tcPr>
                 </a:tc>
+                <a:tc>
+                  <a:txBody>
+                    <a:bodyPr/>
+                    <a:lstStyle/>
+                    <a:p>
+                      <a:r>
+                        <a:rPr sz="1100" b="0">
+                          <a:solidFill>
+                            <a:srgbClr val="555F6B"/>
+                          </a:solidFill>
+                        </a:rPr>
+                        <a:t>—</a:t>
+                      </a:r>
+                    </a:p>
+                  </a:txBody>
+                  <a:tcPr marL="45720" marR="45720" marT="18288" marB="18288">
+                    <a:solidFill>
+                      <a:srgbClr val="EEF3F8"/>
+                    </a:solidFill>
+                  </a:tcPr>
+                </a:tc>
               </a:tr>
-              <a:tr h="457200">
-                <a:tc>
-                  <a:txBody>
-                    <a:bodyPr/>
-                    <a:lstStyle/>
-                    <a:p>
-                      <a:r>
-                        <a:rPr sz="1200" b="0">
-                          <a:solidFill>
-                            <a:srgbClr val="555F6B"/>
-                          </a:solidFill>
-                        </a:rPr>
-                        <a:t>100%</a:t>
+              <a:tr h="411480">
+                <a:tc>
+                  <a:txBody>
+                    <a:bodyPr/>
+                    <a:lstStyle/>
+                    <a:p>
+                      <a:r>
+                        <a:rPr sz="1100" b="0">
+                          <a:solidFill>
+                            <a:srgbClr val="555F6B"/>
+                          </a:solidFill>
+                        </a:rPr>
+                        <a:t>Cụm GKE</a:t>
                       </a:r>
                     </a:p>
                   </a:txBody>
@@ -5578,12 +5163,12 @@
                     <a:lstStyle/>
                     <a:p>
                       <a:r>
-                        <a:rPr sz="1200" b="0">
-                          <a:solidFill>
-                            <a:srgbClr val="555F6B"/>
-                          </a:solidFill>
-                        </a:rPr>
-                        <a:t>Hạ cấp: cấp 1–2 chỉ dùng model rẻ nhất; khóa cấp 4–5</a:t>
+                        <a:rPr sz="1100" b="0">
+                          <a:solidFill>
+                            <a:srgbClr val="555F6B"/>
+                          </a:solidFill>
+                        </a:rPr>
+                        <a:t>Mỗi pod 2 bản ở 2 zone</a:t>
                       </a:r>
                     </a:p>
                   </a:txBody>
@@ -5593,20 +5178,41 @@
                     </a:solidFill>
                   </a:tcPr>
                 </a:tc>
+                <a:tc>
+                  <a:txBody>
+                    <a:bodyPr/>
+                    <a:lstStyle/>
+                    <a:p>
+                      <a:r>
+                        <a:rPr sz="1100" b="0">
+                          <a:solidFill>
+                            <a:srgbClr val="555F6B"/>
+                          </a:solidFill>
+                        </a:rPr>
+                        <a:t>Dựng lại bằng Terraform</a:t>
+                      </a:r>
+                    </a:p>
+                  </a:txBody>
+                  <a:tcPr marL="45720" marR="45720" marT="18288" marB="18288">
+                    <a:solidFill>
+                      <a:srgbClr val="FFFFFF"/>
+                    </a:solidFill>
+                  </a:tcPr>
+                </a:tc>
               </a:tr>
-              <a:tr h="457200">
-                <a:tc>
-                  <a:txBody>
-                    <a:bodyPr/>
-                    <a:lstStyle/>
-                    <a:p>
-                      <a:r>
-                        <a:rPr sz="1200" b="0">
-                          <a:solidFill>
-                            <a:srgbClr val="555F6B"/>
-                          </a:solidFill>
-                        </a:rPr>
-                        <a:t>120%</a:t>
+              <a:tr h="411480">
+                <a:tc>
+                  <a:txBody>
+                    <a:bodyPr/>
+                    <a:lstStyle/>
+                    <a:p>
+                      <a:r>
+                        <a:rPr sz="1100" b="0">
+                          <a:solidFill>
+                            <a:srgbClr val="555F6B"/>
+                          </a:solidFill>
+                        </a:rPr>
+                        <a:t>LiteLLM, web, worker</a:t>
                       </a:r>
                     </a:p>
                   </a:txBody>
@@ -5622,12 +5228,12 @@
                     <a:lstStyle/>
                     <a:p>
                       <a:r>
-                        <a:rPr sz="1200" b="0">
-                          <a:solidFill>
-                            <a:srgbClr val="555F6B"/>
-                          </a:solidFill>
-                        </a:rPr>
-                        <a:t>Chặn đến đầu tháng sau, trừ khi trưởng phòng duyệt</a:t>
+                        <a:rPr sz="1100" b="0">
+                          <a:solidFill>
+                            <a:srgbClr val="555F6B"/>
+                          </a:solidFill>
+                        </a:rPr>
+                        <a:t>2 bản, 2 zone</a:t>
                       </a:r>
                     </a:p>
                   </a:txBody>
@@ -5637,20 +5243,41 @@
                     </a:solidFill>
                   </a:tcPr>
                 </a:tc>
+                <a:tc>
+                  <a:txBody>
+                    <a:bodyPr/>
+                    <a:lstStyle/>
+                    <a:p>
+                      <a:r>
+                        <a:rPr sz="1100" b="0">
+                          <a:solidFill>
+                            <a:srgbClr val="555F6B"/>
+                          </a:solidFill>
+                        </a:rPr>
+                        <a:t>Image lưu trong Artifact Registry</a:t>
+                      </a:r>
+                    </a:p>
+                  </a:txBody>
+                  <a:tcPr marL="45720" marR="45720" marT="18288" marB="18288">
+                    <a:solidFill>
+                      <a:srgbClr val="EEF3F8"/>
+                    </a:solidFill>
+                  </a:tcPr>
+                </a:tc>
               </a:tr>
-              <a:tr h="457200">
-                <a:tc>
-                  <a:txBody>
-                    <a:bodyPr/>
-                    <a:lstStyle/>
-                    <a:p>
-                      <a:r>
-                        <a:rPr sz="1200" b="0">
-                          <a:solidFill>
-                            <a:srgbClr val="555F6B"/>
-                          </a:solidFill>
-                        </a:rPr>
-                        <a:t>90% ngân sách hệ thống</a:t>
+              <a:tr h="411480">
+                <a:tc>
+                  <a:txBody>
+                    <a:bodyPr/>
+                    <a:lstStyle/>
+                    <a:p>
+                      <a:r>
+                        <a:rPr sz="1100" b="0">
+                          <a:solidFill>
+                            <a:srgbClr val="555F6B"/>
+                          </a:solidFill>
+                        </a:rPr>
+                        <a:t>Postgres (Cloud SQL)</a:t>
                       </a:r>
                     </a:p>
                   </a:txBody>
@@ -5666,18 +5293,234 @@
                     <a:lstStyle/>
                     <a:p>
                       <a:r>
-                        <a:rPr sz="1200" b="0">
-                          <a:solidFill>
-                            <a:srgbClr val="555F6B"/>
-                          </a:solidFill>
-                        </a:rPr>
-                        <a:t>Cảnh báo nhóm FinOps và ban IT</a:t>
+                        <a:rPr sz="1100" b="0">
+                          <a:solidFill>
+                            <a:srgbClr val="555F6B"/>
+                          </a:solidFill>
+                        </a:rPr>
+                        <a:t>Bản dự phòng ở zone khác, tự chuyển</a:t>
                       </a:r>
                     </a:p>
                   </a:txBody>
                   <a:tcPr marL="45720" marR="45720" marT="18288" marB="18288">
                     <a:solidFill>
                       <a:srgbClr val="FFFFFF"/>
+                    </a:solidFill>
+                  </a:tcPr>
+                </a:tc>
+                <a:tc>
+                  <a:txBody>
+                    <a:bodyPr/>
+                    <a:lstStyle/>
+                    <a:p>
+                      <a:r>
+                        <a:rPr sz="1100" b="0">
+                          <a:solidFill>
+                            <a:srgbClr val="555F6B"/>
+                          </a:solidFill>
+                        </a:rPr>
+                        <a:t>Backup hằng ngày, khôi phục về thời điểm bất kỳ; bản sao ở Jakarta</a:t>
+                      </a:r>
+                    </a:p>
+                  </a:txBody>
+                  <a:tcPr marL="45720" marR="45720" marT="18288" marB="18288">
+                    <a:solidFill>
+                      <a:srgbClr val="FFFFFF"/>
+                    </a:solidFill>
+                  </a:tcPr>
+                </a:tc>
+              </a:tr>
+              <a:tr h="411480">
+                <a:tc>
+                  <a:txBody>
+                    <a:bodyPr/>
+                    <a:lstStyle/>
+                    <a:p>
+                      <a:r>
+                        <a:rPr sz="1100" b="0">
+                          <a:solidFill>
+                            <a:srgbClr val="555F6B"/>
+                          </a:solidFill>
+                        </a:rPr>
+                        <a:t>Cache</a:t>
+                      </a:r>
+                    </a:p>
+                  </a:txBody>
+                  <a:tcPr marL="45720" marR="45720" marT="18288" marB="18288">
+                    <a:solidFill>
+                      <a:srgbClr val="EEF3F8"/>
+                    </a:solidFill>
+                  </a:tcPr>
+                </a:tc>
+                <a:tc>
+                  <a:txBody>
+                    <a:bodyPr/>
+                    <a:lstStyle/>
+                    <a:p>
+                      <a:r>
+                        <a:rPr sz="1100" b="0">
+                          <a:solidFill>
+                            <a:srgbClr val="555F6B"/>
+                          </a:solidFill>
+                        </a:rPr>
+                        <a:t>Bản chính + bản phụ</a:t>
+                      </a:r>
+                    </a:p>
+                  </a:txBody>
+                  <a:tcPr marL="45720" marR="45720" marT="18288" marB="18288">
+                    <a:solidFill>
+                      <a:srgbClr val="EEF3F8"/>
+                    </a:solidFill>
+                  </a:tcPr>
+                </a:tc>
+                <a:tc>
+                  <a:txBody>
+                    <a:bodyPr/>
+                    <a:lstStyle/>
+                    <a:p>
+                      <a:r>
+                        <a:rPr sz="1100" b="0">
+                          <a:solidFill>
+                            <a:srgbClr val="555F6B"/>
+                          </a:solidFill>
+                        </a:rPr>
+                        <a:t>Không cần (chỉ dữ liệu tạm)</a:t>
+                      </a:r>
+                    </a:p>
+                  </a:txBody>
+                  <a:tcPr marL="45720" marR="45720" marT="18288" marB="18288">
+                    <a:solidFill>
+                      <a:srgbClr val="EEF3F8"/>
+                    </a:solidFill>
+                  </a:tcPr>
+                </a:tc>
+              </a:tr>
+              <a:tr h="411480">
+                <a:tc>
+                  <a:txBody>
+                    <a:bodyPr/>
+                    <a:lstStyle/>
+                    <a:p>
+                      <a:r>
+                        <a:rPr sz="1100" b="0">
+                          <a:solidFill>
+                            <a:srgbClr val="555F6B"/>
+                          </a:solidFill>
+                        </a:rPr>
+                        <a:t>File workspace</a:t>
+                      </a:r>
+                    </a:p>
+                  </a:txBody>
+                  <a:tcPr marL="45720" marR="45720" marT="18288" marB="18288">
+                    <a:solidFill>
+                      <a:srgbClr val="FFFFFF"/>
+                    </a:solidFill>
+                  </a:tcPr>
+                </a:tc>
+                <a:tc>
+                  <a:txBody>
+                    <a:bodyPr/>
+                    <a:lstStyle/>
+                    <a:p>
+                      <a:r>
+                        <a:rPr sz="1100" b="0">
+                          <a:solidFill>
+                            <a:srgbClr val="555F6B"/>
+                          </a:solidFill>
+                        </a:rPr>
+                        <a:t>Đa zone</a:t>
+                      </a:r>
+                    </a:p>
+                  </a:txBody>
+                  <a:tcPr marL="45720" marR="45720" marT="18288" marB="18288">
+                    <a:solidFill>
+                      <a:srgbClr val="FFFFFF"/>
+                    </a:solidFill>
+                  </a:tcPr>
+                </a:tc>
+                <a:tc>
+                  <a:txBody>
+                    <a:bodyPr/>
+                    <a:lstStyle/>
+                    <a:p>
+                      <a:r>
+                        <a:rPr sz="1100" b="0">
+                          <a:solidFill>
+                            <a:srgbClr val="555F6B"/>
+                          </a:solidFill>
+                        </a:rPr>
+                        <a:t>Lưu ở 2 region</a:t>
+                      </a:r>
+                    </a:p>
+                  </a:txBody>
+                  <a:tcPr marL="45720" marR="45720" marT="18288" marB="18288">
+                    <a:solidFill>
+                      <a:srgbClr val="FFFFFF"/>
+                    </a:solidFill>
+                  </a:tcPr>
+                </a:tc>
+              </a:tr>
+              <a:tr h="411480">
+                <a:tc>
+                  <a:txBody>
+                    <a:bodyPr/>
+                    <a:lstStyle/>
+                    <a:p>
+                      <a:r>
+                        <a:rPr sz="1100" b="0">
+                          <a:solidFill>
+                            <a:srgbClr val="555F6B"/>
+                          </a:solidFill>
+                        </a:rPr>
+                        <a:t>Vertex AI</a:t>
+                      </a:r>
+                    </a:p>
+                  </a:txBody>
+                  <a:tcPr marL="45720" marR="45720" marT="18288" marB="18288">
+                    <a:solidFill>
+                      <a:srgbClr val="EEF3F8"/>
+                    </a:solidFill>
+                  </a:tcPr>
+                </a:tc>
+                <a:tc>
+                  <a:txBody>
+                    <a:bodyPr/>
+                    <a:lstStyle/>
+                    <a:p>
+                      <a:r>
+                        <a:rPr sz="1100" b="0">
+                          <a:solidFill>
+                            <a:srgbClr val="555F6B"/>
+                          </a:solidFill>
+                        </a:rPr>
+                        <a:t>Endpoint global</a:t>
+                      </a:r>
+                    </a:p>
+                  </a:txBody>
+                  <a:tcPr marL="45720" marR="45720" marT="18288" marB="18288">
+                    <a:solidFill>
+                      <a:srgbClr val="EEF3F8"/>
+                    </a:solidFill>
+                  </a:tcPr>
+                </a:tc>
+                <a:tc>
+                  <a:txBody>
+                    <a:bodyPr/>
+                    <a:lstStyle/>
+                    <a:p>
+                      <a:r>
+                        <a:rPr sz="1100" b="0">
+                          <a:solidFill>
+                            <a:srgbClr val="555F6B"/>
+                          </a:solidFill>
+                        </a:rPr>
+                        <a:t>Model dự phòng qua LiteLLM</a:t>
+                      </a:r>
+                    </a:p>
+                  </a:txBody>
+                  <a:tcPr marL="45720" marR="45720" marT="18288" marB="18288">
+                    <a:solidFill>
+                      <a:srgbClr val="EEF3F8"/>
                     </a:solidFill>
                   </a:tcPr>
                 </a:tc>
@@ -5688,14 +5531,14 @@
       </p:graphicFrame>
       <p:sp>
         <p:nvSpPr>
-          <p:cNvPr id="9" name="TextBox 8"/>
+          <p:cNvPr id="8" name="TextBox 7"/>
           <p:cNvSpPr txBox="1"/>
           <p:nvPr/>
         </p:nvSpPr>
         <p:spPr>
           <a:xfrm>
-            <a:off x="6309360" y="3931920"/>
-            <a:ext cx="5486400" cy="2103120"/>
+            <a:off x="7132320" y="1371600"/>
+            <a:ext cx="4663440" cy="4754880"/>
           </a:xfrm>
           <a:prstGeom prst="rect">
             <a:avLst/>
@@ -5719,7 +5562,7 @@
                   <a:srgbClr val="555F6B"/>
                 </a:solidFill>
               </a:rPr>
-              <a:t>Quota đặt bao nhiêu?</a:t>
+              <a:t>Khi mất 1 zone lúc 10:00</a:t>
             </a:r>
           </a:p>
           <a:p>
@@ -5734,7 +5577,7 @@
                   <a:srgbClr val="555F6B"/>
                 </a:solidFill>
               </a:rPr>
-              <a:t>Chi phí theo lượt dùng (LLM + guardrail + sandbox) ≈ 1,11 USD/user/tháng</a:t>
+              <a:t>Cân bằng tải chuyển traffic sang zone còn lại; GKE tạo thêm pod</a:t>
             </a:r>
           </a:p>
           <a:p>
@@ -5749,7 +5592,7 @@
                   <a:srgbClr val="555F6B"/>
                 </a:solidFill>
               </a:rPr>
-              <a:t>Quota mặc định: 3 USD/user/tháng, gần 3 lần mức trung bình, đủ cho người dùng nhiều</a:t>
+              <a:t>Postgres tự chuyển sang bản dự phòng trong vài chục giây đến 1–2 phút</a:t>
             </a:r>
           </a:p>
           <a:p>
@@ -5764,7 +5607,67 @@
                   <a:srgbClr val="555F6B"/>
                 </a:solidFill>
               </a:rPr>
-              <a:t>Báo cáo hằng tháng theo phòng ban</a:t>
+              <a:t>Vài request lỗi, user gửi lại được; dữ liệu đã lưu không mất</a:t>
+            </a:r>
+          </a:p>
+          <a:p>
+            <a:pPr algn="l">
+              <a:spcAft>
+                <a:spcPts val="400"/>
+              </a:spcAft>
+            </a:pPr>
+            <a:r>
+              <a:rPr sz="1200" b="1">
+                <a:solidFill>
+                  <a:srgbClr val="555F6B"/>
+                </a:solidFill>
+              </a:rPr>
+              <a:t>Khi mất cả region Singapore</a:t>
+            </a:r>
+          </a:p>
+          <a:p>
+            <a:pPr algn="l">
+              <a:spcAft>
+                <a:spcPts val="400"/>
+              </a:spcAft>
+            </a:pPr>
+            <a:r>
+              <a:rPr sz="1200" b="0">
+                <a:solidFill>
+                  <a:srgbClr val="555F6B"/>
+                </a:solidFill>
+              </a:rPr>
+              <a:t>Dựng lại ở Jakarta bằng Terraform và backup đã sao chép: ≤ 4 giờ, mất ≤ 1 giờ dữ liệu</a:t>
+            </a:r>
+          </a:p>
+          <a:p>
+            <a:pPr algn="l">
+              <a:spcAft>
+                <a:spcPts val="400"/>
+              </a:spcAft>
+            </a:pPr>
+            <a:r>
+              <a:rPr sz="1200" b="1">
+                <a:solidFill>
+                  <a:srgbClr val="555F6B"/>
+                </a:solidFill>
+              </a:rPr>
+              <a:t>Diễn tập và chi phí</a:t>
+            </a:r>
+          </a:p>
+          <a:p>
+            <a:pPr algn="l">
+              <a:spcAft>
+                <a:spcPts val="400"/>
+              </a:spcAft>
+            </a:pPr>
+            <a:r>
+              <a:rPr sz="1200" b="0">
+                <a:solidFill>
+                  <a:srgbClr val="555F6B"/>
+                </a:solidFill>
+              </a:rPr>
+              <a:t>Thử khôi phục DB mỗi quý, dựng region DR mỗi 6 tháng. backup_dr: 164 USD/tháng</a:t>
             </a:r>
           </a:p>
         </p:txBody>
@@ -5863,7 +5766,7 @@
                   <a:srgbClr val="FFFFFF"/>
                 </a:solidFill>
               </a:rPr>
-              <a:t>11. Chi phí: một nửa là nhân sự, LLM chỉ 16%</a:t>
+              <a:t>10. Mỗi user có quota USD; vượt thì hạ cấp (H8)</a:t>
             </a:r>
           </a:p>
         </p:txBody>
@@ -5901,7 +5804,7 @@
                   <a:srgbClr val="2E6FB7"/>
                 </a:solidFill>
               </a:rPr>
-              <a:t>2 kỹ sư trực vận hành (3.400 USD) là khoản cố định để giữ 99,5% (H7) và tự chạy LiteLLM. Phần theo lượt dùng nhỏ nhờ model rẻ và cache</a:t>
+              <a:t>LiteLLM ghi chi phí của từng user và phòng ban, nên mỗi tháng biết ai tiêu bao nhiêu và chặn được khi vượt</a:t>
             </a:r>
           </a:p>
         </p:txBody>
@@ -5939,7 +5842,7 @@
                   <a:srgbClr val="555F6B"/>
                 </a:solidFill>
               </a:rPr>
-              <a:t>11</a:t>
+              <a:t>10</a:t>
             </a:r>
           </a:p>
         </p:txBody>
@@ -5991,7 +5894,7 @@
         <p:spPr>
           <a:xfrm>
             <a:off x="457200" y="1371600"/>
-            <a:ext cx="3657600" cy="1463040"/>
+            <a:ext cx="5577840" cy="4572000"/>
           </a:xfrm>
           <a:prstGeom prst="rect">
             <a:avLst/>
@@ -6010,12 +5913,12 @@
               </a:spcAft>
             </a:pPr>
             <a:r>
-              <a:rPr sz="2600" b="1">
-                <a:solidFill>
-                  <a:srgbClr val="1F3A5F"/>
-                </a:solidFill>
-              </a:rPr>
-              <a:t>6.821,44 USD/tháng</a:t>
+              <a:rPr sz="1300" b="1">
+                <a:solidFill>
+                  <a:srgbClr val="555F6B"/>
+                </a:solidFill>
+              </a:rPr>
+              <a:t>Cảnh báo chính</a:t>
             </a:r>
           </a:p>
           <a:p>
@@ -6025,12 +5928,102 @@
               </a:spcAft>
             </a:pPr>
             <a:r>
-              <a:rPr sz="2600" b="0">
-                <a:solidFill>
-                  <a:srgbClr val="1F3A5F"/>
-                </a:solidFill>
-              </a:rPr>
-              <a:t>3,41 USD/DAU/tháng</a:t>
+              <a:rPr sz="1300" b="0">
+                <a:solidFill>
+                  <a:srgbClr val="555F6B"/>
+                </a:solidFill>
+              </a:rPr>
+              <a:t>Chậm: p95 thời gian tới token đầu tiên &gt; 3 giây trong 10 phút</a:t>
+            </a:r>
+          </a:p>
+          <a:p>
+            <a:pPr algn="l">
+              <a:spcAft>
+                <a:spcPts val="400"/>
+              </a:spcAft>
+            </a:pPr>
+            <a:r>
+              <a:rPr sz="1300" b="0">
+                <a:solidFill>
+                  <a:srgbClr val="555F6B"/>
+                </a:solidFill>
+              </a:rPr>
+              <a:t>Agent chạy quá 10 phút; tỉ lệ lỗi &gt; 2%</a:t>
+            </a:r>
+          </a:p>
+          <a:p>
+            <a:pPr algn="l">
+              <a:spcAft>
+                <a:spcPts val="400"/>
+              </a:spcAft>
+            </a:pPr>
+            <a:r>
+              <a:rPr sz="1300" b="0">
+                <a:solidFill>
+                  <a:srgbClr val="555F6B"/>
+                </a:solidFill>
+              </a:rPr>
+              <a:t>Cache hit &lt; 50%, tức chi phí LLM sắp tăng</a:t>
+            </a:r>
+          </a:p>
+          <a:p>
+            <a:pPr algn="l">
+              <a:spcAft>
+                <a:spcPts val="400"/>
+              </a:spcAft>
+            </a:pPr>
+            <a:r>
+              <a:rPr sz="1300" b="0">
+                <a:solidFill>
+                  <a:srgbClr val="555F6B"/>
+                </a:solidFill>
+              </a:rPr>
+              <a:t>Chi tiêu trong ngày vượt dự báo 20%</a:t>
+            </a:r>
+          </a:p>
+          <a:p>
+            <a:pPr algn="l">
+              <a:spcAft>
+                <a:spcPts val="400"/>
+              </a:spcAft>
+            </a:pPr>
+            <a:r>
+              <a:rPr sz="1300" b="1">
+                <a:solidFill>
+                  <a:srgbClr val="555F6B"/>
+                </a:solidFill>
+              </a:rPr>
+              <a:t>Dashboard</a:t>
+            </a:r>
+          </a:p>
+          <a:p>
+            <a:pPr algn="l">
+              <a:spcAft>
+                <a:spcPts val="400"/>
+              </a:spcAft>
+            </a:pPr>
+            <a:r>
+              <a:rPr sz="1300" b="0">
+                <a:solidFill>
+                  <a:srgbClr val="555F6B"/>
+                </a:solidFill>
+              </a:rPr>
+              <a:t>Token và USD theo user, phòng ban, model, cấp</a:t>
+            </a:r>
+          </a:p>
+          <a:p>
+            <a:pPr algn="l">
+              <a:spcAft>
+                <a:spcPts val="400"/>
+              </a:spcAft>
+            </a:pPr>
+            <a:r>
+              <a:rPr sz="1300" b="0">
+                <a:solidFill>
+                  <a:srgbClr val="555F6B"/>
+                </a:solidFill>
+              </a:rPr>
+              <a:t>Số lần guardrail chặn, số hành động ghi bị user từ chối</a:t>
             </a:r>
           </a:p>
         </p:txBody>
@@ -6044,8 +6037,8 @@
           <p:nvPr/>
         </p:nvGraphicFramePr>
         <p:xfrm>
-          <a:off x="457200" y="2834640"/>
-          <a:ext cx="4572000" cy="2304288"/>
+          <a:off x="6309360" y="1371600"/>
+          <a:ext cx="5486400" cy="2286000"/>
         </p:xfrm>
         <a:graphic>
           <a:graphicData uri="http://schemas.openxmlformats.org/drawingml/2006/table">
@@ -6054,11 +6047,10 @@
                 <a:tableStyleId>{5C22544A-7EE6-4342-B048-85BDC9FD1C3A}</a:tableStyleId>
               </a:tblPr>
               <a:tblGrid>
-                <a:gridCol w="2194560"/>
-                <a:gridCol w="1280160"/>
-                <a:gridCol w="1097280"/>
+                <a:gridCol w="2011680"/>
+                <a:gridCol w="3474720"/>
               </a:tblGrid>
-              <a:tr h="384048">
+              <a:tr h="457200">
                 <a:tc>
                   <a:txBody>
                     <a:bodyPr/>
@@ -6070,7 +6062,7 @@
                             <a:srgbClr val="FFFFFF"/>
                           </a:solidFill>
                         </a:rPr>
-                        <a:t>5 khoản lớn nhất</a:t>
+                        <a:t>Mức dùng quota tháng</a:t>
                       </a:r>
                     </a:p>
                   </a:txBody>
@@ -6091,7 +6083,7 @@
                             <a:srgbClr val="FFFFFF"/>
                           </a:solidFill>
                         </a:rPr>
-                        <a:t>USD/tháng</a:t>
+                        <a:t>Hành động</a:t>
                       </a:r>
                     </a:p>
                   </a:txBody>
@@ -6101,29 +6093,8 @@
                     </a:solidFill>
                   </a:tcPr>
                 </a:tc>
-                <a:tc>
-                  <a:txBody>
-                    <a:bodyPr/>
-                    <a:lstStyle/>
-                    <a:p>
-                      <a:r>
-                        <a:rPr sz="1200" b="1">
-                          <a:solidFill>
-                            <a:srgbClr val="FFFFFF"/>
-                          </a:solidFill>
-                        </a:rPr>
-                        <a:t>%</a:t>
-                      </a:r>
-                    </a:p>
-                  </a:txBody>
-                  <a:tcPr marL="45720" marR="45720" marT="18288" marB="18288">
-                    <a:solidFill>
-                      <a:srgbClr val="2E6FB7"/>
-                    </a:solidFill>
-                  </a:tcPr>
-                </a:tc>
               </a:tr>
-              <a:tr h="384048">
+              <a:tr h="457200">
                 <a:tc>
                   <a:txBody>
                     <a:bodyPr/>
@@ -6135,7 +6106,7 @@
                             <a:srgbClr val="555F6B"/>
                           </a:solidFill>
                         </a:rPr>
-                        <a:t>ops_labor</a:t>
+                        <a:t>80%</a:t>
                       </a:r>
                     </a:p>
                   </a:txBody>
@@ -6156,7 +6127,7 @@
                             <a:srgbClr val="555F6B"/>
                           </a:solidFill>
                         </a:rPr>
-                        <a:t>3.400</a:t>
+                        <a:t>Cảnh báo user; báo trưởng phòng nếu là quota phòng</a:t>
                       </a:r>
                     </a:p>
                   </a:txBody>
@@ -6166,6 +6137,8 @@
                     </a:solidFill>
                   </a:tcPr>
                 </a:tc>
+              </a:tr>
+              <a:tr h="457200">
                 <a:tc>
                   <a:txBody>
                     <a:bodyPr/>
@@ -6177,7 +6150,51 @@
                             <a:srgbClr val="555F6B"/>
                           </a:solidFill>
                         </a:rPr>
-                        <a:t>50%</a:t>
+                        <a:t>100%</a:t>
+                      </a:r>
+                    </a:p>
+                  </a:txBody>
+                  <a:tcPr marL="45720" marR="45720" marT="18288" marB="18288">
+                    <a:solidFill>
+                      <a:srgbClr val="FFFFFF"/>
+                    </a:solidFill>
+                  </a:tcPr>
+                </a:tc>
+                <a:tc>
+                  <a:txBody>
+                    <a:bodyPr/>
+                    <a:lstStyle/>
+                    <a:p>
+                      <a:r>
+                        <a:rPr sz="1200" b="0">
+                          <a:solidFill>
+                            <a:srgbClr val="555F6B"/>
+                          </a:solidFill>
+                        </a:rPr>
+                        <a:t>Hạ cấp: cấp 1–2 chỉ dùng model rẻ nhất; khóa cấp 4–5</a:t>
+                      </a:r>
+                    </a:p>
+                  </a:txBody>
+                  <a:tcPr marL="45720" marR="45720" marT="18288" marB="18288">
+                    <a:solidFill>
+                      <a:srgbClr val="FFFFFF"/>
+                    </a:solidFill>
+                  </a:tcPr>
+                </a:tc>
+              </a:tr>
+              <a:tr h="457200">
+                <a:tc>
+                  <a:txBody>
+                    <a:bodyPr/>
+                    <a:lstStyle/>
+                    <a:p>
+                      <a:r>
+                        <a:rPr sz="1200" b="0">
+                          <a:solidFill>
+                            <a:srgbClr val="555F6B"/>
+                          </a:solidFill>
+                        </a:rPr>
+                        <a:t>120%</a:t>
                       </a:r>
                     </a:p>
                   </a:txBody>
@@ -6187,8 +6204,29 @@
                     </a:solidFill>
                   </a:tcPr>
                 </a:tc>
+                <a:tc>
+                  <a:txBody>
+                    <a:bodyPr/>
+                    <a:lstStyle/>
+                    <a:p>
+                      <a:r>
+                        <a:rPr sz="1200" b="0">
+                          <a:solidFill>
+                            <a:srgbClr val="555F6B"/>
+                          </a:solidFill>
+                        </a:rPr>
+                        <a:t>Chặn đến đầu tháng sau, trừ khi trưởng phòng duyệt</a:t>
+                      </a:r>
+                    </a:p>
+                  </a:txBody>
+                  <a:tcPr marL="45720" marR="45720" marT="18288" marB="18288">
+                    <a:solidFill>
+                      <a:srgbClr val="EEF3F8"/>
+                    </a:solidFill>
+                  </a:tcPr>
+                </a:tc>
               </a:tr>
-              <a:tr h="384048">
+              <a:tr h="457200">
                 <a:tc>
                   <a:txBody>
                     <a:bodyPr/>
@@ -6200,7 +6238,7 @@
                             <a:srgbClr val="555F6B"/>
                           </a:solidFill>
                         </a:rPr>
-                        <a:t>llm</a:t>
+                        <a:t>90% ngân sách hệ thống</a:t>
                       </a:r>
                     </a:p>
                   </a:txBody>
@@ -6221,229 +6259,13 @@
                             <a:srgbClr val="555F6B"/>
                           </a:solidFill>
                         </a:rPr>
-                        <a:t>1.093</a:t>
+                        <a:t>Cảnh báo nhóm FinOps và ban IT</a:t>
                       </a:r>
                     </a:p>
                   </a:txBody>
                   <a:tcPr marL="45720" marR="45720" marT="18288" marB="18288">
                     <a:solidFill>
                       <a:srgbClr val="FFFFFF"/>
-                    </a:solidFill>
-                  </a:tcPr>
-                </a:tc>
-                <a:tc>
-                  <a:txBody>
-                    <a:bodyPr/>
-                    <a:lstStyle/>
-                    <a:p>
-                      <a:r>
-                        <a:rPr sz="1200" b="0">
-                          <a:solidFill>
-                            <a:srgbClr val="555F6B"/>
-                          </a:solidFill>
-                        </a:rPr>
-                        <a:t>16%</a:t>
-                      </a:r>
-                    </a:p>
-                  </a:txBody>
-                  <a:tcPr marL="45720" marR="45720" marT="18288" marB="18288">
-                    <a:solidFill>
-                      <a:srgbClr val="FFFFFF"/>
-                    </a:solidFill>
-                  </a:tcPr>
-                </a:tc>
-              </a:tr>
-              <a:tr h="384048">
-                <a:tc>
-                  <a:txBody>
-                    <a:bodyPr/>
-                    <a:lstStyle/>
-                    <a:p>
-                      <a:r>
-                        <a:rPr sz="1200" b="0">
-                          <a:solidFill>
-                            <a:srgbClr val="555F6B"/>
-                          </a:solidFill>
-                        </a:rPr>
-                        <a:t>governance</a:t>
-                      </a:r>
-                    </a:p>
-                  </a:txBody>
-                  <a:tcPr marL="45720" marR="45720" marT="18288" marB="18288">
-                    <a:solidFill>
-                      <a:srgbClr val="EEF3F8"/>
-                    </a:solidFill>
-                  </a:tcPr>
-                </a:tc>
-                <a:tc>
-                  <a:txBody>
-                    <a:bodyPr/>
-                    <a:lstStyle/>
-                    <a:p>
-                      <a:r>
-                        <a:rPr sz="1200" b="0">
-                          <a:solidFill>
-                            <a:srgbClr val="555F6B"/>
-                          </a:solidFill>
-                        </a:rPr>
-                        <a:t>806</a:t>
-                      </a:r>
-                    </a:p>
-                  </a:txBody>
-                  <a:tcPr marL="45720" marR="45720" marT="18288" marB="18288">
-                    <a:solidFill>
-                      <a:srgbClr val="EEF3F8"/>
-                    </a:solidFill>
-                  </a:tcPr>
-                </a:tc>
-                <a:tc>
-                  <a:txBody>
-                    <a:bodyPr/>
-                    <a:lstStyle/>
-                    <a:p>
-                      <a:r>
-                        <a:rPr sz="1200" b="0">
-                          <a:solidFill>
-                            <a:srgbClr val="555F6B"/>
-                          </a:solidFill>
-                        </a:rPr>
-                        <a:t>12%</a:t>
-                      </a:r>
-                    </a:p>
-                  </a:txBody>
-                  <a:tcPr marL="45720" marR="45720" marT="18288" marB="18288">
-                    <a:solidFill>
-                      <a:srgbClr val="EEF3F8"/>
-                    </a:solidFill>
-                  </a:tcPr>
-                </a:tc>
-              </a:tr>
-              <a:tr h="384048">
-                <a:tc>
-                  <a:txBody>
-                    <a:bodyPr/>
-                    <a:lstStyle/>
-                    <a:p>
-                      <a:r>
-                        <a:rPr sz="1200" b="0">
-                          <a:solidFill>
-                            <a:srgbClr val="555F6B"/>
-                          </a:solidFill>
-                        </a:rPr>
-                        <a:t>database</a:t>
-                      </a:r>
-                    </a:p>
-                  </a:txBody>
-                  <a:tcPr marL="45720" marR="45720" marT="18288" marB="18288">
-                    <a:solidFill>
-                      <a:srgbClr val="FFFFFF"/>
-                    </a:solidFill>
-                  </a:tcPr>
-                </a:tc>
-                <a:tc>
-                  <a:txBody>
-                    <a:bodyPr/>
-                    <a:lstStyle/>
-                    <a:p>
-                      <a:r>
-                        <a:rPr sz="1200" b="0">
-                          <a:solidFill>
-                            <a:srgbClr val="555F6B"/>
-                          </a:solidFill>
-                        </a:rPr>
-                        <a:t>467</a:t>
-                      </a:r>
-                    </a:p>
-                  </a:txBody>
-                  <a:tcPr marL="45720" marR="45720" marT="18288" marB="18288">
-                    <a:solidFill>
-                      <a:srgbClr val="FFFFFF"/>
-                    </a:solidFill>
-                  </a:tcPr>
-                </a:tc>
-                <a:tc>
-                  <a:txBody>
-                    <a:bodyPr/>
-                    <a:lstStyle/>
-                    <a:p>
-                      <a:r>
-                        <a:rPr sz="1200" b="0">
-                          <a:solidFill>
-                            <a:srgbClr val="555F6B"/>
-                          </a:solidFill>
-                        </a:rPr>
-                        <a:t>7%</a:t>
-                      </a:r>
-                    </a:p>
-                  </a:txBody>
-                  <a:tcPr marL="45720" marR="45720" marT="18288" marB="18288">
-                    <a:solidFill>
-                      <a:srgbClr val="FFFFFF"/>
-                    </a:solidFill>
-                  </a:tcPr>
-                </a:tc>
-              </a:tr>
-              <a:tr h="384048">
-                <a:tc>
-                  <a:txBody>
-                    <a:bodyPr/>
-                    <a:lstStyle/>
-                    <a:p>
-                      <a:r>
-                        <a:rPr sz="1200" b="0">
-                          <a:solidFill>
-                            <a:srgbClr val="555F6B"/>
-                          </a:solidFill>
-                        </a:rPr>
-                        <a:t>sandbox</a:t>
-                      </a:r>
-                    </a:p>
-                  </a:txBody>
-                  <a:tcPr marL="45720" marR="45720" marT="18288" marB="18288">
-                    <a:solidFill>
-                      <a:srgbClr val="EEF3F8"/>
-                    </a:solidFill>
-                  </a:tcPr>
-                </a:tc>
-                <a:tc>
-                  <a:txBody>
-                    <a:bodyPr/>
-                    <a:lstStyle/>
-                    <a:p>
-                      <a:r>
-                        <a:rPr sz="1200" b="0">
-                          <a:solidFill>
-                            <a:srgbClr val="555F6B"/>
-                          </a:solidFill>
-                        </a:rPr>
-                        <a:t>315</a:t>
-                      </a:r>
-                    </a:p>
-                  </a:txBody>
-                  <a:tcPr marL="45720" marR="45720" marT="18288" marB="18288">
-                    <a:solidFill>
-                      <a:srgbClr val="EEF3F8"/>
-                    </a:solidFill>
-                  </a:tcPr>
-                </a:tc>
-                <a:tc>
-                  <a:txBody>
-                    <a:bodyPr/>
-                    <a:lstStyle/>
-                    <a:p>
-                      <a:r>
-                        <a:rPr sz="1200" b="0">
-                          <a:solidFill>
-                            <a:srgbClr val="555F6B"/>
-                          </a:solidFill>
-                        </a:rPr>
-                        <a:t>5%</a:t>
-                      </a:r>
-                    </a:p>
-                  </a:txBody>
-                  <a:tcPr marL="45720" marR="45720" marT="18288" marB="18288">
-                    <a:solidFill>
-                      <a:srgbClr val="EEF3F8"/>
                     </a:solidFill>
                   </a:tcPr>
                 </a:tc>
@@ -6452,438 +6274,16 @@
           </a:graphicData>
         </a:graphic>
       </p:graphicFrame>
-      <p:graphicFrame>
-        <p:nvGraphicFramePr>
-          <p:cNvPr id="9" name="Table 8"/>
-          <p:cNvGraphicFramePr>
-            <a:graphicFrameLocks noGrp="1"/>
-          </p:cNvGraphicFramePr>
-          <p:nvPr/>
-        </p:nvGraphicFramePr>
-        <p:xfrm>
-          <a:off x="5486400" y="1371600"/>
-          <a:ext cx="6309360" cy="3456432"/>
-        </p:xfrm>
-        <a:graphic>
-          <a:graphicData uri="http://schemas.openxmlformats.org/drawingml/2006/table">
-            <a:tbl>
-              <a:tblPr firstRow="1" bandRow="1">
-                <a:tableStyleId>{5C22544A-7EE6-4342-B048-85BDC9FD1C3A}</a:tableStyleId>
-              </a:tblPr>
-              <a:tblGrid>
-                <a:gridCol w="4663440"/>
-                <a:gridCol w="1645920"/>
-              </a:tblGrid>
-              <a:tr h="384048">
-                <a:tc>
-                  <a:txBody>
-                    <a:bodyPr/>
-                    <a:lstStyle/>
-                    <a:p>
-                      <a:r>
-                        <a:rPr sz="1100" b="1">
-                          <a:solidFill>
-                            <a:srgbClr val="FFFFFF"/>
-                          </a:solidFill>
-                        </a:rPr>
-                        <a:t>Đòn bẩy tiết kiệm</a:t>
-                      </a:r>
-                    </a:p>
-                  </a:txBody>
-                  <a:tcPr marL="45720" marR="45720" marT="18288" marB="18288">
-                    <a:solidFill>
-                      <a:srgbClr val="2E6FB7"/>
-                    </a:solidFill>
-                  </a:tcPr>
-                </a:tc>
-                <a:tc>
-                  <a:txBody>
-                    <a:bodyPr/>
-                    <a:lstStyle/>
-                    <a:p>
-                      <a:r>
-                        <a:rPr sz="1100" b="1">
-                          <a:solidFill>
-                            <a:srgbClr val="FFFFFF"/>
-                          </a:solidFill>
-                        </a:rPr>
-                        <a:t>Tiết kiệm (USD/tháng)</a:t>
-                      </a:r>
-                    </a:p>
-                  </a:txBody>
-                  <a:tcPr marL="45720" marR="45720" marT="18288" marB="18288">
-                    <a:solidFill>
-                      <a:srgbClr val="2E6FB7"/>
-                    </a:solidFill>
-                  </a:tcPr>
-                </a:tc>
-              </a:tr>
-              <a:tr h="384048">
-                <a:tc>
-                  <a:txBody>
-                    <a:bodyPr/>
-                    <a:lstStyle/>
-                    <a:p>
-                      <a:r>
-                        <a:rPr sz="1100" b="0">
-                          <a:solidFill>
-                            <a:srgbClr val="555F6B"/>
-                          </a:solidFill>
-                        </a:rPr>
-                        <a:t>Haiku cho cả 5 cấp, thay Sonnet ở cấp 3–4 (eval gate giữ chất lượng)</a:t>
-                      </a:r>
-                    </a:p>
-                  </a:txBody>
-                  <a:tcPr marL="45720" marR="45720" marT="18288" marB="18288">
-                    <a:solidFill>
-                      <a:srgbClr val="EEF3F8"/>
-                    </a:solidFill>
-                  </a:tcPr>
-                </a:tc>
-                <a:tc>
-                  <a:txBody>
-                    <a:bodyPr/>
-                    <a:lstStyle/>
-                    <a:p>
-                      <a:r>
-                        <a:rPr sz="1100" b="0">
-                          <a:solidFill>
-                            <a:srgbClr val="555F6B"/>
-                          </a:solidFill>
-                        </a:rPr>
-                        <a:t>4.705</a:t>
-                      </a:r>
-                    </a:p>
-                  </a:txBody>
-                  <a:tcPr marL="45720" marR="45720" marT="18288" marB="18288">
-                    <a:solidFill>
-                      <a:srgbClr val="EEF3F8"/>
-                    </a:solidFill>
-                  </a:tcPr>
-                </a:tc>
-              </a:tr>
-              <a:tr h="384048">
-                <a:tc>
-                  <a:txBody>
-                    <a:bodyPr/>
-                    <a:lstStyle/>
-                    <a:p>
-                      <a:r>
-                        <a:rPr sz="1100" b="0">
-                          <a:solidFill>
-                            <a:srgbClr val="555F6B"/>
-                          </a:solidFill>
-                        </a:rPr>
-                        <a:t>LiteLLM thay Apigee</a:t>
-                      </a:r>
-                    </a:p>
-                  </a:txBody>
-                  <a:tcPr marL="45720" marR="45720" marT="18288" marB="18288">
-                    <a:solidFill>
-                      <a:srgbClr val="FFFFFF"/>
-                    </a:solidFill>
-                  </a:tcPr>
-                </a:tc>
-                <a:tc>
-                  <a:txBody>
-                    <a:bodyPr/>
-                    <a:lstStyle/>
-                    <a:p>
-                      <a:r>
-                        <a:rPr sz="1100" b="0">
-                          <a:solidFill>
-                            <a:srgbClr val="555F6B"/>
-                          </a:solidFill>
-                        </a:rPr>
-                        <a:t>~1.595</a:t>
-                      </a:r>
-                    </a:p>
-                  </a:txBody>
-                  <a:tcPr marL="45720" marR="45720" marT="18288" marB="18288">
-                    <a:solidFill>
-                      <a:srgbClr val="FFFFFF"/>
-                    </a:solidFill>
-                  </a:tcPr>
-                </a:tc>
-              </a:tr>
-              <a:tr h="384048">
-                <a:tc>
-                  <a:txBody>
-                    <a:bodyPr/>
-                    <a:lstStyle/>
-                    <a:p>
-                      <a:r>
-                        <a:rPr sz="1100" b="0">
-                          <a:solidFill>
-                            <a:srgbClr val="555F6B"/>
-                          </a:solidFill>
-                        </a:rPr>
-                        <a:t>Guardrail chỉ quét text mới, thay vì quét toàn bộ token</a:t>
-                      </a:r>
-                    </a:p>
-                  </a:txBody>
-                  <a:tcPr marL="45720" marR="45720" marT="18288" marB="18288">
-                    <a:solidFill>
-                      <a:srgbClr val="EEF3F8"/>
-                    </a:solidFill>
-                  </a:tcPr>
-                </a:tc>
-                <a:tc>
-                  <a:txBody>
-                    <a:bodyPr/>
-                    <a:lstStyle/>
-                    <a:p>
-                      <a:r>
-                        <a:rPr sz="1100" b="0">
-                          <a:solidFill>
-                            <a:srgbClr val="555F6B"/>
-                          </a:solidFill>
-                        </a:rPr>
-                        <a:t>1.018</a:t>
-                      </a:r>
-                    </a:p>
-                  </a:txBody>
-                  <a:tcPr marL="45720" marR="45720" marT="18288" marB="18288">
-                    <a:solidFill>
-                      <a:srgbClr val="EEF3F8"/>
-                    </a:solidFill>
-                  </a:tcPr>
-                </a:tc>
-              </a:tr>
-              <a:tr h="384048">
-                <a:tc>
-                  <a:txBody>
-                    <a:bodyPr/>
-                    <a:lstStyle/>
-                    <a:p>
-                      <a:r>
-                        <a:rPr sz="1100" b="0">
-                          <a:solidFill>
-                            <a:srgbClr val="555F6B"/>
-                          </a:solidFill>
-                        </a:rPr>
-                        <a:t>Cất token bằng KMS trong Postgres, thay Secret Manager</a:t>
-                      </a:r>
-                    </a:p>
-                  </a:txBody>
-                  <a:tcPr marL="45720" marR="45720" marT="18288" marB="18288">
-                    <a:solidFill>
-                      <a:srgbClr val="FFFFFF"/>
-                    </a:solidFill>
-                  </a:tcPr>
-                </a:tc>
-                <a:tc>
-                  <a:txBody>
-                    <a:bodyPr/>
-                    <a:lstStyle/>
-                    <a:p>
-                      <a:r>
-                        <a:rPr sz="1100" b="0">
-                          <a:solidFill>
-                            <a:srgbClr val="555F6B"/>
-                          </a:solidFill>
-                        </a:rPr>
-                        <a:t>~716</a:t>
-                      </a:r>
-                    </a:p>
-                  </a:txBody>
-                  <a:tcPr marL="45720" marR="45720" marT="18288" marB="18288">
-                    <a:solidFill>
-                      <a:srgbClr val="FFFFFF"/>
-                    </a:solidFill>
-                  </a:tcPr>
-                </a:tc>
-              </a:tr>
-              <a:tr h="384048">
-                <a:tc>
-                  <a:txBody>
-                    <a:bodyPr/>
-                    <a:lstStyle/>
-                    <a:p>
-                      <a:r>
-                        <a:rPr sz="1100" b="0">
-                          <a:solidFill>
-                            <a:srgbClr val="555F6B"/>
-                          </a:solidFill>
-                        </a:rPr>
-                        <a:t>Prompt caching (61% token vào đọc từ cache)</a:t>
-                      </a:r>
-                    </a:p>
-                  </a:txBody>
-                  <a:tcPr marL="45720" marR="45720" marT="18288" marB="18288">
-                    <a:solidFill>
-                      <a:srgbClr val="EEF3F8"/>
-                    </a:solidFill>
-                  </a:tcPr>
-                </a:tc>
-                <a:tc>
-                  <a:txBody>
-                    <a:bodyPr/>
-                    <a:lstStyle/>
-                    <a:p>
-                      <a:r>
-                        <a:rPr sz="1100" b="0">
-                          <a:solidFill>
-                            <a:srgbClr val="555F6B"/>
-                          </a:solidFill>
-                        </a:rPr>
-                        <a:t>670</a:t>
-                      </a:r>
-                    </a:p>
-                  </a:txBody>
-                  <a:tcPr marL="45720" marR="45720" marT="18288" marB="18288">
-                    <a:solidFill>
-                      <a:srgbClr val="EEF3F8"/>
-                    </a:solidFill>
-                  </a:tcPr>
-                </a:tc>
-              </a:tr>
-              <a:tr h="384048">
-                <a:tc>
-                  <a:txBody>
-                    <a:bodyPr/>
-                    <a:lstStyle/>
-                    <a:p>
-                      <a:r>
-                        <a:rPr sz="1100" b="0">
-                          <a:solidFill>
-                            <a:srgbClr val="555F6B"/>
-                          </a:solidFill>
-                        </a:rPr>
-                        <a:t>Ngoài giờ chỉ chạy 1 pod, thay vì 2 pod 24/7</a:t>
-                      </a:r>
-                    </a:p>
-                  </a:txBody>
-                  <a:tcPr marL="45720" marR="45720" marT="18288" marB="18288">
-                    <a:solidFill>
-                      <a:srgbClr val="FFFFFF"/>
-                    </a:solidFill>
-                  </a:tcPr>
-                </a:tc>
-                <a:tc>
-                  <a:txBody>
-                    <a:bodyPr/>
-                    <a:lstStyle/>
-                    <a:p>
-                      <a:r>
-                        <a:rPr sz="1100" b="0">
-                          <a:solidFill>
-                            <a:srgbClr val="555F6B"/>
-                          </a:solidFill>
-                        </a:rPr>
-                        <a:t>109</a:t>
-                      </a:r>
-                    </a:p>
-                  </a:txBody>
-                  <a:tcPr marL="45720" marR="45720" marT="18288" marB="18288">
-                    <a:solidFill>
-                      <a:srgbClr val="FFFFFF"/>
-                    </a:solidFill>
-                  </a:tcPr>
-                </a:tc>
-              </a:tr>
-              <a:tr h="384048">
-                <a:tc>
-                  <a:txBody>
-                    <a:bodyPr/>
-                    <a:lstStyle/>
-                    <a:p>
-                      <a:r>
-                        <a:rPr sz="1100" b="0">
-                          <a:solidFill>
-                            <a:srgbClr val="555F6B"/>
-                          </a:solidFill>
-                        </a:rPr>
-                        <a:t>pgvector trong DB, thay Vertex Vector Search</a:t>
-                      </a:r>
-                    </a:p>
-                  </a:txBody>
-                  <a:tcPr marL="45720" marR="45720" marT="18288" marB="18288">
-                    <a:solidFill>
-                      <a:srgbClr val="EEF3F8"/>
-                    </a:solidFill>
-                  </a:tcPr>
-                </a:tc>
-                <a:tc>
-                  <a:txBody>
-                    <a:bodyPr/>
-                    <a:lstStyle/>
-                    <a:p>
-                      <a:r>
-                        <a:rPr sz="1100" b="0">
-                          <a:solidFill>
-                            <a:srgbClr val="555F6B"/>
-                          </a:solidFill>
-                        </a:rPr>
-                        <a:t>~84</a:t>
-                      </a:r>
-                    </a:p>
-                  </a:txBody>
-                  <a:tcPr marL="45720" marR="45720" marT="18288" marB="18288">
-                    <a:solidFill>
-                      <a:srgbClr val="EEF3F8"/>
-                    </a:solidFill>
-                  </a:tcPr>
-                </a:tc>
-              </a:tr>
-              <a:tr h="384048">
-                <a:tc>
-                  <a:txBody>
-                    <a:bodyPr/>
-                    <a:lstStyle/>
-                    <a:p>
-                      <a:r>
-                        <a:rPr sz="1100" b="0">
-                          <a:solidFill>
-                            <a:srgbClr val="555F6B"/>
-                          </a:solidFill>
-                        </a:rPr>
-                        <a:t>Staging dùng chung cụm, thay vì cụm riêng</a:t>
-                      </a:r>
-                    </a:p>
-                  </a:txBody>
-                  <a:tcPr marL="45720" marR="45720" marT="18288" marB="18288">
-                    <a:solidFill>
-                      <a:srgbClr val="FFFFFF"/>
-                    </a:solidFill>
-                  </a:tcPr>
-                </a:tc>
-                <a:tc>
-                  <a:txBody>
-                    <a:bodyPr/>
-                    <a:lstStyle/>
-                    <a:p>
-                      <a:r>
-                        <a:rPr sz="1100" b="0">
-                          <a:solidFill>
-                            <a:srgbClr val="555F6B"/>
-                          </a:solidFill>
-                        </a:rPr>
-                        <a:t>73</a:t>
-                      </a:r>
-                    </a:p>
-                  </a:txBody>
-                  <a:tcPr marL="45720" marR="45720" marT="18288" marB="18288">
-                    <a:solidFill>
-                      <a:srgbClr val="FFFFFF"/>
-                    </a:solidFill>
-                  </a:tcPr>
-                </a:tc>
-              </a:tr>
-            </a:tbl>
-          </a:graphicData>
-        </a:graphic>
-      </p:graphicFrame>
-      <p:sp>
-        <p:nvSpPr>
-          <p:cNvPr id="10" name="TextBox 9"/>
+      <p:sp>
+        <p:nvSpPr>
+          <p:cNvPr id="9" name="TextBox 8"/>
           <p:cNvSpPr txBox="1"/>
           <p:nvPr/>
         </p:nvSpPr>
         <p:spPr>
           <a:xfrm>
-            <a:off x="5486400" y="4937760"/>
-            <a:ext cx="6309360" cy="1371600"/>
+            <a:off x="6309360" y="3931920"/>
+            <a:ext cx="5486400" cy="2103120"/>
           </a:xfrm>
           <a:prstGeom prst="rect">
             <a:avLst/>
@@ -6902,12 +6302,12 @@
               </a:spcAft>
             </a:pPr>
             <a:r>
-              <a:rPr sz="1100" b="0">
+              <a:rPr sz="1200" b="1">
                 <a:solidFill>
                   <a:srgbClr val="555F6B"/>
                 </a:solidFill>
               </a:rPr>
-              <a:t>Mỗi dòng so với một phương án thay thế riêng, nên không cộng dồn các dòng.</a:t>
+              <a:t>Quota đặt bao nhiêu?</a:t>
             </a:r>
           </a:p>
           <a:p>
@@ -6917,12 +6317,42 @@
               </a:spcAft>
             </a:pPr>
             <a:r>
-              <a:rPr sz="1100" b="0">
+              <a:rPr sz="1200" b="0">
                 <a:solidFill>
                   <a:srgbClr val="555F6B"/>
                 </a:solidFill>
               </a:rPr>
-              <a:t>Không dùng free tier, credit hay giá khuyến mãi. Chưa tính phí ghi cache của Claude (ước tính vài %). Không mua gói support; không có dòng dự phòng.</a:t>
+              <a:t>Chi phí theo lượt dùng (LLM + guardrail + sandbox) ≈ 1,11 USD/user/tháng</a:t>
+            </a:r>
+          </a:p>
+          <a:p>
+            <a:pPr algn="l">
+              <a:spcAft>
+                <a:spcPts val="400"/>
+              </a:spcAft>
+            </a:pPr>
+            <a:r>
+              <a:rPr sz="1200" b="0">
+                <a:solidFill>
+                  <a:srgbClr val="555F6B"/>
+                </a:solidFill>
+              </a:rPr>
+              <a:t>Quota mặc định: 3 USD/user/tháng, gần 3 lần mức trung bình, đủ cho người dùng nhiều</a:t>
+            </a:r>
+          </a:p>
+          <a:p>
+            <a:pPr algn="l">
+              <a:spcAft>
+                <a:spcPts val="400"/>
+              </a:spcAft>
+            </a:pPr>
+            <a:r>
+              <a:rPr sz="1200" b="0">
+                <a:solidFill>
+                  <a:srgbClr val="555F6B"/>
+                </a:solidFill>
+              </a:rPr>
+              <a:t>Báo cáo hằng tháng theo phòng ban</a:t>
             </a:r>
           </a:p>
         </p:txBody>
@@ -7021,7 +6451,7 @@
                   <a:srgbClr val="FFFFFF"/>
                 </a:solidFill>
               </a:rPr>
-              <a:t>12. Rủi ro lớn nhất: Haiku không đạt eval ở cấp 3–4</a:t>
+              <a:t>11. Chi phí: một nửa là nhân sự, LLM chỉ 16%</a:t>
             </a:r>
           </a:p>
         </p:txBody>
@@ -7059,7 +6489,7 @@
                   <a:srgbClr val="2E6FB7"/>
                 </a:solidFill>
               </a:rPr>
-              <a:t>Khi đó chi phí lên 11.526 USD/tháng. Nhóm đã tính sẵn; LiteLLM đổi model bằng 1 dòng cấu hình</a:t>
+              <a:t>2 kỹ sư trực vận hành (3.400 USD) là khoản cố định để giữ 99,5% (H7) và tự chạy LiteLLM. Phần theo lượt dùng nhỏ nhờ model rẻ và cache</a:t>
             </a:r>
           </a:p>
         </p:txBody>
@@ -7097,7 +6527,7 @@
                   <a:srgbClr val="555F6B"/>
                 </a:solidFill>
               </a:rPr>
-              <a:t>12</a:t>
+              <a:t>11</a:t>
             </a:r>
           </a:p>
         </p:txBody>
@@ -7140,17 +6570,70 @@
           </a:p>
         </p:txBody>
       </p:sp>
+      <p:sp>
+        <p:nvSpPr>
+          <p:cNvPr id="7" name="TextBox 6"/>
+          <p:cNvSpPr txBox="1"/>
+          <p:nvPr/>
+        </p:nvSpPr>
+        <p:spPr>
+          <a:xfrm>
+            <a:off x="457200" y="1371600"/>
+            <a:ext cx="3657600" cy="1463040"/>
+          </a:xfrm>
+          <a:prstGeom prst="rect">
+            <a:avLst/>
+          </a:prstGeom>
+          <a:noFill/>
+        </p:spPr>
+        <p:txBody>
+          <a:bodyPr wrap="square">
+            <a:spAutoFit/>
+          </a:bodyPr>
+          <a:lstStyle/>
+          <a:p>
+            <a:pPr algn="l">
+              <a:spcAft>
+                <a:spcPts val="400"/>
+              </a:spcAft>
+            </a:pPr>
+            <a:r>
+              <a:rPr sz="2600" b="1">
+                <a:solidFill>
+                  <a:srgbClr val="1F3A5F"/>
+                </a:solidFill>
+              </a:rPr>
+              <a:t>6.821,44 USD/tháng</a:t>
+            </a:r>
+          </a:p>
+          <a:p>
+            <a:pPr algn="l">
+              <a:spcAft>
+                <a:spcPts val="400"/>
+              </a:spcAft>
+            </a:pPr>
+            <a:r>
+              <a:rPr sz="2600" b="0">
+                <a:solidFill>
+                  <a:srgbClr val="1F3A5F"/>
+                </a:solidFill>
+              </a:rPr>
+              <a:t>3,41 USD/DAU/tháng</a:t>
+            </a:r>
+          </a:p>
+        </p:txBody>
+      </p:sp>
       <p:graphicFrame>
         <p:nvGraphicFramePr>
-          <p:cNvPr id="7" name="Table 6"/>
+          <p:cNvPr id="8" name="Table 7"/>
           <p:cNvGraphicFramePr>
             <a:graphicFrameLocks noGrp="1"/>
           </p:cNvGraphicFramePr>
           <p:nvPr/>
         </p:nvGraphicFramePr>
         <p:xfrm>
-          <a:off x="457200" y="1371600"/>
-          <a:ext cx="5760720" cy="2688336"/>
+          <a:off x="457200" y="2834640"/>
+          <a:ext cx="4572000" cy="2304288"/>
         </p:xfrm>
         <a:graphic>
           <a:graphicData uri="http://schemas.openxmlformats.org/drawingml/2006/table">
@@ -7159,9 +6642,9 @@
                 <a:tableStyleId>{5C22544A-7EE6-4342-B048-85BDC9FD1C3A}</a:tableStyleId>
               </a:tblPr>
               <a:tblGrid>
-                <a:gridCol w="3017520"/>
-                <a:gridCol w="1371600"/>
-                <a:gridCol w="1371600"/>
+                <a:gridCol w="2194560"/>
+                <a:gridCol w="1280160"/>
+                <a:gridCol w="1097280"/>
               </a:tblGrid>
               <a:tr h="384048">
                 <a:tc>
@@ -7175,7 +6658,7 @@
                             <a:srgbClr val="FFFFFF"/>
                           </a:solidFill>
                         </a:rPr>
-                        <a:t>Kịch bản</a:t>
+                        <a:t>5 khoản lớn nhất</a:t>
                       </a:r>
                     </a:p>
                   </a:txBody>
@@ -7217,7 +6700,7 @@
                             <a:srgbClr val="FFFFFF"/>
                           </a:solidFill>
                         </a:rPr>
-                        <a:t>USD/DAU</a:t>
+                        <a:t>%</a:t>
                       </a:r>
                     </a:p>
                   </a:txBody>
@@ -7240,7 +6723,7 @@
                             <a:srgbClr val="555F6B"/>
                           </a:solidFill>
                         </a:rPr>
-                        <a:t>Cơ sở (2.000 DAU)</a:t>
+                        <a:t>ops_labor</a:t>
                       </a:r>
                     </a:p>
                   </a:txBody>
@@ -7261,7 +6744,7 @@
                             <a:srgbClr val="555F6B"/>
                           </a:solidFill>
                         </a:rPr>
-                        <a:t>6.821</a:t>
+                        <a:t>3.400</a:t>
                       </a:r>
                     </a:p>
                   </a:txBody>
@@ -7282,7 +6765,7 @@
                             <a:srgbClr val="555F6B"/>
                           </a:solidFill>
                         </a:rPr>
-                        <a:t>3,41</a:t>
+                        <a:t>50%</a:t>
                       </a:r>
                     </a:p>
                   </a:txBody>
@@ -7305,7 +6788,7 @@
                             <a:srgbClr val="555F6B"/>
                           </a:solidFill>
                         </a:rPr>
-                        <a:t>DAU gấp đôi = 4.000</a:t>
+                        <a:t>llm</a:t>
                       </a:r>
                     </a:p>
                   </a:txBody>
@@ -7326,7 +6809,7 @@
                             <a:srgbClr val="555F6B"/>
                           </a:solidFill>
                         </a:rPr>
-                        <a:t>8.826</a:t>
+                        <a:t>1.093</a:t>
                       </a:r>
                     </a:p>
                   </a:txBody>
@@ -7347,7 +6830,7 @@
                             <a:srgbClr val="555F6B"/>
                           </a:solidFill>
                         </a:rPr>
-                        <a:t>2,21</a:t>
+                        <a:t>16%</a:t>
                       </a:r>
                     </a:p>
                   </a:txBody>
@@ -7370,7 +6853,7 @@
                             <a:srgbClr val="555F6B"/>
                           </a:solidFill>
                         </a:rPr>
-                        <a:t>Giá token +30%</a:t>
+                        <a:t>governance</a:t>
                       </a:r>
                     </a:p>
                   </a:txBody>
@@ -7391,7 +6874,7 @@
                             <a:srgbClr val="555F6B"/>
                           </a:solidFill>
                         </a:rPr>
-                        <a:t>7.263</a:t>
+                        <a:t>806</a:t>
                       </a:r>
                     </a:p>
                   </a:txBody>
@@ -7412,7 +6895,7 @@
                             <a:srgbClr val="555F6B"/>
                           </a:solidFill>
                         </a:rPr>
-                        <a:t>3,63</a:t>
+                        <a:t>12%</a:t>
                       </a:r>
                     </a:p>
                   </a:txBody>
@@ -7435,7 +6918,7 @@
                             <a:srgbClr val="555F6B"/>
                           </a:solidFill>
                         </a:rPr>
-                        <a:t>Giá token −50%</a:t>
+                        <a:t>database</a:t>
                       </a:r>
                     </a:p>
                   </a:txBody>
@@ -7456,7 +6939,7 @@
                             <a:srgbClr val="555F6B"/>
                           </a:solidFill>
                         </a:rPr>
-                        <a:t>6.085</a:t>
+                        <a:t>467</a:t>
                       </a:r>
                     </a:p>
                   </a:txBody>
@@ -7477,7 +6960,7 @@
                             <a:srgbClr val="555F6B"/>
                           </a:solidFill>
                         </a:rPr>
-                        <a:t>3,04</a:t>
+                        <a:t>7%</a:t>
                       </a:r>
                     </a:p>
                   </a:txBody>
@@ -7500,7 +6983,7 @@
                             <a:srgbClr val="555F6B"/>
                           </a:solidFill>
                         </a:rPr>
-                        <a:t>Cấp 3–4 phải nâng lên Sonnet 5.5</a:t>
+                        <a:t>sandbox</a:t>
                       </a:r>
                     </a:p>
                   </a:txBody>
@@ -7521,7 +7004,7 @@
                             <a:srgbClr val="555F6B"/>
                           </a:solidFill>
                         </a:rPr>
-                        <a:t>11.526</a:t>
+                        <a:t>315</a:t>
                       </a:r>
                     </a:p>
                   </a:txBody>
@@ -7542,78 +7025,13 @@
                             <a:srgbClr val="555F6B"/>
                           </a:solidFill>
                         </a:rPr>
-                        <a:t>5,76</a:t>
+                        <a:t>5%</a:t>
                       </a:r>
                     </a:p>
                   </a:txBody>
                   <a:tcPr marL="45720" marR="45720" marT="18288" marB="18288">
                     <a:solidFill>
                       <a:srgbClr val="EEF3F8"/>
-                    </a:solidFill>
-                  </a:tcPr>
-                </a:tc>
-              </a:tr>
-              <a:tr h="384048">
-                <a:tc>
-                  <a:txBody>
-                    <a:bodyPr/>
-                    <a:lstStyle/>
-                    <a:p>
-                      <a:r>
-                        <a:rPr sz="1200" b="0">
-                          <a:solidFill>
-                            <a:srgbClr val="555F6B"/>
-                          </a:solidFill>
-                        </a:rPr>
-                        <a:t>Workspace đầy 20 TB</a:t>
-                      </a:r>
-                    </a:p>
-                  </a:txBody>
-                  <a:tcPr marL="45720" marR="45720" marT="18288" marB="18288">
-                    <a:solidFill>
-                      <a:srgbClr val="FFFFFF"/>
-                    </a:solidFill>
-                  </a:tcPr>
-                </a:tc>
-                <a:tc>
-                  <a:txBody>
-                    <a:bodyPr/>
-                    <a:lstStyle/>
-                    <a:p>
-                      <a:r>
-                        <a:rPr sz="1200" b="0">
-                          <a:solidFill>
-                            <a:srgbClr val="555F6B"/>
-                          </a:solidFill>
-                        </a:rPr>
-                        <a:t>+ ~704</a:t>
-                      </a:r>
-                    </a:p>
-                  </a:txBody>
-                  <a:tcPr marL="45720" marR="45720" marT="18288" marB="18288">
-                    <a:solidFill>
-                      <a:srgbClr val="FFFFFF"/>
-                    </a:solidFill>
-                  </a:tcPr>
-                </a:tc>
-                <a:tc>
-                  <a:txBody>
-                    <a:bodyPr/>
-                    <a:lstStyle/>
-                    <a:p>
-                      <a:r>
-                        <a:rPr sz="1200" b="0">
-                          <a:solidFill>
-                            <a:srgbClr val="555F6B"/>
-                          </a:solidFill>
-                        </a:rPr>
-                        <a:t>—</a:t>
-                      </a:r>
-                    </a:p>
-                  </a:txBody>
-                  <a:tcPr marL="45720" marR="45720" marT="18288" marB="18288">
-                    <a:solidFill>
-                      <a:srgbClr val="FFFFFF"/>
                     </a:solidFill>
                   </a:tcPr>
                 </a:tc>
@@ -7622,16 +7040,438 @@
           </a:graphicData>
         </a:graphic>
       </p:graphicFrame>
-      <p:sp>
-        <p:nvSpPr>
-          <p:cNvPr id="8" name="TextBox 7"/>
+      <p:graphicFrame>
+        <p:nvGraphicFramePr>
+          <p:cNvPr id="9" name="Table 8"/>
+          <p:cNvGraphicFramePr>
+            <a:graphicFrameLocks noGrp="1"/>
+          </p:cNvGraphicFramePr>
+          <p:nvPr/>
+        </p:nvGraphicFramePr>
+        <p:xfrm>
+          <a:off x="5486400" y="1371600"/>
+          <a:ext cx="6309360" cy="3456432"/>
+        </p:xfrm>
+        <a:graphic>
+          <a:graphicData uri="http://schemas.openxmlformats.org/drawingml/2006/table">
+            <a:tbl>
+              <a:tblPr firstRow="1" bandRow="1">
+                <a:tableStyleId>{5C22544A-7EE6-4342-B048-85BDC9FD1C3A}</a:tableStyleId>
+              </a:tblPr>
+              <a:tblGrid>
+                <a:gridCol w="4663440"/>
+                <a:gridCol w="1645920"/>
+              </a:tblGrid>
+              <a:tr h="384048">
+                <a:tc>
+                  <a:txBody>
+                    <a:bodyPr/>
+                    <a:lstStyle/>
+                    <a:p>
+                      <a:r>
+                        <a:rPr sz="1100" b="1">
+                          <a:solidFill>
+                            <a:srgbClr val="FFFFFF"/>
+                          </a:solidFill>
+                        </a:rPr>
+                        <a:t>Đòn bẩy tiết kiệm</a:t>
+                      </a:r>
+                    </a:p>
+                  </a:txBody>
+                  <a:tcPr marL="45720" marR="45720" marT="18288" marB="18288">
+                    <a:solidFill>
+                      <a:srgbClr val="2E6FB7"/>
+                    </a:solidFill>
+                  </a:tcPr>
+                </a:tc>
+                <a:tc>
+                  <a:txBody>
+                    <a:bodyPr/>
+                    <a:lstStyle/>
+                    <a:p>
+                      <a:r>
+                        <a:rPr sz="1100" b="1">
+                          <a:solidFill>
+                            <a:srgbClr val="FFFFFF"/>
+                          </a:solidFill>
+                        </a:rPr>
+                        <a:t>Tiết kiệm (USD/tháng)</a:t>
+                      </a:r>
+                    </a:p>
+                  </a:txBody>
+                  <a:tcPr marL="45720" marR="45720" marT="18288" marB="18288">
+                    <a:solidFill>
+                      <a:srgbClr val="2E6FB7"/>
+                    </a:solidFill>
+                  </a:tcPr>
+                </a:tc>
+              </a:tr>
+              <a:tr h="384048">
+                <a:tc>
+                  <a:txBody>
+                    <a:bodyPr/>
+                    <a:lstStyle/>
+                    <a:p>
+                      <a:r>
+                        <a:rPr sz="1100" b="0">
+                          <a:solidFill>
+                            <a:srgbClr val="555F6B"/>
+                          </a:solidFill>
+                        </a:rPr>
+                        <a:t>Haiku cho cả 5 cấp, thay Sonnet ở cấp 3–4 (eval gate giữ chất lượng)</a:t>
+                      </a:r>
+                    </a:p>
+                  </a:txBody>
+                  <a:tcPr marL="45720" marR="45720" marT="18288" marB="18288">
+                    <a:solidFill>
+                      <a:srgbClr val="EEF3F8"/>
+                    </a:solidFill>
+                  </a:tcPr>
+                </a:tc>
+                <a:tc>
+                  <a:txBody>
+                    <a:bodyPr/>
+                    <a:lstStyle/>
+                    <a:p>
+                      <a:r>
+                        <a:rPr sz="1100" b="0">
+                          <a:solidFill>
+                            <a:srgbClr val="555F6B"/>
+                          </a:solidFill>
+                        </a:rPr>
+                        <a:t>4.705</a:t>
+                      </a:r>
+                    </a:p>
+                  </a:txBody>
+                  <a:tcPr marL="45720" marR="45720" marT="18288" marB="18288">
+                    <a:solidFill>
+                      <a:srgbClr val="EEF3F8"/>
+                    </a:solidFill>
+                  </a:tcPr>
+                </a:tc>
+              </a:tr>
+              <a:tr h="384048">
+                <a:tc>
+                  <a:txBody>
+                    <a:bodyPr/>
+                    <a:lstStyle/>
+                    <a:p>
+                      <a:r>
+                        <a:rPr sz="1100" b="0">
+                          <a:solidFill>
+                            <a:srgbClr val="555F6B"/>
+                          </a:solidFill>
+                        </a:rPr>
+                        <a:t>LiteLLM thay Apigee</a:t>
+                      </a:r>
+                    </a:p>
+                  </a:txBody>
+                  <a:tcPr marL="45720" marR="45720" marT="18288" marB="18288">
+                    <a:solidFill>
+                      <a:srgbClr val="FFFFFF"/>
+                    </a:solidFill>
+                  </a:tcPr>
+                </a:tc>
+                <a:tc>
+                  <a:txBody>
+                    <a:bodyPr/>
+                    <a:lstStyle/>
+                    <a:p>
+                      <a:r>
+                        <a:rPr sz="1100" b="0">
+                          <a:solidFill>
+                            <a:srgbClr val="555F6B"/>
+                          </a:solidFill>
+                        </a:rPr>
+                        <a:t>~1.595</a:t>
+                      </a:r>
+                    </a:p>
+                  </a:txBody>
+                  <a:tcPr marL="45720" marR="45720" marT="18288" marB="18288">
+                    <a:solidFill>
+                      <a:srgbClr val="FFFFFF"/>
+                    </a:solidFill>
+                  </a:tcPr>
+                </a:tc>
+              </a:tr>
+              <a:tr h="384048">
+                <a:tc>
+                  <a:txBody>
+                    <a:bodyPr/>
+                    <a:lstStyle/>
+                    <a:p>
+                      <a:r>
+                        <a:rPr sz="1100" b="0">
+                          <a:solidFill>
+                            <a:srgbClr val="555F6B"/>
+                          </a:solidFill>
+                        </a:rPr>
+                        <a:t>Guardrail chỉ quét text mới, thay vì quét toàn bộ token</a:t>
+                      </a:r>
+                    </a:p>
+                  </a:txBody>
+                  <a:tcPr marL="45720" marR="45720" marT="18288" marB="18288">
+                    <a:solidFill>
+                      <a:srgbClr val="EEF3F8"/>
+                    </a:solidFill>
+                  </a:tcPr>
+                </a:tc>
+                <a:tc>
+                  <a:txBody>
+                    <a:bodyPr/>
+                    <a:lstStyle/>
+                    <a:p>
+                      <a:r>
+                        <a:rPr sz="1100" b="0">
+                          <a:solidFill>
+                            <a:srgbClr val="555F6B"/>
+                          </a:solidFill>
+                        </a:rPr>
+                        <a:t>1.018</a:t>
+                      </a:r>
+                    </a:p>
+                  </a:txBody>
+                  <a:tcPr marL="45720" marR="45720" marT="18288" marB="18288">
+                    <a:solidFill>
+                      <a:srgbClr val="EEF3F8"/>
+                    </a:solidFill>
+                  </a:tcPr>
+                </a:tc>
+              </a:tr>
+              <a:tr h="384048">
+                <a:tc>
+                  <a:txBody>
+                    <a:bodyPr/>
+                    <a:lstStyle/>
+                    <a:p>
+                      <a:r>
+                        <a:rPr sz="1100" b="0">
+                          <a:solidFill>
+                            <a:srgbClr val="555F6B"/>
+                          </a:solidFill>
+                        </a:rPr>
+                        <a:t>Cất token bằng KMS trong Postgres, thay Secret Manager</a:t>
+                      </a:r>
+                    </a:p>
+                  </a:txBody>
+                  <a:tcPr marL="45720" marR="45720" marT="18288" marB="18288">
+                    <a:solidFill>
+                      <a:srgbClr val="FFFFFF"/>
+                    </a:solidFill>
+                  </a:tcPr>
+                </a:tc>
+                <a:tc>
+                  <a:txBody>
+                    <a:bodyPr/>
+                    <a:lstStyle/>
+                    <a:p>
+                      <a:r>
+                        <a:rPr sz="1100" b="0">
+                          <a:solidFill>
+                            <a:srgbClr val="555F6B"/>
+                          </a:solidFill>
+                        </a:rPr>
+                        <a:t>~716</a:t>
+                      </a:r>
+                    </a:p>
+                  </a:txBody>
+                  <a:tcPr marL="45720" marR="45720" marT="18288" marB="18288">
+                    <a:solidFill>
+                      <a:srgbClr val="FFFFFF"/>
+                    </a:solidFill>
+                  </a:tcPr>
+                </a:tc>
+              </a:tr>
+              <a:tr h="384048">
+                <a:tc>
+                  <a:txBody>
+                    <a:bodyPr/>
+                    <a:lstStyle/>
+                    <a:p>
+                      <a:r>
+                        <a:rPr sz="1100" b="0">
+                          <a:solidFill>
+                            <a:srgbClr val="555F6B"/>
+                          </a:solidFill>
+                        </a:rPr>
+                        <a:t>Prompt caching (61% token vào đọc từ cache)</a:t>
+                      </a:r>
+                    </a:p>
+                  </a:txBody>
+                  <a:tcPr marL="45720" marR="45720" marT="18288" marB="18288">
+                    <a:solidFill>
+                      <a:srgbClr val="EEF3F8"/>
+                    </a:solidFill>
+                  </a:tcPr>
+                </a:tc>
+                <a:tc>
+                  <a:txBody>
+                    <a:bodyPr/>
+                    <a:lstStyle/>
+                    <a:p>
+                      <a:r>
+                        <a:rPr sz="1100" b="0">
+                          <a:solidFill>
+                            <a:srgbClr val="555F6B"/>
+                          </a:solidFill>
+                        </a:rPr>
+                        <a:t>670</a:t>
+                      </a:r>
+                    </a:p>
+                  </a:txBody>
+                  <a:tcPr marL="45720" marR="45720" marT="18288" marB="18288">
+                    <a:solidFill>
+                      <a:srgbClr val="EEF3F8"/>
+                    </a:solidFill>
+                  </a:tcPr>
+                </a:tc>
+              </a:tr>
+              <a:tr h="384048">
+                <a:tc>
+                  <a:txBody>
+                    <a:bodyPr/>
+                    <a:lstStyle/>
+                    <a:p>
+                      <a:r>
+                        <a:rPr sz="1100" b="0">
+                          <a:solidFill>
+                            <a:srgbClr val="555F6B"/>
+                          </a:solidFill>
+                        </a:rPr>
+                        <a:t>Ngoài giờ chỉ chạy 1 pod, thay vì 2 pod 24/7</a:t>
+                      </a:r>
+                    </a:p>
+                  </a:txBody>
+                  <a:tcPr marL="45720" marR="45720" marT="18288" marB="18288">
+                    <a:solidFill>
+                      <a:srgbClr val="FFFFFF"/>
+                    </a:solidFill>
+                  </a:tcPr>
+                </a:tc>
+                <a:tc>
+                  <a:txBody>
+                    <a:bodyPr/>
+                    <a:lstStyle/>
+                    <a:p>
+                      <a:r>
+                        <a:rPr sz="1100" b="0">
+                          <a:solidFill>
+                            <a:srgbClr val="555F6B"/>
+                          </a:solidFill>
+                        </a:rPr>
+                        <a:t>109</a:t>
+                      </a:r>
+                    </a:p>
+                  </a:txBody>
+                  <a:tcPr marL="45720" marR="45720" marT="18288" marB="18288">
+                    <a:solidFill>
+                      <a:srgbClr val="FFFFFF"/>
+                    </a:solidFill>
+                  </a:tcPr>
+                </a:tc>
+              </a:tr>
+              <a:tr h="384048">
+                <a:tc>
+                  <a:txBody>
+                    <a:bodyPr/>
+                    <a:lstStyle/>
+                    <a:p>
+                      <a:r>
+                        <a:rPr sz="1100" b="0">
+                          <a:solidFill>
+                            <a:srgbClr val="555F6B"/>
+                          </a:solidFill>
+                        </a:rPr>
+                        <a:t>pgvector trong DB, thay Vertex Vector Search</a:t>
+                      </a:r>
+                    </a:p>
+                  </a:txBody>
+                  <a:tcPr marL="45720" marR="45720" marT="18288" marB="18288">
+                    <a:solidFill>
+                      <a:srgbClr val="EEF3F8"/>
+                    </a:solidFill>
+                  </a:tcPr>
+                </a:tc>
+                <a:tc>
+                  <a:txBody>
+                    <a:bodyPr/>
+                    <a:lstStyle/>
+                    <a:p>
+                      <a:r>
+                        <a:rPr sz="1100" b="0">
+                          <a:solidFill>
+                            <a:srgbClr val="555F6B"/>
+                          </a:solidFill>
+                        </a:rPr>
+                        <a:t>~84</a:t>
+                      </a:r>
+                    </a:p>
+                  </a:txBody>
+                  <a:tcPr marL="45720" marR="45720" marT="18288" marB="18288">
+                    <a:solidFill>
+                      <a:srgbClr val="EEF3F8"/>
+                    </a:solidFill>
+                  </a:tcPr>
+                </a:tc>
+              </a:tr>
+              <a:tr h="384048">
+                <a:tc>
+                  <a:txBody>
+                    <a:bodyPr/>
+                    <a:lstStyle/>
+                    <a:p>
+                      <a:r>
+                        <a:rPr sz="1100" b="0">
+                          <a:solidFill>
+                            <a:srgbClr val="555F6B"/>
+                          </a:solidFill>
+                        </a:rPr>
+                        <a:t>Staging dùng chung cụm, thay vì cụm riêng</a:t>
+                      </a:r>
+                    </a:p>
+                  </a:txBody>
+                  <a:tcPr marL="45720" marR="45720" marT="18288" marB="18288">
+                    <a:solidFill>
+                      <a:srgbClr val="FFFFFF"/>
+                    </a:solidFill>
+                  </a:tcPr>
+                </a:tc>
+                <a:tc>
+                  <a:txBody>
+                    <a:bodyPr/>
+                    <a:lstStyle/>
+                    <a:p>
+                      <a:r>
+                        <a:rPr sz="1100" b="0">
+                          <a:solidFill>
+                            <a:srgbClr val="555F6B"/>
+                          </a:solidFill>
+                        </a:rPr>
+                        <a:t>73</a:t>
+                      </a:r>
+                    </a:p>
+                  </a:txBody>
+                  <a:tcPr marL="45720" marR="45720" marT="18288" marB="18288">
+                    <a:solidFill>
+                      <a:srgbClr val="FFFFFF"/>
+                    </a:solidFill>
+                  </a:tcPr>
+                </a:tc>
+              </a:tr>
+            </a:tbl>
+          </a:graphicData>
+        </a:graphic>
+      </p:graphicFrame>
+      <p:sp>
+        <p:nvSpPr>
+          <p:cNvPr id="10" name="TextBox 9"/>
           <p:cNvSpPr txBox="1"/>
           <p:nvPr/>
         </p:nvSpPr>
         <p:spPr>
           <a:xfrm>
-            <a:off x="457200" y="4297680"/>
-            <a:ext cx="5760720" cy="1828800"/>
+            <a:off x="5486400" y="4937760"/>
+            <a:ext cx="6309360" cy="1371600"/>
           </a:xfrm>
           <a:prstGeom prst="rect">
             <a:avLst/>
@@ -7650,12 +7490,12 @@
               </a:spcAft>
             </a:pPr>
             <a:r>
-              <a:rPr sz="1200" b="1">
+              <a:rPr sz="1100" b="0">
                 <a:solidFill>
                   <a:srgbClr val="555F6B"/>
                 </a:solidFill>
               </a:rPr>
-              <a:t>Khi DAU gấp đôi, USD/DAU giảm</a:t>
+              <a:t>Mỗi dòng so với một phương án thay thế riêng, nên không cộng dồn các dòng.</a:t>
             </a:r>
           </a:p>
           <a:p>
@@ -7665,155 +7505,12 @@
               </a:spcAft>
             </a:pPr>
             <a:r>
-              <a:rPr sz="1200" b="0">
+              <a:rPr sz="1100" b="0">
                 <a:solidFill>
                   <a:srgbClr val="555F6B"/>
                 </a:solidFill>
               </a:rPr>
-              <a:t>Tăng theo lượt dùng: LLM, guardrail, sandbox, lưu trữ, log</a:t>
-            </a:r>
-          </a:p>
-          <a:p>
-            <a:pPr algn="l">
-              <a:spcAft>
-                <a:spcPts val="400"/>
-              </a:spcAft>
-            </a:pPr>
-            <a:r>
-              <a:rPr sz="1200" b="0">
-                <a:solidFill>
-                  <a:srgbClr val="555F6B"/>
-                </a:solidFill>
-              </a:rPr>
-              <a:t>Gần như cố định: 2 kỹ sư, cụm GKE, database, cache, cân bằng tải</a:t>
-            </a:r>
-          </a:p>
-          <a:p>
-            <a:pPr algn="l">
-              <a:spcAft>
-                <a:spcPts val="400"/>
-              </a:spcAft>
-            </a:pPr>
-            <a:r>
-              <a:rPr sz="1200" b="0">
-                <a:solidFill>
-                  <a:srgbClr val="555F6B"/>
-                </a:solidFill>
-              </a:rPr>
-              <a:t>Chỉ xét tự host GPU khi tiền token vượt chi phí chạy ≥ 2 GPU 24/7 cộng vận hành</a:t>
-            </a:r>
-          </a:p>
-        </p:txBody>
-      </p:sp>
-      <p:sp>
-        <p:nvSpPr>
-          <p:cNvPr id="9" name="TextBox 8"/>
-          <p:cNvSpPr txBox="1"/>
-          <p:nvPr/>
-        </p:nvSpPr>
-        <p:spPr>
-          <a:xfrm>
-            <a:off x="6492240" y="1371600"/>
-            <a:ext cx="5303520" cy="4754880"/>
-          </a:xfrm>
-          <a:prstGeom prst="rect">
-            <a:avLst/>
-          </a:prstGeom>
-          <a:noFill/>
-        </p:spPr>
-        <p:txBody>
-          <a:bodyPr wrap="square">
-            <a:spAutoFit/>
-          </a:bodyPr>
-          <a:lstStyle/>
-          <a:p>
-            <a:pPr algn="l">
-              <a:spcAft>
-                <a:spcPts val="400"/>
-              </a:spcAft>
-            </a:pPr>
-            <a:r>
-              <a:rPr sz="1200" b="1">
-                <a:solidFill>
-                  <a:srgbClr val="555F6B"/>
-                </a:solidFill>
-              </a:rPr>
-              <a:t>Các rủi ro khác và cách xử lý</a:t>
-            </a:r>
-          </a:p>
-          <a:p>
-            <a:pPr algn="l">
-              <a:spcAft>
-                <a:spcPts val="400"/>
-              </a:spcAft>
-            </a:pPr>
-            <a:r>
-              <a:rPr sz="1200" b="0">
-                <a:solidFill>
-                  <a:srgbClr val="555F6B"/>
-                </a:solidFill>
-              </a:rPr>
-              <a:t>Token thực tế khác giả định: nhóm dùng 13 tỉ token/tháng, khoảng có thể là 4,6–42,8 tỉ → đo trong pilot 2–4 tuần</a:t>
-            </a:r>
-          </a:p>
-          <a:p>
-            <a:pPr algn="l">
-              <a:spcAft>
-                <a:spcPts val="400"/>
-              </a:spcAft>
-            </a:pPr>
-            <a:r>
-              <a:rPr sz="1200" b="0">
-                <a:solidFill>
-                  <a:srgbClr val="555F6B"/>
-                </a:solidFill>
-              </a:rPr>
-              <a:t>Luật bảo vệ dữ liệu cá nhân (Nghị định 13/2023): Vertex AI dùng endpoint global → dữ liệu nhạy cảm dùng model chạy tại Singapore</a:t>
-            </a:r>
-          </a:p>
-          <a:p>
-            <a:pPr algn="l">
-              <a:spcAft>
-                <a:spcPts val="400"/>
-              </a:spcAft>
-            </a:pPr>
-            <a:r>
-              <a:rPr sz="1200" b="0">
-                <a:solidFill>
-                  <a:srgbClr val="555F6B"/>
-                </a:solidFill>
-              </a:rPr>
-              <a:t>LiteLLM là open source, không có SLA → 2 kỹ sư trực, cố định phiên bản, test trên staging</a:t>
-            </a:r>
-          </a:p>
-          <a:p>
-            <a:pPr algn="l">
-              <a:spcAft>
-                <a:spcPts val="400"/>
-              </a:spcAft>
-            </a:pPr>
-            <a:r>
-              <a:rPr sz="1200" b="0">
-                <a:solidFill>
-                  <a:srgbClr val="555F6B"/>
-                </a:solidFill>
-              </a:rPr>
-              <a:t>Rate limit Jira/Confluence dùng chung cho cả app (65.000 điểm/giờ) → hàng đợi và thử lại</a:t>
-            </a:r>
-          </a:p>
-          <a:p>
-            <a:pPr algn="l">
-              <a:spcAft>
-                <a:spcPts val="400"/>
-              </a:spcAft>
-            </a:pPr>
-            <a:r>
-              <a:rPr sz="1200" b="0">
-                <a:solidFill>
-                  <a:srgbClr val="555F6B"/>
-                </a:solidFill>
-              </a:rPr>
-              <a:t>Google dự kiến tính phí API Workspace từ cuối 2026 (chưa công bố giá)</a:t>
+              <a:t>Không dùng free tier, credit hay giá khuyến mãi. Chưa tính phí ghi cache của Claude (ước tính vài %). Không mua gói support; không có dòng dự phòng.</a:t>
             </a:r>
           </a:p>
         </p:txBody>
@@ -7912,7 +7609,7 @@
                   <a:srgbClr val="FFFFFF"/>
                 </a:solidFill>
               </a:rPr>
-              <a:t>Phụ lục A. Báo giá theo component (USD/tháng)</a:t>
+              <a:t>12. Rủi ro lớn nhất: Haiku không đạt eval ở cấp 3–4</a:t>
             </a:r>
           </a:p>
         </p:txBody>
@@ -7950,7 +7647,7 @@
                   <a:srgbClr val="2E6FB7"/>
                 </a:solidFill>
               </a:rPr>
-              <a:t>Chi tiết từng dòng (đơn giá × số lượng, kèm bằng chứng) nằm trong G03_baogia.xlsx</a:t>
+              <a:t>Khi đó chi phí lên 11.526 USD/tháng. Nhóm đã tính sẵn; LiteLLM đổi model bằng 1 dòng cấu hình</a:t>
             </a:r>
           </a:p>
         </p:txBody>
@@ -7988,7 +7685,7 @@
                   <a:srgbClr val="555F6B"/>
                 </a:solidFill>
               </a:rPr>
-              <a:t>A</a:t>
+              <a:t>12</a:t>
             </a:r>
           </a:p>
         </p:txBody>
@@ -8041,7 +7738,7 @@
         </p:nvGraphicFramePr>
         <p:xfrm>
           <a:off x="457200" y="1371600"/>
-          <a:ext cx="5486400" cy="4224528"/>
+          <a:ext cx="5760720" cy="2688336"/>
         </p:xfrm>
         <a:graphic>
           <a:graphicData uri="http://schemas.openxmlformats.org/drawingml/2006/table">
@@ -8050,8 +7747,9 @@
                 <a:tableStyleId>{5C22544A-7EE6-4342-B048-85BDC9FD1C3A}</a:tableStyleId>
               </a:tblPr>
               <a:tblGrid>
-                <a:gridCol w="3200400"/>
-                <a:gridCol w="2286000"/>
+                <a:gridCol w="3017520"/>
+                <a:gridCol w="1371600"/>
+                <a:gridCol w="1371600"/>
               </a:tblGrid>
               <a:tr h="384048">
                 <a:tc>
@@ -8065,7 +7763,7 @@
                             <a:srgbClr val="FFFFFF"/>
                           </a:solidFill>
                         </a:rPr>
-                        <a:t>Component</a:t>
+                        <a:t>Kịch bản</a:t>
                       </a:r>
                     </a:p>
                   </a:txBody>
@@ -8087,6 +7785,27 @@
                           </a:solidFill>
                         </a:rPr>
                         <a:t>USD/tháng</a:t>
+                      </a:r>
+                    </a:p>
+                  </a:txBody>
+                  <a:tcPr marL="45720" marR="45720" marT="18288" marB="18288">
+                    <a:solidFill>
+                      <a:srgbClr val="2E6FB7"/>
+                    </a:solidFill>
+                  </a:tcPr>
+                </a:tc>
+                <a:tc>
+                  <a:txBody>
+                    <a:bodyPr/>
+                    <a:lstStyle/>
+                    <a:p>
+                      <a:r>
+                        <a:rPr sz="1200" b="1">
+                          <a:solidFill>
+                            <a:srgbClr val="FFFFFF"/>
+                          </a:solidFill>
+                        </a:rPr>
+                        <a:t>USD/DAU</a:t>
                       </a:r>
                     </a:p>
                   </a:txBody>
@@ -8109,7 +7828,7 @@
                             <a:srgbClr val="555F6B"/>
                           </a:solidFill>
                         </a:rPr>
-                        <a:t>compute</a:t>
+                        <a:t>Cơ sở (2.000 DAU)</a:t>
                       </a:r>
                     </a:p>
                   </a:txBody>
@@ -8130,7 +7849,28 @@
                             <a:srgbClr val="555F6B"/>
                           </a:solidFill>
                         </a:rPr>
-                        <a:t>284,15</a:t>
+                        <a:t>6.821</a:t>
+                      </a:r>
+                    </a:p>
+                  </a:txBody>
+                  <a:tcPr marL="45720" marR="45720" marT="18288" marB="18288">
+                    <a:solidFill>
+                      <a:srgbClr val="EEF3F8"/>
+                    </a:solidFill>
+                  </a:tcPr>
+                </a:tc>
+                <a:tc>
+                  <a:txBody>
+                    <a:bodyPr/>
+                    <a:lstStyle/>
+                    <a:p>
+                      <a:r>
+                        <a:rPr sz="1200" b="0">
+                          <a:solidFill>
+                            <a:srgbClr val="555F6B"/>
+                          </a:solidFill>
+                        </a:rPr>
+                        <a:t>3,41</a:t>
                       </a:r>
                     </a:p>
                   </a:txBody>
@@ -8153,7 +7893,7 @@
                             <a:srgbClr val="555F6B"/>
                           </a:solidFill>
                         </a:rPr>
-                        <a:t>llm</a:t>
+                        <a:t>DAU gấp đôi = 4.000</a:t>
                       </a:r>
                     </a:p>
                   </a:txBody>
@@ -8174,7 +7914,28 @@
                             <a:srgbClr val="555F6B"/>
                           </a:solidFill>
                         </a:rPr>
-                        <a:t>1.093,34</a:t>
+                        <a:t>8.826</a:t>
+                      </a:r>
+                    </a:p>
+                  </a:txBody>
+                  <a:tcPr marL="45720" marR="45720" marT="18288" marB="18288">
+                    <a:solidFill>
+                      <a:srgbClr val="FFFFFF"/>
+                    </a:solidFill>
+                  </a:tcPr>
+                </a:tc>
+                <a:tc>
+                  <a:txBody>
+                    <a:bodyPr/>
+                    <a:lstStyle/>
+                    <a:p>
+                      <a:r>
+                        <a:rPr sz="1200" b="0">
+                          <a:solidFill>
+                            <a:srgbClr val="555F6B"/>
+                          </a:solidFill>
+                        </a:rPr>
+                        <a:t>2,21</a:t>
                       </a:r>
                     </a:p>
                   </a:txBody>
@@ -8197,7 +7958,7 @@
                             <a:srgbClr val="555F6B"/>
                           </a:solidFill>
                         </a:rPr>
-                        <a:t>embedding</a:t>
+                        <a:t>Giá token +30%</a:t>
                       </a:r>
                     </a:p>
                   </a:txBody>
@@ -8218,7 +7979,28 @@
                             <a:srgbClr val="555F6B"/>
                           </a:solidFill>
                         </a:rPr>
-                        <a:t>19,50</a:t>
+                        <a:t>7.263</a:t>
+                      </a:r>
+                    </a:p>
+                  </a:txBody>
+                  <a:tcPr marL="45720" marR="45720" marT="18288" marB="18288">
+                    <a:solidFill>
+                      <a:srgbClr val="EEF3F8"/>
+                    </a:solidFill>
+                  </a:tcPr>
+                </a:tc>
+                <a:tc>
+                  <a:txBody>
+                    <a:bodyPr/>
+                    <a:lstStyle/>
+                    <a:p>
+                      <a:r>
+                        <a:rPr sz="1200" b="0">
+                          <a:solidFill>
+                            <a:srgbClr val="555F6B"/>
+                          </a:solidFill>
+                        </a:rPr>
+                        <a:t>3,63</a:t>
                       </a:r>
                     </a:p>
                   </a:txBody>
@@ -8241,7 +8023,7 @@
                             <a:srgbClr val="555F6B"/>
                           </a:solidFill>
                         </a:rPr>
-                        <a:t>gateway</a:t>
+                        <a:t>Giá token −50%</a:t>
                       </a:r>
                     </a:p>
                   </a:txBody>
@@ -8262,7 +8044,28 @@
                             <a:srgbClr val="555F6B"/>
                           </a:solidFill>
                         </a:rPr>
-                        <a:t>0,00</a:t>
+                        <a:t>6.085</a:t>
+                      </a:r>
+                    </a:p>
+                  </a:txBody>
+                  <a:tcPr marL="45720" marR="45720" marT="18288" marB="18288">
+                    <a:solidFill>
+                      <a:srgbClr val="FFFFFF"/>
+                    </a:solidFill>
+                  </a:tcPr>
+                </a:tc>
+                <a:tc>
+                  <a:txBody>
+                    <a:bodyPr/>
+                    <a:lstStyle/>
+                    <a:p>
+                      <a:r>
+                        <a:rPr sz="1200" b="0">
+                          <a:solidFill>
+                            <a:srgbClr val="555F6B"/>
+                          </a:solidFill>
+                        </a:rPr>
+                        <a:t>3,04</a:t>
                       </a:r>
                     </a:p>
                   </a:txBody>
@@ -8285,7 +8088,7 @@
                             <a:srgbClr val="555F6B"/>
                           </a:solidFill>
                         </a:rPr>
-                        <a:t>load_balancer</a:t>
+                        <a:t>Cấp 3–4 phải nâng lên Sonnet 5.5</a:t>
                       </a:r>
                     </a:p>
                   </a:txBody>
@@ -8306,7 +8109,28 @@
                             <a:srgbClr val="555F6B"/>
                           </a:solidFill>
                         </a:rPr>
-                        <a:t>29,44</a:t>
+                        <a:t>11.526</a:t>
+                      </a:r>
+                    </a:p>
+                  </a:txBody>
+                  <a:tcPr marL="45720" marR="45720" marT="18288" marB="18288">
+                    <a:solidFill>
+                      <a:srgbClr val="EEF3F8"/>
+                    </a:solidFill>
+                  </a:tcPr>
+                </a:tc>
+                <a:tc>
+                  <a:txBody>
+                    <a:bodyPr/>
+                    <a:lstStyle/>
+                    <a:p>
+                      <a:r>
+                        <a:rPr sz="1200" b="0">
+                          <a:solidFill>
+                            <a:srgbClr val="555F6B"/>
+                          </a:solidFill>
+                        </a:rPr>
+                        <a:t>5,76</a:t>
                       </a:r>
                     </a:p>
                   </a:txBody>
@@ -8329,7 +8153,7 @@
                             <a:srgbClr val="555F6B"/>
                           </a:solidFill>
                         </a:rPr>
-                        <a:t>authn</a:t>
+                        <a:t>Workspace đầy 20 TB</a:t>
                       </a:r>
                     </a:p>
                   </a:txBody>
@@ -8350,7 +8174,7 @@
                             <a:srgbClr val="555F6B"/>
                           </a:solidFill>
                         </a:rPr>
-                        <a:t>0,00</a:t>
+                        <a:t>+ ~704</a:t>
                       </a:r>
                     </a:p>
                   </a:txBody>
@@ -8360,8 +8184,6 @@
                     </a:solidFill>
                   </a:tcPr>
                 </a:tc>
-              </a:tr>
-              <a:tr h="384048">
                 <a:tc>
                   <a:txBody>
                     <a:bodyPr/>
@@ -8373,160 +8195,7 @@
                             <a:srgbClr val="555F6B"/>
                           </a:solidFill>
                         </a:rPr>
-                        <a:t>authz</a:t>
-                      </a:r>
-                    </a:p>
-                  </a:txBody>
-                  <a:tcPr marL="45720" marR="45720" marT="18288" marB="18288">
-                    <a:solidFill>
-                      <a:srgbClr val="EEF3F8"/>
-                    </a:solidFill>
-                  </a:tcPr>
-                </a:tc>
-                <a:tc>
-                  <a:txBody>
-                    <a:bodyPr/>
-                    <a:lstStyle/>
-                    <a:p>
-                      <a:r>
-                        <a:rPr sz="1200" b="0">
-                          <a:solidFill>
-                            <a:srgbClr val="555F6B"/>
-                          </a:solidFill>
-                        </a:rPr>
-                        <a:t>0,00</a:t>
-                      </a:r>
-                    </a:p>
-                  </a:txBody>
-                  <a:tcPr marL="45720" marR="45720" marT="18288" marB="18288">
-                    <a:solidFill>
-                      <a:srgbClr val="EEF3F8"/>
-                    </a:solidFill>
-                  </a:tcPr>
-                </a:tc>
-              </a:tr>
-              <a:tr h="384048">
-                <a:tc>
-                  <a:txBody>
-                    <a:bodyPr/>
-                    <a:lstStyle/>
-                    <a:p>
-                      <a:r>
-                        <a:rPr sz="1200" b="0">
-                          <a:solidFill>
-                            <a:srgbClr val="555F6B"/>
-                          </a:solidFill>
-                        </a:rPr>
-                        <a:t>database</a:t>
-                      </a:r>
-                    </a:p>
-                  </a:txBody>
-                  <a:tcPr marL="45720" marR="45720" marT="18288" marB="18288">
-                    <a:solidFill>
-                      <a:srgbClr val="FFFFFF"/>
-                    </a:solidFill>
-                  </a:tcPr>
-                </a:tc>
-                <a:tc>
-                  <a:txBody>
-                    <a:bodyPr/>
-                    <a:lstStyle/>
-                    <a:p>
-                      <a:r>
-                        <a:rPr sz="1200" b="0">
-                          <a:solidFill>
-                            <a:srgbClr val="555F6B"/>
-                          </a:solidFill>
-                        </a:rPr>
-                        <a:t>466,71</a:t>
-                      </a:r>
-                    </a:p>
-                  </a:txBody>
-                  <a:tcPr marL="45720" marR="45720" marT="18288" marB="18288">
-                    <a:solidFill>
-                      <a:srgbClr val="FFFFFF"/>
-                    </a:solidFill>
-                  </a:tcPr>
-                </a:tc>
-              </a:tr>
-              <a:tr h="384048">
-                <a:tc>
-                  <a:txBody>
-                    <a:bodyPr/>
-                    <a:lstStyle/>
-                    <a:p>
-                      <a:r>
-                        <a:rPr sz="1200" b="0">
-                          <a:solidFill>
-                            <a:srgbClr val="555F6B"/>
-                          </a:solidFill>
-                        </a:rPr>
-                        <a:t>vector_db</a:t>
-                      </a:r>
-                    </a:p>
-                  </a:txBody>
-                  <a:tcPr marL="45720" marR="45720" marT="18288" marB="18288">
-                    <a:solidFill>
-                      <a:srgbClr val="EEF3F8"/>
-                    </a:solidFill>
-                  </a:tcPr>
-                </a:tc>
-                <a:tc>
-                  <a:txBody>
-                    <a:bodyPr/>
-                    <a:lstStyle/>
-                    <a:p>
-                      <a:r>
-                        <a:rPr sz="1200" b="0">
-                          <a:solidFill>
-                            <a:srgbClr val="555F6B"/>
-                          </a:solidFill>
-                        </a:rPr>
-                        <a:t>0,00</a:t>
-                      </a:r>
-                    </a:p>
-                  </a:txBody>
-                  <a:tcPr marL="45720" marR="45720" marT="18288" marB="18288">
-                    <a:solidFill>
-                      <a:srgbClr val="EEF3F8"/>
-                    </a:solidFill>
-                  </a:tcPr>
-                </a:tc>
-              </a:tr>
-              <a:tr h="384048">
-                <a:tc>
-                  <a:txBody>
-                    <a:bodyPr/>
-                    <a:lstStyle/>
-                    <a:p>
-                      <a:r>
-                        <a:rPr sz="1200" b="0">
-                          <a:solidFill>
-                            <a:srgbClr val="555F6B"/>
-                          </a:solidFill>
-                        </a:rPr>
-                        <a:t>object_storage</a:t>
-                      </a:r>
-                    </a:p>
-                  </a:txBody>
-                  <a:tcPr marL="45720" marR="45720" marT="18288" marB="18288">
-                    <a:solidFill>
-                      <a:srgbClr val="FFFFFF"/>
-                    </a:solidFill>
-                  </a:tcPr>
-                </a:tc>
-                <a:tc>
-                  <a:txBody>
-                    <a:bodyPr/>
-                    <a:lstStyle/>
-                    <a:p>
-                      <a:r>
-                        <a:rPr sz="1200" b="0">
-                          <a:solidFill>
-                            <a:srgbClr val="555F6B"/>
-                          </a:solidFill>
-                        </a:rPr>
-                        <a:t>82,80</a:t>
+                        <a:t>—</a:t>
                       </a:r>
                     </a:p>
                   </a:txBody>
@@ -8541,560 +8210,202 @@
           </a:graphicData>
         </a:graphic>
       </p:graphicFrame>
-      <p:graphicFrame>
-        <p:nvGraphicFramePr>
-          <p:cNvPr id="8" name="Table 7"/>
-          <p:cNvGraphicFramePr>
-            <a:graphicFrameLocks noGrp="1"/>
-          </p:cNvGraphicFramePr>
+      <p:sp>
+        <p:nvSpPr>
+          <p:cNvPr id="8" name="TextBox 7"/>
+          <p:cNvSpPr txBox="1"/>
           <p:nvPr/>
-        </p:nvGraphicFramePr>
-        <p:xfrm>
-          <a:off x="6309360" y="1371600"/>
-          <a:ext cx="5486400" cy="4608576"/>
-        </p:xfrm>
-        <a:graphic>
-          <a:graphicData uri="http://schemas.openxmlformats.org/drawingml/2006/table">
-            <a:tbl>
-              <a:tblPr firstRow="1" bandRow="1">
-                <a:tableStyleId>{5C22544A-7EE6-4342-B048-85BDC9FD1C3A}</a:tableStyleId>
-              </a:tblPr>
-              <a:tblGrid>
-                <a:gridCol w="3200400"/>
-                <a:gridCol w="2286000"/>
-              </a:tblGrid>
-              <a:tr h="384048">
-                <a:tc>
-                  <a:txBody>
-                    <a:bodyPr/>
-                    <a:lstStyle/>
-                    <a:p>
-                      <a:r>
-                        <a:rPr sz="1200" b="1">
-                          <a:solidFill>
-                            <a:srgbClr val="FFFFFF"/>
-                          </a:solidFill>
-                        </a:rPr>
-                        <a:t>Component</a:t>
-                      </a:r>
-                    </a:p>
-                  </a:txBody>
-                  <a:tcPr marL="45720" marR="45720" marT="18288" marB="18288">
-                    <a:solidFill>
-                      <a:srgbClr val="2E6FB7"/>
-                    </a:solidFill>
-                  </a:tcPr>
-                </a:tc>
-                <a:tc>
-                  <a:txBody>
-                    <a:bodyPr/>
-                    <a:lstStyle/>
-                    <a:p>
-                      <a:r>
-                        <a:rPr sz="1200" b="1">
-                          <a:solidFill>
-                            <a:srgbClr val="FFFFFF"/>
-                          </a:solidFill>
-                        </a:rPr>
-                        <a:t>USD/tháng</a:t>
-                      </a:r>
-                    </a:p>
-                  </a:txBody>
-                  <a:tcPr marL="45720" marR="45720" marT="18288" marB="18288">
-                    <a:solidFill>
-                      <a:srgbClr val="2E6FB7"/>
-                    </a:solidFill>
-                  </a:tcPr>
-                </a:tc>
-              </a:tr>
-              <a:tr h="384048">
-                <a:tc>
-                  <a:txBody>
-                    <a:bodyPr/>
-                    <a:lstStyle/>
-                    <a:p>
-                      <a:r>
-                        <a:rPr sz="1200" b="0">
-                          <a:solidFill>
-                            <a:srgbClr val="555F6B"/>
-                          </a:solidFill>
-                        </a:rPr>
-                        <a:t>cache_queue</a:t>
-                      </a:r>
-                    </a:p>
-                  </a:txBody>
-                  <a:tcPr marL="45720" marR="45720" marT="18288" marB="18288">
-                    <a:solidFill>
-                      <a:srgbClr val="EEF3F8"/>
-                    </a:solidFill>
-                  </a:tcPr>
-                </a:tc>
-                <a:tc>
-                  <a:txBody>
-                    <a:bodyPr/>
-                    <a:lstStyle/>
-                    <a:p>
-                      <a:r>
-                        <a:rPr sz="1200" b="0">
-                          <a:solidFill>
-                            <a:srgbClr val="555F6B"/>
-                          </a:solidFill>
-                        </a:rPr>
-                        <a:t>55,75</a:t>
-                      </a:r>
-                    </a:p>
-                  </a:txBody>
-                  <a:tcPr marL="45720" marR="45720" marT="18288" marB="18288">
-                    <a:solidFill>
-                      <a:srgbClr val="EEF3F8"/>
-                    </a:solidFill>
-                  </a:tcPr>
-                </a:tc>
-              </a:tr>
-              <a:tr h="384048">
-                <a:tc>
-                  <a:txBody>
-                    <a:bodyPr/>
-                    <a:lstStyle/>
-                    <a:p>
-                      <a:r>
-                        <a:rPr sz="1200" b="0">
-                          <a:solidFill>
-                            <a:srgbClr val="555F6B"/>
-                          </a:solidFill>
-                        </a:rPr>
-                        <a:t>sandbox</a:t>
-                      </a:r>
-                    </a:p>
-                  </a:txBody>
-                  <a:tcPr marL="45720" marR="45720" marT="18288" marB="18288">
-                    <a:solidFill>
-                      <a:srgbClr val="FFFFFF"/>
-                    </a:solidFill>
-                  </a:tcPr>
-                </a:tc>
-                <a:tc>
-                  <a:txBody>
-                    <a:bodyPr/>
-                    <a:lstStyle/>
-                    <a:p>
-                      <a:r>
-                        <a:rPr sz="1200" b="0">
-                          <a:solidFill>
-                            <a:srgbClr val="555F6B"/>
-                          </a:solidFill>
-                        </a:rPr>
-                        <a:t>314,64</a:t>
-                      </a:r>
-                    </a:p>
-                  </a:txBody>
-                  <a:tcPr marL="45720" marR="45720" marT="18288" marB="18288">
-                    <a:solidFill>
-                      <a:srgbClr val="FFFFFF"/>
-                    </a:solidFill>
-                  </a:tcPr>
-                </a:tc>
-              </a:tr>
-              <a:tr h="384048">
-                <a:tc>
-                  <a:txBody>
-                    <a:bodyPr/>
-                    <a:lstStyle/>
-                    <a:p>
-                      <a:r>
-                        <a:rPr sz="1200" b="0">
-                          <a:solidFill>
-                            <a:srgbClr val="555F6B"/>
-                          </a:solidFill>
-                        </a:rPr>
-                        <a:t>connectors</a:t>
-                      </a:r>
-                    </a:p>
-                  </a:txBody>
-                  <a:tcPr marL="45720" marR="45720" marT="18288" marB="18288">
-                    <a:solidFill>
-                      <a:srgbClr val="EEF3F8"/>
-                    </a:solidFill>
-                  </a:tcPr>
-                </a:tc>
-                <a:tc>
-                  <a:txBody>
-                    <a:bodyPr/>
-                    <a:lstStyle/>
-                    <a:p>
-                      <a:r>
-                        <a:rPr sz="1200" b="0">
-                          <a:solidFill>
-                            <a:srgbClr val="555F6B"/>
-                          </a:solidFill>
-                        </a:rPr>
-                        <a:t>0,00</a:t>
-                      </a:r>
-                    </a:p>
-                  </a:txBody>
-                  <a:tcPr marL="45720" marR="45720" marT="18288" marB="18288">
-                    <a:solidFill>
-                      <a:srgbClr val="EEF3F8"/>
-                    </a:solidFill>
-                  </a:tcPr>
-                </a:tc>
-              </a:tr>
-              <a:tr h="384048">
-                <a:tc>
-                  <a:txBody>
-                    <a:bodyPr/>
-                    <a:lstStyle/>
-                    <a:p>
-                      <a:r>
-                        <a:rPr sz="1200" b="0">
-                          <a:solidFill>
-                            <a:srgbClr val="555F6B"/>
-                          </a:solidFill>
-                        </a:rPr>
-                        <a:t>secrets_kms</a:t>
-                      </a:r>
-                    </a:p>
-                  </a:txBody>
-                  <a:tcPr marL="45720" marR="45720" marT="18288" marB="18288">
-                    <a:solidFill>
-                      <a:srgbClr val="FFFFFF"/>
-                    </a:solidFill>
-                  </a:tcPr>
-                </a:tc>
-                <a:tc>
-                  <a:txBody>
-                    <a:bodyPr/>
-                    <a:lstStyle/>
-                    <a:p>
-                      <a:r>
-                        <a:rPr sz="1200" b="0">
-                          <a:solidFill>
-                            <a:srgbClr val="555F6B"/>
-                          </a:solidFill>
-                        </a:rPr>
-                        <a:t>3,96</a:t>
-                      </a:r>
-                    </a:p>
-                  </a:txBody>
-                  <a:tcPr marL="45720" marR="45720" marT="18288" marB="18288">
-                    <a:solidFill>
-                      <a:srgbClr val="FFFFFF"/>
-                    </a:solidFill>
-                  </a:tcPr>
-                </a:tc>
-              </a:tr>
-              <a:tr h="384048">
-                <a:tc>
-                  <a:txBody>
-                    <a:bodyPr/>
-                    <a:lstStyle/>
-                    <a:p>
-                      <a:r>
-                        <a:rPr sz="1200" b="0">
-                          <a:solidFill>
-                            <a:srgbClr val="555F6B"/>
-                          </a:solidFill>
-                        </a:rPr>
-                        <a:t>backup_dr</a:t>
-                      </a:r>
-                    </a:p>
-                  </a:txBody>
-                  <a:tcPr marL="45720" marR="45720" marT="18288" marB="18288">
-                    <a:solidFill>
-                      <a:srgbClr val="EEF3F8"/>
-                    </a:solidFill>
-                  </a:tcPr>
-                </a:tc>
-                <a:tc>
-                  <a:txBody>
-                    <a:bodyPr/>
-                    <a:lstStyle/>
-                    <a:p>
-                      <a:r>
-                        <a:rPr sz="1200" b="0">
-                          <a:solidFill>
-                            <a:srgbClr val="555F6B"/>
-                          </a:solidFill>
-                        </a:rPr>
-                        <a:t>164,40</a:t>
-                      </a:r>
-                    </a:p>
-                  </a:txBody>
-                  <a:tcPr marL="45720" marR="45720" marT="18288" marB="18288">
-                    <a:solidFill>
-                      <a:srgbClr val="EEF3F8"/>
-                    </a:solidFill>
-                  </a:tcPr>
-                </a:tc>
-              </a:tr>
-              <a:tr h="384048">
-                <a:tc>
-                  <a:txBody>
-                    <a:bodyPr/>
-                    <a:lstStyle/>
-                    <a:p>
-                      <a:r>
-                        <a:rPr sz="1200" b="0">
-                          <a:solidFill>
-                            <a:srgbClr val="555F6B"/>
-                          </a:solidFill>
-                        </a:rPr>
-                        <a:t>monitoring</a:t>
-                      </a:r>
-                    </a:p>
-                  </a:txBody>
-                  <a:tcPr marL="45720" marR="45720" marT="18288" marB="18288">
-                    <a:solidFill>
-                      <a:srgbClr val="FFFFFF"/>
-                    </a:solidFill>
-                  </a:tcPr>
-                </a:tc>
-                <a:tc>
-                  <a:txBody>
-                    <a:bodyPr/>
-                    <a:lstStyle/>
-                    <a:p>
-                      <a:r>
-                        <a:rPr sz="1200" b="0">
-                          <a:solidFill>
-                            <a:srgbClr val="555F6B"/>
-                          </a:solidFill>
-                        </a:rPr>
-                        <a:t>22,51</a:t>
-                      </a:r>
-                    </a:p>
-                  </a:txBody>
-                  <a:tcPr marL="45720" marR="45720" marT="18288" marB="18288">
-                    <a:solidFill>
-                      <a:srgbClr val="FFFFFF"/>
-                    </a:solidFill>
-                  </a:tcPr>
-                </a:tc>
-              </a:tr>
-              <a:tr h="384048">
-                <a:tc>
-                  <a:txBody>
-                    <a:bodyPr/>
-                    <a:lstStyle/>
-                    <a:p>
-                      <a:r>
-                        <a:rPr sz="1200" b="0">
-                          <a:solidFill>
-                            <a:srgbClr val="555F6B"/>
-                          </a:solidFill>
-                        </a:rPr>
-                        <a:t>governance</a:t>
-                      </a:r>
-                    </a:p>
-                  </a:txBody>
-                  <a:tcPr marL="45720" marR="45720" marT="18288" marB="18288">
-                    <a:solidFill>
-                      <a:srgbClr val="EEF3F8"/>
-                    </a:solidFill>
-                  </a:tcPr>
-                </a:tc>
-                <a:tc>
-                  <a:txBody>
-                    <a:bodyPr/>
-                    <a:lstStyle/>
-                    <a:p>
-                      <a:r>
-                        <a:rPr sz="1200" b="0">
-                          <a:solidFill>
-                            <a:srgbClr val="555F6B"/>
-                          </a:solidFill>
-                        </a:rPr>
-                        <a:t>805,98</a:t>
-                      </a:r>
-                    </a:p>
-                  </a:txBody>
-                  <a:tcPr marL="45720" marR="45720" marT="18288" marB="18288">
-                    <a:solidFill>
-                      <a:srgbClr val="EEF3F8"/>
-                    </a:solidFill>
-                  </a:tcPr>
-                </a:tc>
-              </a:tr>
-              <a:tr h="384048">
-                <a:tc>
-                  <a:txBody>
-                    <a:bodyPr/>
-                    <a:lstStyle/>
-                    <a:p>
-                      <a:r>
-                        <a:rPr sz="1200" b="0">
-                          <a:solidFill>
-                            <a:srgbClr val="555F6B"/>
-                          </a:solidFill>
-                        </a:rPr>
-                        <a:t>network</a:t>
-                      </a:r>
-                    </a:p>
-                  </a:txBody>
-                  <a:tcPr marL="45720" marR="45720" marT="18288" marB="18288">
-                    <a:solidFill>
-                      <a:srgbClr val="FFFFFF"/>
-                    </a:solidFill>
-                  </a:tcPr>
-                </a:tc>
-                <a:tc>
-                  <a:txBody>
-                    <a:bodyPr/>
-                    <a:lstStyle/>
-                    <a:p>
-                      <a:r>
-                        <a:rPr sz="1200" b="0">
-                          <a:solidFill>
-                            <a:srgbClr val="555F6B"/>
-                          </a:solidFill>
-                        </a:rPr>
-                        <a:t>64,26</a:t>
-                      </a:r>
-                    </a:p>
-                  </a:txBody>
-                  <a:tcPr marL="45720" marR="45720" marT="18288" marB="18288">
-                    <a:solidFill>
-                      <a:srgbClr val="FFFFFF"/>
-                    </a:solidFill>
-                  </a:tcPr>
-                </a:tc>
-              </a:tr>
-              <a:tr h="384048">
-                <a:tc>
-                  <a:txBody>
-                    <a:bodyPr/>
-                    <a:lstStyle/>
-                    <a:p>
-                      <a:r>
-                        <a:rPr sz="1200" b="0">
-                          <a:solidFill>
-                            <a:srgbClr val="555F6B"/>
-                          </a:solidFill>
-                        </a:rPr>
-                        <a:t>cicd</a:t>
-                      </a:r>
-                    </a:p>
-                  </a:txBody>
-                  <a:tcPr marL="45720" marR="45720" marT="18288" marB="18288">
-                    <a:solidFill>
-                      <a:srgbClr val="EEF3F8"/>
-                    </a:solidFill>
-                  </a:tcPr>
-                </a:tc>
-                <a:tc>
-                  <a:txBody>
-                    <a:bodyPr/>
-                    <a:lstStyle/>
-                    <a:p>
-                      <a:r>
-                        <a:rPr sz="1200" b="0">
-                          <a:solidFill>
-                            <a:srgbClr val="555F6B"/>
-                          </a:solidFill>
-                        </a:rPr>
-                        <a:t>14,00</a:t>
-                      </a:r>
-                    </a:p>
-                  </a:txBody>
-                  <a:tcPr marL="45720" marR="45720" marT="18288" marB="18288">
-                    <a:solidFill>
-                      <a:srgbClr val="EEF3F8"/>
-                    </a:solidFill>
-                  </a:tcPr>
-                </a:tc>
-              </a:tr>
-              <a:tr h="384048">
-                <a:tc>
-                  <a:txBody>
-                    <a:bodyPr/>
-                    <a:lstStyle/>
-                    <a:p>
-                      <a:r>
-                        <a:rPr sz="1200" b="0">
-                          <a:solidFill>
-                            <a:srgbClr val="555F6B"/>
-                          </a:solidFill>
-                        </a:rPr>
-                        <a:t>ops_labor</a:t>
-                      </a:r>
-                    </a:p>
-                  </a:txBody>
-                  <a:tcPr marL="45720" marR="45720" marT="18288" marB="18288">
-                    <a:solidFill>
-                      <a:srgbClr val="FFFFFF"/>
-                    </a:solidFill>
-                  </a:tcPr>
-                </a:tc>
-                <a:tc>
-                  <a:txBody>
-                    <a:bodyPr/>
-                    <a:lstStyle/>
-                    <a:p>
-                      <a:r>
-                        <a:rPr sz="1200" b="0">
-                          <a:solidFill>
-                            <a:srgbClr val="555F6B"/>
-                          </a:solidFill>
-                        </a:rPr>
-                        <a:t>3.400,00</a:t>
-                      </a:r>
-                    </a:p>
-                  </a:txBody>
-                  <a:tcPr marL="45720" marR="45720" marT="18288" marB="18288">
-                    <a:solidFill>
-                      <a:srgbClr val="FFFFFF"/>
-                    </a:solidFill>
-                  </a:tcPr>
-                </a:tc>
-              </a:tr>
-              <a:tr h="384048">
-                <a:tc>
-                  <a:txBody>
-                    <a:bodyPr/>
-                    <a:lstStyle/>
-                    <a:p>
-                      <a:r>
-                        <a:rPr sz="1200" b="0">
-                          <a:solidFill>
-                            <a:srgbClr val="555F6B"/>
-                          </a:solidFill>
-                        </a:rPr>
-                        <a:t>TOTAL</a:t>
-                      </a:r>
-                    </a:p>
-                  </a:txBody>
-                  <a:tcPr marL="45720" marR="45720" marT="18288" marB="18288">
-                    <a:solidFill>
-                      <a:srgbClr val="EEF3F8"/>
-                    </a:solidFill>
-                  </a:tcPr>
-                </a:tc>
-                <a:tc>
-                  <a:txBody>
-                    <a:bodyPr/>
-                    <a:lstStyle/>
-                    <a:p>
-                      <a:r>
-                        <a:rPr sz="1200" b="0">
-                          <a:solidFill>
-                            <a:srgbClr val="555F6B"/>
-                          </a:solidFill>
-                        </a:rPr>
-                        <a:t>6.821,44</a:t>
-                      </a:r>
-                    </a:p>
-                  </a:txBody>
-                  <a:tcPr marL="45720" marR="45720" marT="18288" marB="18288">
-                    <a:solidFill>
-                      <a:srgbClr val="EEF3F8"/>
-                    </a:solidFill>
-                  </a:tcPr>
-                </a:tc>
-              </a:tr>
-            </a:tbl>
-          </a:graphicData>
-        </a:graphic>
-      </p:graphicFrame>
+        </p:nvSpPr>
+        <p:spPr>
+          <a:xfrm>
+            <a:off x="457200" y="4297680"/>
+            <a:ext cx="5760720" cy="1828800"/>
+          </a:xfrm>
+          <a:prstGeom prst="rect">
+            <a:avLst/>
+          </a:prstGeom>
+          <a:noFill/>
+        </p:spPr>
+        <p:txBody>
+          <a:bodyPr wrap="square">
+            <a:spAutoFit/>
+          </a:bodyPr>
+          <a:lstStyle/>
+          <a:p>
+            <a:pPr algn="l">
+              <a:spcAft>
+                <a:spcPts val="400"/>
+              </a:spcAft>
+            </a:pPr>
+            <a:r>
+              <a:rPr sz="1200" b="1">
+                <a:solidFill>
+                  <a:srgbClr val="555F6B"/>
+                </a:solidFill>
+              </a:rPr>
+              <a:t>Khi DAU gấp đôi, USD/DAU giảm</a:t>
+            </a:r>
+          </a:p>
+          <a:p>
+            <a:pPr algn="l">
+              <a:spcAft>
+                <a:spcPts val="400"/>
+              </a:spcAft>
+            </a:pPr>
+            <a:r>
+              <a:rPr sz="1200" b="0">
+                <a:solidFill>
+                  <a:srgbClr val="555F6B"/>
+                </a:solidFill>
+              </a:rPr>
+              <a:t>Tăng theo lượt dùng: LLM, guardrail, sandbox, lưu trữ, log</a:t>
+            </a:r>
+          </a:p>
+          <a:p>
+            <a:pPr algn="l">
+              <a:spcAft>
+                <a:spcPts val="400"/>
+              </a:spcAft>
+            </a:pPr>
+            <a:r>
+              <a:rPr sz="1200" b="0">
+                <a:solidFill>
+                  <a:srgbClr val="555F6B"/>
+                </a:solidFill>
+              </a:rPr>
+              <a:t>Gần như cố định: 2 kỹ sư, cụm GKE, database, cache, cân bằng tải</a:t>
+            </a:r>
+          </a:p>
+          <a:p>
+            <a:pPr algn="l">
+              <a:spcAft>
+                <a:spcPts val="400"/>
+              </a:spcAft>
+            </a:pPr>
+            <a:r>
+              <a:rPr sz="1200" b="0">
+                <a:solidFill>
+                  <a:srgbClr val="555F6B"/>
+                </a:solidFill>
+              </a:rPr>
+              <a:t>Chỉ xét tự host GPU khi tiền token vượt chi phí chạy ≥ 2 GPU 24/7 cộng vận hành</a:t>
+            </a:r>
+          </a:p>
+        </p:txBody>
+      </p:sp>
+      <p:sp>
+        <p:nvSpPr>
+          <p:cNvPr id="9" name="TextBox 8"/>
+          <p:cNvSpPr txBox="1"/>
+          <p:nvPr/>
+        </p:nvSpPr>
+        <p:spPr>
+          <a:xfrm>
+            <a:off x="6492240" y="1371600"/>
+            <a:ext cx="5303520" cy="4754880"/>
+          </a:xfrm>
+          <a:prstGeom prst="rect">
+            <a:avLst/>
+          </a:prstGeom>
+          <a:noFill/>
+        </p:spPr>
+        <p:txBody>
+          <a:bodyPr wrap="square">
+            <a:spAutoFit/>
+          </a:bodyPr>
+          <a:lstStyle/>
+          <a:p>
+            <a:pPr algn="l">
+              <a:spcAft>
+                <a:spcPts val="400"/>
+              </a:spcAft>
+            </a:pPr>
+            <a:r>
+              <a:rPr sz="1200" b="1">
+                <a:solidFill>
+                  <a:srgbClr val="555F6B"/>
+                </a:solidFill>
+              </a:rPr>
+              <a:t>Các rủi ro khác và cách xử lý</a:t>
+            </a:r>
+          </a:p>
+          <a:p>
+            <a:pPr algn="l">
+              <a:spcAft>
+                <a:spcPts val="400"/>
+              </a:spcAft>
+            </a:pPr>
+            <a:r>
+              <a:rPr sz="1200" b="0">
+                <a:solidFill>
+                  <a:srgbClr val="555F6B"/>
+                </a:solidFill>
+              </a:rPr>
+              <a:t>Token thực tế khác giả định: nhóm dùng 13 tỉ token/tháng, khoảng có thể là 4,6–42,8 tỉ → đo trong pilot 2–4 tuần</a:t>
+            </a:r>
+          </a:p>
+          <a:p>
+            <a:pPr algn="l">
+              <a:spcAft>
+                <a:spcPts val="400"/>
+              </a:spcAft>
+            </a:pPr>
+            <a:r>
+              <a:rPr sz="1200" b="0">
+                <a:solidFill>
+                  <a:srgbClr val="555F6B"/>
+                </a:solidFill>
+              </a:rPr>
+              <a:t>Luật bảo vệ dữ liệu cá nhân (Nghị định 13/2023): Vertex AI dùng endpoint global → dữ liệu nhạy cảm dùng model chạy tại Singapore</a:t>
+            </a:r>
+          </a:p>
+          <a:p>
+            <a:pPr algn="l">
+              <a:spcAft>
+                <a:spcPts val="400"/>
+              </a:spcAft>
+            </a:pPr>
+            <a:r>
+              <a:rPr sz="1200" b="0">
+                <a:solidFill>
+                  <a:srgbClr val="555F6B"/>
+                </a:solidFill>
+              </a:rPr>
+              <a:t>LiteLLM là open source, không có SLA → 2 kỹ sư trực, cố định phiên bản, test trên staging</a:t>
+            </a:r>
+          </a:p>
+          <a:p>
+            <a:pPr algn="l">
+              <a:spcAft>
+                <a:spcPts val="400"/>
+              </a:spcAft>
+            </a:pPr>
+            <a:r>
+              <a:rPr sz="1200" b="0">
+                <a:solidFill>
+                  <a:srgbClr val="555F6B"/>
+                </a:solidFill>
+              </a:rPr>
+              <a:t>Rate limit Jira/Confluence dùng chung cho cả app (65.000 điểm/giờ) → hàng đợi và thử lại</a:t>
+            </a:r>
+          </a:p>
+          <a:p>
+            <a:pPr algn="l">
+              <a:spcAft>
+                <a:spcPts val="400"/>
+              </a:spcAft>
+            </a:pPr>
+            <a:r>
+              <a:rPr sz="1200" b="0">
+                <a:solidFill>
+                  <a:srgbClr val="555F6B"/>
+                </a:solidFill>
+              </a:rPr>
+              <a:t>Google dự kiến tính phí API Workspace từ cuối 2026 (chưa công bố giá)</a:t>
+            </a:r>
+          </a:p>
+        </p:txBody>
+      </p:sp>
     </p:spTree>
   </p:cSld>
   <p:clrMapOvr>
@@ -9189,7 +8500,7 @@
                   <a:srgbClr val="FFFFFF"/>
                 </a:solidFill>
               </a:rPr>
-              <a:t>Phụ lục B. Nguồn số liệu</a:t>
+              <a:t>Phụ lục A. Báo giá theo component (USD/tháng)</a:t>
             </a:r>
           </a:p>
         </p:txBody>
@@ -9197,6 +8508,44 @@
       <p:sp>
         <p:nvSpPr>
           <p:cNvPr id="4" name="TextBox 3"/>
+          <p:cNvSpPr txBox="1"/>
+          <p:nvPr/>
+        </p:nvSpPr>
+        <p:spPr>
+          <a:xfrm>
+            <a:off x="457200" y="914400"/>
+            <a:ext cx="11247120" cy="457200"/>
+          </a:xfrm>
+          <a:prstGeom prst="rect">
+            <a:avLst/>
+          </a:prstGeom>
+          <a:noFill/>
+        </p:spPr>
+        <p:txBody>
+          <a:bodyPr wrap="square">
+            <a:spAutoFit/>
+          </a:bodyPr>
+          <a:lstStyle/>
+          <a:p>
+            <a:pPr algn="l">
+              <a:spcAft>
+                <a:spcPts val="400"/>
+              </a:spcAft>
+            </a:pPr>
+            <a:r>
+              <a:rPr sz="1300" b="0">
+                <a:solidFill>
+                  <a:srgbClr val="2E6FB7"/>
+                </a:solidFill>
+              </a:rPr>
+              <a:t>Chi tiết từng dòng (đơn giá × số lượng, kèm bằng chứng) nằm trong G03_baogia.xlsx</a:t>
+            </a:r>
+          </a:p>
+        </p:txBody>
+      </p:sp>
+      <p:sp>
+        <p:nvSpPr>
+          <p:cNvPr id="5" name="TextBox 4"/>
           <p:cNvSpPr txBox="1"/>
           <p:nvPr/>
         </p:nvSpPr>
@@ -9227,14 +8576,14 @@
                   <a:srgbClr val="555F6B"/>
                 </a:solidFill>
               </a:rPr>
-              <a:t>B</a:t>
-            </a:r>
-          </a:p>
-        </p:txBody>
-      </p:sp>
-      <p:sp>
-        <p:nvSpPr>
-          <p:cNvPr id="5" name="TextBox 4"/>
+              <a:t>A</a:t>
+            </a:r>
+          </a:p>
+        </p:txBody>
+      </p:sp>
+      <p:sp>
+        <p:nvSpPr>
+          <p:cNvPr id="6" name="TextBox 5"/>
           <p:cNvSpPr txBox="1"/>
           <p:nvPr/>
         </p:nvSpPr>
@@ -9270,164 +8619,1070 @@
           </a:p>
         </p:txBody>
       </p:sp>
-      <p:sp>
-        <p:nvSpPr>
-          <p:cNvPr id="6" name="TextBox 5"/>
-          <p:cNvSpPr txBox="1"/>
+      <p:graphicFrame>
+        <p:nvGraphicFramePr>
+          <p:cNvPr id="7" name="Table 6"/>
+          <p:cNvGraphicFramePr>
+            <a:graphicFrameLocks noGrp="1"/>
+          </p:cNvGraphicFramePr>
           <p:nvPr/>
-        </p:nvSpPr>
-        <p:spPr>
-          <a:xfrm>
-            <a:off x="457200" y="1188720"/>
-            <a:ext cx="11247120" cy="5120640"/>
-          </a:xfrm>
-          <a:prstGeom prst="rect">
-            <a:avLst/>
-          </a:prstGeom>
-          <a:noFill/>
-        </p:spPr>
-        <p:txBody>
-          <a:bodyPr wrap="square">
-            <a:spAutoFit/>
-          </a:bodyPr>
-          <a:lstStyle/>
-          <a:p>
-            <a:pPr algn="l">
-              <a:spcAft>
-                <a:spcPts val="400"/>
-              </a:spcAft>
-            </a:pPr>
-            <a:r>
-              <a:rPr sz="1300" b="0">
-                <a:solidFill>
-                  <a:srgbClr val="555F6B"/>
-                </a:solidFill>
-              </a:rPr>
-              <a:t>Giá: trang giá chính thức của Google Cloud (GKE, Vertex AI, Cloud SQL, Cloud Storage, Memorystore, Cloud Tasks, KMS, Secret Manager, Observability, Security Command Center, Cloud Armor, VPC network, Cloud Build, Artifact Registry, IAP), đọc ngày 16/10/2026</a:t>
-            </a:r>
-          </a:p>
-          <a:p>
-            <a:pPr algn="l">
-              <a:spcAft>
-                <a:spcPts val="400"/>
-              </a:spcAft>
-            </a:pPr>
-            <a:r>
-              <a:rPr sz="1300" b="0">
-                <a:solidFill>
-                  <a:srgbClr val="555F6B"/>
-                </a:solidFill>
-              </a:rPr>
-              <a:t>So sánh với AWS và Azure: AWS Price List API, Azure Retail Prices API (region ap-southeast-1, southeastasia)</a:t>
-            </a:r>
-          </a:p>
-          <a:p>
-            <a:pPr algn="l">
-              <a:spcAft>
-                <a:spcPts val="400"/>
-              </a:spcAft>
-            </a:pPr>
-            <a:r>
-              <a:rPr sz="1300" b="0">
-                <a:solidFill>
-                  <a:srgbClr val="555F6B"/>
-                </a:solidFill>
-              </a:rPr>
-              <a:t>Tải: Microsoft WorkLab 2025; Dillon et al., Shifting Work Patterns with Generative AI (2025); Radicati 2015; APQC; Brynjolfsson et al. NBER 31161; Graphite Research; Liang et al. 2025; UK DBT Copilot evaluation 2025</a:t>
-            </a:r>
-          </a:p>
-          <a:p>
-            <a:pPr algn="l">
-              <a:spcAft>
-                <a:spcPts val="400"/>
-              </a:spcAft>
-            </a:pPr>
-            <a:r>
-              <a:rPr sz="1300" b="0">
-                <a:solidFill>
-                  <a:srgbClr val="555F6B"/>
-                </a:solidFill>
-              </a:rPr>
-              <a:t>Token mỗi lượt chat (số lần gọi model × token vào / token ra): cấp 1: 2 × 5,5k / 250 · cấp 2: 2 × 18k / 2,5k · cấp 3: 3,5 × 12k / 1k · cấp 4: 8 × 15k / 300 · cấp 5: 1,5 × 4k / 600 + 1 ảnh</a:t>
-            </a:r>
-          </a:p>
-          <a:p>
-            <a:pPr algn="l">
-              <a:spcAft>
-                <a:spcPts val="400"/>
-              </a:spcAft>
-            </a:pPr>
-            <a:r>
-              <a:rPr sz="1300" b="0">
-                <a:solidFill>
-                  <a:srgbClr val="555F6B"/>
-                </a:solidFill>
-              </a:rPr>
-              <a:t>Nguồn token: Azure OpenAI On your data defaults; Vertex RAG Engine; DA-Code; DABstep; MCP-Universe; MCPMark; OpenRouter State of AI 2025; Azure LLM inference trace 2024</a:t>
-            </a:r>
-          </a:p>
-          <a:p>
-            <a:pPr algn="l">
-              <a:spcAft>
-                <a:spcPts val="400"/>
-              </a:spcAft>
-            </a:pPr>
-            <a:r>
-              <a:rPr sz="1300" b="0">
-                <a:solidFill>
-                  <a:srgbClr val="555F6B"/>
-                </a:solidFill>
-              </a:rPr>
-              <a:t>Chất lượng và tốc độ model: Artificial Analysis Intelligence Index v4.3.2</a:t>
-            </a:r>
-          </a:p>
-          <a:p>
-            <a:pPr algn="l">
-              <a:spcAft>
-                <a:spcPts val="400"/>
-              </a:spcAft>
-            </a:pPr>
-            <a:r>
-              <a:rPr sz="1300" b="0">
-                <a:solidFill>
-                  <a:srgbClr val="555F6B"/>
-                </a:solidFill>
-              </a:rPr>
-              <a:t>Lương: ITviec Vietnam IT Salary &amp; Recruitment Market 2024–2025; tỉ giá Vietcombank ngày 16/10/2026</a:t>
-            </a:r>
-          </a:p>
-          <a:p>
-            <a:pPr algn="l">
-              <a:spcAft>
-                <a:spcPts val="400"/>
-              </a:spcAft>
-            </a:pPr>
-            <a:r>
-              <a:rPr sz="1300" b="0">
-                <a:solidFill>
-                  <a:srgbClr val="555F6B"/>
-                </a:solidFill>
-              </a:rPr>
-              <a:t>Connector: Microsoft Graph throttling, Atlassian rate limiting, Notion request limits, Google Workspace API limits</a:t>
-            </a:r>
-          </a:p>
-          <a:p>
-            <a:pPr algn="l">
-              <a:spcAft>
-                <a:spcPts val="400"/>
-              </a:spcAft>
-            </a:pPr>
-            <a:r>
-              <a:rPr sz="1300" b="0">
-                <a:solidFill>
-                  <a:srgbClr val="555F6B"/>
-                </a:solidFill>
-              </a:rPr>
-              <a:t>Chi tiết nghiên cứu: thư mục research/ (usage-benchmarks, task-volume-by-role, token-per-task, r1, r2, r3, r5-r9, r8-r6) và cost_model.py</a:t>
-            </a:r>
-          </a:p>
-        </p:txBody>
-      </p:sp>
+        </p:nvGraphicFramePr>
+        <p:xfrm>
+          <a:off x="457200" y="1371600"/>
+          <a:ext cx="5486400" cy="4224528"/>
+        </p:xfrm>
+        <a:graphic>
+          <a:graphicData uri="http://schemas.openxmlformats.org/drawingml/2006/table">
+            <a:tbl>
+              <a:tblPr firstRow="1" bandRow="1">
+                <a:tableStyleId>{5C22544A-7EE6-4342-B048-85BDC9FD1C3A}</a:tableStyleId>
+              </a:tblPr>
+              <a:tblGrid>
+                <a:gridCol w="3200400"/>
+                <a:gridCol w="2286000"/>
+              </a:tblGrid>
+              <a:tr h="384048">
+                <a:tc>
+                  <a:txBody>
+                    <a:bodyPr/>
+                    <a:lstStyle/>
+                    <a:p>
+                      <a:r>
+                        <a:rPr sz="1200" b="1">
+                          <a:solidFill>
+                            <a:srgbClr val="FFFFFF"/>
+                          </a:solidFill>
+                        </a:rPr>
+                        <a:t>Component</a:t>
+                      </a:r>
+                    </a:p>
+                  </a:txBody>
+                  <a:tcPr marL="45720" marR="45720" marT="18288" marB="18288">
+                    <a:solidFill>
+                      <a:srgbClr val="2E6FB7"/>
+                    </a:solidFill>
+                  </a:tcPr>
+                </a:tc>
+                <a:tc>
+                  <a:txBody>
+                    <a:bodyPr/>
+                    <a:lstStyle/>
+                    <a:p>
+                      <a:r>
+                        <a:rPr sz="1200" b="1">
+                          <a:solidFill>
+                            <a:srgbClr val="FFFFFF"/>
+                          </a:solidFill>
+                        </a:rPr>
+                        <a:t>USD/tháng</a:t>
+                      </a:r>
+                    </a:p>
+                  </a:txBody>
+                  <a:tcPr marL="45720" marR="45720" marT="18288" marB="18288">
+                    <a:solidFill>
+                      <a:srgbClr val="2E6FB7"/>
+                    </a:solidFill>
+                  </a:tcPr>
+                </a:tc>
+              </a:tr>
+              <a:tr h="384048">
+                <a:tc>
+                  <a:txBody>
+                    <a:bodyPr/>
+                    <a:lstStyle/>
+                    <a:p>
+                      <a:r>
+                        <a:rPr sz="1200" b="0">
+                          <a:solidFill>
+                            <a:srgbClr val="555F6B"/>
+                          </a:solidFill>
+                        </a:rPr>
+                        <a:t>compute</a:t>
+                      </a:r>
+                    </a:p>
+                  </a:txBody>
+                  <a:tcPr marL="45720" marR="45720" marT="18288" marB="18288">
+                    <a:solidFill>
+                      <a:srgbClr val="EEF3F8"/>
+                    </a:solidFill>
+                  </a:tcPr>
+                </a:tc>
+                <a:tc>
+                  <a:txBody>
+                    <a:bodyPr/>
+                    <a:lstStyle/>
+                    <a:p>
+                      <a:r>
+                        <a:rPr sz="1200" b="0">
+                          <a:solidFill>
+                            <a:srgbClr val="555F6B"/>
+                          </a:solidFill>
+                        </a:rPr>
+                        <a:t>284,15</a:t>
+                      </a:r>
+                    </a:p>
+                  </a:txBody>
+                  <a:tcPr marL="45720" marR="45720" marT="18288" marB="18288">
+                    <a:solidFill>
+                      <a:srgbClr val="EEF3F8"/>
+                    </a:solidFill>
+                  </a:tcPr>
+                </a:tc>
+              </a:tr>
+              <a:tr h="384048">
+                <a:tc>
+                  <a:txBody>
+                    <a:bodyPr/>
+                    <a:lstStyle/>
+                    <a:p>
+                      <a:r>
+                        <a:rPr sz="1200" b="0">
+                          <a:solidFill>
+                            <a:srgbClr val="555F6B"/>
+                          </a:solidFill>
+                        </a:rPr>
+                        <a:t>llm</a:t>
+                      </a:r>
+                    </a:p>
+                  </a:txBody>
+                  <a:tcPr marL="45720" marR="45720" marT="18288" marB="18288">
+                    <a:solidFill>
+                      <a:srgbClr val="FFFFFF"/>
+                    </a:solidFill>
+                  </a:tcPr>
+                </a:tc>
+                <a:tc>
+                  <a:txBody>
+                    <a:bodyPr/>
+                    <a:lstStyle/>
+                    <a:p>
+                      <a:r>
+                        <a:rPr sz="1200" b="0">
+                          <a:solidFill>
+                            <a:srgbClr val="555F6B"/>
+                          </a:solidFill>
+                        </a:rPr>
+                        <a:t>1.093,34</a:t>
+                      </a:r>
+                    </a:p>
+                  </a:txBody>
+                  <a:tcPr marL="45720" marR="45720" marT="18288" marB="18288">
+                    <a:solidFill>
+                      <a:srgbClr val="FFFFFF"/>
+                    </a:solidFill>
+                  </a:tcPr>
+                </a:tc>
+              </a:tr>
+              <a:tr h="384048">
+                <a:tc>
+                  <a:txBody>
+                    <a:bodyPr/>
+                    <a:lstStyle/>
+                    <a:p>
+                      <a:r>
+                        <a:rPr sz="1200" b="0">
+                          <a:solidFill>
+                            <a:srgbClr val="555F6B"/>
+                          </a:solidFill>
+                        </a:rPr>
+                        <a:t>embedding</a:t>
+                      </a:r>
+                    </a:p>
+                  </a:txBody>
+                  <a:tcPr marL="45720" marR="45720" marT="18288" marB="18288">
+                    <a:solidFill>
+                      <a:srgbClr val="EEF3F8"/>
+                    </a:solidFill>
+                  </a:tcPr>
+                </a:tc>
+                <a:tc>
+                  <a:txBody>
+                    <a:bodyPr/>
+                    <a:lstStyle/>
+                    <a:p>
+                      <a:r>
+                        <a:rPr sz="1200" b="0">
+                          <a:solidFill>
+                            <a:srgbClr val="555F6B"/>
+                          </a:solidFill>
+                        </a:rPr>
+                        <a:t>19,50</a:t>
+                      </a:r>
+                    </a:p>
+                  </a:txBody>
+                  <a:tcPr marL="45720" marR="45720" marT="18288" marB="18288">
+                    <a:solidFill>
+                      <a:srgbClr val="EEF3F8"/>
+                    </a:solidFill>
+                  </a:tcPr>
+                </a:tc>
+              </a:tr>
+              <a:tr h="384048">
+                <a:tc>
+                  <a:txBody>
+                    <a:bodyPr/>
+                    <a:lstStyle/>
+                    <a:p>
+                      <a:r>
+                        <a:rPr sz="1200" b="0">
+                          <a:solidFill>
+                            <a:srgbClr val="555F6B"/>
+                          </a:solidFill>
+                        </a:rPr>
+                        <a:t>gateway</a:t>
+                      </a:r>
+                    </a:p>
+                  </a:txBody>
+                  <a:tcPr marL="45720" marR="45720" marT="18288" marB="18288">
+                    <a:solidFill>
+                      <a:srgbClr val="FFFFFF"/>
+                    </a:solidFill>
+                  </a:tcPr>
+                </a:tc>
+                <a:tc>
+                  <a:txBody>
+                    <a:bodyPr/>
+                    <a:lstStyle/>
+                    <a:p>
+                      <a:r>
+                        <a:rPr sz="1200" b="0">
+                          <a:solidFill>
+                            <a:srgbClr val="555F6B"/>
+                          </a:solidFill>
+                        </a:rPr>
+                        <a:t>0,00</a:t>
+                      </a:r>
+                    </a:p>
+                  </a:txBody>
+                  <a:tcPr marL="45720" marR="45720" marT="18288" marB="18288">
+                    <a:solidFill>
+                      <a:srgbClr val="FFFFFF"/>
+                    </a:solidFill>
+                  </a:tcPr>
+                </a:tc>
+              </a:tr>
+              <a:tr h="384048">
+                <a:tc>
+                  <a:txBody>
+                    <a:bodyPr/>
+                    <a:lstStyle/>
+                    <a:p>
+                      <a:r>
+                        <a:rPr sz="1200" b="0">
+                          <a:solidFill>
+                            <a:srgbClr val="555F6B"/>
+                          </a:solidFill>
+                        </a:rPr>
+                        <a:t>load_balancer</a:t>
+                      </a:r>
+                    </a:p>
+                  </a:txBody>
+                  <a:tcPr marL="45720" marR="45720" marT="18288" marB="18288">
+                    <a:solidFill>
+                      <a:srgbClr val="EEF3F8"/>
+                    </a:solidFill>
+                  </a:tcPr>
+                </a:tc>
+                <a:tc>
+                  <a:txBody>
+                    <a:bodyPr/>
+                    <a:lstStyle/>
+                    <a:p>
+                      <a:r>
+                        <a:rPr sz="1200" b="0">
+                          <a:solidFill>
+                            <a:srgbClr val="555F6B"/>
+                          </a:solidFill>
+                        </a:rPr>
+                        <a:t>29,44</a:t>
+                      </a:r>
+                    </a:p>
+                  </a:txBody>
+                  <a:tcPr marL="45720" marR="45720" marT="18288" marB="18288">
+                    <a:solidFill>
+                      <a:srgbClr val="EEF3F8"/>
+                    </a:solidFill>
+                  </a:tcPr>
+                </a:tc>
+              </a:tr>
+              <a:tr h="384048">
+                <a:tc>
+                  <a:txBody>
+                    <a:bodyPr/>
+                    <a:lstStyle/>
+                    <a:p>
+                      <a:r>
+                        <a:rPr sz="1200" b="0">
+                          <a:solidFill>
+                            <a:srgbClr val="555F6B"/>
+                          </a:solidFill>
+                        </a:rPr>
+                        <a:t>authn</a:t>
+                      </a:r>
+                    </a:p>
+                  </a:txBody>
+                  <a:tcPr marL="45720" marR="45720" marT="18288" marB="18288">
+                    <a:solidFill>
+                      <a:srgbClr val="FFFFFF"/>
+                    </a:solidFill>
+                  </a:tcPr>
+                </a:tc>
+                <a:tc>
+                  <a:txBody>
+                    <a:bodyPr/>
+                    <a:lstStyle/>
+                    <a:p>
+                      <a:r>
+                        <a:rPr sz="1200" b="0">
+                          <a:solidFill>
+                            <a:srgbClr val="555F6B"/>
+                          </a:solidFill>
+                        </a:rPr>
+                        <a:t>0,00</a:t>
+                      </a:r>
+                    </a:p>
+                  </a:txBody>
+                  <a:tcPr marL="45720" marR="45720" marT="18288" marB="18288">
+                    <a:solidFill>
+                      <a:srgbClr val="FFFFFF"/>
+                    </a:solidFill>
+                  </a:tcPr>
+                </a:tc>
+              </a:tr>
+              <a:tr h="384048">
+                <a:tc>
+                  <a:txBody>
+                    <a:bodyPr/>
+                    <a:lstStyle/>
+                    <a:p>
+                      <a:r>
+                        <a:rPr sz="1200" b="0">
+                          <a:solidFill>
+                            <a:srgbClr val="555F6B"/>
+                          </a:solidFill>
+                        </a:rPr>
+                        <a:t>authz</a:t>
+                      </a:r>
+                    </a:p>
+                  </a:txBody>
+                  <a:tcPr marL="45720" marR="45720" marT="18288" marB="18288">
+                    <a:solidFill>
+                      <a:srgbClr val="EEF3F8"/>
+                    </a:solidFill>
+                  </a:tcPr>
+                </a:tc>
+                <a:tc>
+                  <a:txBody>
+                    <a:bodyPr/>
+                    <a:lstStyle/>
+                    <a:p>
+                      <a:r>
+                        <a:rPr sz="1200" b="0">
+                          <a:solidFill>
+                            <a:srgbClr val="555F6B"/>
+                          </a:solidFill>
+                        </a:rPr>
+                        <a:t>0,00</a:t>
+                      </a:r>
+                    </a:p>
+                  </a:txBody>
+                  <a:tcPr marL="45720" marR="45720" marT="18288" marB="18288">
+                    <a:solidFill>
+                      <a:srgbClr val="EEF3F8"/>
+                    </a:solidFill>
+                  </a:tcPr>
+                </a:tc>
+              </a:tr>
+              <a:tr h="384048">
+                <a:tc>
+                  <a:txBody>
+                    <a:bodyPr/>
+                    <a:lstStyle/>
+                    <a:p>
+                      <a:r>
+                        <a:rPr sz="1200" b="0">
+                          <a:solidFill>
+                            <a:srgbClr val="555F6B"/>
+                          </a:solidFill>
+                        </a:rPr>
+                        <a:t>database</a:t>
+                      </a:r>
+                    </a:p>
+                  </a:txBody>
+                  <a:tcPr marL="45720" marR="45720" marT="18288" marB="18288">
+                    <a:solidFill>
+                      <a:srgbClr val="FFFFFF"/>
+                    </a:solidFill>
+                  </a:tcPr>
+                </a:tc>
+                <a:tc>
+                  <a:txBody>
+                    <a:bodyPr/>
+                    <a:lstStyle/>
+                    <a:p>
+                      <a:r>
+                        <a:rPr sz="1200" b="0">
+                          <a:solidFill>
+                            <a:srgbClr val="555F6B"/>
+                          </a:solidFill>
+                        </a:rPr>
+                        <a:t>466,71</a:t>
+                      </a:r>
+                    </a:p>
+                  </a:txBody>
+                  <a:tcPr marL="45720" marR="45720" marT="18288" marB="18288">
+                    <a:solidFill>
+                      <a:srgbClr val="FFFFFF"/>
+                    </a:solidFill>
+                  </a:tcPr>
+                </a:tc>
+              </a:tr>
+              <a:tr h="384048">
+                <a:tc>
+                  <a:txBody>
+                    <a:bodyPr/>
+                    <a:lstStyle/>
+                    <a:p>
+                      <a:r>
+                        <a:rPr sz="1200" b="0">
+                          <a:solidFill>
+                            <a:srgbClr val="555F6B"/>
+                          </a:solidFill>
+                        </a:rPr>
+                        <a:t>vector_db</a:t>
+                      </a:r>
+                    </a:p>
+                  </a:txBody>
+                  <a:tcPr marL="45720" marR="45720" marT="18288" marB="18288">
+                    <a:solidFill>
+                      <a:srgbClr val="EEF3F8"/>
+                    </a:solidFill>
+                  </a:tcPr>
+                </a:tc>
+                <a:tc>
+                  <a:txBody>
+                    <a:bodyPr/>
+                    <a:lstStyle/>
+                    <a:p>
+                      <a:r>
+                        <a:rPr sz="1200" b="0">
+                          <a:solidFill>
+                            <a:srgbClr val="555F6B"/>
+                          </a:solidFill>
+                        </a:rPr>
+                        <a:t>0,00</a:t>
+                      </a:r>
+                    </a:p>
+                  </a:txBody>
+                  <a:tcPr marL="45720" marR="45720" marT="18288" marB="18288">
+                    <a:solidFill>
+                      <a:srgbClr val="EEF3F8"/>
+                    </a:solidFill>
+                  </a:tcPr>
+                </a:tc>
+              </a:tr>
+              <a:tr h="384048">
+                <a:tc>
+                  <a:txBody>
+                    <a:bodyPr/>
+                    <a:lstStyle/>
+                    <a:p>
+                      <a:r>
+                        <a:rPr sz="1200" b="0">
+                          <a:solidFill>
+                            <a:srgbClr val="555F6B"/>
+                          </a:solidFill>
+                        </a:rPr>
+                        <a:t>object_storage</a:t>
+                      </a:r>
+                    </a:p>
+                  </a:txBody>
+                  <a:tcPr marL="45720" marR="45720" marT="18288" marB="18288">
+                    <a:solidFill>
+                      <a:srgbClr val="FFFFFF"/>
+                    </a:solidFill>
+                  </a:tcPr>
+                </a:tc>
+                <a:tc>
+                  <a:txBody>
+                    <a:bodyPr/>
+                    <a:lstStyle/>
+                    <a:p>
+                      <a:r>
+                        <a:rPr sz="1200" b="0">
+                          <a:solidFill>
+                            <a:srgbClr val="555F6B"/>
+                          </a:solidFill>
+                        </a:rPr>
+                        <a:t>82,80</a:t>
+                      </a:r>
+                    </a:p>
+                  </a:txBody>
+                  <a:tcPr marL="45720" marR="45720" marT="18288" marB="18288">
+                    <a:solidFill>
+                      <a:srgbClr val="FFFFFF"/>
+                    </a:solidFill>
+                  </a:tcPr>
+                </a:tc>
+              </a:tr>
+            </a:tbl>
+          </a:graphicData>
+        </a:graphic>
+      </p:graphicFrame>
+      <p:graphicFrame>
+        <p:nvGraphicFramePr>
+          <p:cNvPr id="8" name="Table 7"/>
+          <p:cNvGraphicFramePr>
+            <a:graphicFrameLocks noGrp="1"/>
+          </p:cNvGraphicFramePr>
+          <p:nvPr/>
+        </p:nvGraphicFramePr>
+        <p:xfrm>
+          <a:off x="6309360" y="1371600"/>
+          <a:ext cx="5486400" cy="4608576"/>
+        </p:xfrm>
+        <a:graphic>
+          <a:graphicData uri="http://schemas.openxmlformats.org/drawingml/2006/table">
+            <a:tbl>
+              <a:tblPr firstRow="1" bandRow="1">
+                <a:tableStyleId>{5C22544A-7EE6-4342-B048-85BDC9FD1C3A}</a:tableStyleId>
+              </a:tblPr>
+              <a:tblGrid>
+                <a:gridCol w="3200400"/>
+                <a:gridCol w="2286000"/>
+              </a:tblGrid>
+              <a:tr h="384048">
+                <a:tc>
+                  <a:txBody>
+                    <a:bodyPr/>
+                    <a:lstStyle/>
+                    <a:p>
+                      <a:r>
+                        <a:rPr sz="1200" b="1">
+                          <a:solidFill>
+                            <a:srgbClr val="FFFFFF"/>
+                          </a:solidFill>
+                        </a:rPr>
+                        <a:t>Component</a:t>
+                      </a:r>
+                    </a:p>
+                  </a:txBody>
+                  <a:tcPr marL="45720" marR="45720" marT="18288" marB="18288">
+                    <a:solidFill>
+                      <a:srgbClr val="2E6FB7"/>
+                    </a:solidFill>
+                  </a:tcPr>
+                </a:tc>
+                <a:tc>
+                  <a:txBody>
+                    <a:bodyPr/>
+                    <a:lstStyle/>
+                    <a:p>
+                      <a:r>
+                        <a:rPr sz="1200" b="1">
+                          <a:solidFill>
+                            <a:srgbClr val="FFFFFF"/>
+                          </a:solidFill>
+                        </a:rPr>
+                        <a:t>USD/tháng</a:t>
+                      </a:r>
+                    </a:p>
+                  </a:txBody>
+                  <a:tcPr marL="45720" marR="45720" marT="18288" marB="18288">
+                    <a:solidFill>
+                      <a:srgbClr val="2E6FB7"/>
+                    </a:solidFill>
+                  </a:tcPr>
+                </a:tc>
+              </a:tr>
+              <a:tr h="384048">
+                <a:tc>
+                  <a:txBody>
+                    <a:bodyPr/>
+                    <a:lstStyle/>
+                    <a:p>
+                      <a:r>
+                        <a:rPr sz="1200" b="0">
+                          <a:solidFill>
+                            <a:srgbClr val="555F6B"/>
+                          </a:solidFill>
+                        </a:rPr>
+                        <a:t>cache_queue</a:t>
+                      </a:r>
+                    </a:p>
+                  </a:txBody>
+                  <a:tcPr marL="45720" marR="45720" marT="18288" marB="18288">
+                    <a:solidFill>
+                      <a:srgbClr val="EEF3F8"/>
+                    </a:solidFill>
+                  </a:tcPr>
+                </a:tc>
+                <a:tc>
+                  <a:txBody>
+                    <a:bodyPr/>
+                    <a:lstStyle/>
+                    <a:p>
+                      <a:r>
+                        <a:rPr sz="1200" b="0">
+                          <a:solidFill>
+                            <a:srgbClr val="555F6B"/>
+                          </a:solidFill>
+                        </a:rPr>
+                        <a:t>55,75</a:t>
+                      </a:r>
+                    </a:p>
+                  </a:txBody>
+                  <a:tcPr marL="45720" marR="45720" marT="18288" marB="18288">
+                    <a:solidFill>
+                      <a:srgbClr val="EEF3F8"/>
+                    </a:solidFill>
+                  </a:tcPr>
+                </a:tc>
+              </a:tr>
+              <a:tr h="384048">
+                <a:tc>
+                  <a:txBody>
+                    <a:bodyPr/>
+                    <a:lstStyle/>
+                    <a:p>
+                      <a:r>
+                        <a:rPr sz="1200" b="0">
+                          <a:solidFill>
+                            <a:srgbClr val="555F6B"/>
+                          </a:solidFill>
+                        </a:rPr>
+                        <a:t>sandbox</a:t>
+                      </a:r>
+                    </a:p>
+                  </a:txBody>
+                  <a:tcPr marL="45720" marR="45720" marT="18288" marB="18288">
+                    <a:solidFill>
+                      <a:srgbClr val="FFFFFF"/>
+                    </a:solidFill>
+                  </a:tcPr>
+                </a:tc>
+                <a:tc>
+                  <a:txBody>
+                    <a:bodyPr/>
+                    <a:lstStyle/>
+                    <a:p>
+                      <a:r>
+                        <a:rPr sz="1200" b="0">
+                          <a:solidFill>
+                            <a:srgbClr val="555F6B"/>
+                          </a:solidFill>
+                        </a:rPr>
+                        <a:t>314,64</a:t>
+                      </a:r>
+                    </a:p>
+                  </a:txBody>
+                  <a:tcPr marL="45720" marR="45720" marT="18288" marB="18288">
+                    <a:solidFill>
+                      <a:srgbClr val="FFFFFF"/>
+                    </a:solidFill>
+                  </a:tcPr>
+                </a:tc>
+              </a:tr>
+              <a:tr h="384048">
+                <a:tc>
+                  <a:txBody>
+                    <a:bodyPr/>
+                    <a:lstStyle/>
+                    <a:p>
+                      <a:r>
+                        <a:rPr sz="1200" b="0">
+                          <a:solidFill>
+                            <a:srgbClr val="555F6B"/>
+                          </a:solidFill>
+                        </a:rPr>
+                        <a:t>connectors</a:t>
+                      </a:r>
+                    </a:p>
+                  </a:txBody>
+                  <a:tcPr marL="45720" marR="45720" marT="18288" marB="18288">
+                    <a:solidFill>
+                      <a:srgbClr val="EEF3F8"/>
+                    </a:solidFill>
+                  </a:tcPr>
+                </a:tc>
+                <a:tc>
+                  <a:txBody>
+                    <a:bodyPr/>
+                    <a:lstStyle/>
+                    <a:p>
+                      <a:r>
+                        <a:rPr sz="1200" b="0">
+                          <a:solidFill>
+                            <a:srgbClr val="555F6B"/>
+                          </a:solidFill>
+                        </a:rPr>
+                        <a:t>0,00</a:t>
+                      </a:r>
+                    </a:p>
+                  </a:txBody>
+                  <a:tcPr marL="45720" marR="45720" marT="18288" marB="18288">
+                    <a:solidFill>
+                      <a:srgbClr val="EEF3F8"/>
+                    </a:solidFill>
+                  </a:tcPr>
+                </a:tc>
+              </a:tr>
+              <a:tr h="384048">
+                <a:tc>
+                  <a:txBody>
+                    <a:bodyPr/>
+                    <a:lstStyle/>
+                    <a:p>
+                      <a:r>
+                        <a:rPr sz="1200" b="0">
+                          <a:solidFill>
+                            <a:srgbClr val="555F6B"/>
+                          </a:solidFill>
+                        </a:rPr>
+                        <a:t>secrets_kms</a:t>
+                      </a:r>
+                    </a:p>
+                  </a:txBody>
+                  <a:tcPr marL="45720" marR="45720" marT="18288" marB="18288">
+                    <a:solidFill>
+                      <a:srgbClr val="FFFFFF"/>
+                    </a:solidFill>
+                  </a:tcPr>
+                </a:tc>
+                <a:tc>
+                  <a:txBody>
+                    <a:bodyPr/>
+                    <a:lstStyle/>
+                    <a:p>
+                      <a:r>
+                        <a:rPr sz="1200" b="0">
+                          <a:solidFill>
+                            <a:srgbClr val="555F6B"/>
+                          </a:solidFill>
+                        </a:rPr>
+                        <a:t>3,96</a:t>
+                      </a:r>
+                    </a:p>
+                  </a:txBody>
+                  <a:tcPr marL="45720" marR="45720" marT="18288" marB="18288">
+                    <a:solidFill>
+                      <a:srgbClr val="FFFFFF"/>
+                    </a:solidFill>
+                  </a:tcPr>
+                </a:tc>
+              </a:tr>
+              <a:tr h="384048">
+                <a:tc>
+                  <a:txBody>
+                    <a:bodyPr/>
+                    <a:lstStyle/>
+                    <a:p>
+                      <a:r>
+                        <a:rPr sz="1200" b="0">
+                          <a:solidFill>
+                            <a:srgbClr val="555F6B"/>
+                          </a:solidFill>
+                        </a:rPr>
+                        <a:t>backup_dr</a:t>
+                      </a:r>
+                    </a:p>
+                  </a:txBody>
+                  <a:tcPr marL="45720" marR="45720" marT="18288" marB="18288">
+                    <a:solidFill>
+                      <a:srgbClr val="EEF3F8"/>
+                    </a:solidFill>
+                  </a:tcPr>
+                </a:tc>
+                <a:tc>
+                  <a:txBody>
+                    <a:bodyPr/>
+                    <a:lstStyle/>
+                    <a:p>
+                      <a:r>
+                        <a:rPr sz="1200" b="0">
+                          <a:solidFill>
+                            <a:srgbClr val="555F6B"/>
+                          </a:solidFill>
+                        </a:rPr>
+                        <a:t>164,40</a:t>
+                      </a:r>
+                    </a:p>
+                  </a:txBody>
+                  <a:tcPr marL="45720" marR="45720" marT="18288" marB="18288">
+                    <a:solidFill>
+                      <a:srgbClr val="EEF3F8"/>
+                    </a:solidFill>
+                  </a:tcPr>
+                </a:tc>
+              </a:tr>
+              <a:tr h="384048">
+                <a:tc>
+                  <a:txBody>
+                    <a:bodyPr/>
+                    <a:lstStyle/>
+                    <a:p>
+                      <a:r>
+                        <a:rPr sz="1200" b="0">
+                          <a:solidFill>
+                            <a:srgbClr val="555F6B"/>
+                          </a:solidFill>
+                        </a:rPr>
+                        <a:t>monitoring</a:t>
+                      </a:r>
+                    </a:p>
+                  </a:txBody>
+                  <a:tcPr marL="45720" marR="45720" marT="18288" marB="18288">
+                    <a:solidFill>
+                      <a:srgbClr val="FFFFFF"/>
+                    </a:solidFill>
+                  </a:tcPr>
+                </a:tc>
+                <a:tc>
+                  <a:txBody>
+                    <a:bodyPr/>
+                    <a:lstStyle/>
+                    <a:p>
+                      <a:r>
+                        <a:rPr sz="1200" b="0">
+                          <a:solidFill>
+                            <a:srgbClr val="555F6B"/>
+                          </a:solidFill>
+                        </a:rPr>
+                        <a:t>22,51</a:t>
+                      </a:r>
+                    </a:p>
+                  </a:txBody>
+                  <a:tcPr marL="45720" marR="45720" marT="18288" marB="18288">
+                    <a:solidFill>
+                      <a:srgbClr val="FFFFFF"/>
+                    </a:solidFill>
+                  </a:tcPr>
+                </a:tc>
+              </a:tr>
+              <a:tr h="384048">
+                <a:tc>
+                  <a:txBody>
+                    <a:bodyPr/>
+                    <a:lstStyle/>
+                    <a:p>
+                      <a:r>
+                        <a:rPr sz="1200" b="0">
+                          <a:solidFill>
+                            <a:srgbClr val="555F6B"/>
+                          </a:solidFill>
+                        </a:rPr>
+                        <a:t>governance</a:t>
+                      </a:r>
+                    </a:p>
+                  </a:txBody>
+                  <a:tcPr marL="45720" marR="45720" marT="18288" marB="18288">
+                    <a:solidFill>
+                      <a:srgbClr val="EEF3F8"/>
+                    </a:solidFill>
+                  </a:tcPr>
+                </a:tc>
+                <a:tc>
+                  <a:txBody>
+                    <a:bodyPr/>
+                    <a:lstStyle/>
+                    <a:p>
+                      <a:r>
+                        <a:rPr sz="1200" b="0">
+                          <a:solidFill>
+                            <a:srgbClr val="555F6B"/>
+                          </a:solidFill>
+                        </a:rPr>
+                        <a:t>805,98</a:t>
+                      </a:r>
+                    </a:p>
+                  </a:txBody>
+                  <a:tcPr marL="45720" marR="45720" marT="18288" marB="18288">
+                    <a:solidFill>
+                      <a:srgbClr val="EEF3F8"/>
+                    </a:solidFill>
+                  </a:tcPr>
+                </a:tc>
+              </a:tr>
+              <a:tr h="384048">
+                <a:tc>
+                  <a:txBody>
+                    <a:bodyPr/>
+                    <a:lstStyle/>
+                    <a:p>
+                      <a:r>
+                        <a:rPr sz="1200" b="0">
+                          <a:solidFill>
+                            <a:srgbClr val="555F6B"/>
+                          </a:solidFill>
+                        </a:rPr>
+                        <a:t>network</a:t>
+                      </a:r>
+                    </a:p>
+                  </a:txBody>
+                  <a:tcPr marL="45720" marR="45720" marT="18288" marB="18288">
+                    <a:solidFill>
+                      <a:srgbClr val="FFFFFF"/>
+                    </a:solidFill>
+                  </a:tcPr>
+                </a:tc>
+                <a:tc>
+                  <a:txBody>
+                    <a:bodyPr/>
+                    <a:lstStyle/>
+                    <a:p>
+                      <a:r>
+                        <a:rPr sz="1200" b="0">
+                          <a:solidFill>
+                            <a:srgbClr val="555F6B"/>
+                          </a:solidFill>
+                        </a:rPr>
+                        <a:t>64,26</a:t>
+                      </a:r>
+                    </a:p>
+                  </a:txBody>
+                  <a:tcPr marL="45720" marR="45720" marT="18288" marB="18288">
+                    <a:solidFill>
+                      <a:srgbClr val="FFFFFF"/>
+                    </a:solidFill>
+                  </a:tcPr>
+                </a:tc>
+              </a:tr>
+              <a:tr h="384048">
+                <a:tc>
+                  <a:txBody>
+                    <a:bodyPr/>
+                    <a:lstStyle/>
+                    <a:p>
+                      <a:r>
+                        <a:rPr sz="1200" b="0">
+                          <a:solidFill>
+                            <a:srgbClr val="555F6B"/>
+                          </a:solidFill>
+                        </a:rPr>
+                        <a:t>cicd</a:t>
+                      </a:r>
+                    </a:p>
+                  </a:txBody>
+                  <a:tcPr marL="45720" marR="45720" marT="18288" marB="18288">
+                    <a:solidFill>
+                      <a:srgbClr val="EEF3F8"/>
+                    </a:solidFill>
+                  </a:tcPr>
+                </a:tc>
+                <a:tc>
+                  <a:txBody>
+                    <a:bodyPr/>
+                    <a:lstStyle/>
+                    <a:p>
+                      <a:r>
+                        <a:rPr sz="1200" b="0">
+                          <a:solidFill>
+                            <a:srgbClr val="555F6B"/>
+                          </a:solidFill>
+                        </a:rPr>
+                        <a:t>14,00</a:t>
+                      </a:r>
+                    </a:p>
+                  </a:txBody>
+                  <a:tcPr marL="45720" marR="45720" marT="18288" marB="18288">
+                    <a:solidFill>
+                      <a:srgbClr val="EEF3F8"/>
+                    </a:solidFill>
+                  </a:tcPr>
+                </a:tc>
+              </a:tr>
+              <a:tr h="384048">
+                <a:tc>
+                  <a:txBody>
+                    <a:bodyPr/>
+                    <a:lstStyle/>
+                    <a:p>
+                      <a:r>
+                        <a:rPr sz="1200" b="0">
+                          <a:solidFill>
+                            <a:srgbClr val="555F6B"/>
+                          </a:solidFill>
+                        </a:rPr>
+                        <a:t>ops_labor</a:t>
+                      </a:r>
+                    </a:p>
+                  </a:txBody>
+                  <a:tcPr marL="45720" marR="45720" marT="18288" marB="18288">
+                    <a:solidFill>
+                      <a:srgbClr val="FFFFFF"/>
+                    </a:solidFill>
+                  </a:tcPr>
+                </a:tc>
+                <a:tc>
+                  <a:txBody>
+                    <a:bodyPr/>
+                    <a:lstStyle/>
+                    <a:p>
+                      <a:r>
+                        <a:rPr sz="1200" b="0">
+                          <a:solidFill>
+                            <a:srgbClr val="555F6B"/>
+                          </a:solidFill>
+                        </a:rPr>
+                        <a:t>3.400,00</a:t>
+                      </a:r>
+                    </a:p>
+                  </a:txBody>
+                  <a:tcPr marL="45720" marR="45720" marT="18288" marB="18288">
+                    <a:solidFill>
+                      <a:srgbClr val="FFFFFF"/>
+                    </a:solidFill>
+                  </a:tcPr>
+                </a:tc>
+              </a:tr>
+              <a:tr h="384048">
+                <a:tc>
+                  <a:txBody>
+                    <a:bodyPr/>
+                    <a:lstStyle/>
+                    <a:p>
+                      <a:r>
+                        <a:rPr sz="1200" b="0">
+                          <a:solidFill>
+                            <a:srgbClr val="555F6B"/>
+                          </a:solidFill>
+                        </a:rPr>
+                        <a:t>TOTAL</a:t>
+                      </a:r>
+                    </a:p>
+                  </a:txBody>
+                  <a:tcPr marL="45720" marR="45720" marT="18288" marB="18288">
+                    <a:solidFill>
+                      <a:srgbClr val="EEF3F8"/>
+                    </a:solidFill>
+                  </a:tcPr>
+                </a:tc>
+                <a:tc>
+                  <a:txBody>
+                    <a:bodyPr/>
+                    <a:lstStyle/>
+                    <a:p>
+                      <a:r>
+                        <a:rPr sz="1200" b="0">
+                          <a:solidFill>
+                            <a:srgbClr val="555F6B"/>
+                          </a:solidFill>
+                        </a:rPr>
+                        <a:t>6.821,44</a:t>
+                      </a:r>
+                    </a:p>
+                  </a:txBody>
+                  <a:tcPr marL="45720" marR="45720" marT="18288" marB="18288">
+                    <a:solidFill>
+                      <a:srgbClr val="EEF3F8"/>
+                    </a:solidFill>
+                  </a:tcPr>
+                </a:tc>
+              </a:tr>
+            </a:tbl>
+          </a:graphicData>
+        </a:graphic>
+      </p:graphicFrame>
     </p:spTree>
   </p:cSld>
   <p:clrMapOvr>
@@ -9522,6 +9777,339 @@
                   <a:srgbClr val="FFFFFF"/>
                 </a:solidFill>
               </a:rPr>
+              <a:t>Phụ lục B. Nguồn số liệu</a:t>
+            </a:r>
+          </a:p>
+        </p:txBody>
+      </p:sp>
+      <p:sp>
+        <p:nvSpPr>
+          <p:cNvPr id="4" name="TextBox 3"/>
+          <p:cNvSpPr txBox="1"/>
+          <p:nvPr/>
+        </p:nvSpPr>
+        <p:spPr>
+          <a:xfrm>
+            <a:off x="11247120" y="6400800"/>
+            <a:ext cx="822960" cy="365760"/>
+          </a:xfrm>
+          <a:prstGeom prst="rect">
+            <a:avLst/>
+          </a:prstGeom>
+          <a:noFill/>
+        </p:spPr>
+        <p:txBody>
+          <a:bodyPr wrap="square">
+            <a:spAutoFit/>
+          </a:bodyPr>
+          <a:lstStyle/>
+          <a:p>
+            <a:pPr algn="r">
+              <a:spcAft>
+                <a:spcPts val="400"/>
+              </a:spcAft>
+            </a:pPr>
+            <a:r>
+              <a:rPr sz="1100" b="0">
+                <a:solidFill>
+                  <a:srgbClr val="555F6B"/>
+                </a:solidFill>
+              </a:rPr>
+              <a:t>B</a:t>
+            </a:r>
+          </a:p>
+        </p:txBody>
+      </p:sp>
+      <p:sp>
+        <p:nvSpPr>
+          <p:cNvPr id="5" name="TextBox 4"/>
+          <p:cNvSpPr txBox="1"/>
+          <p:nvPr/>
+        </p:nvSpPr>
+        <p:spPr>
+          <a:xfrm>
+            <a:off x="457200" y="6400800"/>
+            <a:ext cx="7315200" cy="365760"/>
+          </a:xfrm>
+          <a:prstGeom prst="rect">
+            <a:avLst/>
+          </a:prstGeom>
+          <a:noFill/>
+        </p:spPr>
+        <p:txBody>
+          <a:bodyPr wrap="square">
+            <a:spAutoFit/>
+          </a:bodyPr>
+          <a:lstStyle/>
+          <a:p>
+            <a:pPr algn="l">
+              <a:spcAft>
+                <a:spcPts val="400"/>
+              </a:spcAft>
+            </a:pPr>
+            <a:r>
+              <a:rPr sz="1000" b="0">
+                <a:solidFill>
+                  <a:srgbClr val="555F6B"/>
+                </a:solidFill>
+              </a:rPr>
+              <a:t>G03 · VBot Workplace · GCP asia-southeast1</a:t>
+            </a:r>
+          </a:p>
+        </p:txBody>
+      </p:sp>
+      <p:sp>
+        <p:nvSpPr>
+          <p:cNvPr id="6" name="TextBox 5"/>
+          <p:cNvSpPr txBox="1"/>
+          <p:nvPr/>
+        </p:nvSpPr>
+        <p:spPr>
+          <a:xfrm>
+            <a:off x="457200" y="1188720"/>
+            <a:ext cx="11247120" cy="5120640"/>
+          </a:xfrm>
+          <a:prstGeom prst="rect">
+            <a:avLst/>
+          </a:prstGeom>
+          <a:noFill/>
+        </p:spPr>
+        <p:txBody>
+          <a:bodyPr wrap="square">
+            <a:spAutoFit/>
+          </a:bodyPr>
+          <a:lstStyle/>
+          <a:p>
+            <a:pPr algn="l">
+              <a:spcAft>
+                <a:spcPts val="400"/>
+              </a:spcAft>
+            </a:pPr>
+            <a:r>
+              <a:rPr sz="1300" b="0">
+                <a:solidFill>
+                  <a:srgbClr val="555F6B"/>
+                </a:solidFill>
+              </a:rPr>
+              <a:t>Giá: trang giá chính thức của Google Cloud (GKE, Vertex AI, Cloud SQL, Cloud Storage, Memorystore, Cloud Tasks, KMS, Secret Manager, Observability, Security Command Center, Cloud Armor, VPC network, Cloud Build, Artifact Registry, IAP), đọc ngày 16/10/2026</a:t>
+            </a:r>
+          </a:p>
+          <a:p>
+            <a:pPr algn="l">
+              <a:spcAft>
+                <a:spcPts val="400"/>
+              </a:spcAft>
+            </a:pPr>
+            <a:r>
+              <a:rPr sz="1300" b="0">
+                <a:solidFill>
+                  <a:srgbClr val="555F6B"/>
+                </a:solidFill>
+              </a:rPr>
+              <a:t>So sánh với AWS và Azure: AWS Price List API, Azure Retail Prices API (region ap-southeast-1, southeastasia)</a:t>
+            </a:r>
+          </a:p>
+          <a:p>
+            <a:pPr algn="l">
+              <a:spcAft>
+                <a:spcPts val="400"/>
+              </a:spcAft>
+            </a:pPr>
+            <a:r>
+              <a:rPr sz="1300" b="0">
+                <a:solidFill>
+                  <a:srgbClr val="555F6B"/>
+                </a:solidFill>
+              </a:rPr>
+              <a:t>Tải: Microsoft WorkLab 2025; Dillon et al., Shifting Work Patterns with Generative AI (2025); Radicati 2015; APQC; Brynjolfsson et al. NBER 31161; Graphite Research; Liang et al. 2025; UK DBT Copilot evaluation 2025</a:t>
+            </a:r>
+          </a:p>
+          <a:p>
+            <a:pPr algn="l">
+              <a:spcAft>
+                <a:spcPts val="400"/>
+              </a:spcAft>
+            </a:pPr>
+            <a:r>
+              <a:rPr sz="1300" b="0">
+                <a:solidFill>
+                  <a:srgbClr val="555F6B"/>
+                </a:solidFill>
+              </a:rPr>
+              <a:t>Token mỗi lượt chat (số lần gọi model × token vào / token ra): cấp 1: 2 × 5,5k / 250 · cấp 2: 2 × 18k / 2,5k · cấp 3: 3,5 × 12k / 1k · cấp 4: 8 × 15k / 300 · cấp 5: 1,5 × 4k / 600 + 1 ảnh</a:t>
+            </a:r>
+          </a:p>
+          <a:p>
+            <a:pPr algn="l">
+              <a:spcAft>
+                <a:spcPts val="400"/>
+              </a:spcAft>
+            </a:pPr>
+            <a:r>
+              <a:rPr sz="1300" b="0">
+                <a:solidFill>
+                  <a:srgbClr val="555F6B"/>
+                </a:solidFill>
+              </a:rPr>
+              <a:t>Nguồn token: Azure OpenAI On your data defaults; Vertex RAG Engine; DA-Code; DABstep; MCP-Universe; MCPMark; OpenRouter State of AI 2025; Azure LLM inference trace 2024</a:t>
+            </a:r>
+          </a:p>
+          <a:p>
+            <a:pPr algn="l">
+              <a:spcAft>
+                <a:spcPts val="400"/>
+              </a:spcAft>
+            </a:pPr>
+            <a:r>
+              <a:rPr sz="1300" b="0">
+                <a:solidFill>
+                  <a:srgbClr val="555F6B"/>
+                </a:solidFill>
+              </a:rPr>
+              <a:t>Chất lượng và tốc độ model: Artificial Analysis Intelligence Index v4.3.2</a:t>
+            </a:r>
+          </a:p>
+          <a:p>
+            <a:pPr algn="l">
+              <a:spcAft>
+                <a:spcPts val="400"/>
+              </a:spcAft>
+            </a:pPr>
+            <a:r>
+              <a:rPr sz="1300" b="0">
+                <a:solidFill>
+                  <a:srgbClr val="555F6B"/>
+                </a:solidFill>
+              </a:rPr>
+              <a:t>Lương: ITviec Vietnam IT Salary &amp; Recruitment Market 2024–2025; tỉ giá Vietcombank ngày 16/10/2026</a:t>
+            </a:r>
+          </a:p>
+          <a:p>
+            <a:pPr algn="l">
+              <a:spcAft>
+                <a:spcPts val="400"/>
+              </a:spcAft>
+            </a:pPr>
+            <a:r>
+              <a:rPr sz="1300" b="0">
+                <a:solidFill>
+                  <a:srgbClr val="555F6B"/>
+                </a:solidFill>
+              </a:rPr>
+              <a:t>Connector: Microsoft Graph throttling, Atlassian rate limiting, Notion request limits, Google Workspace API limits</a:t>
+            </a:r>
+          </a:p>
+          <a:p>
+            <a:pPr algn="l">
+              <a:spcAft>
+                <a:spcPts val="400"/>
+              </a:spcAft>
+            </a:pPr>
+            <a:r>
+              <a:rPr sz="1300" b="0">
+                <a:solidFill>
+                  <a:srgbClr val="555F6B"/>
+                </a:solidFill>
+              </a:rPr>
+              <a:t>Chi tiết nghiên cứu: thư mục research/ (usage-benchmarks, task-volume-by-role, token-per-task, r1, r2, r3, r5-r9, r8-r6) và cost_model.py</a:t>
+            </a:r>
+          </a:p>
+        </p:txBody>
+      </p:sp>
+    </p:spTree>
+  </p:cSld>
+  <p:clrMapOvr>
+    <a:masterClrMapping/>
+  </p:clrMapOvr>
+</p:sld>
+</file>
+
+<file path=ppt/slides/slide18.xml><?xml version="1.0" encoding="utf-8"?>
+<p:sld xmlns:a="http://schemas.openxmlformats.org/drawingml/2006/main" xmlns:p="http://schemas.openxmlformats.org/presentationml/2006/main" xmlns:r="http://schemas.openxmlformats.org/officeDocument/2006/relationships">
+  <p:cSld>
+    <p:spTree>
+      <p:nvGrpSpPr>
+        <p:cNvPr id="1" name=""/>
+        <p:cNvGrpSpPr/>
+        <p:nvPr/>
+      </p:nvGrpSpPr>
+      <p:grpSpPr/>
+      <p:sp>
+        <p:nvSpPr>
+          <p:cNvPr id="2" name="Rectangle 1"/>
+          <p:cNvSpPr/>
+          <p:nvPr/>
+        </p:nvSpPr>
+        <p:spPr>
+          <a:xfrm>
+            <a:off x="0" y="0"/>
+            <a:ext cx="12191695" cy="868680"/>
+          </a:xfrm>
+          <a:prstGeom prst="rect">
+            <a:avLst/>
+          </a:prstGeom>
+          <a:solidFill>
+            <a:srgbClr val="1F3A5F"/>
+          </a:solidFill>
+          <a:ln>
+            <a:noFill/>
+          </a:ln>
+        </p:spPr>
+        <p:style>
+          <a:lnRef idx="1">
+            <a:schemeClr val="accent1"/>
+          </a:lnRef>
+          <a:fillRef idx="3">
+            <a:schemeClr val="accent1"/>
+          </a:fillRef>
+          <a:effectRef idx="2">
+            <a:schemeClr val="accent1"/>
+          </a:effectRef>
+          <a:fontRef idx="minor">
+            <a:schemeClr val="lt1"/>
+          </a:fontRef>
+        </p:style>
+        <p:txBody>
+          <a:bodyPr rtlCol="0" anchor="ctr"/>
+          <a:lstStyle/>
+          <a:p>
+            <a:pPr algn="ctr"/>
+          </a:p>
+        </p:txBody>
+      </p:sp>
+      <p:sp>
+        <p:nvSpPr>
+          <p:cNvPr id="3" name="TextBox 2"/>
+          <p:cNvSpPr txBox="1"/>
+          <p:nvPr/>
+        </p:nvSpPr>
+        <p:spPr>
+          <a:xfrm>
+            <a:off x="457200" y="137160"/>
+            <a:ext cx="10515600" cy="640080"/>
+          </a:xfrm>
+          <a:prstGeom prst="rect">
+            <a:avLst/>
+          </a:prstGeom>
+          <a:noFill/>
+        </p:spPr>
+        <p:txBody>
+          <a:bodyPr wrap="square">
+            <a:spAutoFit/>
+          </a:bodyPr>
+          <a:lstStyle/>
+          <a:p>
+            <a:pPr algn="l">
+              <a:spcAft>
+                <a:spcPts val="400"/>
+              </a:spcAft>
+            </a:pPr>
+            <a:r>
+              <a:rPr sz="2600" b="1">
+                <a:solidFill>
+                  <a:srgbClr val="FFFFFF"/>
+                </a:solidFill>
+              </a:rPr>
               <a:t>Phụ lục C. Việc chung của mọi nhân viên: 6,26 nhiệm vụ/ngày</a:t>
             </a:r>
           </a:p>
@@ -10607,7 +11195,7 @@
 </p:sld>
 </file>
 
-<file path=ppt/slides/slide18.xml><?xml version="1.0" encoding="utf-8"?>
+<file path=ppt/slides/slide19.xml><?xml version="1.0" encoding="utf-8"?>
 <p:sld xmlns:a="http://schemas.openxmlformats.org/drawingml/2006/main" xmlns:p="http://schemas.openxmlformats.org/presentationml/2006/main" xmlns:r="http://schemas.openxmlformats.org/officeDocument/2006/relationships">
   <p:cSld>
     <p:spTree>
@@ -18671,7 +19259,7 @@
                   <a:srgbClr val="2E6FB7"/>
                 </a:solidFill>
               </a:rPr>
-              <a:t>Chọn phương án rẻ nhất mà vẫn đạt đủ ràng buộc H1–H8. Đơn vị: USD/tháng</a:t>
+              <a:t>Chọn phương án rẻ nhất mà vẫn đạt đủ ràng buộc H1–H8. Đơn vị: USD/tháng. Cách tính từng con số: slide 5b</a:t>
             </a:r>
           </a:p>
         </p:txBody>
@@ -18709,7 +19297,7 @@
                   <a:srgbClr val="555F6B"/>
                 </a:solidFill>
               </a:rPr>
-              <a:t>5</a:t>
+              <a:t>5a</a:t>
             </a:r>
           </a:p>
         </p:txBody>
@@ -19600,7 +20188,7 @@
                   <a:srgbClr val="FFFFFF"/>
                 </a:solidFill>
               </a:rPr>
-              <a:t>6. Agent chỉ thấy những gì user được thấy (H2)</a:t>
+              <a:t>5. Cách tính: đơn giá niêm yết × khối lượng tải</a:t>
             </a:r>
           </a:p>
         </p:txBody>
@@ -19638,7 +20226,7 @@
                   <a:srgbClr val="2E6FB7"/>
                 </a:solidFill>
               </a:rPr>
-              <a:t>Agent dùng 11 connector (Google, Microsoft, Atlassian, Notion) bằng quyền OAuth của chính user</a:t>
+              <a:t>Mỗi con số ở slide 5a = đơn giá của dịch vụ × khối lượng ước lượng ở slide 1b. Đơn vị: USD/tháng; 1 tháng = 730 giờ</a:t>
             </a:r>
           </a:p>
         </p:txBody>
@@ -19676,7 +20264,7 @@
                   <a:srgbClr val="555F6B"/>
                 </a:solidFill>
               </a:rPr>
-              <a:t>6</a:t>
+              <a:t>5b</a:t>
             </a:r>
           </a:p>
         </p:txBody>
@@ -19719,16 +20307,498 @@
           </a:p>
         </p:txBody>
       </p:sp>
-      <p:sp>
-        <p:nvSpPr>
-          <p:cNvPr id="7" name="TextBox 6"/>
+      <p:graphicFrame>
+        <p:nvGraphicFramePr>
+          <p:cNvPr id="7" name="Table 6"/>
+          <p:cNvGraphicFramePr>
+            <a:graphicFrameLocks noGrp="1"/>
+          </p:cNvGraphicFramePr>
+          <p:nvPr/>
+        </p:nvGraphicFramePr>
+        <p:xfrm>
+          <a:off x="457200" y="1371600"/>
+          <a:ext cx="11247120" cy="3968496"/>
+        </p:xfrm>
+        <a:graphic>
+          <a:graphicData uri="http://schemas.openxmlformats.org/drawingml/2006/table">
+            <a:tbl>
+              <a:tblPr firstRow="1" bandRow="1">
+                <a:tableStyleId>{5C22544A-7EE6-4342-B048-85BDC9FD1C3A}</a:tableStyleId>
+              </a:tblPr>
+              <a:tblGrid>
+                <a:gridCol w="1554480"/>
+                <a:gridCol w="4480560"/>
+                <a:gridCol w="5212080"/>
+              </a:tblGrid>
+              <a:tr h="566928">
+                <a:tc>
+                  <a:txBody>
+                    <a:bodyPr/>
+                    <a:lstStyle/>
+                    <a:p>
+                      <a:r>
+                        <a:rPr sz="1200" b="1">
+                          <a:solidFill>
+                            <a:srgbClr val="FFFFFF"/>
+                          </a:solidFill>
+                        </a:rPr>
+                        <a:t>Quyết định</a:t>
+                      </a:r>
+                    </a:p>
+                  </a:txBody>
+                  <a:tcPr marL="45720" marR="45720" marT="18288" marB="18288">
+                    <a:solidFill>
+                      <a:srgbClr val="2E6FB7"/>
+                    </a:solidFill>
+                  </a:tcPr>
+                </a:tc>
+                <a:tc>
+                  <a:txBody>
+                    <a:bodyPr/>
+                    <a:lstStyle/>
+                    <a:p>
+                      <a:r>
+                        <a:rPr sz="1200" b="1">
+                          <a:solidFill>
+                            <a:srgbClr val="FFFFFF"/>
+                          </a:solidFill>
+                        </a:rPr>
+                        <a:t>Phương án chọn: cách tính</a:t>
+                      </a:r>
+                    </a:p>
+                  </a:txBody>
+                  <a:tcPr marL="45720" marR="45720" marT="18288" marB="18288">
+                    <a:solidFill>
+                      <a:srgbClr val="2E6FB7"/>
+                    </a:solidFill>
+                  </a:tcPr>
+                </a:tc>
+                <a:tc>
+                  <a:txBody>
+                    <a:bodyPr/>
+                    <a:lstStyle/>
+                    <a:p>
+                      <a:r>
+                        <a:rPr sz="1200" b="1">
+                          <a:solidFill>
+                            <a:srgbClr val="FFFFFF"/>
+                          </a:solidFill>
+                        </a:rPr>
+                        <a:t>Phương án so sánh: cách tính</a:t>
+                      </a:r>
+                    </a:p>
+                  </a:txBody>
+                  <a:tcPr marL="45720" marR="45720" marT="18288" marB="18288">
+                    <a:solidFill>
+                      <a:srgbClr val="2E6FB7"/>
+                    </a:solidFill>
+                  </a:tcPr>
+                </a:tc>
+              </a:tr>
+              <a:tr h="566928">
+                <a:tc>
+                  <a:txBody>
+                    <a:bodyPr/>
+                    <a:lstStyle/>
+                    <a:p>
+                      <a:r>
+                        <a:rPr sz="1200" b="0">
+                          <a:solidFill>
+                            <a:srgbClr val="555F6B"/>
+                          </a:solidFill>
+                        </a:rPr>
+                        <a:t>Cloud chính</a:t>
+                      </a:r>
+                    </a:p>
+                  </a:txBody>
+                  <a:tcPr marL="45720" marR="45720" marT="18288" marB="18288">
+                    <a:solidFill>
+                      <a:srgbClr val="EEF3F8"/>
+                    </a:solidFill>
+                  </a:tcPr>
+                </a:tc>
+                <a:tc>
+                  <a:txBody>
+                    <a:bodyPr/>
+                    <a:lstStyle/>
+                    <a:p>
+                      <a:r>
+                        <a:rPr sz="1200" b="0">
+                          <a:solidFill>
+                            <a:srgbClr val="555F6B"/>
+                          </a:solidFill>
+                        </a:rPr>
+                        <a:t>GCP 6.821 = tổng 20 dòng của báo giá (Phụ lục A)</a:t>
+                      </a:r>
+                    </a:p>
+                  </a:txBody>
+                  <a:tcPr marL="45720" marR="45720" marT="18288" marB="18288">
+                    <a:solidFill>
+                      <a:srgbClr val="EEF3F8"/>
+                    </a:solidFill>
+                  </a:tcPr>
+                </a:tc>
+                <a:tc>
+                  <a:txBody>
+                    <a:bodyPr/>
+                    <a:lstStyle/>
+                    <a:p>
+                      <a:r>
+                        <a:rPr sz="1200" b="0">
+                          <a:solidFill>
+                            <a:srgbClr val="555F6B"/>
+                          </a:solidFill>
+                        </a:rPr>
+                        <a:t>AWS 8.643, Azure 14.484: cùng khối lượng, tính theo giá của AWS, Azure. Nếu bỏ dòng governance, 3 cloud chênh nhau dưới 8%. Chênh lệch nằm ở guardrail + che PII: GCP 281, AWS ~1.910, Azure ~7.534</a:t>
+                      </a:r>
+                    </a:p>
+                  </a:txBody>
+                  <a:tcPr marL="45720" marR="45720" marT="18288" marB="18288">
+                    <a:solidFill>
+                      <a:srgbClr val="EEF3F8"/>
+                    </a:solidFill>
+                  </a:tcPr>
+                </a:tc>
+              </a:tr>
+              <a:tr h="566928">
+                <a:tc>
+                  <a:txBody>
+                    <a:bodyPr/>
+                    <a:lstStyle/>
+                    <a:p>
+                      <a:r>
+                        <a:rPr sz="1200" b="0">
+                          <a:solidFill>
+                            <a:srgbClr val="555F6B"/>
+                          </a:solidFill>
+                        </a:rPr>
+                        <a:t>LLM gateway</a:t>
+                      </a:r>
+                    </a:p>
+                  </a:txBody>
+                  <a:tcPr marL="45720" marR="45720" marT="18288" marB="18288">
+                    <a:solidFill>
+                      <a:srgbClr val="FFFFFF"/>
+                    </a:solidFill>
+                  </a:tcPr>
+                </a:tc>
+                <a:tc>
+                  <a:txBody>
+                    <a:bodyPr/>
+                    <a:lstStyle/>
+                    <a:p>
+                      <a:r>
+                        <a:rPr sz="1200" b="0">
+                          <a:solidFill>
+                            <a:srgbClr val="555F6B"/>
+                          </a:solidFill>
+                        </a:rPr>
+                        <a:t>LiteLLM là phần mềm miễn phí. 2 pod chạy trong cụm GKE, tiền máy đã nằm trong dòng compute</a:t>
+                      </a:r>
+                    </a:p>
+                  </a:txBody>
+                  <a:tcPr marL="45720" marR="45720" marT="18288" marB="18288">
+                    <a:solidFill>
+                      <a:srgbClr val="FFFFFF"/>
+                    </a:solidFill>
+                  </a:tcPr>
+                </a:tc>
+                <a:tc>
+                  <a:txBody>
+                    <a:bodyPr/>
+                    <a:lstStyle/>
+                    <a:p>
+                      <a:r>
+                        <a:rPr sz="1200" b="0">
+                          <a:solidFill>
+                            <a:srgbClr val="555F6B"/>
+                          </a:solidFill>
+                        </a:rPr>
+                        <a:t>Apigee: môi trường Intermediate 1.460 + phí theo lượt gọi model (100 USD/1 triệu lượt) ≈ 1.595. Azure APIM Standard v2: 0,96 USD/giờ × 730 giờ ≈ 700</a:t>
+                      </a:r>
+                    </a:p>
+                  </a:txBody>
+                  <a:tcPr marL="45720" marR="45720" marT="18288" marB="18288">
+                    <a:solidFill>
+                      <a:srgbClr val="FFFFFF"/>
+                    </a:solidFill>
+                  </a:tcPr>
+                </a:tc>
+              </a:tr>
+              <a:tr h="566928">
+                <a:tc>
+                  <a:txBody>
+                    <a:bodyPr/>
+                    <a:lstStyle/>
+                    <a:p>
+                      <a:r>
+                        <a:rPr sz="1200" b="0">
+                          <a:solidFill>
+                            <a:srgbClr val="555F6B"/>
+                          </a:solidFill>
+                        </a:rPr>
+                        <a:t>Tìm kiếm vector</a:t>
+                      </a:r>
+                    </a:p>
+                  </a:txBody>
+                  <a:tcPr marL="45720" marR="45720" marT="18288" marB="18288">
+                    <a:solidFill>
+                      <a:srgbClr val="EEF3F8"/>
+                    </a:solidFill>
+                  </a:tcPr>
+                </a:tc>
+                <a:tc>
+                  <a:txBody>
+                    <a:bodyPr/>
+                    <a:lstStyle/>
+                    <a:p>
+                      <a:r>
+                        <a:rPr sz="1200" b="0">
+                          <a:solidFill>
+                            <a:srgbClr val="555F6B"/>
+                          </a:solidFill>
+                        </a:rPr>
+                        <a:t>pgvector là extension của Postgres, chạy trong database đã có (467 USD), chỉ tốn thêm ít dung lượng</a:t>
+                      </a:r>
+                    </a:p>
+                  </a:txBody>
+                  <a:tcPr marL="45720" marR="45720" marT="18288" marB="18288">
+                    <a:solidFill>
+                      <a:srgbClr val="EEF3F8"/>
+                    </a:solidFill>
+                  </a:tcPr>
+                </a:tc>
+                <a:tc>
+                  <a:txBody>
+                    <a:bodyPr/>
+                    <a:lstStyle/>
+                    <a:p>
+                      <a:r>
+                        <a:rPr sz="1200" b="0">
+                          <a:solidFill>
+                            <a:srgbClr val="555F6B"/>
+                          </a:solidFill>
+                        </a:rPr>
+                        <a:t>Vertex Vector Search: tối thiểu 1 máy e2-standard-2 chạy 24/7 ≈ 84. OpenSearch: tối thiểu 2 OCU × 0,283 USD/giờ × 730 giờ ≈ 413</a:t>
+                      </a:r>
+                    </a:p>
+                  </a:txBody>
+                  <a:tcPr marL="45720" marR="45720" marT="18288" marB="18288">
+                    <a:solidFill>
+                      <a:srgbClr val="EEF3F8"/>
+                    </a:solidFill>
+                  </a:tcPr>
+                </a:tc>
+              </a:tr>
+              <a:tr h="566928">
+                <a:tc>
+                  <a:txBody>
+                    <a:bodyPr/>
+                    <a:lstStyle/>
+                    <a:p>
+                      <a:r>
+                        <a:rPr sz="1200" b="0">
+                          <a:solidFill>
+                            <a:srgbClr val="555F6B"/>
+                          </a:solidFill>
+                        </a:rPr>
+                        <a:t>Cất token OAuth</a:t>
+                      </a:r>
+                    </a:p>
+                  </a:txBody>
+                  <a:tcPr marL="45720" marR="45720" marT="18288" marB="18288">
+                    <a:solidFill>
+                      <a:srgbClr val="FFFFFF"/>
+                    </a:solidFill>
+                  </a:tcPr>
+                </a:tc>
+                <a:tc>
+                  <a:txBody>
+                    <a:bodyPr/>
+                    <a:lstStyle/>
+                    <a:p>
+                      <a:r>
+                        <a:rPr sz="1200" b="0">
+                          <a:solidFill>
+                            <a:srgbClr val="555F6B"/>
+                          </a:solidFill>
+                        </a:rPr>
+                        <a:t>3 khóa KMS × 0,06 + 760.000 lần mã hóa/giải mã × 0,03 USD/10.000 lần + 20 secret hệ thống ≈ 4</a:t>
+                      </a:r>
+                    </a:p>
+                  </a:txBody>
+                  <a:tcPr marL="45720" marR="45720" marT="18288" marB="18288">
+                    <a:solidFill>
+                      <a:srgbClr val="FFFFFF"/>
+                    </a:solidFill>
+                  </a:tcPr>
+                </a:tc>
+                <a:tc>
+                  <a:txBody>
+                    <a:bodyPr/>
+                    <a:lstStyle/>
+                    <a:p>
+                      <a:r>
+                        <a:rPr sz="1200" b="0">
+                          <a:solidFill>
+                            <a:srgbClr val="555F6B"/>
+                          </a:solidFill>
+                        </a:rPr>
+                        <a:t>Mỗi token một secret: 2.000 user × 6 connector = 12.000 secret × 0,06 USD ≈ 720</a:t>
+                      </a:r>
+                    </a:p>
+                  </a:txBody>
+                  <a:tcPr marL="45720" marR="45720" marT="18288" marB="18288">
+                    <a:solidFill>
+                      <a:srgbClr val="FFFFFF"/>
+                    </a:solidFill>
+                  </a:tcPr>
+                </a:tc>
+              </a:tr>
+              <a:tr h="566928">
+                <a:tc>
+                  <a:txBody>
+                    <a:bodyPr/>
+                    <a:lstStyle/>
+                    <a:p>
+                      <a:r>
+                        <a:rPr sz="1200" b="0">
+                          <a:solidFill>
+                            <a:srgbClr val="555F6B"/>
+                          </a:solidFill>
+                        </a:rPr>
+                        <a:t>Sandbox</a:t>
+                      </a:r>
+                    </a:p>
+                  </a:txBody>
+                  <a:tcPr marL="45720" marR="45720" marT="18288" marB="18288">
+                    <a:solidFill>
+                      <a:srgbClr val="EEF3F8"/>
+                    </a:solidFill>
+                  </a:tcPr>
+                </a:tc>
+                <a:tc>
+                  <a:txBody>
+                    <a:bodyPr/>
+                    <a:lstStyle/>
+                    <a:p>
+                      <a:r>
+                        <a:rPr sz="1200" b="0">
+                          <a:solidFill>
+                            <a:srgbClr val="555F6B"/>
+                          </a:solidFill>
+                        </a:rPr>
+                        <a:t>140.800 lượt × 2 phút = 4.693 vCPU-giờ × 0,0549 + 9.386 GB-giờ × 0,0061 ≈ 315</a:t>
+                      </a:r>
+                    </a:p>
+                  </a:txBody>
+                  <a:tcPr marL="45720" marR="45720" marT="18288" marB="18288">
+                    <a:solidFill>
+                      <a:srgbClr val="EEF3F8"/>
+                    </a:solidFill>
+                  </a:tcPr>
+                </a:tc>
+                <a:tc>
+                  <a:txBody>
+                    <a:bodyPr/>
+                    <a:lstStyle/>
+                    <a:p>
+                      <a:r>
+                        <a:rPr sz="1200" b="0">
+                          <a:solidFill>
+                            <a:srgbClr val="555F6B"/>
+                          </a:solidFill>
+                        </a:rPr>
+                        <a:t>Cùng số giờ, theo giá Agent Engine (0,085 USD/vCPU-giờ) ≈ 483; AgentCore (0,0895 USD/vCPU-giờ) ≈ 509</a:t>
+                      </a:r>
+                    </a:p>
+                  </a:txBody>
+                  <a:tcPr marL="45720" marR="45720" marT="18288" marB="18288">
+                    <a:solidFill>
+                      <a:srgbClr val="EEF3F8"/>
+                    </a:solidFill>
+                  </a:tcPr>
+                </a:tc>
+              </a:tr>
+              <a:tr h="566928">
+                <a:tc>
+                  <a:txBody>
+                    <a:bodyPr/>
+                    <a:lstStyle/>
+                    <a:p>
+                      <a:r>
+                        <a:rPr sz="1200" b="0">
+                          <a:solidFill>
+                            <a:srgbClr val="555F6B"/>
+                          </a:solidFill>
+                        </a:rPr>
+                        <a:t>Guardrail</a:t>
+                      </a:r>
+                    </a:p>
+                  </a:txBody>
+                  <a:tcPr marL="45720" marR="45720" marT="18288" marB="18288">
+                    <a:solidFill>
+                      <a:srgbClr val="FFFFFF"/>
+                    </a:solidFill>
+                  </a:tcPr>
+                </a:tc>
+                <a:tc>
+                  <a:txBody>
+                    <a:bodyPr/>
+                    <a:lstStyle/>
+                    <a:p>
+                      <a:r>
+                        <a:rPr sz="1200" b="0">
+                          <a:solidFill>
+                            <a:srgbClr val="555F6B"/>
+                          </a:solidFill>
+                        </a:rPr>
+                        <a:t>Chỉ quét text mới: 2,81 tỉ token/tháng × 0,10 USD/1 triệu token ≈ 281</a:t>
+                      </a:r>
+                    </a:p>
+                  </a:txBody>
+                  <a:tcPr marL="45720" marR="45720" marT="18288" marB="18288">
+                    <a:solidFill>
+                      <a:srgbClr val="FFFFFF"/>
+                    </a:solidFill>
+                  </a:tcPr>
+                </a:tc>
+                <a:tc>
+                  <a:txBody>
+                    <a:bodyPr/>
+                    <a:lstStyle/>
+                    <a:p>
+                      <a:r>
+                        <a:rPr sz="1200" b="0">
+                          <a:solidFill>
+                            <a:srgbClr val="555F6B"/>
+                          </a:solidFill>
+                        </a:rPr>
+                        <a:t>Quét toàn bộ token: (12,19 + 0,79) tỉ token × 0,10 USD/1 triệu token ≈ 1.298</a:t>
+                      </a:r>
+                    </a:p>
+                  </a:txBody>
+                  <a:tcPr marL="45720" marR="45720" marT="18288" marB="18288">
+                    <a:solidFill>
+                      <a:srgbClr val="FFFFFF"/>
+                    </a:solidFill>
+                  </a:tcPr>
+                </a:tc>
+              </a:tr>
+            </a:tbl>
+          </a:graphicData>
+        </a:graphic>
+      </p:graphicFrame>
+      <p:sp>
+        <p:nvSpPr>
+          <p:cNvPr id="8" name="TextBox 7"/>
           <p:cNvSpPr txBox="1"/>
           <p:nvPr/>
         </p:nvSpPr>
         <p:spPr>
           <a:xfrm>
-            <a:off x="457200" y="1463040"/>
-            <a:ext cx="5577840" cy="4389120"/>
+            <a:off x="457200" y="5623560"/>
+            <a:ext cx="11247120" cy="731520"/>
           </a:xfrm>
           <a:prstGeom prst="rect">
             <a:avLst/>
@@ -19747,12 +20817,12 @@
               </a:spcAft>
             </a:pPr>
             <a:r>
-              <a:rPr sz="1500" b="1">
+              <a:rPr sz="1100" b="0">
                 <a:solidFill>
                   <a:srgbClr val="555F6B"/>
                 </a:solidFill>
               </a:rPr>
-              <a:t>Đăng nhập</a:t>
+              <a:t>Giá niêm yết tại Singapore, đọc ngày 16/10/2026, chưa VAT. Sandbox tính theo trần 2 phút/lượt nên là cận trên.</a:t>
             </a:r>
           </a:p>
           <a:p>
@@ -19762,238 +20832,12 @@
               </a:spcAft>
             </a:pPr>
             <a:r>
-              <a:rPr sz="1500" b="0">
+              <a:rPr sz="1100" b="0">
                 <a:solidFill>
                   <a:srgbClr val="555F6B"/>
                 </a:solidFill>
               </a:rPr>
-              <a:t>SSO bằng tài khoản tập đoàn có sẵn, bắt buộc MFA</a:t>
-            </a:r>
-          </a:p>
-          <a:p>
-            <a:pPr algn="l">
-              <a:spcAft>
-                <a:spcPts val="400"/>
-              </a:spcAft>
-            </a:pPr>
-            <a:r>
-              <a:rPr sz="1500" b="0">
-                <a:solidFill>
-                  <a:srgbClr val="555F6B"/>
-                </a:solidFill>
-              </a:rPr>
-              <a:t>Phân quyền chức năng theo nhóm (ví dụ: chỉ IT dùng sandbox hạng lớn)</a:t>
-            </a:r>
-          </a:p>
-          <a:p>
-            <a:pPr algn="l">
-              <a:spcAft>
-                <a:spcPts val="400"/>
-              </a:spcAft>
-            </a:pPr>
-            <a:r>
-              <a:rPr sz="1500" b="1">
-                <a:solidFill>
-                  <a:srgbClr val="555F6B"/>
-                </a:solidFill>
-              </a:rPr>
-              <a:t>Agent mượn quyền của user (OAuth)</a:t>
-            </a:r>
-          </a:p>
-          <a:p>
-            <a:pPr algn="l">
-              <a:spcAft>
-                <a:spcPts val="400"/>
-              </a:spcAft>
-            </a:pPr>
-            <a:r>
-              <a:rPr sz="1500" b="0">
-                <a:solidFill>
-                  <a:srgbClr val="555F6B"/>
-                </a:solidFill>
-              </a:rPr>
-              <a:t>Mỗi user tự cho phép từng SaaS; mặc định chỉ quyền đọc</a:t>
-            </a:r>
-          </a:p>
-          <a:p>
-            <a:pPr algn="l">
-              <a:spcAft>
-                <a:spcPts val="400"/>
-              </a:spcAft>
-            </a:pPr>
-            <a:r>
-              <a:rPr sz="1500" b="0">
-                <a:solidFill>
-                  <a:srgbClr val="555F6B"/>
-                </a:solidFill>
-              </a:rPr>
-              <a:t>Quyền ghi (gửi email, tạo ticket) chỉ xin khi cần</a:t>
-            </a:r>
-          </a:p>
-          <a:p>
-            <a:pPr algn="l">
-              <a:spcAft>
-                <a:spcPts val="400"/>
-              </a:spcAft>
-            </a:pPr>
-            <a:r>
-              <a:rPr sz="1500" b="0">
-                <a:solidFill>
-                  <a:srgbClr val="555F6B"/>
-                </a:solidFill>
-              </a:rPr>
-              <a:t>Không dùng tài khoản dịch vụ có quyền rộng</a:t>
-            </a:r>
-          </a:p>
-        </p:txBody>
-      </p:sp>
-      <p:sp>
-        <p:nvSpPr>
-          <p:cNvPr id="8" name="TextBox 7"/>
-          <p:cNvSpPr txBox="1"/>
-          <p:nvPr/>
-        </p:nvSpPr>
-        <p:spPr>
-          <a:xfrm>
-            <a:off x="6309360" y="1463040"/>
-            <a:ext cx="5486400" cy="4389120"/>
-          </a:xfrm>
-          <a:prstGeom prst="rect">
-            <a:avLst/>
-          </a:prstGeom>
-          <a:noFill/>
-        </p:spPr>
-        <p:txBody>
-          <a:bodyPr wrap="square">
-            <a:spAutoFit/>
-          </a:bodyPr>
-          <a:lstStyle/>
-          <a:p>
-            <a:pPr algn="l">
-              <a:spcAft>
-                <a:spcPts val="400"/>
-              </a:spcAft>
-            </a:pPr>
-            <a:r>
-              <a:rPr sz="1500" b="1">
-                <a:solidFill>
-                  <a:srgbClr val="555F6B"/>
-                </a:solidFill>
-              </a:rPr>
-              <a:t>Token được cất an toàn</a:t>
-            </a:r>
-          </a:p>
-          <a:p>
-            <a:pPr algn="l">
-              <a:spcAft>
-                <a:spcPts val="400"/>
-              </a:spcAft>
-            </a:pPr>
-            <a:r>
-              <a:rPr sz="1500" b="0">
-                <a:solidFill>
-                  <a:srgbClr val="555F6B"/>
-                </a:solidFill>
-              </a:rPr>
-              <a:t>Token OAuth được mã hóa bằng khóa trong Cloud KMS, lưu trong Postgres</a:t>
-            </a:r>
-          </a:p>
-          <a:p>
-            <a:pPr algn="l">
-              <a:spcAft>
-                <a:spcPts val="400"/>
-              </a:spcAft>
-            </a:pPr>
-            <a:r>
-              <a:rPr sz="1500" b="0">
-                <a:solidFill>
-                  <a:srgbClr val="555F6B"/>
-                </a:solidFill>
-              </a:rPr>
-              <a:t>Chỉ worker được giải mã, và chỉ cho đúng user của request. Mỗi lần giải mã đều ghi audit</a:t>
-            </a:r>
-          </a:p>
-          <a:p>
-            <a:pPr algn="l">
-              <a:spcAft>
-                <a:spcPts val="400"/>
-              </a:spcAft>
-            </a:pPr>
-            <a:r>
-              <a:rPr sz="1500" b="1">
-                <a:solidFill>
-                  <a:srgbClr val="555F6B"/>
-                </a:solidFill>
-              </a:rPr>
-              <a:t>Tài liệu giữ quyền gốc</a:t>
-            </a:r>
-          </a:p>
-          <a:p>
-            <a:pPr algn="l">
-              <a:spcAft>
-                <a:spcPts val="400"/>
-              </a:spcAft>
-            </a:pPr>
-            <a:r>
-              <a:rPr sz="1500" b="0">
-                <a:solidFill>
-                  <a:srgbClr val="555F6B"/>
-                </a:solidFill>
-              </a:rPr>
-              <a:t>Mail, lịch, Jira: agent gọi search API của SaaS bằng token của user, nên SaaS tự lọc quyền</a:t>
-            </a:r>
-          </a:p>
-          <a:p>
-            <a:pPr algn="l">
-              <a:spcAft>
-                <a:spcPts val="400"/>
-              </a:spcAft>
-            </a:pPr>
-            <a:r>
-              <a:rPr sz="1500" b="0">
-                <a:solidFill>
-                  <a:srgbClr val="555F6B"/>
-                </a:solidFill>
-              </a:rPr>
-              <a:t>Tài liệu chung đã index: mỗi đoạn ghi nhóm được xem; mọi truy vấn lọc theo nhóm của user</a:t>
-            </a:r>
-          </a:p>
-        </p:txBody>
-      </p:sp>
-      <p:sp>
-        <p:nvSpPr>
-          <p:cNvPr id="9" name="TextBox 8"/>
-          <p:cNvSpPr txBox="1"/>
-          <p:nvPr/>
-        </p:nvSpPr>
-        <p:spPr>
-          <a:xfrm>
-            <a:off x="457200" y="5852160"/>
-            <a:ext cx="11247120" cy="457200"/>
-          </a:xfrm>
-          <a:prstGeom prst="rect">
-            <a:avLst/>
-          </a:prstGeom>
-          <a:noFill/>
-        </p:spPr>
-        <p:txBody>
-          <a:bodyPr wrap="square">
-            <a:spAutoFit/>
-          </a:bodyPr>
-          <a:lstStyle/>
-          <a:p>
-            <a:pPr algn="l">
-              <a:spcAft>
-                <a:spcPts val="400"/>
-              </a:spcAft>
-            </a:pPr>
-            <a:r>
-              <a:rPr sz="1100" b="0">
-                <a:solidFill>
-                  <a:srgbClr val="555F6B"/>
-                </a:solidFill>
-              </a:rPr>
-              <a:t>API của 11 SaaS không tính phí theo lượt; tập đoàn đã có license SaaS. Rate limit của SaaS: slide 12.</a:t>
+              <a:t>Đơn giá và khối lượng của từng dòng: cột Ghi chú và Bằng chứng trong G03_baogia.xlsx.</a:t>
             </a:r>
           </a:p>
         </p:txBody>
@@ -20092,7 +20936,7 @@
                   <a:srgbClr val="FFFFFF"/>
                 </a:solidFill>
               </a:rPr>
-              <a:t>7. File của user A không lộ sang user B (H3)</a:t>
+              <a:t>6. Agent chỉ thấy những gì user được thấy (H2)</a:t>
             </a:r>
           </a:p>
         </p:txBody>
@@ -20130,7 +20974,7 @@
                   <a:srgbClr val="2E6FB7"/>
                 </a:solidFill>
               </a:rPr>
-              <a:t>"Agent của A có đọc được file của B không?" Không, vì có 4 lớp chặn:</a:t>
+              <a:t>Agent dùng 11 connector (Google, Microsoft, Atlassian, Notion) bằng quyền OAuth của chính user</a:t>
             </a:r>
           </a:p>
         </p:txBody>
@@ -20168,7 +21012,7 @@
                   <a:srgbClr val="555F6B"/>
                 </a:solidFill>
               </a:rPr>
-              <a:t>7</a:t>
+              <a:t>6</a:t>
             </a:r>
           </a:p>
         </p:txBody>
@@ -20211,262 +21055,16 @@
           </a:p>
         </p:txBody>
       </p:sp>
-      <p:graphicFrame>
-        <p:nvGraphicFramePr>
-          <p:cNvPr id="7" name="Table 6"/>
-          <p:cNvGraphicFramePr>
-            <a:graphicFrameLocks noGrp="1"/>
-          </p:cNvGraphicFramePr>
-          <p:nvPr/>
-        </p:nvGraphicFramePr>
-        <p:xfrm>
-          <a:off x="457200" y="1371600"/>
-          <a:ext cx="5669280" cy="3200400"/>
-        </p:xfrm>
-        <a:graphic>
-          <a:graphicData uri="http://schemas.openxmlformats.org/drawingml/2006/table">
-            <a:tbl>
-              <a:tblPr firstRow="1" bandRow="1">
-                <a:tableStyleId>{5C22544A-7EE6-4342-B048-85BDC9FD1C3A}</a:tableStyleId>
-              </a:tblPr>
-              <a:tblGrid>
-                <a:gridCol w="1188720"/>
-                <a:gridCol w="4480560"/>
-              </a:tblGrid>
-              <a:tr h="640080">
-                <a:tc>
-                  <a:txBody>
-                    <a:bodyPr/>
-                    <a:lstStyle/>
-                    <a:p>
-                      <a:r>
-                        <a:rPr sz="1400" b="1">
-                          <a:solidFill>
-                            <a:srgbClr val="FFFFFF"/>
-                          </a:solidFill>
-                        </a:rPr>
-                        <a:t>Lớp</a:t>
-                      </a:r>
-                    </a:p>
-                  </a:txBody>
-                  <a:tcPr marL="45720" marR="45720" marT="18288" marB="18288">
-                    <a:solidFill>
-                      <a:srgbClr val="2E6FB7"/>
-                    </a:solidFill>
-                  </a:tcPr>
-                </a:tc>
-                <a:tc>
-                  <a:txBody>
-                    <a:bodyPr/>
-                    <a:lstStyle/>
-                    <a:p>
-                      <a:r>
-                        <a:rPr sz="1400" b="1">
-                          <a:solidFill>
-                            <a:srgbClr val="FFFFFF"/>
-                          </a:solidFill>
-                        </a:rPr>
-                        <a:t>Cách chặn</a:t>
-                      </a:r>
-                    </a:p>
-                  </a:txBody>
-                  <a:tcPr marL="45720" marR="45720" marT="18288" marB="18288">
-                    <a:solidFill>
-                      <a:srgbClr val="2E6FB7"/>
-                    </a:solidFill>
-                  </a:tcPr>
-                </a:tc>
-              </a:tr>
-              <a:tr h="640080">
-                <a:tc>
-                  <a:txBody>
-                    <a:bodyPr/>
-                    <a:lstStyle/>
-                    <a:p>
-                      <a:r>
-                        <a:rPr sz="1400" b="0">
-                          <a:solidFill>
-                            <a:srgbClr val="555F6B"/>
-                          </a:solidFill>
-                        </a:rPr>
-                        <a:t>Lưu trữ</a:t>
-                      </a:r>
-                    </a:p>
-                  </a:txBody>
-                  <a:tcPr marL="45720" marR="45720" marT="18288" marB="18288">
-                    <a:solidFill>
-                      <a:srgbClr val="EEF3F8"/>
-                    </a:solidFill>
-                  </a:tcPr>
-                </a:tc>
-                <a:tc>
-                  <a:txBody>
-                    <a:bodyPr/>
-                    <a:lstStyle/>
-                    <a:p>
-                      <a:r>
-                        <a:rPr sz="1400" b="0">
-                          <a:solidFill>
-                            <a:srgbClr val="555F6B"/>
-                          </a:solidFill>
-                        </a:rPr>
-                        <a:t>Mỗi user một thư mục riêng; chỉ app có quyền vào bucket</a:t>
-                      </a:r>
-                    </a:p>
-                  </a:txBody>
-                  <a:tcPr marL="45720" marR="45720" marT="18288" marB="18288">
-                    <a:solidFill>
-                      <a:srgbClr val="EEF3F8"/>
-                    </a:solidFill>
-                  </a:tcPr>
-                </a:tc>
-              </a:tr>
-              <a:tr h="640080">
-                <a:tc>
-                  <a:txBody>
-                    <a:bodyPr/>
-                    <a:lstStyle/>
-                    <a:p>
-                      <a:r>
-                        <a:rPr sz="1400" b="0">
-                          <a:solidFill>
-                            <a:srgbClr val="555F6B"/>
-                          </a:solidFill>
-                        </a:rPr>
-                        <a:t>Database</a:t>
-                      </a:r>
-                    </a:p>
-                  </a:txBody>
-                  <a:tcPr marL="45720" marR="45720" marT="18288" marB="18288">
-                    <a:solidFill>
-                      <a:srgbClr val="FFFFFF"/>
-                    </a:solidFill>
-                  </a:tcPr>
-                </a:tc>
-                <a:tc>
-                  <a:txBody>
-                    <a:bodyPr/>
-                    <a:lstStyle/>
-                    <a:p>
-                      <a:r>
-                        <a:rPr sz="1400" b="0">
-                          <a:solidFill>
-                            <a:srgbClr val="555F6B"/>
-                          </a:solidFill>
-                        </a:rPr>
-                        <a:t>Postgres tự lọc dòng theo người sở hữu (Row-Level Security)</a:t>
-                      </a:r>
-                    </a:p>
-                  </a:txBody>
-                  <a:tcPr marL="45720" marR="45720" marT="18288" marB="18288">
-                    <a:solidFill>
-                      <a:srgbClr val="FFFFFF"/>
-                    </a:solidFill>
-                  </a:tcPr>
-                </a:tc>
-              </a:tr>
-              <a:tr h="640080">
-                <a:tc>
-                  <a:txBody>
-                    <a:bodyPr/>
-                    <a:lstStyle/>
-                    <a:p>
-                      <a:r>
-                        <a:rPr sz="1400" b="0">
-                          <a:solidFill>
-                            <a:srgbClr val="555F6B"/>
-                          </a:solidFill>
-                        </a:rPr>
-                        <a:t>Tìm kiếm</a:t>
-                      </a:r>
-                    </a:p>
-                  </a:txBody>
-                  <a:tcPr marL="45720" marR="45720" marT="18288" marB="18288">
-                    <a:solidFill>
-                      <a:srgbClr val="EEF3F8"/>
-                    </a:solidFill>
-                  </a:tcPr>
-                </a:tc>
-                <a:tc>
-                  <a:txBody>
-                    <a:bodyPr/>
-                    <a:lstStyle/>
-                    <a:p>
-                      <a:r>
-                        <a:rPr sz="1400" b="0">
-                          <a:solidFill>
-                            <a:srgbClr val="555F6B"/>
-                          </a:solidFill>
-                        </a:rPr>
-                        <a:t>Mọi truy vấn bắt buộc lọc theo người sở hữu hoặc nhóm</a:t>
-                      </a:r>
-                    </a:p>
-                  </a:txBody>
-                  <a:tcPr marL="45720" marR="45720" marT="18288" marB="18288">
-                    <a:solidFill>
-                      <a:srgbClr val="EEF3F8"/>
-                    </a:solidFill>
-                  </a:tcPr>
-                </a:tc>
-              </a:tr>
-              <a:tr h="640080">
-                <a:tc>
-                  <a:txBody>
-                    <a:bodyPr/>
-                    <a:lstStyle/>
-                    <a:p>
-                      <a:r>
-                        <a:rPr sz="1400" b="0">
-                          <a:solidFill>
-                            <a:srgbClr val="555F6B"/>
-                          </a:solidFill>
-                        </a:rPr>
-                        <a:t>Connector</a:t>
-                      </a:r>
-                    </a:p>
-                  </a:txBody>
-                  <a:tcPr marL="45720" marR="45720" marT="18288" marB="18288">
-                    <a:solidFill>
-                      <a:srgbClr val="FFFFFF"/>
-                    </a:solidFill>
-                  </a:tcPr>
-                </a:tc>
-                <a:tc>
-                  <a:txBody>
-                    <a:bodyPr/>
-                    <a:lstStyle/>
-                    <a:p>
-                      <a:r>
-                        <a:rPr sz="1400" b="0">
-                          <a:solidFill>
-                            <a:srgbClr val="555F6B"/>
-                          </a:solidFill>
-                        </a:rPr>
-                        <a:t>Dùng OAuth của chính user, nên không thấy dữ liệu người khác</a:t>
-                      </a:r>
-                    </a:p>
-                  </a:txBody>
-                  <a:tcPr marL="45720" marR="45720" marT="18288" marB="18288">
-                    <a:solidFill>
-                      <a:srgbClr val="FFFFFF"/>
-                    </a:solidFill>
-                  </a:tcPr>
-                </a:tc>
-              </a:tr>
-            </a:tbl>
-          </a:graphicData>
-        </a:graphic>
-      </p:graphicFrame>
-      <p:sp>
-        <p:nvSpPr>
-          <p:cNvPr id="8" name="TextBox 7"/>
+      <p:sp>
+        <p:nvSpPr>
+          <p:cNvPr id="7" name="TextBox 6"/>
           <p:cNvSpPr txBox="1"/>
           <p:nvPr/>
         </p:nvSpPr>
         <p:spPr>
           <a:xfrm>
-            <a:off x="6400800" y="1371600"/>
-            <a:ext cx="5394960" cy="4572000"/>
+            <a:off x="457200" y="1463040"/>
+            <a:ext cx="5577840" cy="4389120"/>
           </a:xfrm>
           <a:prstGeom prst="rect">
             <a:avLst/>
@@ -20490,7 +21088,7 @@
                   <a:srgbClr val="555F6B"/>
                 </a:solidFill>
               </a:rPr>
-              <a:t>Sandbox: code của agent chạy trong hộp kín</a:t>
+              <a:t>Đăng nhập</a:t>
             </a:r>
           </a:p>
           <a:p>
@@ -20505,7 +21103,7 @@
                   <a:srgbClr val="555F6B"/>
                 </a:solidFill>
               </a:rPr>
-              <a:t>gVisor ngăn code chạm trực tiếp vào kernel của máy chủ</a:t>
+              <a:t>SSO bằng tài khoản tập đoàn có sẵn, bắt buộc MFA</a:t>
             </a:r>
           </a:p>
           <a:p>
@@ -20520,7 +21118,7 @@
                   <a:srgbClr val="555F6B"/>
                 </a:solidFill>
               </a:rPr>
-              <a:t>Không có mạng ra ngoài: không internet, không mạng nội bộ</a:t>
+              <a:t>Phân quyền chức năng theo nhóm (ví dụ: chỉ IT dùng sandbox hạng lớn)</a:t>
             </a:r>
           </a:p>
           <a:p>
@@ -20530,12 +21128,27 @@
               </a:spcAft>
             </a:pPr>
             <a:r>
+              <a:rPr sz="1500" b="1">
+                <a:solidFill>
+                  <a:srgbClr val="555F6B"/>
+                </a:solidFill>
+              </a:rPr>
+              <a:t>Agent mượn quyền của user (OAuth)</a:t>
+            </a:r>
+          </a:p>
+          <a:p>
+            <a:pPr algn="l">
+              <a:spcAft>
+                <a:spcPts val="400"/>
+              </a:spcAft>
+            </a:pPr>
+            <a:r>
               <a:rPr sz="1500" b="0">
                 <a:solidFill>
                   <a:srgbClr val="555F6B"/>
                 </a:solidFill>
               </a:rPr>
-              <a:t>Chỉ thấy thư mục workspace của đúng user đó</a:t>
+              <a:t>Mỗi user tự cho phép từng SaaS; mặc định chỉ quyền đọc</a:t>
             </a:r>
           </a:p>
           <a:p>
@@ -20550,7 +21163,7 @@
                   <a:srgbClr val="555F6B"/>
                 </a:solidFill>
               </a:rPr>
-              <a:t>Tối đa 2 phút (hạng lớn 10 phút); chạy xong hoặc hết giờ thì hủy pod</a:t>
+              <a:t>Quyền ghi (gửi email, tạo ticket) chỉ xin khi cần</a:t>
             </a:r>
           </a:p>
           <a:p>
@@ -20560,12 +21173,50 @@
               </a:spcAft>
             </a:pPr>
             <a:r>
+              <a:rPr sz="1500" b="0">
+                <a:solidFill>
+                  <a:srgbClr val="555F6B"/>
+                </a:solidFill>
+              </a:rPr>
+              <a:t>Không dùng tài khoản dịch vụ có quyền rộng</a:t>
+            </a:r>
+          </a:p>
+        </p:txBody>
+      </p:sp>
+      <p:sp>
+        <p:nvSpPr>
+          <p:cNvPr id="8" name="TextBox 7"/>
+          <p:cNvSpPr txBox="1"/>
+          <p:nvPr/>
+        </p:nvSpPr>
+        <p:spPr>
+          <a:xfrm>
+            <a:off x="6309360" y="1463040"/>
+            <a:ext cx="5486400" cy="4389120"/>
+          </a:xfrm>
+          <a:prstGeom prst="rect">
+            <a:avLst/>
+          </a:prstGeom>
+          <a:noFill/>
+        </p:spPr>
+        <p:txBody>
+          <a:bodyPr wrap="square">
+            <a:spAutoFit/>
+          </a:bodyPr>
+          <a:lstStyle/>
+          <a:p>
+            <a:pPr algn="l">
+              <a:spcAft>
+                <a:spcPts val="400"/>
+              </a:spcAft>
+            </a:pPr>
+            <a:r>
               <a:rPr sz="1500" b="1">
                 <a:solidFill>
                   <a:srgbClr val="555F6B"/>
                 </a:solidFill>
               </a:rPr>
-              <a:t>Code cố thoát ra máy chủ?</a:t>
+              <a:t>Token được cất an toàn</a:t>
             </a:r>
           </a:p>
           <a:p>
@@ -20580,7 +21231,105 @@
                   <a:srgbClr val="555F6B"/>
                 </a:solidFill>
               </a:rPr>
-              <a:t>Bị gVisor chặn. Pod không có quyền đặc biệt và không gọi được API của cloud</a:t>
+              <a:t>Token OAuth được mã hóa bằng khóa trong Cloud KMS, lưu trong Postgres</a:t>
+            </a:r>
+          </a:p>
+          <a:p>
+            <a:pPr algn="l">
+              <a:spcAft>
+                <a:spcPts val="400"/>
+              </a:spcAft>
+            </a:pPr>
+            <a:r>
+              <a:rPr sz="1500" b="0">
+                <a:solidFill>
+                  <a:srgbClr val="555F6B"/>
+                </a:solidFill>
+              </a:rPr>
+              <a:t>Chỉ worker được giải mã, và chỉ cho đúng user của request. Mỗi lần giải mã đều ghi audit</a:t>
+            </a:r>
+          </a:p>
+          <a:p>
+            <a:pPr algn="l">
+              <a:spcAft>
+                <a:spcPts val="400"/>
+              </a:spcAft>
+            </a:pPr>
+            <a:r>
+              <a:rPr sz="1500" b="1">
+                <a:solidFill>
+                  <a:srgbClr val="555F6B"/>
+                </a:solidFill>
+              </a:rPr>
+              <a:t>Tài liệu giữ quyền gốc</a:t>
+            </a:r>
+          </a:p>
+          <a:p>
+            <a:pPr algn="l">
+              <a:spcAft>
+                <a:spcPts val="400"/>
+              </a:spcAft>
+            </a:pPr>
+            <a:r>
+              <a:rPr sz="1500" b="0">
+                <a:solidFill>
+                  <a:srgbClr val="555F6B"/>
+                </a:solidFill>
+              </a:rPr>
+              <a:t>Mail, lịch, Jira: agent gọi search API của SaaS bằng token của user, nên SaaS tự lọc quyền</a:t>
+            </a:r>
+          </a:p>
+          <a:p>
+            <a:pPr algn="l">
+              <a:spcAft>
+                <a:spcPts val="400"/>
+              </a:spcAft>
+            </a:pPr>
+            <a:r>
+              <a:rPr sz="1500" b="0">
+                <a:solidFill>
+                  <a:srgbClr val="555F6B"/>
+                </a:solidFill>
+              </a:rPr>
+              <a:t>Tài liệu chung đã index: mỗi đoạn ghi nhóm được xem; mọi truy vấn lọc theo nhóm của user</a:t>
+            </a:r>
+          </a:p>
+        </p:txBody>
+      </p:sp>
+      <p:sp>
+        <p:nvSpPr>
+          <p:cNvPr id="9" name="TextBox 8"/>
+          <p:cNvSpPr txBox="1"/>
+          <p:nvPr/>
+        </p:nvSpPr>
+        <p:spPr>
+          <a:xfrm>
+            <a:off x="457200" y="5852160"/>
+            <a:ext cx="11247120" cy="457200"/>
+          </a:xfrm>
+          <a:prstGeom prst="rect">
+            <a:avLst/>
+          </a:prstGeom>
+          <a:noFill/>
+        </p:spPr>
+        <p:txBody>
+          <a:bodyPr wrap="square">
+            <a:spAutoFit/>
+          </a:bodyPr>
+          <a:lstStyle/>
+          <a:p>
+            <a:pPr algn="l">
+              <a:spcAft>
+                <a:spcPts val="400"/>
+              </a:spcAft>
+            </a:pPr>
+            <a:r>
+              <a:rPr sz="1100" b="0">
+                <a:solidFill>
+                  <a:srgbClr val="555F6B"/>
+                </a:solidFill>
+              </a:rPr>
+              <a:t>API của 11 SaaS không tính phí theo lượt; tập đoàn đã có license SaaS. Rate limit của SaaS: slide 12.</a:t>
             </a:r>
           </a:p>
         </p:txBody>

--- a/anh-le/G03_slide.pptx
+++ b/anh-le/G03_slide.pptx
@@ -24,6 +24,7 @@
     <p:sldId id="272" r:id="rId23"/>
     <p:sldId id="273" r:id="rId24"/>
     <p:sldId id="274" r:id="rId25"/>
+    <p:sldId id="275" r:id="rId26"/>
   </p:sldIdLst>
   <p:sldSz cx="12191695" cy="6858000" type="screen4x3"/>
   <p:notesSz cx="6858000" cy="9144000"/>
@@ -6489,7 +6490,7 @@
                   <a:srgbClr val="2E6FB7"/>
                 </a:solidFill>
               </a:rPr>
-              <a:t>2 kỹ sư trực vận hành (3.400 USD) là khoản cố định để giữ 99,5% (H7) và tự chạy LiteLLM. Phần theo lượt dùng nhỏ nhờ model rẻ và cache</a:t>
+              <a:t>Tổng 6.821,44 USD/tháng, tức 3,41 USD/DAU. Bảng dưới giải thích vì sao mỗi khoản ra con số này</a:t>
             </a:r>
           </a:p>
         </p:txBody>
@@ -6527,7 +6528,7 @@
                   <a:srgbClr val="555F6B"/>
                 </a:solidFill>
               </a:rPr>
-              <a:t>11</a:t>
+              <a:t>11a</a:t>
             </a:r>
           </a:p>
         </p:txBody>
@@ -6570,70 +6571,17 @@
           </a:p>
         </p:txBody>
       </p:sp>
-      <p:sp>
-        <p:nvSpPr>
-          <p:cNvPr id="7" name="TextBox 6"/>
-          <p:cNvSpPr txBox="1"/>
-          <p:nvPr/>
-        </p:nvSpPr>
-        <p:spPr>
-          <a:xfrm>
-            <a:off x="457200" y="1371600"/>
-            <a:ext cx="3657600" cy="1463040"/>
-          </a:xfrm>
-          <a:prstGeom prst="rect">
-            <a:avLst/>
-          </a:prstGeom>
-          <a:noFill/>
-        </p:spPr>
-        <p:txBody>
-          <a:bodyPr wrap="square">
-            <a:spAutoFit/>
-          </a:bodyPr>
-          <a:lstStyle/>
-          <a:p>
-            <a:pPr algn="l">
-              <a:spcAft>
-                <a:spcPts val="400"/>
-              </a:spcAft>
-            </a:pPr>
-            <a:r>
-              <a:rPr sz="2600" b="1">
-                <a:solidFill>
-                  <a:srgbClr val="1F3A5F"/>
-                </a:solidFill>
-              </a:rPr>
-              <a:t>6.821,44 USD/tháng</a:t>
-            </a:r>
-          </a:p>
-          <a:p>
-            <a:pPr algn="l">
-              <a:spcAft>
-                <a:spcPts val="400"/>
-              </a:spcAft>
-            </a:pPr>
-            <a:r>
-              <a:rPr sz="2600" b="0">
-                <a:solidFill>
-                  <a:srgbClr val="1F3A5F"/>
-                </a:solidFill>
-              </a:rPr>
-              <a:t>3,41 USD/DAU/tháng</a:t>
-            </a:r>
-          </a:p>
-        </p:txBody>
-      </p:sp>
       <p:graphicFrame>
         <p:nvGraphicFramePr>
-          <p:cNvPr id="8" name="Table 7"/>
+          <p:cNvPr id="7" name="Table 6"/>
           <p:cNvGraphicFramePr>
             <a:graphicFrameLocks noGrp="1"/>
           </p:cNvGraphicFramePr>
           <p:nvPr/>
         </p:nvGraphicFramePr>
         <p:xfrm>
-          <a:off x="457200" y="2834640"/>
-          <a:ext cx="4572000" cy="2304288"/>
+          <a:off x="457200" y="1371600"/>
+          <a:ext cx="11247120" cy="4352544"/>
         </p:xfrm>
         <a:graphic>
           <a:graphicData uri="http://schemas.openxmlformats.org/drawingml/2006/table">
@@ -6642,23 +6590,25 @@
                 <a:tableStyleId>{5C22544A-7EE6-4342-B048-85BDC9FD1C3A}</a:tableStyleId>
               </a:tblPr>
               <a:tblGrid>
-                <a:gridCol w="2194560"/>
-                <a:gridCol w="1280160"/>
-                <a:gridCol w="1097280"/>
+                <a:gridCol w="1645920"/>
+                <a:gridCol w="1005840"/>
+                <a:gridCol w="640080"/>
+                <a:gridCol w="4297680"/>
+                <a:gridCol w="3657600"/>
               </a:tblGrid>
-              <a:tr h="384048">
-                <a:tc>
-                  <a:txBody>
-                    <a:bodyPr/>
-                    <a:lstStyle/>
-                    <a:p>
-                      <a:r>
-                        <a:rPr sz="1200" b="1">
+              <a:tr h="621792">
+                <a:tc>
+                  <a:txBody>
+                    <a:bodyPr/>
+                    <a:lstStyle/>
+                    <a:p>
+                      <a:r>
+                        <a:rPr sz="1100" b="1">
                           <a:solidFill>
                             <a:srgbClr val="FFFFFF"/>
                           </a:solidFill>
                         </a:rPr>
-                        <a:t>5 khoản lớn nhất</a:t>
+                        <a:t>Khoản</a:t>
                       </a:r>
                     </a:p>
                   </a:txBody>
@@ -6674,7 +6624,7 @@
                     <a:lstStyle/>
                     <a:p>
                       <a:r>
-                        <a:rPr sz="1200" b="1">
+                        <a:rPr sz="1100" b="1">
                           <a:solidFill>
                             <a:srgbClr val="FFFFFF"/>
                           </a:solidFill>
@@ -6695,7 +6645,7 @@
                     <a:lstStyle/>
                     <a:p>
                       <a:r>
-                        <a:rPr sz="1200" b="1">
+                        <a:rPr sz="1100" b="1">
                           <a:solidFill>
                             <a:srgbClr val="FFFFFF"/>
                           </a:solidFill>
@@ -6710,20 +6660,62 @@
                     </a:solidFill>
                   </a:tcPr>
                 </a:tc>
+                <a:tc>
+                  <a:txBody>
+                    <a:bodyPr/>
+                    <a:lstStyle/>
+                    <a:p>
+                      <a:r>
+                        <a:rPr sz="1100" b="1">
+                          <a:solidFill>
+                            <a:srgbClr val="FFFFFF"/>
+                          </a:solidFill>
+                        </a:rPr>
+                        <a:t>Cách tính</a:t>
+                      </a:r>
+                    </a:p>
+                  </a:txBody>
+                  <a:tcPr marL="45720" marR="45720" marT="18288" marB="18288">
+                    <a:solidFill>
+                      <a:srgbClr val="2E6FB7"/>
+                    </a:solidFill>
+                  </a:tcPr>
+                </a:tc>
+                <a:tc>
+                  <a:txBody>
+                    <a:bodyPr/>
+                    <a:lstStyle/>
+                    <a:p>
+                      <a:r>
+                        <a:rPr sz="1100" b="1">
+                          <a:solidFill>
+                            <a:srgbClr val="FFFFFF"/>
+                          </a:solidFill>
+                        </a:rPr>
+                        <a:t>Vì sao lớn hay nhỏ</a:t>
+                      </a:r>
+                    </a:p>
+                  </a:txBody>
+                  <a:tcPr marL="45720" marR="45720" marT="18288" marB="18288">
+                    <a:solidFill>
+                      <a:srgbClr val="2E6FB7"/>
+                    </a:solidFill>
+                  </a:tcPr>
+                </a:tc>
               </a:tr>
-              <a:tr h="384048">
-                <a:tc>
-                  <a:txBody>
-                    <a:bodyPr/>
-                    <a:lstStyle/>
-                    <a:p>
-                      <a:r>
-                        <a:rPr sz="1200" b="0">
-                          <a:solidFill>
-                            <a:srgbClr val="555F6B"/>
-                          </a:solidFill>
-                        </a:rPr>
-                        <a:t>ops_labor</a:t>
+              <a:tr h="621792">
+                <a:tc>
+                  <a:txBody>
+                    <a:bodyPr/>
+                    <a:lstStyle/>
+                    <a:p>
+                      <a:r>
+                        <a:rPr sz="1100" b="0">
+                          <a:solidFill>
+                            <a:srgbClr val="555F6B"/>
+                          </a:solidFill>
+                        </a:rPr>
+                        <a:t>ops_labor (nhân sự)</a:t>
                       </a:r>
                     </a:p>
                   </a:txBody>
@@ -6739,7 +6731,7 @@
                     <a:lstStyle/>
                     <a:p>
                       <a:r>
-                        <a:rPr sz="1200" b="0">
+                        <a:rPr sz="1100" b="0">
                           <a:solidFill>
                             <a:srgbClr val="555F6B"/>
                           </a:solidFill>
@@ -6760,7 +6752,7 @@
                     <a:lstStyle/>
                     <a:p>
                       <a:r>
-                        <a:rPr sz="1200" b="0">
+                        <a:rPr sz="1100" b="0">
                           <a:solidFill>
                             <a:srgbClr val="555F6B"/>
                           </a:solidFill>
@@ -6775,15 +6767,57 @@
                     </a:solidFill>
                   </a:tcPr>
                 </a:tc>
+                <a:tc>
+                  <a:txBody>
+                    <a:bodyPr/>
+                    <a:lstStyle/>
+                    <a:p>
+                      <a:r>
+                        <a:rPr sz="1100" b="0">
+                          <a:solidFill>
+                            <a:srgbClr val="555F6B"/>
+                          </a:solidFill>
+                        </a:rPr>
+                        <a:t>2 kỹ sư trực luân phiên: SRE 5–8 năm (53,85 triệu VND) + AI/MLOps 3–4 năm (34,1 triệu VND) = 87,95 triệu VND ÷ 25.870 VND/USD</a:t>
+                      </a:r>
+                    </a:p>
+                  </a:txBody>
+                  <a:tcPr marL="45720" marR="45720" marT="18288" marB="18288">
+                    <a:solidFill>
+                      <a:srgbClr val="EEF3F8"/>
+                    </a:solidFill>
+                  </a:tcPr>
+                </a:tc>
+                <a:tc>
+                  <a:txBody>
+                    <a:bodyPr/>
+                    <a:lstStyle/>
+                    <a:p>
+                      <a:r>
+                        <a:rPr sz="1100" b="0">
+                          <a:solidFill>
+                            <a:srgbClr val="555F6B"/>
+                          </a:solidFill>
+                        </a:rPr>
+                        <a:t>Lớn nhất vì cố định: cần người trực để giữ 99,5% (H7), vận hành LiteLLM và eval. Không giảm khi ít người dùng</a:t>
+                      </a:r>
+                    </a:p>
+                  </a:txBody>
+                  <a:tcPr marL="45720" marR="45720" marT="18288" marB="18288">
+                    <a:solidFill>
+                      <a:srgbClr val="EEF3F8"/>
+                    </a:solidFill>
+                  </a:tcPr>
+                </a:tc>
               </a:tr>
-              <a:tr h="384048">
-                <a:tc>
-                  <a:txBody>
-                    <a:bodyPr/>
-                    <a:lstStyle/>
-                    <a:p>
-                      <a:r>
-                        <a:rPr sz="1200" b="0">
+              <a:tr h="621792">
+                <a:tc>
+                  <a:txBody>
+                    <a:bodyPr/>
+                    <a:lstStyle/>
+                    <a:p>
+                      <a:r>
+                        <a:rPr sz="1100" b="0">
                           <a:solidFill>
                             <a:srgbClr val="555F6B"/>
                           </a:solidFill>
@@ -6804,7 +6838,7 @@
                     <a:lstStyle/>
                     <a:p>
                       <a:r>
-                        <a:rPr sz="1200" b="0">
+                        <a:rPr sz="1100" b="0">
                           <a:solidFill>
                             <a:srgbClr val="555F6B"/>
                           </a:solidFill>
@@ -6825,7 +6859,7 @@
                     <a:lstStyle/>
                     <a:p>
                       <a:r>
-                        <a:rPr sz="1200" b="0">
+                        <a:rPr sz="1100" b="0">
                           <a:solidFill>
                             <a:srgbClr val="555F6B"/>
                           </a:solidFill>
@@ -6840,15 +6874,57 @@
                     </a:solidFill>
                   </a:tcPr>
                 </a:tc>
+                <a:tc>
+                  <a:txBody>
+                    <a:bodyPr/>
+                    <a:lstStyle/>
+                    <a:p>
+                      <a:r>
+                        <a:rPr sz="1100" b="0">
+                          <a:solidFill>
+                            <a:srgbClr val="555F6B"/>
+                          </a:solidFill>
+                        </a:rPr>
+                        <a:t>Lượt × số lần gọi model × token × giá. Cấp 1: 386 · cấp 2: 288 · cấp 3: 161 · cấp 4: 105 · cấp 5: 7 + ảnh 147 (4.312 ảnh × 0,034)</a:t>
+                      </a:r>
+                    </a:p>
+                  </a:txBody>
+                  <a:tcPr marL="45720" marR="45720" marT="18288" marB="18288">
+                    <a:solidFill>
+                      <a:srgbClr val="FFFFFF"/>
+                    </a:solidFill>
+                  </a:tcPr>
+                </a:tc>
+                <a:tc>
+                  <a:txBody>
+                    <a:bodyPr/>
+                    <a:lstStyle/>
+                    <a:p>
+                      <a:r>
+                        <a:rPr sz="1100" b="0">
+                          <a:solidFill>
+                            <a:srgbClr val="555F6B"/>
+                          </a:solidFill>
+                        </a:rPr>
+                        <a:t>Nhỏ vì Haiku rẻ (0,10 USD/1M token vào) và 61% token vào đọc từ cache với giá 0,01</a:t>
+                      </a:r>
+                    </a:p>
+                  </a:txBody>
+                  <a:tcPr marL="45720" marR="45720" marT="18288" marB="18288">
+                    <a:solidFill>
+                      <a:srgbClr val="FFFFFF"/>
+                    </a:solidFill>
+                  </a:tcPr>
+                </a:tc>
               </a:tr>
-              <a:tr h="384048">
-                <a:tc>
-                  <a:txBody>
-                    <a:bodyPr/>
-                    <a:lstStyle/>
-                    <a:p>
-                      <a:r>
-                        <a:rPr sz="1200" b="0">
+              <a:tr h="621792">
+                <a:tc>
+                  <a:txBody>
+                    <a:bodyPr/>
+                    <a:lstStyle/>
+                    <a:p>
+                      <a:r>
+                        <a:rPr sz="1100" b="0">
                           <a:solidFill>
                             <a:srgbClr val="555F6B"/>
                           </a:solidFill>
@@ -6869,7 +6945,7 @@
                     <a:lstStyle/>
                     <a:p>
                       <a:r>
-                        <a:rPr sz="1200" b="0">
+                        <a:rPr sz="1100" b="0">
                           <a:solidFill>
                             <a:srgbClr val="555F6B"/>
                           </a:solidFill>
@@ -6890,7 +6966,7 @@
                     <a:lstStyle/>
                     <a:p>
                       <a:r>
-                        <a:rPr sz="1200" b="0">
+                        <a:rPr sz="1100" b="0">
                           <a:solidFill>
                             <a:srgbClr val="555F6B"/>
                           </a:solidFill>
@@ -6905,15 +6981,57 @@
                     </a:solidFill>
                   </a:tcPr>
                 </a:tc>
+                <a:tc>
+                  <a:txBody>
+                    <a:bodyPr/>
+                    <a:lstStyle/>
+                    <a:p>
+                      <a:r>
+                        <a:rPr sz="1100" b="0">
+                          <a:solidFill>
+                            <a:srgbClr val="555F6B"/>
+                          </a:solidFill>
+                        </a:rPr>
+                        <a:t>Guardrail: 2,81 tỉ token × 0,10 USD/1M = 281. Eval gate: 4 lần/tháng × 5 cấp × 100 nhiệm vụ = 525</a:t>
+                      </a:r>
+                    </a:p>
+                  </a:txBody>
+                  <a:tcPr marL="45720" marR="45720" marT="18288" marB="18288">
+                    <a:solidFill>
+                      <a:srgbClr val="EEF3F8"/>
+                    </a:solidFill>
+                  </a:tcPr>
+                </a:tc>
+                <a:tc>
+                  <a:txBody>
+                    <a:bodyPr/>
+                    <a:lstStyle/>
+                    <a:p>
+                      <a:r>
+                        <a:rPr sz="1100" b="0">
+                          <a:solidFill>
+                            <a:srgbClr val="555F6B"/>
+                          </a:solidFill>
+                        </a:rPr>
+                        <a:t>Eval đắt hơn guardrail vì Opus 5.5 vừa làm bài mẫu vừa chấm điểm</a:t>
+                      </a:r>
+                    </a:p>
+                  </a:txBody>
+                  <a:tcPr marL="45720" marR="45720" marT="18288" marB="18288">
+                    <a:solidFill>
+                      <a:srgbClr val="EEF3F8"/>
+                    </a:solidFill>
+                  </a:tcPr>
+                </a:tc>
               </a:tr>
-              <a:tr h="384048">
-                <a:tc>
-                  <a:txBody>
-                    <a:bodyPr/>
-                    <a:lstStyle/>
-                    <a:p>
-                      <a:r>
-                        <a:rPr sz="1200" b="0">
+              <a:tr h="621792">
+                <a:tc>
+                  <a:txBody>
+                    <a:bodyPr/>
+                    <a:lstStyle/>
+                    <a:p>
+                      <a:r>
+                        <a:rPr sz="1100" b="0">
                           <a:solidFill>
                             <a:srgbClr val="555F6B"/>
                           </a:solidFill>
@@ -6934,7 +7052,7 @@
                     <a:lstStyle/>
                     <a:p>
                       <a:r>
-                        <a:rPr sz="1200" b="0">
+                        <a:rPr sz="1100" b="0">
                           <a:solidFill>
                             <a:srgbClr val="555F6B"/>
                           </a:solidFill>
@@ -6955,7 +7073,7 @@
                     <a:lstStyle/>
                     <a:p>
                       <a:r>
-                        <a:rPr sz="1200" b="0">
+                        <a:rPr sz="1100" b="0">
                           <a:solidFill>
                             <a:srgbClr val="555F6B"/>
                           </a:solidFill>
@@ -6970,15 +7088,57 @@
                     </a:solidFill>
                   </a:tcPr>
                 </a:tc>
+                <a:tc>
+                  <a:txBody>
+                    <a:bodyPr/>
+                    <a:lstStyle/>
+                    <a:p>
+                      <a:r>
+                        <a:rPr sz="1100" b="0">
+                          <a:solidFill>
+                            <a:srgbClr val="555F6B"/>
+                          </a:solidFill>
+                        </a:rPr>
+                        <a:t>Postgres HA 2 vCPU, 13 GB × 730 giờ = 355 · SSD 150 GB = 71 · database staging = 41</a:t>
+                      </a:r>
+                    </a:p>
+                  </a:txBody>
+                  <a:tcPr marL="45720" marR="45720" marT="18288" marB="18288">
+                    <a:solidFill>
+                      <a:srgbClr val="FFFFFF"/>
+                    </a:solidFill>
+                  </a:tcPr>
+                </a:tc>
+                <a:tc>
+                  <a:txBody>
+                    <a:bodyPr/>
+                    <a:lstStyle/>
+                    <a:p>
+                      <a:r>
+                        <a:rPr sz="1100" b="0">
+                          <a:solidFill>
+                            <a:srgbClr val="555F6B"/>
+                          </a:solidFill>
+                        </a:rPr>
+                        <a:t>Chạy 24/7, có bản dự phòng ở zone khác. Chứa luôn vector và token, nên không cần dịch vụ riêng</a:t>
+                      </a:r>
+                    </a:p>
+                  </a:txBody>
+                  <a:tcPr marL="45720" marR="45720" marT="18288" marB="18288">
+                    <a:solidFill>
+                      <a:srgbClr val="FFFFFF"/>
+                    </a:solidFill>
+                  </a:tcPr>
+                </a:tc>
               </a:tr>
-              <a:tr h="384048">
-                <a:tc>
-                  <a:txBody>
-                    <a:bodyPr/>
-                    <a:lstStyle/>
-                    <a:p>
-                      <a:r>
-                        <a:rPr sz="1200" b="0">
+              <a:tr h="621792">
+                <a:tc>
+                  <a:txBody>
+                    <a:bodyPr/>
+                    <a:lstStyle/>
+                    <a:p>
+                      <a:r>
+                        <a:rPr sz="1100" b="0">
                           <a:solidFill>
                             <a:srgbClr val="555F6B"/>
                           </a:solidFill>
@@ -6999,7 +7159,7 @@
                     <a:lstStyle/>
                     <a:p>
                       <a:r>
-                        <a:rPr sz="1200" b="0">
+                        <a:rPr sz="1100" b="0">
                           <a:solidFill>
                             <a:srgbClr val="555F6B"/>
                           </a:solidFill>
@@ -7020,7 +7180,7 @@
                     <a:lstStyle/>
                     <a:p>
                       <a:r>
-                        <a:rPr sz="1200" b="0">
+                        <a:rPr sz="1100" b="0">
                           <a:solidFill>
                             <a:srgbClr val="555F6B"/>
                           </a:solidFill>
@@ -7032,6 +7192,155 @@
                   <a:tcPr marL="45720" marR="45720" marT="18288" marB="18288">
                     <a:solidFill>
                       <a:srgbClr val="EEF3F8"/>
+                    </a:solidFill>
+                  </a:tcPr>
+                </a:tc>
+                <a:tc>
+                  <a:txBody>
+                    <a:bodyPr/>
+                    <a:lstStyle/>
+                    <a:p>
+                      <a:r>
+                        <a:rPr sz="1100" b="0">
+                          <a:solidFill>
+                            <a:srgbClr val="555F6B"/>
+                          </a:solidFill>
+                        </a:rPr>
+                        <a:t>140.800 lượt × 2 phút = 4.693 vCPU-giờ × 0,0549 + 9.386 GB-giờ × 0,0061</a:t>
+                      </a:r>
+                    </a:p>
+                  </a:txBody>
+                  <a:tcPr marL="45720" marR="45720" marT="18288" marB="18288">
+                    <a:solidFill>
+                      <a:srgbClr val="EEF3F8"/>
+                    </a:solidFill>
+                  </a:tcPr>
+                </a:tc>
+                <a:tc>
+                  <a:txBody>
+                    <a:bodyPr/>
+                    <a:lstStyle/>
+                    <a:p>
+                      <a:r>
+                        <a:rPr sz="1100" b="0">
+                          <a:solidFill>
+                            <a:srgbClr val="555F6B"/>
+                          </a:solidFill>
+                        </a:rPr>
+                        <a:t>Là cận trên: thời gian chạy thật chưa đo, nên mỗi lượt tính đủ 2 phút tối đa</a:t>
+                      </a:r>
+                    </a:p>
+                  </a:txBody>
+                  <a:tcPr marL="45720" marR="45720" marT="18288" marB="18288">
+                    <a:solidFill>
+                      <a:srgbClr val="EEF3F8"/>
+                    </a:solidFill>
+                  </a:tcPr>
+                </a:tc>
+              </a:tr>
+              <a:tr h="621792">
+                <a:tc>
+                  <a:txBody>
+                    <a:bodyPr/>
+                    <a:lstStyle/>
+                    <a:p>
+                      <a:r>
+                        <a:rPr sz="1100" b="0">
+                          <a:solidFill>
+                            <a:srgbClr val="555F6B"/>
+                          </a:solidFill>
+                        </a:rPr>
+                        <a:t>10 khoản còn lại</a:t>
+                      </a:r>
+                    </a:p>
+                  </a:txBody>
+                  <a:tcPr marL="45720" marR="45720" marT="18288" marB="18288">
+                    <a:solidFill>
+                      <a:srgbClr val="FFFFFF"/>
+                    </a:solidFill>
+                  </a:tcPr>
+                </a:tc>
+                <a:tc>
+                  <a:txBody>
+                    <a:bodyPr/>
+                    <a:lstStyle/>
+                    <a:p>
+                      <a:r>
+                        <a:rPr sz="1100" b="0">
+                          <a:solidFill>
+                            <a:srgbClr val="555F6B"/>
+                          </a:solidFill>
+                        </a:rPr>
+                        <a:t>741</a:t>
+                      </a:r>
+                    </a:p>
+                  </a:txBody>
+                  <a:tcPr marL="45720" marR="45720" marT="18288" marB="18288">
+                    <a:solidFill>
+                      <a:srgbClr val="FFFFFF"/>
+                    </a:solidFill>
+                  </a:tcPr>
+                </a:tc>
+                <a:tc>
+                  <a:txBody>
+                    <a:bodyPr/>
+                    <a:lstStyle/>
+                    <a:p>
+                      <a:r>
+                        <a:rPr sz="1100" b="0">
+                          <a:solidFill>
+                            <a:srgbClr val="555F6B"/>
+                          </a:solidFill>
+                        </a:rPr>
+                        <a:t>11%</a:t>
+                      </a:r>
+                    </a:p>
+                  </a:txBody>
+                  <a:tcPr marL="45720" marR="45720" marT="18288" marB="18288">
+                    <a:solidFill>
+                      <a:srgbClr val="FFFFFF"/>
+                    </a:solidFill>
+                  </a:tcPr>
+                </a:tc>
+                <a:tc>
+                  <a:txBody>
+                    <a:bodyPr/>
+                    <a:lstStyle/>
+                    <a:p>
+                      <a:r>
+                        <a:rPr sz="1100" b="0">
+                          <a:solidFill>
+                            <a:srgbClr val="555F6B"/>
+                          </a:solidFill>
+                        </a:rPr>
+                        <a:t>compute 284 · backup_dr 164 · object_storage 83 · network 64 · cache_queue 56 · …</a:t>
+                      </a:r>
+                    </a:p>
+                  </a:txBody>
+                  <a:tcPr marL="45720" marR="45720" marT="18288" marB="18288">
+                    <a:solidFill>
+                      <a:srgbClr val="FFFFFF"/>
+                    </a:solidFill>
+                  </a:tcPr>
+                </a:tc>
+                <a:tc>
+                  <a:txBody>
+                    <a:bodyPr/>
+                    <a:lstStyle/>
+                    <a:p>
+                      <a:r>
+                        <a:rPr sz="1100" b="0">
+                          <a:solidFill>
+                            <a:srgbClr val="555F6B"/>
+                          </a:solidFill>
+                        </a:rPr>
+                        <a:t>Hạ tầng gọn: 1 cụm GKE, 1 region, phần lớn chỉ chạy đủ trong giờ hành chính</a:t>
+                      </a:r>
+                    </a:p>
+                  </a:txBody>
+                  <a:tcPr marL="45720" marR="45720" marT="18288" marB="18288">
+                    <a:solidFill>
+                      <a:srgbClr val="FFFFFF"/>
                     </a:solidFill>
                   </a:tcPr>
                 </a:tc>
@@ -7040,438 +7349,16 @@
           </a:graphicData>
         </a:graphic>
       </p:graphicFrame>
-      <p:graphicFrame>
-        <p:nvGraphicFramePr>
-          <p:cNvPr id="9" name="Table 8"/>
-          <p:cNvGraphicFramePr>
-            <a:graphicFrameLocks noGrp="1"/>
-          </p:cNvGraphicFramePr>
-          <p:nvPr/>
-        </p:nvGraphicFramePr>
-        <p:xfrm>
-          <a:off x="5486400" y="1371600"/>
-          <a:ext cx="6309360" cy="3456432"/>
-        </p:xfrm>
-        <a:graphic>
-          <a:graphicData uri="http://schemas.openxmlformats.org/drawingml/2006/table">
-            <a:tbl>
-              <a:tblPr firstRow="1" bandRow="1">
-                <a:tableStyleId>{5C22544A-7EE6-4342-B048-85BDC9FD1C3A}</a:tableStyleId>
-              </a:tblPr>
-              <a:tblGrid>
-                <a:gridCol w="4663440"/>
-                <a:gridCol w="1645920"/>
-              </a:tblGrid>
-              <a:tr h="384048">
-                <a:tc>
-                  <a:txBody>
-                    <a:bodyPr/>
-                    <a:lstStyle/>
-                    <a:p>
-                      <a:r>
-                        <a:rPr sz="1100" b="1">
-                          <a:solidFill>
-                            <a:srgbClr val="FFFFFF"/>
-                          </a:solidFill>
-                        </a:rPr>
-                        <a:t>Đòn bẩy tiết kiệm</a:t>
-                      </a:r>
-                    </a:p>
-                  </a:txBody>
-                  <a:tcPr marL="45720" marR="45720" marT="18288" marB="18288">
-                    <a:solidFill>
-                      <a:srgbClr val="2E6FB7"/>
-                    </a:solidFill>
-                  </a:tcPr>
-                </a:tc>
-                <a:tc>
-                  <a:txBody>
-                    <a:bodyPr/>
-                    <a:lstStyle/>
-                    <a:p>
-                      <a:r>
-                        <a:rPr sz="1100" b="1">
-                          <a:solidFill>
-                            <a:srgbClr val="FFFFFF"/>
-                          </a:solidFill>
-                        </a:rPr>
-                        <a:t>Tiết kiệm (USD/tháng)</a:t>
-                      </a:r>
-                    </a:p>
-                  </a:txBody>
-                  <a:tcPr marL="45720" marR="45720" marT="18288" marB="18288">
-                    <a:solidFill>
-                      <a:srgbClr val="2E6FB7"/>
-                    </a:solidFill>
-                  </a:tcPr>
-                </a:tc>
-              </a:tr>
-              <a:tr h="384048">
-                <a:tc>
-                  <a:txBody>
-                    <a:bodyPr/>
-                    <a:lstStyle/>
-                    <a:p>
-                      <a:r>
-                        <a:rPr sz="1100" b="0">
-                          <a:solidFill>
-                            <a:srgbClr val="555F6B"/>
-                          </a:solidFill>
-                        </a:rPr>
-                        <a:t>Haiku cho cả 5 cấp, thay Sonnet ở cấp 3–4 (eval gate giữ chất lượng)</a:t>
-                      </a:r>
-                    </a:p>
-                  </a:txBody>
-                  <a:tcPr marL="45720" marR="45720" marT="18288" marB="18288">
-                    <a:solidFill>
-                      <a:srgbClr val="EEF3F8"/>
-                    </a:solidFill>
-                  </a:tcPr>
-                </a:tc>
-                <a:tc>
-                  <a:txBody>
-                    <a:bodyPr/>
-                    <a:lstStyle/>
-                    <a:p>
-                      <a:r>
-                        <a:rPr sz="1100" b="0">
-                          <a:solidFill>
-                            <a:srgbClr val="555F6B"/>
-                          </a:solidFill>
-                        </a:rPr>
-                        <a:t>4.705</a:t>
-                      </a:r>
-                    </a:p>
-                  </a:txBody>
-                  <a:tcPr marL="45720" marR="45720" marT="18288" marB="18288">
-                    <a:solidFill>
-                      <a:srgbClr val="EEF3F8"/>
-                    </a:solidFill>
-                  </a:tcPr>
-                </a:tc>
-              </a:tr>
-              <a:tr h="384048">
-                <a:tc>
-                  <a:txBody>
-                    <a:bodyPr/>
-                    <a:lstStyle/>
-                    <a:p>
-                      <a:r>
-                        <a:rPr sz="1100" b="0">
-                          <a:solidFill>
-                            <a:srgbClr val="555F6B"/>
-                          </a:solidFill>
-                        </a:rPr>
-                        <a:t>LiteLLM thay Apigee</a:t>
-                      </a:r>
-                    </a:p>
-                  </a:txBody>
-                  <a:tcPr marL="45720" marR="45720" marT="18288" marB="18288">
-                    <a:solidFill>
-                      <a:srgbClr val="FFFFFF"/>
-                    </a:solidFill>
-                  </a:tcPr>
-                </a:tc>
-                <a:tc>
-                  <a:txBody>
-                    <a:bodyPr/>
-                    <a:lstStyle/>
-                    <a:p>
-                      <a:r>
-                        <a:rPr sz="1100" b="0">
-                          <a:solidFill>
-                            <a:srgbClr val="555F6B"/>
-                          </a:solidFill>
-                        </a:rPr>
-                        <a:t>~1.595</a:t>
-                      </a:r>
-                    </a:p>
-                  </a:txBody>
-                  <a:tcPr marL="45720" marR="45720" marT="18288" marB="18288">
-                    <a:solidFill>
-                      <a:srgbClr val="FFFFFF"/>
-                    </a:solidFill>
-                  </a:tcPr>
-                </a:tc>
-              </a:tr>
-              <a:tr h="384048">
-                <a:tc>
-                  <a:txBody>
-                    <a:bodyPr/>
-                    <a:lstStyle/>
-                    <a:p>
-                      <a:r>
-                        <a:rPr sz="1100" b="0">
-                          <a:solidFill>
-                            <a:srgbClr val="555F6B"/>
-                          </a:solidFill>
-                        </a:rPr>
-                        <a:t>Guardrail chỉ quét text mới, thay vì quét toàn bộ token</a:t>
-                      </a:r>
-                    </a:p>
-                  </a:txBody>
-                  <a:tcPr marL="45720" marR="45720" marT="18288" marB="18288">
-                    <a:solidFill>
-                      <a:srgbClr val="EEF3F8"/>
-                    </a:solidFill>
-                  </a:tcPr>
-                </a:tc>
-                <a:tc>
-                  <a:txBody>
-                    <a:bodyPr/>
-                    <a:lstStyle/>
-                    <a:p>
-                      <a:r>
-                        <a:rPr sz="1100" b="0">
-                          <a:solidFill>
-                            <a:srgbClr val="555F6B"/>
-                          </a:solidFill>
-                        </a:rPr>
-                        <a:t>1.018</a:t>
-                      </a:r>
-                    </a:p>
-                  </a:txBody>
-                  <a:tcPr marL="45720" marR="45720" marT="18288" marB="18288">
-                    <a:solidFill>
-                      <a:srgbClr val="EEF3F8"/>
-                    </a:solidFill>
-                  </a:tcPr>
-                </a:tc>
-              </a:tr>
-              <a:tr h="384048">
-                <a:tc>
-                  <a:txBody>
-                    <a:bodyPr/>
-                    <a:lstStyle/>
-                    <a:p>
-                      <a:r>
-                        <a:rPr sz="1100" b="0">
-                          <a:solidFill>
-                            <a:srgbClr val="555F6B"/>
-                          </a:solidFill>
-                        </a:rPr>
-                        <a:t>Cất token bằng KMS trong Postgres, thay Secret Manager</a:t>
-                      </a:r>
-                    </a:p>
-                  </a:txBody>
-                  <a:tcPr marL="45720" marR="45720" marT="18288" marB="18288">
-                    <a:solidFill>
-                      <a:srgbClr val="FFFFFF"/>
-                    </a:solidFill>
-                  </a:tcPr>
-                </a:tc>
-                <a:tc>
-                  <a:txBody>
-                    <a:bodyPr/>
-                    <a:lstStyle/>
-                    <a:p>
-                      <a:r>
-                        <a:rPr sz="1100" b="0">
-                          <a:solidFill>
-                            <a:srgbClr val="555F6B"/>
-                          </a:solidFill>
-                        </a:rPr>
-                        <a:t>~716</a:t>
-                      </a:r>
-                    </a:p>
-                  </a:txBody>
-                  <a:tcPr marL="45720" marR="45720" marT="18288" marB="18288">
-                    <a:solidFill>
-                      <a:srgbClr val="FFFFFF"/>
-                    </a:solidFill>
-                  </a:tcPr>
-                </a:tc>
-              </a:tr>
-              <a:tr h="384048">
-                <a:tc>
-                  <a:txBody>
-                    <a:bodyPr/>
-                    <a:lstStyle/>
-                    <a:p>
-                      <a:r>
-                        <a:rPr sz="1100" b="0">
-                          <a:solidFill>
-                            <a:srgbClr val="555F6B"/>
-                          </a:solidFill>
-                        </a:rPr>
-                        <a:t>Prompt caching (61% token vào đọc từ cache)</a:t>
-                      </a:r>
-                    </a:p>
-                  </a:txBody>
-                  <a:tcPr marL="45720" marR="45720" marT="18288" marB="18288">
-                    <a:solidFill>
-                      <a:srgbClr val="EEF3F8"/>
-                    </a:solidFill>
-                  </a:tcPr>
-                </a:tc>
-                <a:tc>
-                  <a:txBody>
-                    <a:bodyPr/>
-                    <a:lstStyle/>
-                    <a:p>
-                      <a:r>
-                        <a:rPr sz="1100" b="0">
-                          <a:solidFill>
-                            <a:srgbClr val="555F6B"/>
-                          </a:solidFill>
-                        </a:rPr>
-                        <a:t>670</a:t>
-                      </a:r>
-                    </a:p>
-                  </a:txBody>
-                  <a:tcPr marL="45720" marR="45720" marT="18288" marB="18288">
-                    <a:solidFill>
-                      <a:srgbClr val="EEF3F8"/>
-                    </a:solidFill>
-                  </a:tcPr>
-                </a:tc>
-              </a:tr>
-              <a:tr h="384048">
-                <a:tc>
-                  <a:txBody>
-                    <a:bodyPr/>
-                    <a:lstStyle/>
-                    <a:p>
-                      <a:r>
-                        <a:rPr sz="1100" b="0">
-                          <a:solidFill>
-                            <a:srgbClr val="555F6B"/>
-                          </a:solidFill>
-                        </a:rPr>
-                        <a:t>Ngoài giờ chỉ chạy 1 pod, thay vì 2 pod 24/7</a:t>
-                      </a:r>
-                    </a:p>
-                  </a:txBody>
-                  <a:tcPr marL="45720" marR="45720" marT="18288" marB="18288">
-                    <a:solidFill>
-                      <a:srgbClr val="FFFFFF"/>
-                    </a:solidFill>
-                  </a:tcPr>
-                </a:tc>
-                <a:tc>
-                  <a:txBody>
-                    <a:bodyPr/>
-                    <a:lstStyle/>
-                    <a:p>
-                      <a:r>
-                        <a:rPr sz="1100" b="0">
-                          <a:solidFill>
-                            <a:srgbClr val="555F6B"/>
-                          </a:solidFill>
-                        </a:rPr>
-                        <a:t>109</a:t>
-                      </a:r>
-                    </a:p>
-                  </a:txBody>
-                  <a:tcPr marL="45720" marR="45720" marT="18288" marB="18288">
-                    <a:solidFill>
-                      <a:srgbClr val="FFFFFF"/>
-                    </a:solidFill>
-                  </a:tcPr>
-                </a:tc>
-              </a:tr>
-              <a:tr h="384048">
-                <a:tc>
-                  <a:txBody>
-                    <a:bodyPr/>
-                    <a:lstStyle/>
-                    <a:p>
-                      <a:r>
-                        <a:rPr sz="1100" b="0">
-                          <a:solidFill>
-                            <a:srgbClr val="555F6B"/>
-                          </a:solidFill>
-                        </a:rPr>
-                        <a:t>pgvector trong DB, thay Vertex Vector Search</a:t>
-                      </a:r>
-                    </a:p>
-                  </a:txBody>
-                  <a:tcPr marL="45720" marR="45720" marT="18288" marB="18288">
-                    <a:solidFill>
-                      <a:srgbClr val="EEF3F8"/>
-                    </a:solidFill>
-                  </a:tcPr>
-                </a:tc>
-                <a:tc>
-                  <a:txBody>
-                    <a:bodyPr/>
-                    <a:lstStyle/>
-                    <a:p>
-                      <a:r>
-                        <a:rPr sz="1100" b="0">
-                          <a:solidFill>
-                            <a:srgbClr val="555F6B"/>
-                          </a:solidFill>
-                        </a:rPr>
-                        <a:t>~84</a:t>
-                      </a:r>
-                    </a:p>
-                  </a:txBody>
-                  <a:tcPr marL="45720" marR="45720" marT="18288" marB="18288">
-                    <a:solidFill>
-                      <a:srgbClr val="EEF3F8"/>
-                    </a:solidFill>
-                  </a:tcPr>
-                </a:tc>
-              </a:tr>
-              <a:tr h="384048">
-                <a:tc>
-                  <a:txBody>
-                    <a:bodyPr/>
-                    <a:lstStyle/>
-                    <a:p>
-                      <a:r>
-                        <a:rPr sz="1100" b="0">
-                          <a:solidFill>
-                            <a:srgbClr val="555F6B"/>
-                          </a:solidFill>
-                        </a:rPr>
-                        <a:t>Staging dùng chung cụm, thay vì cụm riêng</a:t>
-                      </a:r>
-                    </a:p>
-                  </a:txBody>
-                  <a:tcPr marL="45720" marR="45720" marT="18288" marB="18288">
-                    <a:solidFill>
-                      <a:srgbClr val="FFFFFF"/>
-                    </a:solidFill>
-                  </a:tcPr>
-                </a:tc>
-                <a:tc>
-                  <a:txBody>
-                    <a:bodyPr/>
-                    <a:lstStyle/>
-                    <a:p>
-                      <a:r>
-                        <a:rPr sz="1100" b="0">
-                          <a:solidFill>
-                            <a:srgbClr val="555F6B"/>
-                          </a:solidFill>
-                        </a:rPr>
-                        <a:t>73</a:t>
-                      </a:r>
-                    </a:p>
-                  </a:txBody>
-                  <a:tcPr marL="45720" marR="45720" marT="18288" marB="18288">
-                    <a:solidFill>
-                      <a:srgbClr val="FFFFFF"/>
-                    </a:solidFill>
-                  </a:tcPr>
-                </a:tc>
-              </a:tr>
-            </a:tbl>
-          </a:graphicData>
-        </a:graphic>
-      </p:graphicFrame>
-      <p:sp>
-        <p:nvSpPr>
-          <p:cNvPr id="10" name="TextBox 9"/>
+      <p:sp>
+        <p:nvSpPr>
+          <p:cNvPr id="8" name="TextBox 7"/>
           <p:cNvSpPr txBox="1"/>
           <p:nvPr/>
         </p:nvSpPr>
         <p:spPr>
           <a:xfrm>
-            <a:off x="5486400" y="4937760"/>
-            <a:ext cx="6309360" cy="1371600"/>
+            <a:off x="457200" y="5897880"/>
+            <a:ext cx="11247120" cy="457200"/>
           </a:xfrm>
           <a:prstGeom prst="rect">
             <a:avLst/>
@@ -7495,22 +7382,7 @@
                   <a:srgbClr val="555F6B"/>
                 </a:solidFill>
               </a:rPr>
-              <a:t>Mỗi dòng so với một phương án thay thế riêng, nên không cộng dồn các dòng.</a:t>
-            </a:r>
-          </a:p>
-          <a:p>
-            <a:pPr algn="l">
-              <a:spcAft>
-                <a:spcPts val="400"/>
-              </a:spcAft>
-            </a:pPr>
-            <a:r>
-              <a:rPr sz="1100" b="0">
-                <a:solidFill>
-                  <a:srgbClr val="555F6B"/>
-                </a:solidFill>
-              </a:rPr>
-              <a:t>Không dùng free tier, credit hay giá khuyến mãi. Chưa tính phí ghi cache của Claude (ước tính vài %). Không mua gói support; không có dòng dự phòng.</a:t>
+              <a:t>Đơn giá và bằng chứng từng dòng: Phụ lục A và G03_baogia.xlsx. Không dùng free tier, credit hay giá khuyến mãi.</a:t>
             </a:r>
           </a:p>
         </p:txBody>
@@ -7609,7 +7481,7 @@
                   <a:srgbClr val="FFFFFF"/>
                 </a:solidFill>
               </a:rPr>
-              <a:t>12. Rủi ro lớn nhất: Haiku không đạt eval ở cấp 3–4</a:t>
+              <a:t>11. Đòn bẩy: mỗi lựa chọn tiết kiệm bao nhiêu</a:t>
             </a:r>
           </a:p>
         </p:txBody>
@@ -7647,7 +7519,7 @@
                   <a:srgbClr val="2E6FB7"/>
                 </a:solidFill>
               </a:rPr>
-              <a:t>Khi đó chi phí lên 11.526 USD/tháng. Nhóm đã tính sẵn; LiteLLM đổi model bằng 1 dòng cấu hình</a:t>
+              <a:t>Tiết kiệm = chi phí của phương án thay thế − chi phí của phương án nhóm chọn. Đơn vị: USD/tháng</a:t>
             </a:r>
           </a:p>
         </p:txBody>
@@ -7685,7 +7557,7 @@
                   <a:srgbClr val="555F6B"/>
                 </a:solidFill>
               </a:rPr>
-              <a:t>12</a:t>
+              <a:t>11b</a:t>
             </a:r>
           </a:p>
         </p:txBody>
@@ -7738,7 +7610,7 @@
         </p:nvGraphicFramePr>
         <p:xfrm>
           <a:off x="457200" y="1371600"/>
-          <a:ext cx="5760720" cy="2688336"/>
+          <a:ext cx="11247120" cy="4114800"/>
         </p:xfrm>
         <a:graphic>
           <a:graphicData uri="http://schemas.openxmlformats.org/drawingml/2006/table">
@@ -7747,11 +7619,11 @@
                 <a:tableStyleId>{5C22544A-7EE6-4342-B048-85BDC9FD1C3A}</a:tableStyleId>
               </a:tblPr>
               <a:tblGrid>
-                <a:gridCol w="3017520"/>
-                <a:gridCol w="1371600"/>
-                <a:gridCol w="1371600"/>
+                <a:gridCol w="3474720"/>
+                <a:gridCol w="1188720"/>
+                <a:gridCol w="6583680"/>
               </a:tblGrid>
-              <a:tr h="384048">
+              <a:tr h="457200">
                 <a:tc>
                   <a:txBody>
                     <a:bodyPr/>
@@ -7763,7 +7635,7 @@
                             <a:srgbClr val="FFFFFF"/>
                           </a:solidFill>
                         </a:rPr>
-                        <a:t>Kịch bản</a:t>
+                        <a:t>Đòn bẩy</a:t>
                       </a:r>
                     </a:p>
                   </a:txBody>
@@ -7784,7 +7656,7 @@
                             <a:srgbClr val="FFFFFF"/>
                           </a:solidFill>
                         </a:rPr>
-                        <a:t>USD/tháng</a:t>
+                        <a:t>Tiết kiệm</a:t>
                       </a:r>
                     </a:p>
                   </a:txBody>
@@ -7805,7 +7677,7 @@
                             <a:srgbClr val="FFFFFF"/>
                           </a:solidFill>
                         </a:rPr>
-                        <a:t>USD/DAU</a:t>
+                        <a:t>Cách tính</a:t>
                       </a:r>
                     </a:p>
                   </a:txBody>
@@ -7816,7 +7688,7 @@
                   </a:tcPr>
                 </a:tc>
               </a:tr>
-              <a:tr h="384048">
+              <a:tr h="457200">
                 <a:tc>
                   <a:txBody>
                     <a:bodyPr/>
@@ -7828,7 +7700,7 @@
                             <a:srgbClr val="555F6B"/>
                           </a:solidFill>
                         </a:rPr>
-                        <a:t>Cơ sở (2.000 DAU)</a:t>
+                        <a:t>Haiku cho cả 5 cấp, thay Sonnet ở cấp 3–4</a:t>
                       </a:r>
                     </a:p>
                   </a:txBody>
@@ -7849,7 +7721,7 @@
                             <a:srgbClr val="555F6B"/>
                           </a:solidFill>
                         </a:rPr>
-                        <a:t>6.821</a:t>
+                        <a:t>4.705</a:t>
                       </a:r>
                     </a:p>
                   </a:txBody>
@@ -7870,7 +7742,7 @@
                             <a:srgbClr val="555F6B"/>
                           </a:solidFill>
                         </a:rPr>
-                        <a:t>3,41</a:t>
+                        <a:t>Sonnet cho cấp 3 tốn thêm 2.939, cấp 4 tốn thêm 1.766. Eval gate kiểm tra Haiku vẫn đạt ≥ 95% điểm Opus</a:t>
                       </a:r>
                     </a:p>
                   </a:txBody>
@@ -7881,7 +7753,7 @@
                   </a:tcPr>
                 </a:tc>
               </a:tr>
-              <a:tr h="384048">
+              <a:tr h="457200">
                 <a:tc>
                   <a:txBody>
                     <a:bodyPr/>
@@ -7893,7 +7765,7 @@
                             <a:srgbClr val="555F6B"/>
                           </a:solidFill>
                         </a:rPr>
-                        <a:t>DAU gấp đôi = 4.000</a:t>
+                        <a:t>LiteLLM thay Apigee</a:t>
                       </a:r>
                     </a:p>
                   </a:txBody>
@@ -7914,7 +7786,7 @@
                             <a:srgbClr val="555F6B"/>
                           </a:solidFill>
                         </a:rPr>
-                        <a:t>8.826</a:t>
+                        <a:t>~1.595</a:t>
                       </a:r>
                     </a:p>
                   </a:txBody>
@@ -7935,7 +7807,7 @@
                             <a:srgbClr val="555F6B"/>
                           </a:solidFill>
                         </a:rPr>
-                        <a:t>2,21</a:t>
+                        <a:t>Apigee: môi trường Intermediate 1.460 + phí theo lượt gọi. LiteLLM miễn phí, chạy trong compute</a:t>
                       </a:r>
                     </a:p>
                   </a:txBody>
@@ -7946,7 +7818,7 @@
                   </a:tcPr>
                 </a:tc>
               </a:tr>
-              <a:tr h="384048">
+              <a:tr h="457200">
                 <a:tc>
                   <a:txBody>
                     <a:bodyPr/>
@@ -7958,7 +7830,7 @@
                             <a:srgbClr val="555F6B"/>
                           </a:solidFill>
                         </a:rPr>
-                        <a:t>Giá token +30%</a:t>
+                        <a:t>Guardrail chỉ quét text mới</a:t>
                       </a:r>
                     </a:p>
                   </a:txBody>
@@ -7979,7 +7851,7 @@
                             <a:srgbClr val="555F6B"/>
                           </a:solidFill>
                         </a:rPr>
-                        <a:t>7.263</a:t>
+                        <a:t>1.018</a:t>
                       </a:r>
                     </a:p>
                   </a:txBody>
@@ -8000,7 +7872,7 @@
                             <a:srgbClr val="555F6B"/>
                           </a:solidFill>
                         </a:rPr>
-                        <a:t>3,63</a:t>
+                        <a:t>Quét toàn bộ 12,98 tỉ token = 1.298 − quét 2,81 tỉ token mới = 281</a:t>
                       </a:r>
                     </a:p>
                   </a:txBody>
@@ -8011,7 +7883,7 @@
                   </a:tcPr>
                 </a:tc>
               </a:tr>
-              <a:tr h="384048">
+              <a:tr h="457200">
                 <a:tc>
                   <a:txBody>
                     <a:bodyPr/>
@@ -8023,7 +7895,7 @@
                             <a:srgbClr val="555F6B"/>
                           </a:solidFill>
                         </a:rPr>
-                        <a:t>Giá token −50%</a:t>
+                        <a:t>Cất token bằng KMS trong Postgres</a:t>
                       </a:r>
                     </a:p>
                   </a:txBody>
@@ -8044,7 +7916,7 @@
                             <a:srgbClr val="555F6B"/>
                           </a:solidFill>
                         </a:rPr>
-                        <a:t>6.085</a:t>
+                        <a:t>~716</a:t>
                       </a:r>
                     </a:p>
                   </a:txBody>
@@ -8065,7 +7937,7 @@
                             <a:srgbClr val="555F6B"/>
                           </a:solidFill>
                         </a:rPr>
-                        <a:t>3,04</a:t>
+                        <a:t>12.000 secret × 0,06 = 720 − KMS ≈ 4</a:t>
                       </a:r>
                     </a:p>
                   </a:txBody>
@@ -8076,7 +7948,7 @@
                   </a:tcPr>
                 </a:tc>
               </a:tr>
-              <a:tr h="384048">
+              <a:tr h="457200">
                 <a:tc>
                   <a:txBody>
                     <a:bodyPr/>
@@ -8088,7 +7960,7 @@
                             <a:srgbClr val="555F6B"/>
                           </a:solidFill>
                         </a:rPr>
-                        <a:t>Cấp 3–4 phải nâng lên Sonnet 5.5</a:t>
+                        <a:t>Prompt caching</a:t>
                       </a:r>
                     </a:p>
                   </a:txBody>
@@ -8109,7 +7981,7 @@
                             <a:srgbClr val="555F6B"/>
                           </a:solidFill>
                         </a:rPr>
-                        <a:t>11.526</a:t>
+                        <a:t>670</a:t>
                       </a:r>
                     </a:p>
                   </a:txBody>
@@ -8130,7 +8002,7 @@
                             <a:srgbClr val="555F6B"/>
                           </a:solidFill>
                         </a:rPr>
-                        <a:t>5,76</a:t>
+                        <a:t>7,44 tỉ token vào đọc từ cache × (0,10 − 0,01) USD/1M token</a:t>
                       </a:r>
                     </a:p>
                   </a:txBody>
@@ -8141,7 +8013,7 @@
                   </a:tcPr>
                 </a:tc>
               </a:tr>
-              <a:tr h="384048">
+              <a:tr h="457200">
                 <a:tc>
                   <a:txBody>
                     <a:bodyPr/>
@@ -8153,7 +8025,7 @@
                             <a:srgbClr val="555F6B"/>
                           </a:solidFill>
                         </a:rPr>
-                        <a:t>Workspace đầy 20 TB</a:t>
+                        <a:t>Ngoài giờ chỉ chạy 1 pod mỗi loại</a:t>
                       </a:r>
                     </a:p>
                   </a:txBody>
@@ -8174,7 +8046,7 @@
                             <a:srgbClr val="555F6B"/>
                           </a:solidFill>
                         </a:rPr>
-                        <a:t>+ ~704</a:t>
+                        <a:t>109</a:t>
                       </a:r>
                     </a:p>
                   </a:txBody>
@@ -8195,7 +8067,137 @@
                             <a:srgbClr val="555F6B"/>
                           </a:solidFill>
                         </a:rPr>
-                        <a:t>—</a:t>
+                        <a:t>510 giờ ngoài giờ × 3 loại pod: 1.530 vCPU-giờ × 0,0549 + 4.080 GB-giờ × 0,0061</a:t>
+                      </a:r>
+                    </a:p>
+                  </a:txBody>
+                  <a:tcPr marL="45720" marR="45720" marT="18288" marB="18288">
+                    <a:solidFill>
+                      <a:srgbClr val="FFFFFF"/>
+                    </a:solidFill>
+                  </a:tcPr>
+                </a:tc>
+              </a:tr>
+              <a:tr h="457200">
+                <a:tc>
+                  <a:txBody>
+                    <a:bodyPr/>
+                    <a:lstStyle/>
+                    <a:p>
+                      <a:r>
+                        <a:rPr sz="1200" b="0">
+                          <a:solidFill>
+                            <a:srgbClr val="555F6B"/>
+                          </a:solidFill>
+                        </a:rPr>
+                        <a:t>pgvector trong Postgres</a:t>
+                      </a:r>
+                    </a:p>
+                  </a:txBody>
+                  <a:tcPr marL="45720" marR="45720" marT="18288" marB="18288">
+                    <a:solidFill>
+                      <a:srgbClr val="EEF3F8"/>
+                    </a:solidFill>
+                  </a:tcPr>
+                </a:tc>
+                <a:tc>
+                  <a:txBody>
+                    <a:bodyPr/>
+                    <a:lstStyle/>
+                    <a:p>
+                      <a:r>
+                        <a:rPr sz="1200" b="0">
+                          <a:solidFill>
+                            <a:srgbClr val="555F6B"/>
+                          </a:solidFill>
+                        </a:rPr>
+                        <a:t>~84</a:t>
+                      </a:r>
+                    </a:p>
+                  </a:txBody>
+                  <a:tcPr marL="45720" marR="45720" marT="18288" marB="18288">
+                    <a:solidFill>
+                      <a:srgbClr val="EEF3F8"/>
+                    </a:solidFill>
+                  </a:tcPr>
+                </a:tc>
+                <a:tc>
+                  <a:txBody>
+                    <a:bodyPr/>
+                    <a:lstStyle/>
+                    <a:p>
+                      <a:r>
+                        <a:rPr sz="1200" b="0">
+                          <a:solidFill>
+                            <a:srgbClr val="555F6B"/>
+                          </a:solidFill>
+                        </a:rPr>
+                        <a:t>Vertex Vector Search cần tối thiểu 1 máy chạy 24/7</a:t>
+                      </a:r>
+                    </a:p>
+                  </a:txBody>
+                  <a:tcPr marL="45720" marR="45720" marT="18288" marB="18288">
+                    <a:solidFill>
+                      <a:srgbClr val="EEF3F8"/>
+                    </a:solidFill>
+                  </a:tcPr>
+                </a:tc>
+              </a:tr>
+              <a:tr h="457200">
+                <a:tc>
+                  <a:txBody>
+                    <a:bodyPr/>
+                    <a:lstStyle/>
+                    <a:p>
+                      <a:r>
+                        <a:rPr sz="1200" b="0">
+                          <a:solidFill>
+                            <a:srgbClr val="555F6B"/>
+                          </a:solidFill>
+                        </a:rPr>
+                        <a:t>Staging dùng chung cụm GKE</a:t>
+                      </a:r>
+                    </a:p>
+                  </a:txBody>
+                  <a:tcPr marL="45720" marR="45720" marT="18288" marB="18288">
+                    <a:solidFill>
+                      <a:srgbClr val="FFFFFF"/>
+                    </a:solidFill>
+                  </a:tcPr>
+                </a:tc>
+                <a:tc>
+                  <a:txBody>
+                    <a:bodyPr/>
+                    <a:lstStyle/>
+                    <a:p>
+                      <a:r>
+                        <a:rPr sz="1200" b="0">
+                          <a:solidFill>
+                            <a:srgbClr val="555F6B"/>
+                          </a:solidFill>
+                        </a:rPr>
+                        <a:t>73</a:t>
+                      </a:r>
+                    </a:p>
+                  </a:txBody>
+                  <a:tcPr marL="45720" marR="45720" marT="18288" marB="18288">
+                    <a:solidFill>
+                      <a:srgbClr val="FFFFFF"/>
+                    </a:solidFill>
+                  </a:tcPr>
+                </a:tc>
+                <a:tc>
+                  <a:txBody>
+                    <a:bodyPr/>
+                    <a:lstStyle/>
+                    <a:p>
+                      <a:r>
+                        <a:rPr sz="1200" b="0">
+                          <a:solidFill>
+                            <a:srgbClr val="555F6B"/>
+                          </a:solidFill>
+                        </a:rPr>
+                        <a:t>Cụm riêng mất thêm phí quản lý: 0,10 USD/giờ × 730 giờ</a:t>
                       </a:r>
                     </a:p>
                   </a:txBody>
@@ -8218,8 +8220,8 @@
         </p:nvSpPr>
         <p:spPr>
           <a:xfrm>
-            <a:off x="457200" y="4297680"/>
-            <a:ext cx="5760720" cy="1828800"/>
+            <a:off x="457200" y="5577840"/>
+            <a:ext cx="11247120" cy="731520"/>
           </a:xfrm>
           <a:prstGeom prst="rect">
             <a:avLst/>
@@ -8238,12 +8240,12 @@
               </a:spcAft>
             </a:pPr>
             <a:r>
-              <a:rPr sz="1200" b="1">
+              <a:rPr sz="1100" b="0">
                 <a:solidFill>
                   <a:srgbClr val="555F6B"/>
                 </a:solidFill>
               </a:rPr>
-              <a:t>Khi DAU gấp đôi, USD/DAU giảm</a:t>
+              <a:t>Mỗi dòng so với một phương án thay thế riêng, nên không cộng dồn các dòng.</a:t>
             </a:r>
           </a:p>
           <a:p>
@@ -8253,155 +8255,12 @@
               </a:spcAft>
             </a:pPr>
             <a:r>
-              <a:rPr sz="1200" b="0">
+              <a:rPr sz="1100" b="0">
                 <a:solidFill>
                   <a:srgbClr val="555F6B"/>
                 </a:solidFill>
               </a:rPr>
-              <a:t>Tăng theo lượt dùng: LLM, guardrail, sandbox, lưu trữ, log</a:t>
-            </a:r>
-          </a:p>
-          <a:p>
-            <a:pPr algn="l">
-              <a:spcAft>
-                <a:spcPts val="400"/>
-              </a:spcAft>
-            </a:pPr>
-            <a:r>
-              <a:rPr sz="1200" b="0">
-                <a:solidFill>
-                  <a:srgbClr val="555F6B"/>
-                </a:solidFill>
-              </a:rPr>
-              <a:t>Gần như cố định: 2 kỹ sư, cụm GKE, database, cache, cân bằng tải</a:t>
-            </a:r>
-          </a:p>
-          <a:p>
-            <a:pPr algn="l">
-              <a:spcAft>
-                <a:spcPts val="400"/>
-              </a:spcAft>
-            </a:pPr>
-            <a:r>
-              <a:rPr sz="1200" b="0">
-                <a:solidFill>
-                  <a:srgbClr val="555F6B"/>
-                </a:solidFill>
-              </a:rPr>
-              <a:t>Chỉ xét tự host GPU khi tiền token vượt chi phí chạy ≥ 2 GPU 24/7 cộng vận hành</a:t>
-            </a:r>
-          </a:p>
-        </p:txBody>
-      </p:sp>
-      <p:sp>
-        <p:nvSpPr>
-          <p:cNvPr id="9" name="TextBox 8"/>
-          <p:cNvSpPr txBox="1"/>
-          <p:nvPr/>
-        </p:nvSpPr>
-        <p:spPr>
-          <a:xfrm>
-            <a:off x="6492240" y="1371600"/>
-            <a:ext cx="5303520" cy="4754880"/>
-          </a:xfrm>
-          <a:prstGeom prst="rect">
-            <a:avLst/>
-          </a:prstGeom>
-          <a:noFill/>
-        </p:spPr>
-        <p:txBody>
-          <a:bodyPr wrap="square">
-            <a:spAutoFit/>
-          </a:bodyPr>
-          <a:lstStyle/>
-          <a:p>
-            <a:pPr algn="l">
-              <a:spcAft>
-                <a:spcPts val="400"/>
-              </a:spcAft>
-            </a:pPr>
-            <a:r>
-              <a:rPr sz="1200" b="1">
-                <a:solidFill>
-                  <a:srgbClr val="555F6B"/>
-                </a:solidFill>
-              </a:rPr>
-              <a:t>Các rủi ro khác và cách xử lý</a:t>
-            </a:r>
-          </a:p>
-          <a:p>
-            <a:pPr algn="l">
-              <a:spcAft>
-                <a:spcPts val="400"/>
-              </a:spcAft>
-            </a:pPr>
-            <a:r>
-              <a:rPr sz="1200" b="0">
-                <a:solidFill>
-                  <a:srgbClr val="555F6B"/>
-                </a:solidFill>
-              </a:rPr>
-              <a:t>Token thực tế khác giả định: nhóm dùng 13 tỉ token/tháng, khoảng có thể là 4,6–42,8 tỉ → đo trong pilot 2–4 tuần</a:t>
-            </a:r>
-          </a:p>
-          <a:p>
-            <a:pPr algn="l">
-              <a:spcAft>
-                <a:spcPts val="400"/>
-              </a:spcAft>
-            </a:pPr>
-            <a:r>
-              <a:rPr sz="1200" b="0">
-                <a:solidFill>
-                  <a:srgbClr val="555F6B"/>
-                </a:solidFill>
-              </a:rPr>
-              <a:t>Luật bảo vệ dữ liệu cá nhân (Nghị định 13/2023): Vertex AI dùng endpoint global → dữ liệu nhạy cảm dùng model chạy tại Singapore</a:t>
-            </a:r>
-          </a:p>
-          <a:p>
-            <a:pPr algn="l">
-              <a:spcAft>
-                <a:spcPts val="400"/>
-              </a:spcAft>
-            </a:pPr>
-            <a:r>
-              <a:rPr sz="1200" b="0">
-                <a:solidFill>
-                  <a:srgbClr val="555F6B"/>
-                </a:solidFill>
-              </a:rPr>
-              <a:t>LiteLLM là open source, không có SLA → 2 kỹ sư trực, cố định phiên bản, test trên staging</a:t>
-            </a:r>
-          </a:p>
-          <a:p>
-            <a:pPr algn="l">
-              <a:spcAft>
-                <a:spcPts val="400"/>
-              </a:spcAft>
-            </a:pPr>
-            <a:r>
-              <a:rPr sz="1200" b="0">
-                <a:solidFill>
-                  <a:srgbClr val="555F6B"/>
-                </a:solidFill>
-              </a:rPr>
-              <a:t>Rate limit Jira/Confluence dùng chung cho cả app (65.000 điểm/giờ) → hàng đợi và thử lại</a:t>
-            </a:r>
-          </a:p>
-          <a:p>
-            <a:pPr algn="l">
-              <a:spcAft>
-                <a:spcPts val="400"/>
-              </a:spcAft>
-            </a:pPr>
-            <a:r>
-              <a:rPr sz="1200" b="0">
-                <a:solidFill>
-                  <a:srgbClr val="555F6B"/>
-                </a:solidFill>
-              </a:rPr>
-              <a:t>Google dự kiến tính phí API Workspace từ cuối 2026 (chưa công bố giá)</a:t>
+              <a:t>Chưa tính phí ghi cache của Claude (ước tính vài %). Không mua gói support. Không có dòng dự phòng.</a:t>
             </a:r>
           </a:p>
         </p:txBody>
@@ -8500,7 +8359,7 @@
                   <a:srgbClr val="FFFFFF"/>
                 </a:solidFill>
               </a:rPr>
-              <a:t>Phụ lục A. Báo giá theo component (USD/tháng)</a:t>
+              <a:t>12. Rủi ro lớn nhất: Haiku không đạt eval ở cấp 3–4</a:t>
             </a:r>
           </a:p>
         </p:txBody>
@@ -8538,7 +8397,7 @@
                   <a:srgbClr val="2E6FB7"/>
                 </a:solidFill>
               </a:rPr>
-              <a:t>Chi tiết từng dòng (đơn giá × số lượng, kèm bằng chứng) nằm trong G03_baogia.xlsx</a:t>
+              <a:t>Khi đó chi phí lên 11.526 USD/tháng. Nhóm đã tính sẵn; LiteLLM đổi model bằng 1 dòng cấu hình</a:t>
             </a:r>
           </a:p>
         </p:txBody>
@@ -8576,7 +8435,7 @@
                   <a:srgbClr val="555F6B"/>
                 </a:solidFill>
               </a:rPr>
-              <a:t>A</a:t>
+              <a:t>12</a:t>
             </a:r>
           </a:p>
         </p:txBody>
@@ -8629,7 +8488,7 @@
         </p:nvGraphicFramePr>
         <p:xfrm>
           <a:off x="457200" y="1371600"/>
-          <a:ext cx="5486400" cy="4224528"/>
+          <a:ext cx="5760720" cy="2688336"/>
         </p:xfrm>
         <a:graphic>
           <a:graphicData uri="http://schemas.openxmlformats.org/drawingml/2006/table">
@@ -8638,8 +8497,9 @@
                 <a:tableStyleId>{5C22544A-7EE6-4342-B048-85BDC9FD1C3A}</a:tableStyleId>
               </a:tblPr>
               <a:tblGrid>
-                <a:gridCol w="3200400"/>
-                <a:gridCol w="2286000"/>
+                <a:gridCol w="3017520"/>
+                <a:gridCol w="1371600"/>
+                <a:gridCol w="1371600"/>
               </a:tblGrid>
               <a:tr h="384048">
                 <a:tc>
@@ -8653,7 +8513,7 @@
                             <a:srgbClr val="FFFFFF"/>
                           </a:solidFill>
                         </a:rPr>
-                        <a:t>Component</a:t>
+                        <a:t>Kịch bản</a:t>
                       </a:r>
                     </a:p>
                   </a:txBody>
@@ -8675,6 +8535,27 @@
                           </a:solidFill>
                         </a:rPr>
                         <a:t>USD/tháng</a:t>
+                      </a:r>
+                    </a:p>
+                  </a:txBody>
+                  <a:tcPr marL="45720" marR="45720" marT="18288" marB="18288">
+                    <a:solidFill>
+                      <a:srgbClr val="2E6FB7"/>
+                    </a:solidFill>
+                  </a:tcPr>
+                </a:tc>
+                <a:tc>
+                  <a:txBody>
+                    <a:bodyPr/>
+                    <a:lstStyle/>
+                    <a:p>
+                      <a:r>
+                        <a:rPr sz="1200" b="1">
+                          <a:solidFill>
+                            <a:srgbClr val="FFFFFF"/>
+                          </a:solidFill>
+                        </a:rPr>
+                        <a:t>USD/DAU</a:t>
                       </a:r>
                     </a:p>
                   </a:txBody>
@@ -8697,7 +8578,7 @@
                             <a:srgbClr val="555F6B"/>
                           </a:solidFill>
                         </a:rPr>
-                        <a:t>compute</a:t>
+                        <a:t>Cơ sở (2.000 DAU)</a:t>
                       </a:r>
                     </a:p>
                   </a:txBody>
@@ -8718,7 +8599,28 @@
                             <a:srgbClr val="555F6B"/>
                           </a:solidFill>
                         </a:rPr>
-                        <a:t>284,15</a:t>
+                        <a:t>6.821</a:t>
+                      </a:r>
+                    </a:p>
+                  </a:txBody>
+                  <a:tcPr marL="45720" marR="45720" marT="18288" marB="18288">
+                    <a:solidFill>
+                      <a:srgbClr val="EEF3F8"/>
+                    </a:solidFill>
+                  </a:tcPr>
+                </a:tc>
+                <a:tc>
+                  <a:txBody>
+                    <a:bodyPr/>
+                    <a:lstStyle/>
+                    <a:p>
+                      <a:r>
+                        <a:rPr sz="1200" b="0">
+                          <a:solidFill>
+                            <a:srgbClr val="555F6B"/>
+                          </a:solidFill>
+                        </a:rPr>
+                        <a:t>3,41</a:t>
                       </a:r>
                     </a:p>
                   </a:txBody>
@@ -8741,7 +8643,7 @@
                             <a:srgbClr val="555F6B"/>
                           </a:solidFill>
                         </a:rPr>
-                        <a:t>llm</a:t>
+                        <a:t>DAU gấp đôi = 4.000</a:t>
                       </a:r>
                     </a:p>
                   </a:txBody>
@@ -8762,7 +8664,28 @@
                             <a:srgbClr val="555F6B"/>
                           </a:solidFill>
                         </a:rPr>
-                        <a:t>1.093,34</a:t>
+                        <a:t>8.826</a:t>
+                      </a:r>
+                    </a:p>
+                  </a:txBody>
+                  <a:tcPr marL="45720" marR="45720" marT="18288" marB="18288">
+                    <a:solidFill>
+                      <a:srgbClr val="FFFFFF"/>
+                    </a:solidFill>
+                  </a:tcPr>
+                </a:tc>
+                <a:tc>
+                  <a:txBody>
+                    <a:bodyPr/>
+                    <a:lstStyle/>
+                    <a:p>
+                      <a:r>
+                        <a:rPr sz="1200" b="0">
+                          <a:solidFill>
+                            <a:srgbClr val="555F6B"/>
+                          </a:solidFill>
+                        </a:rPr>
+                        <a:t>2,21</a:t>
                       </a:r>
                     </a:p>
                   </a:txBody>
@@ -8785,7 +8708,7 @@
                             <a:srgbClr val="555F6B"/>
                           </a:solidFill>
                         </a:rPr>
-                        <a:t>embedding</a:t>
+                        <a:t>Giá token +30%</a:t>
                       </a:r>
                     </a:p>
                   </a:txBody>
@@ -8806,7 +8729,28 @@
                             <a:srgbClr val="555F6B"/>
                           </a:solidFill>
                         </a:rPr>
-                        <a:t>19,50</a:t>
+                        <a:t>7.263</a:t>
+                      </a:r>
+                    </a:p>
+                  </a:txBody>
+                  <a:tcPr marL="45720" marR="45720" marT="18288" marB="18288">
+                    <a:solidFill>
+                      <a:srgbClr val="EEF3F8"/>
+                    </a:solidFill>
+                  </a:tcPr>
+                </a:tc>
+                <a:tc>
+                  <a:txBody>
+                    <a:bodyPr/>
+                    <a:lstStyle/>
+                    <a:p>
+                      <a:r>
+                        <a:rPr sz="1200" b="0">
+                          <a:solidFill>
+                            <a:srgbClr val="555F6B"/>
+                          </a:solidFill>
+                        </a:rPr>
+                        <a:t>3,63</a:t>
                       </a:r>
                     </a:p>
                   </a:txBody>
@@ -8829,7 +8773,7 @@
                             <a:srgbClr val="555F6B"/>
                           </a:solidFill>
                         </a:rPr>
-                        <a:t>gateway</a:t>
+                        <a:t>Giá token −50%</a:t>
                       </a:r>
                     </a:p>
                   </a:txBody>
@@ -8850,7 +8794,28 @@
                             <a:srgbClr val="555F6B"/>
                           </a:solidFill>
                         </a:rPr>
-                        <a:t>0,00</a:t>
+                        <a:t>6.085</a:t>
+                      </a:r>
+                    </a:p>
+                  </a:txBody>
+                  <a:tcPr marL="45720" marR="45720" marT="18288" marB="18288">
+                    <a:solidFill>
+                      <a:srgbClr val="FFFFFF"/>
+                    </a:solidFill>
+                  </a:tcPr>
+                </a:tc>
+                <a:tc>
+                  <a:txBody>
+                    <a:bodyPr/>
+                    <a:lstStyle/>
+                    <a:p>
+                      <a:r>
+                        <a:rPr sz="1200" b="0">
+                          <a:solidFill>
+                            <a:srgbClr val="555F6B"/>
+                          </a:solidFill>
+                        </a:rPr>
+                        <a:t>3,04</a:t>
                       </a:r>
                     </a:p>
                   </a:txBody>
@@ -8873,7 +8838,7 @@
                             <a:srgbClr val="555F6B"/>
                           </a:solidFill>
                         </a:rPr>
-                        <a:t>load_balancer</a:t>
+                        <a:t>Cấp 3–4 phải nâng lên Sonnet 5.5</a:t>
                       </a:r>
                     </a:p>
                   </a:txBody>
@@ -8894,7 +8859,28 @@
                             <a:srgbClr val="555F6B"/>
                           </a:solidFill>
                         </a:rPr>
-                        <a:t>29,44</a:t>
+                        <a:t>11.526</a:t>
+                      </a:r>
+                    </a:p>
+                  </a:txBody>
+                  <a:tcPr marL="45720" marR="45720" marT="18288" marB="18288">
+                    <a:solidFill>
+                      <a:srgbClr val="EEF3F8"/>
+                    </a:solidFill>
+                  </a:tcPr>
+                </a:tc>
+                <a:tc>
+                  <a:txBody>
+                    <a:bodyPr/>
+                    <a:lstStyle/>
+                    <a:p>
+                      <a:r>
+                        <a:rPr sz="1200" b="0">
+                          <a:solidFill>
+                            <a:srgbClr val="555F6B"/>
+                          </a:solidFill>
+                        </a:rPr>
+                        <a:t>5,76</a:t>
                       </a:r>
                     </a:p>
                   </a:txBody>
@@ -8917,7 +8903,7 @@
                             <a:srgbClr val="555F6B"/>
                           </a:solidFill>
                         </a:rPr>
-                        <a:t>authn</a:t>
+                        <a:t>Workspace đầy 20 TB</a:t>
                       </a:r>
                     </a:p>
                   </a:txBody>
@@ -8938,7 +8924,7 @@
                             <a:srgbClr val="555F6B"/>
                           </a:solidFill>
                         </a:rPr>
-                        <a:t>0,00</a:t>
+                        <a:t>+ ~704</a:t>
                       </a:r>
                     </a:p>
                   </a:txBody>
@@ -8948,8 +8934,6 @@
                     </a:solidFill>
                   </a:tcPr>
                 </a:tc>
-              </a:tr>
-              <a:tr h="384048">
                 <a:tc>
                   <a:txBody>
                     <a:bodyPr/>
@@ -8961,160 +8945,7 @@
                             <a:srgbClr val="555F6B"/>
                           </a:solidFill>
                         </a:rPr>
-                        <a:t>authz</a:t>
-                      </a:r>
-                    </a:p>
-                  </a:txBody>
-                  <a:tcPr marL="45720" marR="45720" marT="18288" marB="18288">
-                    <a:solidFill>
-                      <a:srgbClr val="EEF3F8"/>
-                    </a:solidFill>
-                  </a:tcPr>
-                </a:tc>
-                <a:tc>
-                  <a:txBody>
-                    <a:bodyPr/>
-                    <a:lstStyle/>
-                    <a:p>
-                      <a:r>
-                        <a:rPr sz="1200" b="0">
-                          <a:solidFill>
-                            <a:srgbClr val="555F6B"/>
-                          </a:solidFill>
-                        </a:rPr>
-                        <a:t>0,00</a:t>
-                      </a:r>
-                    </a:p>
-                  </a:txBody>
-                  <a:tcPr marL="45720" marR="45720" marT="18288" marB="18288">
-                    <a:solidFill>
-                      <a:srgbClr val="EEF3F8"/>
-                    </a:solidFill>
-                  </a:tcPr>
-                </a:tc>
-              </a:tr>
-              <a:tr h="384048">
-                <a:tc>
-                  <a:txBody>
-                    <a:bodyPr/>
-                    <a:lstStyle/>
-                    <a:p>
-                      <a:r>
-                        <a:rPr sz="1200" b="0">
-                          <a:solidFill>
-                            <a:srgbClr val="555F6B"/>
-                          </a:solidFill>
-                        </a:rPr>
-                        <a:t>database</a:t>
-                      </a:r>
-                    </a:p>
-                  </a:txBody>
-                  <a:tcPr marL="45720" marR="45720" marT="18288" marB="18288">
-                    <a:solidFill>
-                      <a:srgbClr val="FFFFFF"/>
-                    </a:solidFill>
-                  </a:tcPr>
-                </a:tc>
-                <a:tc>
-                  <a:txBody>
-                    <a:bodyPr/>
-                    <a:lstStyle/>
-                    <a:p>
-                      <a:r>
-                        <a:rPr sz="1200" b="0">
-                          <a:solidFill>
-                            <a:srgbClr val="555F6B"/>
-                          </a:solidFill>
-                        </a:rPr>
-                        <a:t>466,71</a:t>
-                      </a:r>
-                    </a:p>
-                  </a:txBody>
-                  <a:tcPr marL="45720" marR="45720" marT="18288" marB="18288">
-                    <a:solidFill>
-                      <a:srgbClr val="FFFFFF"/>
-                    </a:solidFill>
-                  </a:tcPr>
-                </a:tc>
-              </a:tr>
-              <a:tr h="384048">
-                <a:tc>
-                  <a:txBody>
-                    <a:bodyPr/>
-                    <a:lstStyle/>
-                    <a:p>
-                      <a:r>
-                        <a:rPr sz="1200" b="0">
-                          <a:solidFill>
-                            <a:srgbClr val="555F6B"/>
-                          </a:solidFill>
-                        </a:rPr>
-                        <a:t>vector_db</a:t>
-                      </a:r>
-                    </a:p>
-                  </a:txBody>
-                  <a:tcPr marL="45720" marR="45720" marT="18288" marB="18288">
-                    <a:solidFill>
-                      <a:srgbClr val="EEF3F8"/>
-                    </a:solidFill>
-                  </a:tcPr>
-                </a:tc>
-                <a:tc>
-                  <a:txBody>
-                    <a:bodyPr/>
-                    <a:lstStyle/>
-                    <a:p>
-                      <a:r>
-                        <a:rPr sz="1200" b="0">
-                          <a:solidFill>
-                            <a:srgbClr val="555F6B"/>
-                          </a:solidFill>
-                        </a:rPr>
-                        <a:t>0,00</a:t>
-                      </a:r>
-                    </a:p>
-                  </a:txBody>
-                  <a:tcPr marL="45720" marR="45720" marT="18288" marB="18288">
-                    <a:solidFill>
-                      <a:srgbClr val="EEF3F8"/>
-                    </a:solidFill>
-                  </a:tcPr>
-                </a:tc>
-              </a:tr>
-              <a:tr h="384048">
-                <a:tc>
-                  <a:txBody>
-                    <a:bodyPr/>
-                    <a:lstStyle/>
-                    <a:p>
-                      <a:r>
-                        <a:rPr sz="1200" b="0">
-                          <a:solidFill>
-                            <a:srgbClr val="555F6B"/>
-                          </a:solidFill>
-                        </a:rPr>
-                        <a:t>object_storage</a:t>
-                      </a:r>
-                    </a:p>
-                  </a:txBody>
-                  <a:tcPr marL="45720" marR="45720" marT="18288" marB="18288">
-                    <a:solidFill>
-                      <a:srgbClr val="FFFFFF"/>
-                    </a:solidFill>
-                  </a:tcPr>
-                </a:tc>
-                <a:tc>
-                  <a:txBody>
-                    <a:bodyPr/>
-                    <a:lstStyle/>
-                    <a:p>
-                      <a:r>
-                        <a:rPr sz="1200" b="0">
-                          <a:solidFill>
-                            <a:srgbClr val="555F6B"/>
-                          </a:solidFill>
-                        </a:rPr>
-                        <a:t>82,80</a:t>
+                        <a:t>—</a:t>
                       </a:r>
                     </a:p>
                   </a:txBody>
@@ -9129,560 +8960,202 @@
           </a:graphicData>
         </a:graphic>
       </p:graphicFrame>
-      <p:graphicFrame>
-        <p:nvGraphicFramePr>
-          <p:cNvPr id="8" name="Table 7"/>
-          <p:cNvGraphicFramePr>
-            <a:graphicFrameLocks noGrp="1"/>
-          </p:cNvGraphicFramePr>
+      <p:sp>
+        <p:nvSpPr>
+          <p:cNvPr id="8" name="TextBox 7"/>
+          <p:cNvSpPr txBox="1"/>
           <p:nvPr/>
-        </p:nvGraphicFramePr>
-        <p:xfrm>
-          <a:off x="6309360" y="1371600"/>
-          <a:ext cx="5486400" cy="4608576"/>
-        </p:xfrm>
-        <a:graphic>
-          <a:graphicData uri="http://schemas.openxmlformats.org/drawingml/2006/table">
-            <a:tbl>
-              <a:tblPr firstRow="1" bandRow="1">
-                <a:tableStyleId>{5C22544A-7EE6-4342-B048-85BDC9FD1C3A}</a:tableStyleId>
-              </a:tblPr>
-              <a:tblGrid>
-                <a:gridCol w="3200400"/>
-                <a:gridCol w="2286000"/>
-              </a:tblGrid>
-              <a:tr h="384048">
-                <a:tc>
-                  <a:txBody>
-                    <a:bodyPr/>
-                    <a:lstStyle/>
-                    <a:p>
-                      <a:r>
-                        <a:rPr sz="1200" b="1">
-                          <a:solidFill>
-                            <a:srgbClr val="FFFFFF"/>
-                          </a:solidFill>
-                        </a:rPr>
-                        <a:t>Component</a:t>
-                      </a:r>
-                    </a:p>
-                  </a:txBody>
-                  <a:tcPr marL="45720" marR="45720" marT="18288" marB="18288">
-                    <a:solidFill>
-                      <a:srgbClr val="2E6FB7"/>
-                    </a:solidFill>
-                  </a:tcPr>
-                </a:tc>
-                <a:tc>
-                  <a:txBody>
-                    <a:bodyPr/>
-                    <a:lstStyle/>
-                    <a:p>
-                      <a:r>
-                        <a:rPr sz="1200" b="1">
-                          <a:solidFill>
-                            <a:srgbClr val="FFFFFF"/>
-                          </a:solidFill>
-                        </a:rPr>
-                        <a:t>USD/tháng</a:t>
-                      </a:r>
-                    </a:p>
-                  </a:txBody>
-                  <a:tcPr marL="45720" marR="45720" marT="18288" marB="18288">
-                    <a:solidFill>
-                      <a:srgbClr val="2E6FB7"/>
-                    </a:solidFill>
-                  </a:tcPr>
-                </a:tc>
-              </a:tr>
-              <a:tr h="384048">
-                <a:tc>
-                  <a:txBody>
-                    <a:bodyPr/>
-                    <a:lstStyle/>
-                    <a:p>
-                      <a:r>
-                        <a:rPr sz="1200" b="0">
-                          <a:solidFill>
-                            <a:srgbClr val="555F6B"/>
-                          </a:solidFill>
-                        </a:rPr>
-                        <a:t>cache_queue</a:t>
-                      </a:r>
-                    </a:p>
-                  </a:txBody>
-                  <a:tcPr marL="45720" marR="45720" marT="18288" marB="18288">
-                    <a:solidFill>
-                      <a:srgbClr val="EEF3F8"/>
-                    </a:solidFill>
-                  </a:tcPr>
-                </a:tc>
-                <a:tc>
-                  <a:txBody>
-                    <a:bodyPr/>
-                    <a:lstStyle/>
-                    <a:p>
-                      <a:r>
-                        <a:rPr sz="1200" b="0">
-                          <a:solidFill>
-                            <a:srgbClr val="555F6B"/>
-                          </a:solidFill>
-                        </a:rPr>
-                        <a:t>55,75</a:t>
-                      </a:r>
-                    </a:p>
-                  </a:txBody>
-                  <a:tcPr marL="45720" marR="45720" marT="18288" marB="18288">
-                    <a:solidFill>
-                      <a:srgbClr val="EEF3F8"/>
-                    </a:solidFill>
-                  </a:tcPr>
-                </a:tc>
-              </a:tr>
-              <a:tr h="384048">
-                <a:tc>
-                  <a:txBody>
-                    <a:bodyPr/>
-                    <a:lstStyle/>
-                    <a:p>
-                      <a:r>
-                        <a:rPr sz="1200" b="0">
-                          <a:solidFill>
-                            <a:srgbClr val="555F6B"/>
-                          </a:solidFill>
-                        </a:rPr>
-                        <a:t>sandbox</a:t>
-                      </a:r>
-                    </a:p>
-                  </a:txBody>
-                  <a:tcPr marL="45720" marR="45720" marT="18288" marB="18288">
-                    <a:solidFill>
-                      <a:srgbClr val="FFFFFF"/>
-                    </a:solidFill>
-                  </a:tcPr>
-                </a:tc>
-                <a:tc>
-                  <a:txBody>
-                    <a:bodyPr/>
-                    <a:lstStyle/>
-                    <a:p>
-                      <a:r>
-                        <a:rPr sz="1200" b="0">
-                          <a:solidFill>
-                            <a:srgbClr val="555F6B"/>
-                          </a:solidFill>
-                        </a:rPr>
-                        <a:t>314,64</a:t>
-                      </a:r>
-                    </a:p>
-                  </a:txBody>
-                  <a:tcPr marL="45720" marR="45720" marT="18288" marB="18288">
-                    <a:solidFill>
-                      <a:srgbClr val="FFFFFF"/>
-                    </a:solidFill>
-                  </a:tcPr>
-                </a:tc>
-              </a:tr>
-              <a:tr h="384048">
-                <a:tc>
-                  <a:txBody>
-                    <a:bodyPr/>
-                    <a:lstStyle/>
-                    <a:p>
-                      <a:r>
-                        <a:rPr sz="1200" b="0">
-                          <a:solidFill>
-                            <a:srgbClr val="555F6B"/>
-                          </a:solidFill>
-                        </a:rPr>
-                        <a:t>connectors</a:t>
-                      </a:r>
-                    </a:p>
-                  </a:txBody>
-                  <a:tcPr marL="45720" marR="45720" marT="18288" marB="18288">
-                    <a:solidFill>
-                      <a:srgbClr val="EEF3F8"/>
-                    </a:solidFill>
-                  </a:tcPr>
-                </a:tc>
-                <a:tc>
-                  <a:txBody>
-                    <a:bodyPr/>
-                    <a:lstStyle/>
-                    <a:p>
-                      <a:r>
-                        <a:rPr sz="1200" b="0">
-                          <a:solidFill>
-                            <a:srgbClr val="555F6B"/>
-                          </a:solidFill>
-                        </a:rPr>
-                        <a:t>0,00</a:t>
-                      </a:r>
-                    </a:p>
-                  </a:txBody>
-                  <a:tcPr marL="45720" marR="45720" marT="18288" marB="18288">
-                    <a:solidFill>
-                      <a:srgbClr val="EEF3F8"/>
-                    </a:solidFill>
-                  </a:tcPr>
-                </a:tc>
-              </a:tr>
-              <a:tr h="384048">
-                <a:tc>
-                  <a:txBody>
-                    <a:bodyPr/>
-                    <a:lstStyle/>
-                    <a:p>
-                      <a:r>
-                        <a:rPr sz="1200" b="0">
-                          <a:solidFill>
-                            <a:srgbClr val="555F6B"/>
-                          </a:solidFill>
-                        </a:rPr>
-                        <a:t>secrets_kms</a:t>
-                      </a:r>
-                    </a:p>
-                  </a:txBody>
-                  <a:tcPr marL="45720" marR="45720" marT="18288" marB="18288">
-                    <a:solidFill>
-                      <a:srgbClr val="FFFFFF"/>
-                    </a:solidFill>
-                  </a:tcPr>
-                </a:tc>
-                <a:tc>
-                  <a:txBody>
-                    <a:bodyPr/>
-                    <a:lstStyle/>
-                    <a:p>
-                      <a:r>
-                        <a:rPr sz="1200" b="0">
-                          <a:solidFill>
-                            <a:srgbClr val="555F6B"/>
-                          </a:solidFill>
-                        </a:rPr>
-                        <a:t>3,96</a:t>
-                      </a:r>
-                    </a:p>
-                  </a:txBody>
-                  <a:tcPr marL="45720" marR="45720" marT="18288" marB="18288">
-                    <a:solidFill>
-                      <a:srgbClr val="FFFFFF"/>
-                    </a:solidFill>
-                  </a:tcPr>
-                </a:tc>
-              </a:tr>
-              <a:tr h="384048">
-                <a:tc>
-                  <a:txBody>
-                    <a:bodyPr/>
-                    <a:lstStyle/>
-                    <a:p>
-                      <a:r>
-                        <a:rPr sz="1200" b="0">
-                          <a:solidFill>
-                            <a:srgbClr val="555F6B"/>
-                          </a:solidFill>
-                        </a:rPr>
-                        <a:t>backup_dr</a:t>
-                      </a:r>
-                    </a:p>
-                  </a:txBody>
-                  <a:tcPr marL="45720" marR="45720" marT="18288" marB="18288">
-                    <a:solidFill>
-                      <a:srgbClr val="EEF3F8"/>
-                    </a:solidFill>
-                  </a:tcPr>
-                </a:tc>
-                <a:tc>
-                  <a:txBody>
-                    <a:bodyPr/>
-                    <a:lstStyle/>
-                    <a:p>
-                      <a:r>
-                        <a:rPr sz="1200" b="0">
-                          <a:solidFill>
-                            <a:srgbClr val="555F6B"/>
-                          </a:solidFill>
-                        </a:rPr>
-                        <a:t>164,40</a:t>
-                      </a:r>
-                    </a:p>
-                  </a:txBody>
-                  <a:tcPr marL="45720" marR="45720" marT="18288" marB="18288">
-                    <a:solidFill>
-                      <a:srgbClr val="EEF3F8"/>
-                    </a:solidFill>
-                  </a:tcPr>
-                </a:tc>
-              </a:tr>
-              <a:tr h="384048">
-                <a:tc>
-                  <a:txBody>
-                    <a:bodyPr/>
-                    <a:lstStyle/>
-                    <a:p>
-                      <a:r>
-                        <a:rPr sz="1200" b="0">
-                          <a:solidFill>
-                            <a:srgbClr val="555F6B"/>
-                          </a:solidFill>
-                        </a:rPr>
-                        <a:t>monitoring</a:t>
-                      </a:r>
-                    </a:p>
-                  </a:txBody>
-                  <a:tcPr marL="45720" marR="45720" marT="18288" marB="18288">
-                    <a:solidFill>
-                      <a:srgbClr val="FFFFFF"/>
-                    </a:solidFill>
-                  </a:tcPr>
-                </a:tc>
-                <a:tc>
-                  <a:txBody>
-                    <a:bodyPr/>
-                    <a:lstStyle/>
-                    <a:p>
-                      <a:r>
-                        <a:rPr sz="1200" b="0">
-                          <a:solidFill>
-                            <a:srgbClr val="555F6B"/>
-                          </a:solidFill>
-                        </a:rPr>
-                        <a:t>22,51</a:t>
-                      </a:r>
-                    </a:p>
-                  </a:txBody>
-                  <a:tcPr marL="45720" marR="45720" marT="18288" marB="18288">
-                    <a:solidFill>
-                      <a:srgbClr val="FFFFFF"/>
-                    </a:solidFill>
-                  </a:tcPr>
-                </a:tc>
-              </a:tr>
-              <a:tr h="384048">
-                <a:tc>
-                  <a:txBody>
-                    <a:bodyPr/>
-                    <a:lstStyle/>
-                    <a:p>
-                      <a:r>
-                        <a:rPr sz="1200" b="0">
-                          <a:solidFill>
-                            <a:srgbClr val="555F6B"/>
-                          </a:solidFill>
-                        </a:rPr>
-                        <a:t>governance</a:t>
-                      </a:r>
-                    </a:p>
-                  </a:txBody>
-                  <a:tcPr marL="45720" marR="45720" marT="18288" marB="18288">
-                    <a:solidFill>
-                      <a:srgbClr val="EEF3F8"/>
-                    </a:solidFill>
-                  </a:tcPr>
-                </a:tc>
-                <a:tc>
-                  <a:txBody>
-                    <a:bodyPr/>
-                    <a:lstStyle/>
-                    <a:p>
-                      <a:r>
-                        <a:rPr sz="1200" b="0">
-                          <a:solidFill>
-                            <a:srgbClr val="555F6B"/>
-                          </a:solidFill>
-                        </a:rPr>
-                        <a:t>805,98</a:t>
-                      </a:r>
-                    </a:p>
-                  </a:txBody>
-                  <a:tcPr marL="45720" marR="45720" marT="18288" marB="18288">
-                    <a:solidFill>
-                      <a:srgbClr val="EEF3F8"/>
-                    </a:solidFill>
-                  </a:tcPr>
-                </a:tc>
-              </a:tr>
-              <a:tr h="384048">
-                <a:tc>
-                  <a:txBody>
-                    <a:bodyPr/>
-                    <a:lstStyle/>
-                    <a:p>
-                      <a:r>
-                        <a:rPr sz="1200" b="0">
-                          <a:solidFill>
-                            <a:srgbClr val="555F6B"/>
-                          </a:solidFill>
-                        </a:rPr>
-                        <a:t>network</a:t>
-                      </a:r>
-                    </a:p>
-                  </a:txBody>
-                  <a:tcPr marL="45720" marR="45720" marT="18288" marB="18288">
-                    <a:solidFill>
-                      <a:srgbClr val="FFFFFF"/>
-                    </a:solidFill>
-                  </a:tcPr>
-                </a:tc>
-                <a:tc>
-                  <a:txBody>
-                    <a:bodyPr/>
-                    <a:lstStyle/>
-                    <a:p>
-                      <a:r>
-                        <a:rPr sz="1200" b="0">
-                          <a:solidFill>
-                            <a:srgbClr val="555F6B"/>
-                          </a:solidFill>
-                        </a:rPr>
-                        <a:t>64,26</a:t>
-                      </a:r>
-                    </a:p>
-                  </a:txBody>
-                  <a:tcPr marL="45720" marR="45720" marT="18288" marB="18288">
-                    <a:solidFill>
-                      <a:srgbClr val="FFFFFF"/>
-                    </a:solidFill>
-                  </a:tcPr>
-                </a:tc>
-              </a:tr>
-              <a:tr h="384048">
-                <a:tc>
-                  <a:txBody>
-                    <a:bodyPr/>
-                    <a:lstStyle/>
-                    <a:p>
-                      <a:r>
-                        <a:rPr sz="1200" b="0">
-                          <a:solidFill>
-                            <a:srgbClr val="555F6B"/>
-                          </a:solidFill>
-                        </a:rPr>
-                        <a:t>cicd</a:t>
-                      </a:r>
-                    </a:p>
-                  </a:txBody>
-                  <a:tcPr marL="45720" marR="45720" marT="18288" marB="18288">
-                    <a:solidFill>
-                      <a:srgbClr val="EEF3F8"/>
-                    </a:solidFill>
-                  </a:tcPr>
-                </a:tc>
-                <a:tc>
-                  <a:txBody>
-                    <a:bodyPr/>
-                    <a:lstStyle/>
-                    <a:p>
-                      <a:r>
-                        <a:rPr sz="1200" b="0">
-                          <a:solidFill>
-                            <a:srgbClr val="555F6B"/>
-                          </a:solidFill>
-                        </a:rPr>
-                        <a:t>14,00</a:t>
-                      </a:r>
-                    </a:p>
-                  </a:txBody>
-                  <a:tcPr marL="45720" marR="45720" marT="18288" marB="18288">
-                    <a:solidFill>
-                      <a:srgbClr val="EEF3F8"/>
-                    </a:solidFill>
-                  </a:tcPr>
-                </a:tc>
-              </a:tr>
-              <a:tr h="384048">
-                <a:tc>
-                  <a:txBody>
-                    <a:bodyPr/>
-                    <a:lstStyle/>
-                    <a:p>
-                      <a:r>
-                        <a:rPr sz="1200" b="0">
-                          <a:solidFill>
-                            <a:srgbClr val="555F6B"/>
-                          </a:solidFill>
-                        </a:rPr>
-                        <a:t>ops_labor</a:t>
-                      </a:r>
-                    </a:p>
-                  </a:txBody>
-                  <a:tcPr marL="45720" marR="45720" marT="18288" marB="18288">
-                    <a:solidFill>
-                      <a:srgbClr val="FFFFFF"/>
-                    </a:solidFill>
-                  </a:tcPr>
-                </a:tc>
-                <a:tc>
-                  <a:txBody>
-                    <a:bodyPr/>
-                    <a:lstStyle/>
-                    <a:p>
-                      <a:r>
-                        <a:rPr sz="1200" b="0">
-                          <a:solidFill>
-                            <a:srgbClr val="555F6B"/>
-                          </a:solidFill>
-                        </a:rPr>
-                        <a:t>3.400,00</a:t>
-                      </a:r>
-                    </a:p>
-                  </a:txBody>
-                  <a:tcPr marL="45720" marR="45720" marT="18288" marB="18288">
-                    <a:solidFill>
-                      <a:srgbClr val="FFFFFF"/>
-                    </a:solidFill>
-                  </a:tcPr>
-                </a:tc>
-              </a:tr>
-              <a:tr h="384048">
-                <a:tc>
-                  <a:txBody>
-                    <a:bodyPr/>
-                    <a:lstStyle/>
-                    <a:p>
-                      <a:r>
-                        <a:rPr sz="1200" b="0">
-                          <a:solidFill>
-                            <a:srgbClr val="555F6B"/>
-                          </a:solidFill>
-                        </a:rPr>
-                        <a:t>TOTAL</a:t>
-                      </a:r>
-                    </a:p>
-                  </a:txBody>
-                  <a:tcPr marL="45720" marR="45720" marT="18288" marB="18288">
-                    <a:solidFill>
-                      <a:srgbClr val="EEF3F8"/>
-                    </a:solidFill>
-                  </a:tcPr>
-                </a:tc>
-                <a:tc>
-                  <a:txBody>
-                    <a:bodyPr/>
-                    <a:lstStyle/>
-                    <a:p>
-                      <a:r>
-                        <a:rPr sz="1200" b="0">
-                          <a:solidFill>
-                            <a:srgbClr val="555F6B"/>
-                          </a:solidFill>
-                        </a:rPr>
-                        <a:t>6.821,44</a:t>
-                      </a:r>
-                    </a:p>
-                  </a:txBody>
-                  <a:tcPr marL="45720" marR="45720" marT="18288" marB="18288">
-                    <a:solidFill>
-                      <a:srgbClr val="EEF3F8"/>
-                    </a:solidFill>
-                  </a:tcPr>
-                </a:tc>
-              </a:tr>
-            </a:tbl>
-          </a:graphicData>
-        </a:graphic>
-      </p:graphicFrame>
+        </p:nvSpPr>
+        <p:spPr>
+          <a:xfrm>
+            <a:off x="457200" y="4297680"/>
+            <a:ext cx="5760720" cy="1828800"/>
+          </a:xfrm>
+          <a:prstGeom prst="rect">
+            <a:avLst/>
+          </a:prstGeom>
+          <a:noFill/>
+        </p:spPr>
+        <p:txBody>
+          <a:bodyPr wrap="square">
+            <a:spAutoFit/>
+          </a:bodyPr>
+          <a:lstStyle/>
+          <a:p>
+            <a:pPr algn="l">
+              <a:spcAft>
+                <a:spcPts val="400"/>
+              </a:spcAft>
+            </a:pPr>
+            <a:r>
+              <a:rPr sz="1200" b="1">
+                <a:solidFill>
+                  <a:srgbClr val="555F6B"/>
+                </a:solidFill>
+              </a:rPr>
+              <a:t>Khi DAU gấp đôi, USD/DAU giảm</a:t>
+            </a:r>
+          </a:p>
+          <a:p>
+            <a:pPr algn="l">
+              <a:spcAft>
+                <a:spcPts val="400"/>
+              </a:spcAft>
+            </a:pPr>
+            <a:r>
+              <a:rPr sz="1200" b="0">
+                <a:solidFill>
+                  <a:srgbClr val="555F6B"/>
+                </a:solidFill>
+              </a:rPr>
+              <a:t>Tăng theo lượt dùng: LLM, guardrail, sandbox, lưu trữ, log</a:t>
+            </a:r>
+          </a:p>
+          <a:p>
+            <a:pPr algn="l">
+              <a:spcAft>
+                <a:spcPts val="400"/>
+              </a:spcAft>
+            </a:pPr>
+            <a:r>
+              <a:rPr sz="1200" b="0">
+                <a:solidFill>
+                  <a:srgbClr val="555F6B"/>
+                </a:solidFill>
+              </a:rPr>
+              <a:t>Gần như cố định: 2 kỹ sư, cụm GKE, database, cache, cân bằng tải</a:t>
+            </a:r>
+          </a:p>
+          <a:p>
+            <a:pPr algn="l">
+              <a:spcAft>
+                <a:spcPts val="400"/>
+              </a:spcAft>
+            </a:pPr>
+            <a:r>
+              <a:rPr sz="1200" b="0">
+                <a:solidFill>
+                  <a:srgbClr val="555F6B"/>
+                </a:solidFill>
+              </a:rPr>
+              <a:t>Chỉ xét tự host GPU khi tiền token vượt chi phí chạy ≥ 2 GPU 24/7 cộng vận hành</a:t>
+            </a:r>
+          </a:p>
+        </p:txBody>
+      </p:sp>
+      <p:sp>
+        <p:nvSpPr>
+          <p:cNvPr id="9" name="TextBox 8"/>
+          <p:cNvSpPr txBox="1"/>
+          <p:nvPr/>
+        </p:nvSpPr>
+        <p:spPr>
+          <a:xfrm>
+            <a:off x="6492240" y="1371600"/>
+            <a:ext cx="5303520" cy="4754880"/>
+          </a:xfrm>
+          <a:prstGeom prst="rect">
+            <a:avLst/>
+          </a:prstGeom>
+          <a:noFill/>
+        </p:spPr>
+        <p:txBody>
+          <a:bodyPr wrap="square">
+            <a:spAutoFit/>
+          </a:bodyPr>
+          <a:lstStyle/>
+          <a:p>
+            <a:pPr algn="l">
+              <a:spcAft>
+                <a:spcPts val="400"/>
+              </a:spcAft>
+            </a:pPr>
+            <a:r>
+              <a:rPr sz="1200" b="1">
+                <a:solidFill>
+                  <a:srgbClr val="555F6B"/>
+                </a:solidFill>
+              </a:rPr>
+              <a:t>Các rủi ro khác và cách xử lý</a:t>
+            </a:r>
+          </a:p>
+          <a:p>
+            <a:pPr algn="l">
+              <a:spcAft>
+                <a:spcPts val="400"/>
+              </a:spcAft>
+            </a:pPr>
+            <a:r>
+              <a:rPr sz="1200" b="0">
+                <a:solidFill>
+                  <a:srgbClr val="555F6B"/>
+                </a:solidFill>
+              </a:rPr>
+              <a:t>Token thực tế khác giả định: nhóm dùng 13 tỉ token/tháng, khoảng có thể là 4,6–42,8 tỉ → đo trong pilot 2–4 tuần</a:t>
+            </a:r>
+          </a:p>
+          <a:p>
+            <a:pPr algn="l">
+              <a:spcAft>
+                <a:spcPts val="400"/>
+              </a:spcAft>
+            </a:pPr>
+            <a:r>
+              <a:rPr sz="1200" b="0">
+                <a:solidFill>
+                  <a:srgbClr val="555F6B"/>
+                </a:solidFill>
+              </a:rPr>
+              <a:t>Luật bảo vệ dữ liệu cá nhân (Nghị định 13/2023): Vertex AI dùng endpoint global → dữ liệu nhạy cảm dùng model chạy tại Singapore</a:t>
+            </a:r>
+          </a:p>
+          <a:p>
+            <a:pPr algn="l">
+              <a:spcAft>
+                <a:spcPts val="400"/>
+              </a:spcAft>
+            </a:pPr>
+            <a:r>
+              <a:rPr sz="1200" b="0">
+                <a:solidFill>
+                  <a:srgbClr val="555F6B"/>
+                </a:solidFill>
+              </a:rPr>
+              <a:t>LiteLLM là open source, không có SLA → 2 kỹ sư trực, cố định phiên bản, test trên staging</a:t>
+            </a:r>
+          </a:p>
+          <a:p>
+            <a:pPr algn="l">
+              <a:spcAft>
+                <a:spcPts val="400"/>
+              </a:spcAft>
+            </a:pPr>
+            <a:r>
+              <a:rPr sz="1200" b="0">
+                <a:solidFill>
+                  <a:srgbClr val="555F6B"/>
+                </a:solidFill>
+              </a:rPr>
+              <a:t>Rate limit Jira/Confluence dùng chung cho cả app (65.000 điểm/giờ) → hàng đợi và thử lại</a:t>
+            </a:r>
+          </a:p>
+          <a:p>
+            <a:pPr algn="l">
+              <a:spcAft>
+                <a:spcPts val="400"/>
+              </a:spcAft>
+            </a:pPr>
+            <a:r>
+              <a:rPr sz="1200" b="0">
+                <a:solidFill>
+                  <a:srgbClr val="555F6B"/>
+                </a:solidFill>
+              </a:rPr>
+              <a:t>Google dự kiến tính phí API Workspace từ cuối 2026 (chưa công bố giá)</a:t>
+            </a:r>
+          </a:p>
+        </p:txBody>
+      </p:sp>
     </p:spTree>
   </p:cSld>
   <p:clrMapOvr>
@@ -9777,7 +9250,7 @@
                   <a:srgbClr val="FFFFFF"/>
                 </a:solidFill>
               </a:rPr>
-              <a:t>Phụ lục B. Nguồn số liệu</a:t>
+              <a:t>Phụ lục A. Báo giá theo component (USD/tháng)</a:t>
             </a:r>
           </a:p>
         </p:txBody>
@@ -9785,6 +9258,44 @@
       <p:sp>
         <p:nvSpPr>
           <p:cNvPr id="4" name="TextBox 3"/>
+          <p:cNvSpPr txBox="1"/>
+          <p:nvPr/>
+        </p:nvSpPr>
+        <p:spPr>
+          <a:xfrm>
+            <a:off x="457200" y="914400"/>
+            <a:ext cx="11247120" cy="457200"/>
+          </a:xfrm>
+          <a:prstGeom prst="rect">
+            <a:avLst/>
+          </a:prstGeom>
+          <a:noFill/>
+        </p:spPr>
+        <p:txBody>
+          <a:bodyPr wrap="square">
+            <a:spAutoFit/>
+          </a:bodyPr>
+          <a:lstStyle/>
+          <a:p>
+            <a:pPr algn="l">
+              <a:spcAft>
+                <a:spcPts val="400"/>
+              </a:spcAft>
+            </a:pPr>
+            <a:r>
+              <a:rPr sz="1300" b="0">
+                <a:solidFill>
+                  <a:srgbClr val="2E6FB7"/>
+                </a:solidFill>
+              </a:rPr>
+              <a:t>Chi tiết từng dòng (đơn giá × số lượng, kèm bằng chứng) nằm trong G03_baogia.xlsx</a:t>
+            </a:r>
+          </a:p>
+        </p:txBody>
+      </p:sp>
+      <p:sp>
+        <p:nvSpPr>
+          <p:cNvPr id="5" name="TextBox 4"/>
           <p:cNvSpPr txBox="1"/>
           <p:nvPr/>
         </p:nvSpPr>
@@ -9815,14 +9326,14 @@
                   <a:srgbClr val="555F6B"/>
                 </a:solidFill>
               </a:rPr>
-              <a:t>B</a:t>
-            </a:r>
-          </a:p>
-        </p:txBody>
-      </p:sp>
-      <p:sp>
-        <p:nvSpPr>
-          <p:cNvPr id="5" name="TextBox 4"/>
+              <a:t>A</a:t>
+            </a:r>
+          </a:p>
+        </p:txBody>
+      </p:sp>
+      <p:sp>
+        <p:nvSpPr>
+          <p:cNvPr id="6" name="TextBox 5"/>
           <p:cNvSpPr txBox="1"/>
           <p:nvPr/>
         </p:nvSpPr>
@@ -9858,164 +9369,1070 @@
           </a:p>
         </p:txBody>
       </p:sp>
-      <p:sp>
-        <p:nvSpPr>
-          <p:cNvPr id="6" name="TextBox 5"/>
-          <p:cNvSpPr txBox="1"/>
+      <p:graphicFrame>
+        <p:nvGraphicFramePr>
+          <p:cNvPr id="7" name="Table 6"/>
+          <p:cNvGraphicFramePr>
+            <a:graphicFrameLocks noGrp="1"/>
+          </p:cNvGraphicFramePr>
           <p:nvPr/>
-        </p:nvSpPr>
-        <p:spPr>
-          <a:xfrm>
-            <a:off x="457200" y="1188720"/>
-            <a:ext cx="11247120" cy="5120640"/>
-          </a:xfrm>
-          <a:prstGeom prst="rect">
-            <a:avLst/>
-          </a:prstGeom>
-          <a:noFill/>
-        </p:spPr>
-        <p:txBody>
-          <a:bodyPr wrap="square">
-            <a:spAutoFit/>
-          </a:bodyPr>
-          <a:lstStyle/>
-          <a:p>
-            <a:pPr algn="l">
-              <a:spcAft>
-                <a:spcPts val="400"/>
-              </a:spcAft>
-            </a:pPr>
-            <a:r>
-              <a:rPr sz="1300" b="0">
-                <a:solidFill>
-                  <a:srgbClr val="555F6B"/>
-                </a:solidFill>
-              </a:rPr>
-              <a:t>Giá: trang giá chính thức của Google Cloud (GKE, Vertex AI, Cloud SQL, Cloud Storage, Memorystore, Cloud Tasks, KMS, Secret Manager, Observability, Security Command Center, Cloud Armor, VPC network, Cloud Build, Artifact Registry, IAP), đọc ngày 16/10/2026</a:t>
-            </a:r>
-          </a:p>
-          <a:p>
-            <a:pPr algn="l">
-              <a:spcAft>
-                <a:spcPts val="400"/>
-              </a:spcAft>
-            </a:pPr>
-            <a:r>
-              <a:rPr sz="1300" b="0">
-                <a:solidFill>
-                  <a:srgbClr val="555F6B"/>
-                </a:solidFill>
-              </a:rPr>
-              <a:t>So sánh với AWS và Azure: AWS Price List API, Azure Retail Prices API (region ap-southeast-1, southeastasia)</a:t>
-            </a:r>
-          </a:p>
-          <a:p>
-            <a:pPr algn="l">
-              <a:spcAft>
-                <a:spcPts val="400"/>
-              </a:spcAft>
-            </a:pPr>
-            <a:r>
-              <a:rPr sz="1300" b="0">
-                <a:solidFill>
-                  <a:srgbClr val="555F6B"/>
-                </a:solidFill>
-              </a:rPr>
-              <a:t>Tải: Microsoft WorkLab 2025; Dillon et al., Shifting Work Patterns with Generative AI (2025); Radicati 2015; APQC; Brynjolfsson et al. NBER 31161; Graphite Research; Liang et al. 2025; UK DBT Copilot evaluation 2025</a:t>
-            </a:r>
-          </a:p>
-          <a:p>
-            <a:pPr algn="l">
-              <a:spcAft>
-                <a:spcPts val="400"/>
-              </a:spcAft>
-            </a:pPr>
-            <a:r>
-              <a:rPr sz="1300" b="0">
-                <a:solidFill>
-                  <a:srgbClr val="555F6B"/>
-                </a:solidFill>
-              </a:rPr>
-              <a:t>Token mỗi lượt chat (số lần gọi model × token vào / token ra): cấp 1: 2 × 5,5k / 250 · cấp 2: 2 × 18k / 2,5k · cấp 3: 3,5 × 12k / 1k · cấp 4: 8 × 15k / 300 · cấp 5: 1,5 × 4k / 600 + 1 ảnh</a:t>
-            </a:r>
-          </a:p>
-          <a:p>
-            <a:pPr algn="l">
-              <a:spcAft>
-                <a:spcPts val="400"/>
-              </a:spcAft>
-            </a:pPr>
-            <a:r>
-              <a:rPr sz="1300" b="0">
-                <a:solidFill>
-                  <a:srgbClr val="555F6B"/>
-                </a:solidFill>
-              </a:rPr>
-              <a:t>Nguồn token: Azure OpenAI On your data defaults; Vertex RAG Engine; DA-Code; DABstep; MCP-Universe; MCPMark; OpenRouter State of AI 2025; Azure LLM inference trace 2024</a:t>
-            </a:r>
-          </a:p>
-          <a:p>
-            <a:pPr algn="l">
-              <a:spcAft>
-                <a:spcPts val="400"/>
-              </a:spcAft>
-            </a:pPr>
-            <a:r>
-              <a:rPr sz="1300" b="0">
-                <a:solidFill>
-                  <a:srgbClr val="555F6B"/>
-                </a:solidFill>
-              </a:rPr>
-              <a:t>Chất lượng và tốc độ model: Artificial Analysis Intelligence Index v4.3.2</a:t>
-            </a:r>
-          </a:p>
-          <a:p>
-            <a:pPr algn="l">
-              <a:spcAft>
-                <a:spcPts val="400"/>
-              </a:spcAft>
-            </a:pPr>
-            <a:r>
-              <a:rPr sz="1300" b="0">
-                <a:solidFill>
-                  <a:srgbClr val="555F6B"/>
-                </a:solidFill>
-              </a:rPr>
-              <a:t>Lương: ITviec Vietnam IT Salary &amp; Recruitment Market 2024–2025; tỉ giá Vietcombank ngày 16/10/2026</a:t>
-            </a:r>
-          </a:p>
-          <a:p>
-            <a:pPr algn="l">
-              <a:spcAft>
-                <a:spcPts val="400"/>
-              </a:spcAft>
-            </a:pPr>
-            <a:r>
-              <a:rPr sz="1300" b="0">
-                <a:solidFill>
-                  <a:srgbClr val="555F6B"/>
-                </a:solidFill>
-              </a:rPr>
-              <a:t>Connector: Microsoft Graph throttling, Atlassian rate limiting, Notion request limits, Google Workspace API limits</a:t>
-            </a:r>
-          </a:p>
-          <a:p>
-            <a:pPr algn="l">
-              <a:spcAft>
-                <a:spcPts val="400"/>
-              </a:spcAft>
-            </a:pPr>
-            <a:r>
-              <a:rPr sz="1300" b="0">
-                <a:solidFill>
-                  <a:srgbClr val="555F6B"/>
-                </a:solidFill>
-              </a:rPr>
-              <a:t>Chi tiết nghiên cứu: thư mục research/ (usage-benchmarks, task-volume-by-role, token-per-task, r1, r2, r3, r5-r9, r8-r6) và cost_model.py</a:t>
-            </a:r>
-          </a:p>
-        </p:txBody>
-      </p:sp>
+        </p:nvGraphicFramePr>
+        <p:xfrm>
+          <a:off x="457200" y="1371600"/>
+          <a:ext cx="5486400" cy="4224528"/>
+        </p:xfrm>
+        <a:graphic>
+          <a:graphicData uri="http://schemas.openxmlformats.org/drawingml/2006/table">
+            <a:tbl>
+              <a:tblPr firstRow="1" bandRow="1">
+                <a:tableStyleId>{5C22544A-7EE6-4342-B048-85BDC9FD1C3A}</a:tableStyleId>
+              </a:tblPr>
+              <a:tblGrid>
+                <a:gridCol w="3200400"/>
+                <a:gridCol w="2286000"/>
+              </a:tblGrid>
+              <a:tr h="384048">
+                <a:tc>
+                  <a:txBody>
+                    <a:bodyPr/>
+                    <a:lstStyle/>
+                    <a:p>
+                      <a:r>
+                        <a:rPr sz="1200" b="1">
+                          <a:solidFill>
+                            <a:srgbClr val="FFFFFF"/>
+                          </a:solidFill>
+                        </a:rPr>
+                        <a:t>Component</a:t>
+                      </a:r>
+                    </a:p>
+                  </a:txBody>
+                  <a:tcPr marL="45720" marR="45720" marT="18288" marB="18288">
+                    <a:solidFill>
+                      <a:srgbClr val="2E6FB7"/>
+                    </a:solidFill>
+                  </a:tcPr>
+                </a:tc>
+                <a:tc>
+                  <a:txBody>
+                    <a:bodyPr/>
+                    <a:lstStyle/>
+                    <a:p>
+                      <a:r>
+                        <a:rPr sz="1200" b="1">
+                          <a:solidFill>
+                            <a:srgbClr val="FFFFFF"/>
+                          </a:solidFill>
+                        </a:rPr>
+                        <a:t>USD/tháng</a:t>
+                      </a:r>
+                    </a:p>
+                  </a:txBody>
+                  <a:tcPr marL="45720" marR="45720" marT="18288" marB="18288">
+                    <a:solidFill>
+                      <a:srgbClr val="2E6FB7"/>
+                    </a:solidFill>
+                  </a:tcPr>
+                </a:tc>
+              </a:tr>
+              <a:tr h="384048">
+                <a:tc>
+                  <a:txBody>
+                    <a:bodyPr/>
+                    <a:lstStyle/>
+                    <a:p>
+                      <a:r>
+                        <a:rPr sz="1200" b="0">
+                          <a:solidFill>
+                            <a:srgbClr val="555F6B"/>
+                          </a:solidFill>
+                        </a:rPr>
+                        <a:t>compute</a:t>
+                      </a:r>
+                    </a:p>
+                  </a:txBody>
+                  <a:tcPr marL="45720" marR="45720" marT="18288" marB="18288">
+                    <a:solidFill>
+                      <a:srgbClr val="EEF3F8"/>
+                    </a:solidFill>
+                  </a:tcPr>
+                </a:tc>
+                <a:tc>
+                  <a:txBody>
+                    <a:bodyPr/>
+                    <a:lstStyle/>
+                    <a:p>
+                      <a:r>
+                        <a:rPr sz="1200" b="0">
+                          <a:solidFill>
+                            <a:srgbClr val="555F6B"/>
+                          </a:solidFill>
+                        </a:rPr>
+                        <a:t>284,15</a:t>
+                      </a:r>
+                    </a:p>
+                  </a:txBody>
+                  <a:tcPr marL="45720" marR="45720" marT="18288" marB="18288">
+                    <a:solidFill>
+                      <a:srgbClr val="EEF3F8"/>
+                    </a:solidFill>
+                  </a:tcPr>
+                </a:tc>
+              </a:tr>
+              <a:tr h="384048">
+                <a:tc>
+                  <a:txBody>
+                    <a:bodyPr/>
+                    <a:lstStyle/>
+                    <a:p>
+                      <a:r>
+                        <a:rPr sz="1200" b="0">
+                          <a:solidFill>
+                            <a:srgbClr val="555F6B"/>
+                          </a:solidFill>
+                        </a:rPr>
+                        <a:t>llm</a:t>
+                      </a:r>
+                    </a:p>
+                  </a:txBody>
+                  <a:tcPr marL="45720" marR="45720" marT="18288" marB="18288">
+                    <a:solidFill>
+                      <a:srgbClr val="FFFFFF"/>
+                    </a:solidFill>
+                  </a:tcPr>
+                </a:tc>
+                <a:tc>
+                  <a:txBody>
+                    <a:bodyPr/>
+                    <a:lstStyle/>
+                    <a:p>
+                      <a:r>
+                        <a:rPr sz="1200" b="0">
+                          <a:solidFill>
+                            <a:srgbClr val="555F6B"/>
+                          </a:solidFill>
+                        </a:rPr>
+                        <a:t>1.093,34</a:t>
+                      </a:r>
+                    </a:p>
+                  </a:txBody>
+                  <a:tcPr marL="45720" marR="45720" marT="18288" marB="18288">
+                    <a:solidFill>
+                      <a:srgbClr val="FFFFFF"/>
+                    </a:solidFill>
+                  </a:tcPr>
+                </a:tc>
+              </a:tr>
+              <a:tr h="384048">
+                <a:tc>
+                  <a:txBody>
+                    <a:bodyPr/>
+                    <a:lstStyle/>
+                    <a:p>
+                      <a:r>
+                        <a:rPr sz="1200" b="0">
+                          <a:solidFill>
+                            <a:srgbClr val="555F6B"/>
+                          </a:solidFill>
+                        </a:rPr>
+                        <a:t>embedding</a:t>
+                      </a:r>
+                    </a:p>
+                  </a:txBody>
+                  <a:tcPr marL="45720" marR="45720" marT="18288" marB="18288">
+                    <a:solidFill>
+                      <a:srgbClr val="EEF3F8"/>
+                    </a:solidFill>
+                  </a:tcPr>
+                </a:tc>
+                <a:tc>
+                  <a:txBody>
+                    <a:bodyPr/>
+                    <a:lstStyle/>
+                    <a:p>
+                      <a:r>
+                        <a:rPr sz="1200" b="0">
+                          <a:solidFill>
+                            <a:srgbClr val="555F6B"/>
+                          </a:solidFill>
+                        </a:rPr>
+                        <a:t>19,50</a:t>
+                      </a:r>
+                    </a:p>
+                  </a:txBody>
+                  <a:tcPr marL="45720" marR="45720" marT="18288" marB="18288">
+                    <a:solidFill>
+                      <a:srgbClr val="EEF3F8"/>
+                    </a:solidFill>
+                  </a:tcPr>
+                </a:tc>
+              </a:tr>
+              <a:tr h="384048">
+                <a:tc>
+                  <a:txBody>
+                    <a:bodyPr/>
+                    <a:lstStyle/>
+                    <a:p>
+                      <a:r>
+                        <a:rPr sz="1200" b="0">
+                          <a:solidFill>
+                            <a:srgbClr val="555F6B"/>
+                          </a:solidFill>
+                        </a:rPr>
+                        <a:t>gateway</a:t>
+                      </a:r>
+                    </a:p>
+                  </a:txBody>
+                  <a:tcPr marL="45720" marR="45720" marT="18288" marB="18288">
+                    <a:solidFill>
+                      <a:srgbClr val="FFFFFF"/>
+                    </a:solidFill>
+                  </a:tcPr>
+                </a:tc>
+                <a:tc>
+                  <a:txBody>
+                    <a:bodyPr/>
+                    <a:lstStyle/>
+                    <a:p>
+                      <a:r>
+                        <a:rPr sz="1200" b="0">
+                          <a:solidFill>
+                            <a:srgbClr val="555F6B"/>
+                          </a:solidFill>
+                        </a:rPr>
+                        <a:t>0,00</a:t>
+                      </a:r>
+                    </a:p>
+                  </a:txBody>
+                  <a:tcPr marL="45720" marR="45720" marT="18288" marB="18288">
+                    <a:solidFill>
+                      <a:srgbClr val="FFFFFF"/>
+                    </a:solidFill>
+                  </a:tcPr>
+                </a:tc>
+              </a:tr>
+              <a:tr h="384048">
+                <a:tc>
+                  <a:txBody>
+                    <a:bodyPr/>
+                    <a:lstStyle/>
+                    <a:p>
+                      <a:r>
+                        <a:rPr sz="1200" b="0">
+                          <a:solidFill>
+                            <a:srgbClr val="555F6B"/>
+                          </a:solidFill>
+                        </a:rPr>
+                        <a:t>load_balancer</a:t>
+                      </a:r>
+                    </a:p>
+                  </a:txBody>
+                  <a:tcPr marL="45720" marR="45720" marT="18288" marB="18288">
+                    <a:solidFill>
+                      <a:srgbClr val="EEF3F8"/>
+                    </a:solidFill>
+                  </a:tcPr>
+                </a:tc>
+                <a:tc>
+                  <a:txBody>
+                    <a:bodyPr/>
+                    <a:lstStyle/>
+                    <a:p>
+                      <a:r>
+                        <a:rPr sz="1200" b="0">
+                          <a:solidFill>
+                            <a:srgbClr val="555F6B"/>
+                          </a:solidFill>
+                        </a:rPr>
+                        <a:t>29,44</a:t>
+                      </a:r>
+                    </a:p>
+                  </a:txBody>
+                  <a:tcPr marL="45720" marR="45720" marT="18288" marB="18288">
+                    <a:solidFill>
+                      <a:srgbClr val="EEF3F8"/>
+                    </a:solidFill>
+                  </a:tcPr>
+                </a:tc>
+              </a:tr>
+              <a:tr h="384048">
+                <a:tc>
+                  <a:txBody>
+                    <a:bodyPr/>
+                    <a:lstStyle/>
+                    <a:p>
+                      <a:r>
+                        <a:rPr sz="1200" b="0">
+                          <a:solidFill>
+                            <a:srgbClr val="555F6B"/>
+                          </a:solidFill>
+                        </a:rPr>
+                        <a:t>authn</a:t>
+                      </a:r>
+                    </a:p>
+                  </a:txBody>
+                  <a:tcPr marL="45720" marR="45720" marT="18288" marB="18288">
+                    <a:solidFill>
+                      <a:srgbClr val="FFFFFF"/>
+                    </a:solidFill>
+                  </a:tcPr>
+                </a:tc>
+                <a:tc>
+                  <a:txBody>
+                    <a:bodyPr/>
+                    <a:lstStyle/>
+                    <a:p>
+                      <a:r>
+                        <a:rPr sz="1200" b="0">
+                          <a:solidFill>
+                            <a:srgbClr val="555F6B"/>
+                          </a:solidFill>
+                        </a:rPr>
+                        <a:t>0,00</a:t>
+                      </a:r>
+                    </a:p>
+                  </a:txBody>
+                  <a:tcPr marL="45720" marR="45720" marT="18288" marB="18288">
+                    <a:solidFill>
+                      <a:srgbClr val="FFFFFF"/>
+                    </a:solidFill>
+                  </a:tcPr>
+                </a:tc>
+              </a:tr>
+              <a:tr h="384048">
+                <a:tc>
+                  <a:txBody>
+                    <a:bodyPr/>
+                    <a:lstStyle/>
+                    <a:p>
+                      <a:r>
+                        <a:rPr sz="1200" b="0">
+                          <a:solidFill>
+                            <a:srgbClr val="555F6B"/>
+                          </a:solidFill>
+                        </a:rPr>
+                        <a:t>authz</a:t>
+                      </a:r>
+                    </a:p>
+                  </a:txBody>
+                  <a:tcPr marL="45720" marR="45720" marT="18288" marB="18288">
+                    <a:solidFill>
+                      <a:srgbClr val="EEF3F8"/>
+                    </a:solidFill>
+                  </a:tcPr>
+                </a:tc>
+                <a:tc>
+                  <a:txBody>
+                    <a:bodyPr/>
+                    <a:lstStyle/>
+                    <a:p>
+                      <a:r>
+                        <a:rPr sz="1200" b="0">
+                          <a:solidFill>
+                            <a:srgbClr val="555F6B"/>
+                          </a:solidFill>
+                        </a:rPr>
+                        <a:t>0,00</a:t>
+                      </a:r>
+                    </a:p>
+                  </a:txBody>
+                  <a:tcPr marL="45720" marR="45720" marT="18288" marB="18288">
+                    <a:solidFill>
+                      <a:srgbClr val="EEF3F8"/>
+                    </a:solidFill>
+                  </a:tcPr>
+                </a:tc>
+              </a:tr>
+              <a:tr h="384048">
+                <a:tc>
+                  <a:txBody>
+                    <a:bodyPr/>
+                    <a:lstStyle/>
+                    <a:p>
+                      <a:r>
+                        <a:rPr sz="1200" b="0">
+                          <a:solidFill>
+                            <a:srgbClr val="555F6B"/>
+                          </a:solidFill>
+                        </a:rPr>
+                        <a:t>database</a:t>
+                      </a:r>
+                    </a:p>
+                  </a:txBody>
+                  <a:tcPr marL="45720" marR="45720" marT="18288" marB="18288">
+                    <a:solidFill>
+                      <a:srgbClr val="FFFFFF"/>
+                    </a:solidFill>
+                  </a:tcPr>
+                </a:tc>
+                <a:tc>
+                  <a:txBody>
+                    <a:bodyPr/>
+                    <a:lstStyle/>
+                    <a:p>
+                      <a:r>
+                        <a:rPr sz="1200" b="0">
+                          <a:solidFill>
+                            <a:srgbClr val="555F6B"/>
+                          </a:solidFill>
+                        </a:rPr>
+                        <a:t>466,71</a:t>
+                      </a:r>
+                    </a:p>
+                  </a:txBody>
+                  <a:tcPr marL="45720" marR="45720" marT="18288" marB="18288">
+                    <a:solidFill>
+                      <a:srgbClr val="FFFFFF"/>
+                    </a:solidFill>
+                  </a:tcPr>
+                </a:tc>
+              </a:tr>
+              <a:tr h="384048">
+                <a:tc>
+                  <a:txBody>
+                    <a:bodyPr/>
+                    <a:lstStyle/>
+                    <a:p>
+                      <a:r>
+                        <a:rPr sz="1200" b="0">
+                          <a:solidFill>
+                            <a:srgbClr val="555F6B"/>
+                          </a:solidFill>
+                        </a:rPr>
+                        <a:t>vector_db</a:t>
+                      </a:r>
+                    </a:p>
+                  </a:txBody>
+                  <a:tcPr marL="45720" marR="45720" marT="18288" marB="18288">
+                    <a:solidFill>
+                      <a:srgbClr val="EEF3F8"/>
+                    </a:solidFill>
+                  </a:tcPr>
+                </a:tc>
+                <a:tc>
+                  <a:txBody>
+                    <a:bodyPr/>
+                    <a:lstStyle/>
+                    <a:p>
+                      <a:r>
+                        <a:rPr sz="1200" b="0">
+                          <a:solidFill>
+                            <a:srgbClr val="555F6B"/>
+                          </a:solidFill>
+                        </a:rPr>
+                        <a:t>0,00</a:t>
+                      </a:r>
+                    </a:p>
+                  </a:txBody>
+                  <a:tcPr marL="45720" marR="45720" marT="18288" marB="18288">
+                    <a:solidFill>
+                      <a:srgbClr val="EEF3F8"/>
+                    </a:solidFill>
+                  </a:tcPr>
+                </a:tc>
+              </a:tr>
+              <a:tr h="384048">
+                <a:tc>
+                  <a:txBody>
+                    <a:bodyPr/>
+                    <a:lstStyle/>
+                    <a:p>
+                      <a:r>
+                        <a:rPr sz="1200" b="0">
+                          <a:solidFill>
+                            <a:srgbClr val="555F6B"/>
+                          </a:solidFill>
+                        </a:rPr>
+                        <a:t>object_storage</a:t>
+                      </a:r>
+                    </a:p>
+                  </a:txBody>
+                  <a:tcPr marL="45720" marR="45720" marT="18288" marB="18288">
+                    <a:solidFill>
+                      <a:srgbClr val="FFFFFF"/>
+                    </a:solidFill>
+                  </a:tcPr>
+                </a:tc>
+                <a:tc>
+                  <a:txBody>
+                    <a:bodyPr/>
+                    <a:lstStyle/>
+                    <a:p>
+                      <a:r>
+                        <a:rPr sz="1200" b="0">
+                          <a:solidFill>
+                            <a:srgbClr val="555F6B"/>
+                          </a:solidFill>
+                        </a:rPr>
+                        <a:t>82,80</a:t>
+                      </a:r>
+                    </a:p>
+                  </a:txBody>
+                  <a:tcPr marL="45720" marR="45720" marT="18288" marB="18288">
+                    <a:solidFill>
+                      <a:srgbClr val="FFFFFF"/>
+                    </a:solidFill>
+                  </a:tcPr>
+                </a:tc>
+              </a:tr>
+            </a:tbl>
+          </a:graphicData>
+        </a:graphic>
+      </p:graphicFrame>
+      <p:graphicFrame>
+        <p:nvGraphicFramePr>
+          <p:cNvPr id="8" name="Table 7"/>
+          <p:cNvGraphicFramePr>
+            <a:graphicFrameLocks noGrp="1"/>
+          </p:cNvGraphicFramePr>
+          <p:nvPr/>
+        </p:nvGraphicFramePr>
+        <p:xfrm>
+          <a:off x="6309360" y="1371600"/>
+          <a:ext cx="5486400" cy="4608576"/>
+        </p:xfrm>
+        <a:graphic>
+          <a:graphicData uri="http://schemas.openxmlformats.org/drawingml/2006/table">
+            <a:tbl>
+              <a:tblPr firstRow="1" bandRow="1">
+                <a:tableStyleId>{5C22544A-7EE6-4342-B048-85BDC9FD1C3A}</a:tableStyleId>
+              </a:tblPr>
+              <a:tblGrid>
+                <a:gridCol w="3200400"/>
+                <a:gridCol w="2286000"/>
+              </a:tblGrid>
+              <a:tr h="384048">
+                <a:tc>
+                  <a:txBody>
+                    <a:bodyPr/>
+                    <a:lstStyle/>
+                    <a:p>
+                      <a:r>
+                        <a:rPr sz="1200" b="1">
+                          <a:solidFill>
+                            <a:srgbClr val="FFFFFF"/>
+                          </a:solidFill>
+                        </a:rPr>
+                        <a:t>Component</a:t>
+                      </a:r>
+                    </a:p>
+                  </a:txBody>
+                  <a:tcPr marL="45720" marR="45720" marT="18288" marB="18288">
+                    <a:solidFill>
+                      <a:srgbClr val="2E6FB7"/>
+                    </a:solidFill>
+                  </a:tcPr>
+                </a:tc>
+                <a:tc>
+                  <a:txBody>
+                    <a:bodyPr/>
+                    <a:lstStyle/>
+                    <a:p>
+                      <a:r>
+                        <a:rPr sz="1200" b="1">
+                          <a:solidFill>
+                            <a:srgbClr val="FFFFFF"/>
+                          </a:solidFill>
+                        </a:rPr>
+                        <a:t>USD/tháng</a:t>
+                      </a:r>
+                    </a:p>
+                  </a:txBody>
+                  <a:tcPr marL="45720" marR="45720" marT="18288" marB="18288">
+                    <a:solidFill>
+                      <a:srgbClr val="2E6FB7"/>
+                    </a:solidFill>
+                  </a:tcPr>
+                </a:tc>
+              </a:tr>
+              <a:tr h="384048">
+                <a:tc>
+                  <a:txBody>
+                    <a:bodyPr/>
+                    <a:lstStyle/>
+                    <a:p>
+                      <a:r>
+                        <a:rPr sz="1200" b="0">
+                          <a:solidFill>
+                            <a:srgbClr val="555F6B"/>
+                          </a:solidFill>
+                        </a:rPr>
+                        <a:t>cache_queue</a:t>
+                      </a:r>
+                    </a:p>
+                  </a:txBody>
+                  <a:tcPr marL="45720" marR="45720" marT="18288" marB="18288">
+                    <a:solidFill>
+                      <a:srgbClr val="EEF3F8"/>
+                    </a:solidFill>
+                  </a:tcPr>
+                </a:tc>
+                <a:tc>
+                  <a:txBody>
+                    <a:bodyPr/>
+                    <a:lstStyle/>
+                    <a:p>
+                      <a:r>
+                        <a:rPr sz="1200" b="0">
+                          <a:solidFill>
+                            <a:srgbClr val="555F6B"/>
+                          </a:solidFill>
+                        </a:rPr>
+                        <a:t>55,75</a:t>
+                      </a:r>
+                    </a:p>
+                  </a:txBody>
+                  <a:tcPr marL="45720" marR="45720" marT="18288" marB="18288">
+                    <a:solidFill>
+                      <a:srgbClr val="EEF3F8"/>
+                    </a:solidFill>
+                  </a:tcPr>
+                </a:tc>
+              </a:tr>
+              <a:tr h="384048">
+                <a:tc>
+                  <a:txBody>
+                    <a:bodyPr/>
+                    <a:lstStyle/>
+                    <a:p>
+                      <a:r>
+                        <a:rPr sz="1200" b="0">
+                          <a:solidFill>
+                            <a:srgbClr val="555F6B"/>
+                          </a:solidFill>
+                        </a:rPr>
+                        <a:t>sandbox</a:t>
+                      </a:r>
+                    </a:p>
+                  </a:txBody>
+                  <a:tcPr marL="45720" marR="45720" marT="18288" marB="18288">
+                    <a:solidFill>
+                      <a:srgbClr val="FFFFFF"/>
+                    </a:solidFill>
+                  </a:tcPr>
+                </a:tc>
+                <a:tc>
+                  <a:txBody>
+                    <a:bodyPr/>
+                    <a:lstStyle/>
+                    <a:p>
+                      <a:r>
+                        <a:rPr sz="1200" b="0">
+                          <a:solidFill>
+                            <a:srgbClr val="555F6B"/>
+                          </a:solidFill>
+                        </a:rPr>
+                        <a:t>314,64</a:t>
+                      </a:r>
+                    </a:p>
+                  </a:txBody>
+                  <a:tcPr marL="45720" marR="45720" marT="18288" marB="18288">
+                    <a:solidFill>
+                      <a:srgbClr val="FFFFFF"/>
+                    </a:solidFill>
+                  </a:tcPr>
+                </a:tc>
+              </a:tr>
+              <a:tr h="384048">
+                <a:tc>
+                  <a:txBody>
+                    <a:bodyPr/>
+                    <a:lstStyle/>
+                    <a:p>
+                      <a:r>
+                        <a:rPr sz="1200" b="0">
+                          <a:solidFill>
+                            <a:srgbClr val="555F6B"/>
+                          </a:solidFill>
+                        </a:rPr>
+                        <a:t>connectors</a:t>
+                      </a:r>
+                    </a:p>
+                  </a:txBody>
+                  <a:tcPr marL="45720" marR="45720" marT="18288" marB="18288">
+                    <a:solidFill>
+                      <a:srgbClr val="EEF3F8"/>
+                    </a:solidFill>
+                  </a:tcPr>
+                </a:tc>
+                <a:tc>
+                  <a:txBody>
+                    <a:bodyPr/>
+                    <a:lstStyle/>
+                    <a:p>
+                      <a:r>
+                        <a:rPr sz="1200" b="0">
+                          <a:solidFill>
+                            <a:srgbClr val="555F6B"/>
+                          </a:solidFill>
+                        </a:rPr>
+                        <a:t>0,00</a:t>
+                      </a:r>
+                    </a:p>
+                  </a:txBody>
+                  <a:tcPr marL="45720" marR="45720" marT="18288" marB="18288">
+                    <a:solidFill>
+                      <a:srgbClr val="EEF3F8"/>
+                    </a:solidFill>
+                  </a:tcPr>
+                </a:tc>
+              </a:tr>
+              <a:tr h="384048">
+                <a:tc>
+                  <a:txBody>
+                    <a:bodyPr/>
+                    <a:lstStyle/>
+                    <a:p>
+                      <a:r>
+                        <a:rPr sz="1200" b="0">
+                          <a:solidFill>
+                            <a:srgbClr val="555F6B"/>
+                          </a:solidFill>
+                        </a:rPr>
+                        <a:t>secrets_kms</a:t>
+                      </a:r>
+                    </a:p>
+                  </a:txBody>
+                  <a:tcPr marL="45720" marR="45720" marT="18288" marB="18288">
+                    <a:solidFill>
+                      <a:srgbClr val="FFFFFF"/>
+                    </a:solidFill>
+                  </a:tcPr>
+                </a:tc>
+                <a:tc>
+                  <a:txBody>
+                    <a:bodyPr/>
+                    <a:lstStyle/>
+                    <a:p>
+                      <a:r>
+                        <a:rPr sz="1200" b="0">
+                          <a:solidFill>
+                            <a:srgbClr val="555F6B"/>
+                          </a:solidFill>
+                        </a:rPr>
+                        <a:t>3,96</a:t>
+                      </a:r>
+                    </a:p>
+                  </a:txBody>
+                  <a:tcPr marL="45720" marR="45720" marT="18288" marB="18288">
+                    <a:solidFill>
+                      <a:srgbClr val="FFFFFF"/>
+                    </a:solidFill>
+                  </a:tcPr>
+                </a:tc>
+              </a:tr>
+              <a:tr h="384048">
+                <a:tc>
+                  <a:txBody>
+                    <a:bodyPr/>
+                    <a:lstStyle/>
+                    <a:p>
+                      <a:r>
+                        <a:rPr sz="1200" b="0">
+                          <a:solidFill>
+                            <a:srgbClr val="555F6B"/>
+                          </a:solidFill>
+                        </a:rPr>
+                        <a:t>backup_dr</a:t>
+                      </a:r>
+                    </a:p>
+                  </a:txBody>
+                  <a:tcPr marL="45720" marR="45720" marT="18288" marB="18288">
+                    <a:solidFill>
+                      <a:srgbClr val="EEF3F8"/>
+                    </a:solidFill>
+                  </a:tcPr>
+                </a:tc>
+                <a:tc>
+                  <a:txBody>
+                    <a:bodyPr/>
+                    <a:lstStyle/>
+                    <a:p>
+                      <a:r>
+                        <a:rPr sz="1200" b="0">
+                          <a:solidFill>
+                            <a:srgbClr val="555F6B"/>
+                          </a:solidFill>
+                        </a:rPr>
+                        <a:t>164,40</a:t>
+                      </a:r>
+                    </a:p>
+                  </a:txBody>
+                  <a:tcPr marL="45720" marR="45720" marT="18288" marB="18288">
+                    <a:solidFill>
+                      <a:srgbClr val="EEF3F8"/>
+                    </a:solidFill>
+                  </a:tcPr>
+                </a:tc>
+              </a:tr>
+              <a:tr h="384048">
+                <a:tc>
+                  <a:txBody>
+                    <a:bodyPr/>
+                    <a:lstStyle/>
+                    <a:p>
+                      <a:r>
+                        <a:rPr sz="1200" b="0">
+                          <a:solidFill>
+                            <a:srgbClr val="555F6B"/>
+                          </a:solidFill>
+                        </a:rPr>
+                        <a:t>monitoring</a:t>
+                      </a:r>
+                    </a:p>
+                  </a:txBody>
+                  <a:tcPr marL="45720" marR="45720" marT="18288" marB="18288">
+                    <a:solidFill>
+                      <a:srgbClr val="FFFFFF"/>
+                    </a:solidFill>
+                  </a:tcPr>
+                </a:tc>
+                <a:tc>
+                  <a:txBody>
+                    <a:bodyPr/>
+                    <a:lstStyle/>
+                    <a:p>
+                      <a:r>
+                        <a:rPr sz="1200" b="0">
+                          <a:solidFill>
+                            <a:srgbClr val="555F6B"/>
+                          </a:solidFill>
+                        </a:rPr>
+                        <a:t>22,51</a:t>
+                      </a:r>
+                    </a:p>
+                  </a:txBody>
+                  <a:tcPr marL="45720" marR="45720" marT="18288" marB="18288">
+                    <a:solidFill>
+                      <a:srgbClr val="FFFFFF"/>
+                    </a:solidFill>
+                  </a:tcPr>
+                </a:tc>
+              </a:tr>
+              <a:tr h="384048">
+                <a:tc>
+                  <a:txBody>
+                    <a:bodyPr/>
+                    <a:lstStyle/>
+                    <a:p>
+                      <a:r>
+                        <a:rPr sz="1200" b="0">
+                          <a:solidFill>
+                            <a:srgbClr val="555F6B"/>
+                          </a:solidFill>
+                        </a:rPr>
+                        <a:t>governance</a:t>
+                      </a:r>
+                    </a:p>
+                  </a:txBody>
+                  <a:tcPr marL="45720" marR="45720" marT="18288" marB="18288">
+                    <a:solidFill>
+                      <a:srgbClr val="EEF3F8"/>
+                    </a:solidFill>
+                  </a:tcPr>
+                </a:tc>
+                <a:tc>
+                  <a:txBody>
+                    <a:bodyPr/>
+                    <a:lstStyle/>
+                    <a:p>
+                      <a:r>
+                        <a:rPr sz="1200" b="0">
+                          <a:solidFill>
+                            <a:srgbClr val="555F6B"/>
+                          </a:solidFill>
+                        </a:rPr>
+                        <a:t>805,98</a:t>
+                      </a:r>
+                    </a:p>
+                  </a:txBody>
+                  <a:tcPr marL="45720" marR="45720" marT="18288" marB="18288">
+                    <a:solidFill>
+                      <a:srgbClr val="EEF3F8"/>
+                    </a:solidFill>
+                  </a:tcPr>
+                </a:tc>
+              </a:tr>
+              <a:tr h="384048">
+                <a:tc>
+                  <a:txBody>
+                    <a:bodyPr/>
+                    <a:lstStyle/>
+                    <a:p>
+                      <a:r>
+                        <a:rPr sz="1200" b="0">
+                          <a:solidFill>
+                            <a:srgbClr val="555F6B"/>
+                          </a:solidFill>
+                        </a:rPr>
+                        <a:t>network</a:t>
+                      </a:r>
+                    </a:p>
+                  </a:txBody>
+                  <a:tcPr marL="45720" marR="45720" marT="18288" marB="18288">
+                    <a:solidFill>
+                      <a:srgbClr val="FFFFFF"/>
+                    </a:solidFill>
+                  </a:tcPr>
+                </a:tc>
+                <a:tc>
+                  <a:txBody>
+                    <a:bodyPr/>
+                    <a:lstStyle/>
+                    <a:p>
+                      <a:r>
+                        <a:rPr sz="1200" b="0">
+                          <a:solidFill>
+                            <a:srgbClr val="555F6B"/>
+                          </a:solidFill>
+                        </a:rPr>
+                        <a:t>64,26</a:t>
+                      </a:r>
+                    </a:p>
+                  </a:txBody>
+                  <a:tcPr marL="45720" marR="45720" marT="18288" marB="18288">
+                    <a:solidFill>
+                      <a:srgbClr val="FFFFFF"/>
+                    </a:solidFill>
+                  </a:tcPr>
+                </a:tc>
+              </a:tr>
+              <a:tr h="384048">
+                <a:tc>
+                  <a:txBody>
+                    <a:bodyPr/>
+                    <a:lstStyle/>
+                    <a:p>
+                      <a:r>
+                        <a:rPr sz="1200" b="0">
+                          <a:solidFill>
+                            <a:srgbClr val="555F6B"/>
+                          </a:solidFill>
+                        </a:rPr>
+                        <a:t>cicd</a:t>
+                      </a:r>
+                    </a:p>
+                  </a:txBody>
+                  <a:tcPr marL="45720" marR="45720" marT="18288" marB="18288">
+                    <a:solidFill>
+                      <a:srgbClr val="EEF3F8"/>
+                    </a:solidFill>
+                  </a:tcPr>
+                </a:tc>
+                <a:tc>
+                  <a:txBody>
+                    <a:bodyPr/>
+                    <a:lstStyle/>
+                    <a:p>
+                      <a:r>
+                        <a:rPr sz="1200" b="0">
+                          <a:solidFill>
+                            <a:srgbClr val="555F6B"/>
+                          </a:solidFill>
+                        </a:rPr>
+                        <a:t>14,00</a:t>
+                      </a:r>
+                    </a:p>
+                  </a:txBody>
+                  <a:tcPr marL="45720" marR="45720" marT="18288" marB="18288">
+                    <a:solidFill>
+                      <a:srgbClr val="EEF3F8"/>
+                    </a:solidFill>
+                  </a:tcPr>
+                </a:tc>
+              </a:tr>
+              <a:tr h="384048">
+                <a:tc>
+                  <a:txBody>
+                    <a:bodyPr/>
+                    <a:lstStyle/>
+                    <a:p>
+                      <a:r>
+                        <a:rPr sz="1200" b="0">
+                          <a:solidFill>
+                            <a:srgbClr val="555F6B"/>
+                          </a:solidFill>
+                        </a:rPr>
+                        <a:t>ops_labor</a:t>
+                      </a:r>
+                    </a:p>
+                  </a:txBody>
+                  <a:tcPr marL="45720" marR="45720" marT="18288" marB="18288">
+                    <a:solidFill>
+                      <a:srgbClr val="FFFFFF"/>
+                    </a:solidFill>
+                  </a:tcPr>
+                </a:tc>
+                <a:tc>
+                  <a:txBody>
+                    <a:bodyPr/>
+                    <a:lstStyle/>
+                    <a:p>
+                      <a:r>
+                        <a:rPr sz="1200" b="0">
+                          <a:solidFill>
+                            <a:srgbClr val="555F6B"/>
+                          </a:solidFill>
+                        </a:rPr>
+                        <a:t>3.400,00</a:t>
+                      </a:r>
+                    </a:p>
+                  </a:txBody>
+                  <a:tcPr marL="45720" marR="45720" marT="18288" marB="18288">
+                    <a:solidFill>
+                      <a:srgbClr val="FFFFFF"/>
+                    </a:solidFill>
+                  </a:tcPr>
+                </a:tc>
+              </a:tr>
+              <a:tr h="384048">
+                <a:tc>
+                  <a:txBody>
+                    <a:bodyPr/>
+                    <a:lstStyle/>
+                    <a:p>
+                      <a:r>
+                        <a:rPr sz="1200" b="0">
+                          <a:solidFill>
+                            <a:srgbClr val="555F6B"/>
+                          </a:solidFill>
+                        </a:rPr>
+                        <a:t>TOTAL</a:t>
+                      </a:r>
+                    </a:p>
+                  </a:txBody>
+                  <a:tcPr marL="45720" marR="45720" marT="18288" marB="18288">
+                    <a:solidFill>
+                      <a:srgbClr val="EEF3F8"/>
+                    </a:solidFill>
+                  </a:tcPr>
+                </a:tc>
+                <a:tc>
+                  <a:txBody>
+                    <a:bodyPr/>
+                    <a:lstStyle/>
+                    <a:p>
+                      <a:r>
+                        <a:rPr sz="1200" b="0">
+                          <a:solidFill>
+                            <a:srgbClr val="555F6B"/>
+                          </a:solidFill>
+                        </a:rPr>
+                        <a:t>6.821,44</a:t>
+                      </a:r>
+                    </a:p>
+                  </a:txBody>
+                  <a:tcPr marL="45720" marR="45720" marT="18288" marB="18288">
+                    <a:solidFill>
+                      <a:srgbClr val="EEF3F8"/>
+                    </a:solidFill>
+                  </a:tcPr>
+                </a:tc>
+              </a:tr>
+            </a:tbl>
+          </a:graphicData>
+        </a:graphic>
+      </p:graphicFrame>
     </p:spTree>
   </p:cSld>
   <p:clrMapOvr>
@@ -10110,7 +10527,7 @@
                   <a:srgbClr val="FFFFFF"/>
                 </a:solidFill>
               </a:rPr>
-              <a:t>Phụ lục C. Việc chung của mọi nhân viên: 6,26 nhiệm vụ/ngày</a:t>
+              <a:t>Phụ lục B. Nguồn số liệu</a:t>
             </a:r>
           </a:p>
         </p:txBody>
@@ -10118,44 +10535,6 @@
       <p:sp>
         <p:nvSpPr>
           <p:cNvPr id="4" name="TextBox 3"/>
-          <p:cNvSpPr txBox="1"/>
-          <p:nvPr/>
-        </p:nvSpPr>
-        <p:spPr>
-          <a:xfrm>
-            <a:off x="457200" y="914400"/>
-            <a:ext cx="11247120" cy="457200"/>
-          </a:xfrm>
-          <a:prstGeom prst="rect">
-            <a:avLst/>
-          </a:prstGeom>
-          <a:noFill/>
-        </p:spPr>
-        <p:txBody>
-          <a:bodyPr wrap="square">
-            <a:spAutoFit/>
-          </a:bodyPr>
-          <a:lstStyle/>
-          <a:p>
-            <a:pPr algn="l">
-              <a:spcAft>
-                <a:spcPts val="400"/>
-              </a:spcAft>
-            </a:pPr>
-            <a:r>
-              <a:rPr sz="1300" b="0">
-                <a:solidFill>
-                  <a:srgbClr val="2E6FB7"/>
-                </a:solidFill>
-              </a:rPr>
-              <a:t>Ai cũng làm 5 việc này. Số nhiệm vụ = khối lượng việc thật mỗi ngày × tỉ lệ giao cho AI</a:t>
-            </a:r>
-          </a:p>
-        </p:txBody>
-      </p:sp>
-      <p:sp>
-        <p:nvSpPr>
-          <p:cNvPr id="5" name="TextBox 4"/>
           <p:cNvSpPr txBox="1"/>
           <p:nvPr/>
         </p:nvSpPr>
@@ -10186,14 +10565,14 @@
                   <a:srgbClr val="555F6B"/>
                 </a:solidFill>
               </a:rPr>
-              <a:t>C</a:t>
-            </a:r>
-          </a:p>
-        </p:txBody>
-      </p:sp>
-      <p:sp>
-        <p:nvSpPr>
-          <p:cNvPr id="6" name="TextBox 5"/>
+              <a:t>B</a:t>
+            </a:r>
+          </a:p>
+        </p:txBody>
+      </p:sp>
+      <p:sp>
+        <p:nvSpPr>
+          <p:cNvPr id="5" name="TextBox 4"/>
           <p:cNvSpPr txBox="1"/>
           <p:nvPr/>
         </p:nvSpPr>
@@ -10229,906 +10608,16 @@
           </a:p>
         </p:txBody>
       </p:sp>
-      <p:graphicFrame>
-        <p:nvGraphicFramePr>
-          <p:cNvPr id="7" name="Table 6"/>
-          <p:cNvGraphicFramePr>
-            <a:graphicFrameLocks noGrp="1"/>
-          </p:cNvGraphicFramePr>
-          <p:nvPr/>
-        </p:nvGraphicFramePr>
-        <p:xfrm>
-          <a:off x="457200" y="1371600"/>
-          <a:ext cx="11247120" cy="3520440"/>
-        </p:xfrm>
-        <a:graphic>
-          <a:graphicData uri="http://schemas.openxmlformats.org/drawingml/2006/table">
-            <a:tbl>
-              <a:tblPr firstRow="1" bandRow="1">
-                <a:tableStyleId>{5C22544A-7EE6-4342-B048-85BDC9FD1C3A}</a:tableStyleId>
-              </a:tblPr>
-              <a:tblGrid>
-                <a:gridCol w="2286000"/>
-                <a:gridCol w="548640"/>
-                <a:gridCol w="1828800"/>
-                <a:gridCol w="1005840"/>
-                <a:gridCol w="1280160"/>
-                <a:gridCol w="4297680"/>
-              </a:tblGrid>
-              <a:tr h="502920">
-                <a:tc>
-                  <a:txBody>
-                    <a:bodyPr/>
-                    <a:lstStyle/>
-                    <a:p>
-                      <a:r>
-                        <a:rPr sz="1100" b="1">
-                          <a:solidFill>
-                            <a:srgbClr val="FFFFFF"/>
-                          </a:solidFill>
-                        </a:rPr>
-                        <a:t>Việc</a:t>
-                      </a:r>
-                    </a:p>
-                  </a:txBody>
-                  <a:tcPr marL="45720" marR="45720" marT="18288" marB="18288">
-                    <a:solidFill>
-                      <a:srgbClr val="2E6FB7"/>
-                    </a:solidFill>
-                  </a:tcPr>
-                </a:tc>
-                <a:tc>
-                  <a:txBody>
-                    <a:bodyPr/>
-                    <a:lstStyle/>
-                    <a:p>
-                      <a:r>
-                        <a:rPr sz="1100" b="1">
-                          <a:solidFill>
-                            <a:srgbClr val="FFFFFF"/>
-                          </a:solidFill>
-                        </a:rPr>
-                        <a:t>Cấp</a:t>
-                      </a:r>
-                    </a:p>
-                  </a:txBody>
-                  <a:tcPr marL="45720" marR="45720" marT="18288" marB="18288">
-                    <a:solidFill>
-                      <a:srgbClr val="2E6FB7"/>
-                    </a:solidFill>
-                  </a:tcPr>
-                </a:tc>
-                <a:tc>
-                  <a:txBody>
-                    <a:bodyPr/>
-                    <a:lstStyle/>
-                    <a:p>
-                      <a:r>
-                        <a:rPr sz="1100" b="1">
-                          <a:solidFill>
-                            <a:srgbClr val="FFFFFF"/>
-                          </a:solidFill>
-                        </a:rPr>
-                        <a:t>Khối lượng thật/người/ngày</a:t>
-                      </a:r>
-                    </a:p>
-                  </a:txBody>
-                  <a:tcPr marL="45720" marR="45720" marT="18288" marB="18288">
-                    <a:solidFill>
-                      <a:srgbClr val="2E6FB7"/>
-                    </a:solidFill>
-                  </a:tcPr>
-                </a:tc>
-                <a:tc>
-                  <a:txBody>
-                    <a:bodyPr/>
-                    <a:lstStyle/>
-                    <a:p>
-                      <a:r>
-                        <a:rPr sz="1100" b="1">
-                          <a:solidFill>
-                            <a:srgbClr val="FFFFFF"/>
-                          </a:solidFill>
-                        </a:rPr>
-                        <a:t>Tỉ lệ giao AI</a:t>
-                      </a:r>
-                    </a:p>
-                  </a:txBody>
-                  <a:tcPr marL="45720" marR="45720" marT="18288" marB="18288">
-                    <a:solidFill>
-                      <a:srgbClr val="2E6FB7"/>
-                    </a:solidFill>
-                  </a:tcPr>
-                </a:tc>
-                <a:tc>
-                  <a:txBody>
-                    <a:bodyPr/>
-                    <a:lstStyle/>
-                    <a:p>
-                      <a:r>
-                        <a:rPr sz="1100" b="1">
-                          <a:solidFill>
-                            <a:srgbClr val="FFFFFF"/>
-                          </a:solidFill>
-                        </a:rPr>
-                        <a:t>Nhiệm vụ/người/ngày</a:t>
-                      </a:r>
-                    </a:p>
-                  </a:txBody>
-                  <a:tcPr marL="45720" marR="45720" marT="18288" marB="18288">
-                    <a:solidFill>
-                      <a:srgbClr val="2E6FB7"/>
-                    </a:solidFill>
-                  </a:tcPr>
-                </a:tc>
-                <a:tc>
-                  <a:txBody>
-                    <a:bodyPr/>
-                    <a:lstStyle/>
-                    <a:p>
-                      <a:r>
-                        <a:rPr sz="1100" b="1">
-                          <a:solidFill>
-                            <a:srgbClr val="FFFFFF"/>
-                          </a:solidFill>
-                        </a:rPr>
-                        <a:t>Căn cứ</a:t>
-                      </a:r>
-                    </a:p>
-                  </a:txBody>
-                  <a:tcPr marL="45720" marR="45720" marT="18288" marB="18288">
-                    <a:solidFill>
-                      <a:srgbClr val="2E6FB7"/>
-                    </a:solidFill>
-                  </a:tcPr>
-                </a:tc>
-              </a:tr>
-              <a:tr h="502920">
-                <a:tc>
-                  <a:txBody>
-                    <a:bodyPr/>
-                    <a:lstStyle/>
-                    <a:p>
-                      <a:r>
-                        <a:rPr sz="1100" b="0">
-                          <a:solidFill>
-                            <a:srgbClr val="555F6B"/>
-                          </a:solidFill>
-                        </a:rPr>
-                        <a:t>Soạn, trả lời email</a:t>
-                      </a:r>
-                    </a:p>
-                  </a:txBody>
-                  <a:tcPr marL="45720" marR="45720" marT="18288" marB="18288">
-                    <a:solidFill>
-                      <a:srgbClr val="EEF3F8"/>
-                    </a:solidFill>
-                  </a:tcPr>
-                </a:tc>
-                <a:tc>
-                  <a:txBody>
-                    <a:bodyPr/>
-                    <a:lstStyle/>
-                    <a:p>
-                      <a:r>
-                        <a:rPr sz="1100" b="0">
-                          <a:solidFill>
-                            <a:srgbClr val="555F6B"/>
-                          </a:solidFill>
-                        </a:rPr>
-                        <a:t>1</a:t>
-                      </a:r>
-                    </a:p>
-                  </a:txBody>
-                  <a:tcPr marL="45720" marR="45720" marT="18288" marB="18288">
-                    <a:solidFill>
-                      <a:srgbClr val="EEF3F8"/>
-                    </a:solidFill>
-                  </a:tcPr>
-                </a:tc>
-                <a:tc>
-                  <a:txBody>
-                    <a:bodyPr/>
-                    <a:lstStyle/>
-                    <a:p>
-                      <a:r>
-                        <a:rPr sz="1100" b="0">
-                          <a:solidFill>
-                            <a:srgbClr val="555F6B"/>
-                          </a:solidFill>
-                        </a:rPr>
-                        <a:t>9,9 email gửi</a:t>
-                      </a:r>
-                    </a:p>
-                  </a:txBody>
-                  <a:tcPr marL="45720" marR="45720" marT="18288" marB="18288">
-                    <a:solidFill>
-                      <a:srgbClr val="EEF3F8"/>
-                    </a:solidFill>
-                  </a:tcPr>
-                </a:tc>
-                <a:tc>
-                  <a:txBody>
-                    <a:bodyPr/>
-                    <a:lstStyle/>
-                    <a:p>
-                      <a:r>
-                        <a:rPr sz="1100" b="0">
-                          <a:solidFill>
-                            <a:srgbClr val="555F6B"/>
-                          </a:solidFill>
-                        </a:rPr>
-                        <a:t>30%</a:t>
-                      </a:r>
-                    </a:p>
-                  </a:txBody>
-                  <a:tcPr marL="45720" marR="45720" marT="18288" marB="18288">
-                    <a:solidFill>
-                      <a:srgbClr val="EEF3F8"/>
-                    </a:solidFill>
-                  </a:tcPr>
-                </a:tc>
-                <a:tc>
-                  <a:txBody>
-                    <a:bodyPr/>
-                    <a:lstStyle/>
-                    <a:p>
-                      <a:r>
-                        <a:rPr sz="1100" b="0">
-                          <a:solidFill>
-                            <a:srgbClr val="555F6B"/>
-                          </a:solidFill>
-                        </a:rPr>
-                        <a:t>2,97</a:t>
-                      </a:r>
-                    </a:p>
-                  </a:txBody>
-                  <a:tcPr marL="45720" marR="45720" marT="18288" marB="18288">
-                    <a:solidFill>
-                      <a:srgbClr val="EEF3F8"/>
-                    </a:solidFill>
-                  </a:tcPr>
-                </a:tc>
-                <a:tc>
-                  <a:txBody>
-                    <a:bodyPr/>
-                    <a:lstStyle/>
-                    <a:p>
-                      <a:r>
-                        <a:rPr sz="1100" b="0">
-                          <a:solidFill>
-                            <a:srgbClr val="555F6B"/>
-                          </a:solidFill>
-                        </a:rPr>
-                        <a:t>Trung bình nhân của 2,9 (Microsoft RCT 2025) và 34 (Radicati). 30% cao hơn mức 10–24% của Liang 2025 vì công ty triển khai chính thức</a:t>
-                      </a:r>
-                    </a:p>
-                  </a:txBody>
-                  <a:tcPr marL="45720" marR="45720" marT="18288" marB="18288">
-                    <a:solidFill>
-                      <a:srgbClr val="EEF3F8"/>
-                    </a:solidFill>
-                  </a:tcPr>
-                </a:tc>
-              </a:tr>
-              <a:tr h="502920">
-                <a:tc>
-                  <a:txBody>
-                    <a:bodyPr/>
-                    <a:lstStyle/>
-                    <a:p>
-                      <a:r>
-                        <a:rPr sz="1100" b="0">
-                          <a:solidFill>
-                            <a:srgbClr val="555F6B"/>
-                          </a:solidFill>
-                        </a:rPr>
-                        <a:t>Tóm tắt, phân loại email</a:t>
-                      </a:r>
-                    </a:p>
-                  </a:txBody>
-                  <a:tcPr marL="45720" marR="45720" marT="18288" marB="18288">
-                    <a:solidFill>
-                      <a:srgbClr val="FFFFFF"/>
-                    </a:solidFill>
-                  </a:tcPr>
-                </a:tc>
-                <a:tc>
-                  <a:txBody>
-                    <a:bodyPr/>
-                    <a:lstStyle/>
-                    <a:p>
-                      <a:r>
-                        <a:rPr sz="1100" b="0">
-                          <a:solidFill>
-                            <a:srgbClr val="555F6B"/>
-                          </a:solidFill>
-                        </a:rPr>
-                        <a:t>1</a:t>
-                      </a:r>
-                    </a:p>
-                  </a:txBody>
-                  <a:tcPr marL="45720" marR="45720" marT="18288" marB="18288">
-                    <a:solidFill>
-                      <a:srgbClr val="FFFFFF"/>
-                    </a:solidFill>
-                  </a:tcPr>
-                </a:tc>
-                <a:tc>
-                  <a:txBody>
-                    <a:bodyPr/>
-                    <a:lstStyle/>
-                    <a:p>
-                      <a:r>
-                        <a:rPr sz="1100" b="0">
-                          <a:solidFill>
-                            <a:srgbClr val="555F6B"/>
-                          </a:solidFill>
-                        </a:rPr>
-                        <a:t>32,2 email đọc</a:t>
-                      </a:r>
-                    </a:p>
-                  </a:txBody>
-                  <a:tcPr marL="45720" marR="45720" marT="18288" marB="18288">
-                    <a:solidFill>
-                      <a:srgbClr val="FFFFFF"/>
-                    </a:solidFill>
-                  </a:tcPr>
-                </a:tc>
-                <a:tc>
-                  <a:txBody>
-                    <a:bodyPr/>
-                    <a:lstStyle/>
-                    <a:p>
-                      <a:r>
-                        <a:rPr sz="1100" b="0">
-                          <a:solidFill>
-                            <a:srgbClr val="555F6B"/>
-                          </a:solidFill>
-                        </a:rPr>
-                        <a:t>5%</a:t>
-                      </a:r>
-                    </a:p>
-                  </a:txBody>
-                  <a:tcPr marL="45720" marR="45720" marT="18288" marB="18288">
-                    <a:solidFill>
-                      <a:srgbClr val="FFFFFF"/>
-                    </a:solidFill>
-                  </a:tcPr>
-                </a:tc>
-                <a:tc>
-                  <a:txBody>
-                    <a:bodyPr/>
-                    <a:lstStyle/>
-                    <a:p>
-                      <a:r>
-                        <a:rPr sz="1100" b="0">
-                          <a:solidFill>
-                            <a:srgbClr val="555F6B"/>
-                          </a:solidFill>
-                        </a:rPr>
-                        <a:t>1,61</a:t>
-                      </a:r>
-                    </a:p>
-                  </a:txBody>
-                  <a:tcPr marL="45720" marR="45720" marT="18288" marB="18288">
-                    <a:solidFill>
-                      <a:srgbClr val="FFFFFF"/>
-                    </a:solidFill>
-                  </a:tcPr>
-                </a:tc>
-                <a:tc>
-                  <a:txBody>
-                    <a:bodyPr/>
-                    <a:lstStyle/>
-                    <a:p>
-                      <a:r>
-                        <a:rPr sz="1100" b="0">
-                          <a:solidFill>
-                            <a:srgbClr val="555F6B"/>
-                          </a:solidFill>
-                        </a:rPr>
-                        <a:t>Microsoft RCT 2025: 160,8 email đọc/tuần. Tỉ lệ 5%: giả định của nhóm</a:t>
-                      </a:r>
-                    </a:p>
-                  </a:txBody>
-                  <a:tcPr marL="45720" marR="45720" marT="18288" marB="18288">
-                    <a:solidFill>
-                      <a:srgbClr val="FFFFFF"/>
-                    </a:solidFill>
-                  </a:tcPr>
-                </a:tc>
-              </a:tr>
-              <a:tr h="502920">
-                <a:tc>
-                  <a:txBody>
-                    <a:bodyPr/>
-                    <a:lstStyle/>
-                    <a:p>
-                      <a:r>
-                        <a:rPr sz="1100" b="0">
-                          <a:solidFill>
-                            <a:srgbClr val="555F6B"/>
-                          </a:solidFill>
-                        </a:rPr>
-                        <a:t>Hỏi đáp tài liệu nội bộ</a:t>
-                      </a:r>
-                    </a:p>
-                  </a:txBody>
-                  <a:tcPr marL="45720" marR="45720" marT="18288" marB="18288">
-                    <a:solidFill>
-                      <a:srgbClr val="EEF3F8"/>
-                    </a:solidFill>
-                  </a:tcPr>
-                </a:tc>
-                <a:tc>
-                  <a:txBody>
-                    <a:bodyPr/>
-                    <a:lstStyle/>
-                    <a:p>
-                      <a:r>
-                        <a:rPr sz="1100" b="0">
-                          <a:solidFill>
-                            <a:srgbClr val="555F6B"/>
-                          </a:solidFill>
-                        </a:rPr>
-                        <a:t>1</a:t>
-                      </a:r>
-                    </a:p>
-                  </a:txBody>
-                  <a:tcPr marL="45720" marR="45720" marT="18288" marB="18288">
-                    <a:solidFill>
-                      <a:srgbClr val="EEF3F8"/>
-                    </a:solidFill>
-                  </a:tcPr>
-                </a:tc>
-                <a:tc>
-                  <a:txBody>
-                    <a:bodyPr/>
-                    <a:lstStyle/>
-                    <a:p>
-                      <a:r>
-                        <a:rPr sz="1100" b="0">
-                          <a:solidFill>
-                            <a:srgbClr val="555F6B"/>
-                          </a:solidFill>
-                        </a:rPr>
-                        <a:t>4,0 lần tra cứu</a:t>
-                      </a:r>
-                    </a:p>
-                  </a:txBody>
-                  <a:tcPr marL="45720" marR="45720" marT="18288" marB="18288">
-                    <a:solidFill>
-                      <a:srgbClr val="EEF3F8"/>
-                    </a:solidFill>
-                  </a:tcPr>
-                </a:tc>
-                <a:tc>
-                  <a:txBody>
-                    <a:bodyPr/>
-                    <a:lstStyle/>
-                    <a:p>
-                      <a:r>
-                        <a:rPr sz="1100" b="0">
-                          <a:solidFill>
-                            <a:srgbClr val="555F6B"/>
-                          </a:solidFill>
-                        </a:rPr>
-                        <a:t>30%</a:t>
-                      </a:r>
-                    </a:p>
-                  </a:txBody>
-                  <a:tcPr marL="45720" marR="45720" marT="18288" marB="18288">
-                    <a:solidFill>
-                      <a:srgbClr val="EEF3F8"/>
-                    </a:solidFill>
-                  </a:tcPr>
-                </a:tc>
-                <a:tc>
-                  <a:txBody>
-                    <a:bodyPr/>
-                    <a:lstStyle/>
-                    <a:p>
-                      <a:r>
-                        <a:rPr sz="1100" b="0">
-                          <a:solidFill>
-                            <a:srgbClr val="555F6B"/>
-                          </a:solidFill>
-                        </a:rPr>
-                        <a:t>1,20</a:t>
-                      </a:r>
-                    </a:p>
-                  </a:txBody>
-                  <a:tcPr marL="45720" marR="45720" marT="18288" marB="18288">
-                    <a:solidFill>
-                      <a:srgbClr val="EEF3F8"/>
-                    </a:solidFill>
-                  </a:tcPr>
-                </a:tc>
-                <a:tc>
-                  <a:txBody>
-                    <a:bodyPr/>
-                    <a:lstStyle/>
-                    <a:p>
-                      <a:r>
-                        <a:rPr sz="1100" b="0">
-                          <a:solidFill>
-                            <a:srgbClr val="555F6B"/>
-                          </a:solidFill>
-                        </a:rPr>
-                        <a:t>Mỗi người mất 1,6–2 giờ/ngày tìm thông tin (McKinsey, Atlassian). 4 lần và 30%: giả định của nhóm</a:t>
-                      </a:r>
-                    </a:p>
-                  </a:txBody>
-                  <a:tcPr marL="45720" marR="45720" marT="18288" marB="18288">
-                    <a:solidFill>
-                      <a:srgbClr val="EEF3F8"/>
-                    </a:solidFill>
-                  </a:tcPr>
-                </a:tc>
-              </a:tr>
-              <a:tr h="502920">
-                <a:tc>
-                  <a:txBody>
-                    <a:bodyPr/>
-                    <a:lstStyle/>
-                    <a:p>
-                      <a:r>
-                        <a:rPr sz="1100" b="0">
-                          <a:solidFill>
-                            <a:srgbClr val="555F6B"/>
-                          </a:solidFill>
-                        </a:rPr>
-                        <a:t>Biên bản họp → DOCX</a:t>
-                      </a:r>
-                    </a:p>
-                  </a:txBody>
-                  <a:tcPr marL="45720" marR="45720" marT="18288" marB="18288">
-                    <a:solidFill>
-                      <a:srgbClr val="FFFFFF"/>
-                    </a:solidFill>
-                  </a:tcPr>
-                </a:tc>
-                <a:tc>
-                  <a:txBody>
-                    <a:bodyPr/>
-                    <a:lstStyle/>
-                    <a:p>
-                      <a:r>
-                        <a:rPr sz="1100" b="0">
-                          <a:solidFill>
-                            <a:srgbClr val="555F6B"/>
-                          </a:solidFill>
-                        </a:rPr>
-                        <a:t>2</a:t>
-                      </a:r>
-                    </a:p>
-                  </a:txBody>
-                  <a:tcPr marL="45720" marR="45720" marT="18288" marB="18288">
-                    <a:solidFill>
-                      <a:srgbClr val="FFFFFF"/>
-                    </a:solidFill>
-                  </a:tcPr>
-                </a:tc>
-                <a:tc>
-                  <a:txBody>
-                    <a:bodyPr/>
-                    <a:lstStyle/>
-                    <a:p>
-                      <a:r>
-                        <a:rPr sz="1100" b="0">
-                          <a:solidFill>
-                            <a:srgbClr val="555F6B"/>
-                          </a:solidFill>
-                        </a:rPr>
-                        <a:t>2,0 cuộc họp</a:t>
-                      </a:r>
-                    </a:p>
-                  </a:txBody>
-                  <a:tcPr marL="45720" marR="45720" marT="18288" marB="18288">
-                    <a:solidFill>
-                      <a:srgbClr val="FFFFFF"/>
-                    </a:solidFill>
-                  </a:tcPr>
-                </a:tc>
-                <a:tc>
-                  <a:txBody>
-                    <a:bodyPr/>
-                    <a:lstStyle/>
-                    <a:p>
-                      <a:r>
-                        <a:rPr sz="1100" b="0">
-                          <a:solidFill>
-                            <a:srgbClr val="555F6B"/>
-                          </a:solidFill>
-                        </a:rPr>
-                        <a:t>20%</a:t>
-                      </a:r>
-                    </a:p>
-                  </a:txBody>
-                  <a:tcPr marL="45720" marR="45720" marT="18288" marB="18288">
-                    <a:solidFill>
-                      <a:srgbClr val="FFFFFF"/>
-                    </a:solidFill>
-                  </a:tcPr>
-                </a:tc>
-                <a:tc>
-                  <a:txBody>
-                    <a:bodyPr/>
-                    <a:lstStyle/>
-                    <a:p>
-                      <a:r>
-                        <a:rPr sz="1100" b="0">
-                          <a:solidFill>
-                            <a:srgbClr val="555F6B"/>
-                          </a:solidFill>
-                        </a:rPr>
-                        <a:t>0,40</a:t>
-                      </a:r>
-                    </a:p>
-                  </a:txBody>
-                  <a:tcPr marL="45720" marR="45720" marT="18288" marB="18288">
-                    <a:solidFill>
-                      <a:srgbClr val="FFFFFF"/>
-                    </a:solidFill>
-                  </a:tcPr>
-                </a:tc>
-                <a:tc>
-                  <a:txBody>
-                    <a:bodyPr/>
-                    <a:lstStyle/>
-                    <a:p>
-                      <a:r>
-                        <a:rPr sz="1100" b="0">
-                          <a:solidFill>
-                            <a:srgbClr val="555F6B"/>
-                          </a:solidFill>
-                        </a:rPr>
-                        <a:t>Microsoft RCT 2025: 9,9 cuộc họp/tuần. Tỉ lệ 20%: giả định của nhóm</a:t>
-                      </a:r>
-                    </a:p>
-                  </a:txBody>
-                  <a:tcPr marL="45720" marR="45720" marT="18288" marB="18288">
-                    <a:solidFill>
-                      <a:srgbClr val="FFFFFF"/>
-                    </a:solidFill>
-                  </a:tcPr>
-                </a:tc>
-              </a:tr>
-              <a:tr h="502920">
-                <a:tc>
-                  <a:txBody>
-                    <a:bodyPr/>
-                    <a:lstStyle/>
-                    <a:p>
-                      <a:r>
-                        <a:rPr sz="1100" b="0">
-                          <a:solidFill>
-                            <a:srgbClr val="555F6B"/>
-                          </a:solidFill>
-                        </a:rPr>
-                        <a:t>Báo cáo, đề xuất → DOCX/PPTX</a:t>
-                      </a:r>
-                    </a:p>
-                  </a:txBody>
-                  <a:tcPr marL="45720" marR="45720" marT="18288" marB="18288">
-                    <a:solidFill>
-                      <a:srgbClr val="EEF3F8"/>
-                    </a:solidFill>
-                  </a:tcPr>
-                </a:tc>
-                <a:tc>
-                  <a:txBody>
-                    <a:bodyPr/>
-                    <a:lstStyle/>
-                    <a:p>
-                      <a:r>
-                        <a:rPr sz="1100" b="0">
-                          <a:solidFill>
-                            <a:srgbClr val="555F6B"/>
-                          </a:solidFill>
-                        </a:rPr>
-                        <a:t>2</a:t>
-                      </a:r>
-                    </a:p>
-                  </a:txBody>
-                  <a:tcPr marL="45720" marR="45720" marT="18288" marB="18288">
-                    <a:solidFill>
-                      <a:srgbClr val="EEF3F8"/>
-                    </a:solidFill>
-                  </a:tcPr>
-                </a:tc>
-                <a:tc>
-                  <a:txBody>
-                    <a:bodyPr/>
-                    <a:lstStyle/>
-                    <a:p>
-                      <a:r>
-                        <a:rPr sz="1100" b="0">
-                          <a:solidFill>
-                            <a:srgbClr val="555F6B"/>
-                          </a:solidFill>
-                        </a:rPr>
-                        <a:t>0,15 tài liệu</a:t>
-                      </a:r>
-                    </a:p>
-                  </a:txBody>
-                  <a:tcPr marL="45720" marR="45720" marT="18288" marB="18288">
-                    <a:solidFill>
-                      <a:srgbClr val="EEF3F8"/>
-                    </a:solidFill>
-                  </a:tcPr>
-                </a:tc>
-                <a:tc>
-                  <a:txBody>
-                    <a:bodyPr/>
-                    <a:lstStyle/>
-                    <a:p>
-                      <a:r>
-                        <a:rPr sz="1100" b="0">
-                          <a:solidFill>
-                            <a:srgbClr val="555F6B"/>
-                          </a:solidFill>
-                        </a:rPr>
-                        <a:t>50%</a:t>
-                      </a:r>
-                    </a:p>
-                  </a:txBody>
-                  <a:tcPr marL="45720" marR="45720" marT="18288" marB="18288">
-                    <a:solidFill>
-                      <a:srgbClr val="EEF3F8"/>
-                    </a:solidFill>
-                  </a:tcPr>
-                </a:tc>
-                <a:tc>
-                  <a:txBody>
-                    <a:bodyPr/>
-                    <a:lstStyle/>
-                    <a:p>
-                      <a:r>
-                        <a:rPr sz="1100" b="0">
-                          <a:solidFill>
-                            <a:srgbClr val="555F6B"/>
-                          </a:solidFill>
-                        </a:rPr>
-                        <a:t>0,08</a:t>
-                      </a:r>
-                    </a:p>
-                  </a:txBody>
-                  <a:tcPr marL="45720" marR="45720" marT="18288" marB="18288">
-                    <a:solidFill>
-                      <a:srgbClr val="EEF3F8"/>
-                    </a:solidFill>
-                  </a:tcPr>
-                </a:tc>
-                <a:tc>
-                  <a:txBody>
-                    <a:bodyPr/>
-                    <a:lstStyle/>
-                    <a:p>
-                      <a:r>
-                        <a:rPr sz="1100" b="0">
-                          <a:solidFill>
-                            <a:srgbClr val="555F6B"/>
-                          </a:solidFill>
-                        </a:rPr>
-                        <a:t>Microsoft RCT 2025: 0,76 tài liệu Word hoàn thành/tuần. Tỉ lệ 50%: giả định của nhóm</a:t>
-                      </a:r>
-                    </a:p>
-                  </a:txBody>
-                  <a:tcPr marL="45720" marR="45720" marT="18288" marB="18288">
-                    <a:solidFill>
-                      <a:srgbClr val="EEF3F8"/>
-                    </a:solidFill>
-                  </a:tcPr>
-                </a:tc>
-              </a:tr>
-              <a:tr h="502920">
-                <a:tc>
-                  <a:txBody>
-                    <a:bodyPr/>
-                    <a:lstStyle/>
-                    <a:p>
-                      <a:r>
-                        <a:rPr sz="1100" b="0">
-                          <a:solidFill>
-                            <a:srgbClr val="555F6B"/>
-                          </a:solidFill>
-                        </a:rPr>
-                        <a:t>Cộng</a:t>
-                      </a:r>
-                    </a:p>
-                  </a:txBody>
-                  <a:tcPr marL="45720" marR="45720" marT="18288" marB="18288">
-                    <a:solidFill>
-                      <a:srgbClr val="FFFFFF"/>
-                    </a:solidFill>
-                  </a:tcPr>
-                </a:tc>
-                <a:tc>
-                  <a:txBody>
-                    <a:bodyPr/>
-                    <a:lstStyle/>
-                    <a:p/>
-                  </a:txBody>
-                  <a:tcPr marL="45720" marR="45720" marT="18288" marB="18288">
-                    <a:solidFill>
-                      <a:srgbClr val="FFFFFF"/>
-                    </a:solidFill>
-                  </a:tcPr>
-                </a:tc>
-                <a:tc>
-                  <a:txBody>
-                    <a:bodyPr/>
-                    <a:lstStyle/>
-                    <a:p/>
-                  </a:txBody>
-                  <a:tcPr marL="45720" marR="45720" marT="18288" marB="18288">
-                    <a:solidFill>
-                      <a:srgbClr val="FFFFFF"/>
-                    </a:solidFill>
-                  </a:tcPr>
-                </a:tc>
-                <a:tc>
-                  <a:txBody>
-                    <a:bodyPr/>
-                    <a:lstStyle/>
-                    <a:p/>
-                  </a:txBody>
-                  <a:tcPr marL="45720" marR="45720" marT="18288" marB="18288">
-                    <a:solidFill>
-                      <a:srgbClr val="FFFFFF"/>
-                    </a:solidFill>
-                  </a:tcPr>
-                </a:tc>
-                <a:tc>
-                  <a:txBody>
-                    <a:bodyPr/>
-                    <a:lstStyle/>
-                    <a:p>
-                      <a:r>
-                        <a:rPr sz="1100" b="0">
-                          <a:solidFill>
-                            <a:srgbClr val="555F6B"/>
-                          </a:solidFill>
-                        </a:rPr>
-                        <a:t>6,26</a:t>
-                      </a:r>
-                    </a:p>
-                  </a:txBody>
-                  <a:tcPr marL="45720" marR="45720" marT="18288" marB="18288">
-                    <a:solidFill>
-                      <a:srgbClr val="FFFFFF"/>
-                    </a:solidFill>
-                  </a:tcPr>
-                </a:tc>
-                <a:tc>
-                  <a:txBody>
-                    <a:bodyPr/>
-                    <a:lstStyle/>
-                    <a:p/>
-                  </a:txBody>
-                  <a:tcPr marL="45720" marR="45720" marT="18288" marB="18288">
-                    <a:solidFill>
-                      <a:srgbClr val="FFFFFF"/>
-                    </a:solidFill>
-                  </a:tcPr>
-                </a:tc>
-              </a:tr>
-            </a:tbl>
-          </a:graphicData>
-        </a:graphic>
-      </p:graphicFrame>
-      <p:sp>
-        <p:nvSpPr>
-          <p:cNvPr id="8" name="TextBox 7"/>
+      <p:sp>
+        <p:nvSpPr>
+          <p:cNvPr id="6" name="TextBox 5"/>
           <p:cNvSpPr txBox="1"/>
           <p:nvPr/>
         </p:nvSpPr>
         <p:spPr>
           <a:xfrm>
-            <a:off x="457200" y="5120640"/>
-            <a:ext cx="11247120" cy="1188720"/>
+            <a:off x="457200" y="1188720"/>
+            <a:ext cx="11247120" cy="5120640"/>
           </a:xfrm>
           <a:prstGeom prst="rect">
             <a:avLst/>
@@ -11147,12 +10636,12 @@
               </a:spcAft>
             </a:pPr>
             <a:r>
-              <a:rPr sz="1200" b="1">
+              <a:rPr sz="1300" b="0">
                 <a:solidFill>
                   <a:srgbClr val="555F6B"/>
                 </a:solidFill>
               </a:rPr>
-              <a:t>Đọc bảng thế nào</a:t>
+              <a:t>Giá: trang giá chính thức của Google Cloud (GKE, Vertex AI, Cloud SQL, Cloud Storage, Memorystore, Cloud Tasks, KMS, Secret Manager, Observability, Security Command Center, Cloud Armor, VPC network, Cloud Build, Artifact Registry, IAP), đọc ngày 16/10/2026</a:t>
             </a:r>
           </a:p>
           <a:p>
@@ -11162,12 +10651,12 @@
               </a:spcAft>
             </a:pPr>
             <a:r>
-              <a:rPr sz="1200" b="0">
+              <a:rPr sz="1300" b="0">
                 <a:solidFill>
                   <a:srgbClr val="555F6B"/>
                 </a:solidFill>
               </a:rPr>
-              <a:t>Ví dụ dòng đầu: mỗi người gửi khoảng 9,9 email/ngày. Nhóm giả định 30% số email đó nhờ AI soạn, nên 9,9 × 30% = 2,97 nhiệm vụ.</a:t>
+              <a:t>So sánh với AWS và Azure: AWS Price List API, Azure Retail Prices API (region ap-southeast-1, southeastasia)</a:t>
             </a:r>
           </a:p>
           <a:p>
@@ -11177,12 +10666,102 @@
               </a:spcAft>
             </a:pPr>
             <a:r>
-              <a:rPr sz="1200" b="0">
+              <a:rPr sz="1300" b="0">
                 <a:solidFill>
                   <a:srgbClr val="555F6B"/>
                 </a:solidFill>
               </a:rPr>
-              <a:t>Khối lượng việc lấy từ số đo thật (telemetry, khảo sát). Tỉ lệ giao AI phần lớn là giả định của nhóm; nhóm sẽ đo lại trong pilot 2–4 tuần.</a:t>
+              <a:t>Tải: Microsoft WorkLab 2025; Dillon et al., Shifting Work Patterns with Generative AI (2025); Radicati 2015; APQC; Brynjolfsson et al. NBER 31161; Graphite Research; Liang et al. 2025; UK DBT Copilot evaluation 2025</a:t>
+            </a:r>
+          </a:p>
+          <a:p>
+            <a:pPr algn="l">
+              <a:spcAft>
+                <a:spcPts val="400"/>
+              </a:spcAft>
+            </a:pPr>
+            <a:r>
+              <a:rPr sz="1300" b="0">
+                <a:solidFill>
+                  <a:srgbClr val="555F6B"/>
+                </a:solidFill>
+              </a:rPr>
+              <a:t>Token mỗi lượt chat (số lần gọi model × token vào / token ra): cấp 1: 2 × 5,5k / 250 · cấp 2: 2 × 18k / 2,5k · cấp 3: 3,5 × 12k / 1k · cấp 4: 8 × 15k / 300 · cấp 5: 1,5 × 4k / 600 + 1 ảnh</a:t>
+            </a:r>
+          </a:p>
+          <a:p>
+            <a:pPr algn="l">
+              <a:spcAft>
+                <a:spcPts val="400"/>
+              </a:spcAft>
+            </a:pPr>
+            <a:r>
+              <a:rPr sz="1300" b="0">
+                <a:solidFill>
+                  <a:srgbClr val="555F6B"/>
+                </a:solidFill>
+              </a:rPr>
+              <a:t>Nguồn token: Azure OpenAI On your data defaults; Vertex RAG Engine; DA-Code; DABstep; MCP-Universe; MCPMark; OpenRouter State of AI 2025; Azure LLM inference trace 2024</a:t>
+            </a:r>
+          </a:p>
+          <a:p>
+            <a:pPr algn="l">
+              <a:spcAft>
+                <a:spcPts val="400"/>
+              </a:spcAft>
+            </a:pPr>
+            <a:r>
+              <a:rPr sz="1300" b="0">
+                <a:solidFill>
+                  <a:srgbClr val="555F6B"/>
+                </a:solidFill>
+              </a:rPr>
+              <a:t>Chất lượng và tốc độ model: Artificial Analysis Intelligence Index v4.3.2</a:t>
+            </a:r>
+          </a:p>
+          <a:p>
+            <a:pPr algn="l">
+              <a:spcAft>
+                <a:spcPts val="400"/>
+              </a:spcAft>
+            </a:pPr>
+            <a:r>
+              <a:rPr sz="1300" b="0">
+                <a:solidFill>
+                  <a:srgbClr val="555F6B"/>
+                </a:solidFill>
+              </a:rPr>
+              <a:t>Lương: ITviec Vietnam IT Salary &amp; Recruitment Market 2024–2025; tỉ giá Vietcombank ngày 16/10/2026</a:t>
+            </a:r>
+          </a:p>
+          <a:p>
+            <a:pPr algn="l">
+              <a:spcAft>
+                <a:spcPts val="400"/>
+              </a:spcAft>
+            </a:pPr>
+            <a:r>
+              <a:rPr sz="1300" b="0">
+                <a:solidFill>
+                  <a:srgbClr val="555F6B"/>
+                </a:solidFill>
+              </a:rPr>
+              <a:t>Connector: Microsoft Graph throttling, Atlassian rate limiting, Notion request limits, Google Workspace API limits</a:t>
+            </a:r>
+          </a:p>
+          <a:p>
+            <a:pPr algn="l">
+              <a:spcAft>
+                <a:spcPts val="400"/>
+              </a:spcAft>
+            </a:pPr>
+            <a:r>
+              <a:rPr sz="1300" b="0">
+                <a:solidFill>
+                  <a:srgbClr val="555F6B"/>
+                </a:solidFill>
+              </a:rPr>
+              <a:t>Chi tiết nghiên cứu: thư mục research/ (usage-benchmarks, task-volume-by-role, token-per-task, r1, r2, r3, r5-r9, r8-r6) và cost_model.py</a:t>
             </a:r>
           </a:p>
         </p:txBody>
@@ -11281,7 +10860,7 @@
                   <a:srgbClr val="FFFFFF"/>
                 </a:solidFill>
               </a:rPr>
-              <a:t>Phụ lục D. Việc riêng của từng phòng ban</a:t>
+              <a:t>Phụ lục C. Việc chung của mọi nhân viên: 6,26 nhiệm vụ/ngày</a:t>
             </a:r>
           </a:p>
         </p:txBody>
@@ -11319,7 +10898,7 @@
                   <a:srgbClr val="2E6FB7"/>
                 </a:solidFill>
               </a:rPr>
-              <a:t>Mỗi người = 6,26 nhiệm vụ việc chung + việc riêng của phòng. Cả phòng = số người × nhiệm vụ mỗi người</a:t>
+              <a:t>Ai cũng làm 5 việc này. Số nhiệm vụ = khối lượng việc thật mỗi ngày × tỉ lệ giao cho AI</a:t>
             </a:r>
           </a:p>
         </p:txBody>
@@ -11357,7 +10936,7 @@
                   <a:srgbClr val="555F6B"/>
                 </a:solidFill>
               </a:rPr>
-              <a:t>D</a:t>
+              <a:t>C</a:t>
             </a:r>
           </a:p>
         </p:txBody>
@@ -11409,8 +10988,8 @@
           <p:nvPr/>
         </p:nvGraphicFramePr>
         <p:xfrm>
-          <a:off x="457200" y="1325880"/>
-          <a:ext cx="11247120" cy="4297679"/>
+          <a:off x="457200" y="1371600"/>
+          <a:ext cx="11247120" cy="3520440"/>
         </p:xfrm>
         <a:graphic>
           <a:graphicData uri="http://schemas.openxmlformats.org/drawingml/2006/table">
@@ -11419,25 +10998,26 @@
                 <a:tableStyleId>{5C22544A-7EE6-4342-B048-85BDC9FD1C3A}</a:tableStyleId>
               </a:tblPr>
               <a:tblGrid>
+                <a:gridCol w="2286000"/>
+                <a:gridCol w="548640"/>
                 <a:gridCol w="1828800"/>
-                <a:gridCol w="1920240"/>
-                <a:gridCol w="4206240"/>
-                <a:gridCol w="1554480"/>
-                <a:gridCol w="1737360"/>
+                <a:gridCol w="1005840"/>
+                <a:gridCol w="1280160"/>
+                <a:gridCol w="4297680"/>
               </a:tblGrid>
-              <a:tr h="429767">
-                <a:tc>
-                  <a:txBody>
-                    <a:bodyPr/>
-                    <a:lstStyle/>
-                    <a:p>
-                      <a:r>
-                        <a:rPr sz="1000" b="1">
+              <a:tr h="502920">
+                <a:tc>
+                  <a:txBody>
+                    <a:bodyPr/>
+                    <a:lstStyle/>
+                    <a:p>
+                      <a:r>
+                        <a:rPr sz="1100" b="1">
                           <a:solidFill>
                             <a:srgbClr val="FFFFFF"/>
                           </a:solidFill>
                         </a:rPr>
-                        <a:t>Phòng ban (số người)</a:t>
+                        <a:t>Việc</a:t>
                       </a:r>
                     </a:p>
                   </a:txBody>
@@ -11453,12 +11033,12 @@
                     <a:lstStyle/>
                     <a:p>
                       <a:r>
-                        <a:rPr sz="1000" b="1">
+                        <a:rPr sz="1100" b="1">
                           <a:solidFill>
                             <a:srgbClr val="FFFFFF"/>
                           </a:solidFill>
                         </a:rPr>
-                        <a:t>Phòng làm gì</a:t>
+                        <a:t>Cấp</a:t>
                       </a:r>
                     </a:p>
                   </a:txBody>
@@ -11474,12 +11054,12 @@
                     <a:lstStyle/>
                     <a:p>
                       <a:r>
-                        <a:rPr sz="1000" b="1">
+                        <a:rPr sz="1100" b="1">
                           <a:solidFill>
                             <a:srgbClr val="FFFFFF"/>
                           </a:solidFill>
                         </a:rPr>
-                        <a:t>Việc riêng giao AI (nhiệm vụ/người/ngày)</a:t>
+                        <a:t>Khối lượng thật/người/ngày</a:t>
                       </a:r>
                     </a:p>
                   </a:txBody>
@@ -11495,12 +11075,12 @@
                     <a:lstStyle/>
                     <a:p>
                       <a:r>
-                        <a:rPr sz="1000" b="1">
+                        <a:rPr sz="1100" b="1">
                           <a:solidFill>
                             <a:srgbClr val="FFFFFF"/>
                           </a:solidFill>
                         </a:rPr>
-                        <a:t>Mỗi người/ngày</a:t>
+                        <a:t>Tỉ lệ giao AI</a:t>
                       </a:r>
                     </a:p>
                   </a:txBody>
@@ -11516,12 +11096,12 @@
                     <a:lstStyle/>
                     <a:p>
                       <a:r>
-                        <a:rPr sz="1000" b="1">
+                        <a:rPr sz="1100" b="1">
                           <a:solidFill>
                             <a:srgbClr val="FFFFFF"/>
                           </a:solidFill>
                         </a:rPr>
-                        <a:t>Cả phòng/ngày</a:t>
+                        <a:t>Nhiệm vụ/người/ngày</a:t>
                       </a:r>
                     </a:p>
                   </a:txBody>
@@ -11531,20 +11111,41 @@
                     </a:solidFill>
                   </a:tcPr>
                 </a:tc>
+                <a:tc>
+                  <a:txBody>
+                    <a:bodyPr/>
+                    <a:lstStyle/>
+                    <a:p>
+                      <a:r>
+                        <a:rPr sz="1100" b="1">
+                          <a:solidFill>
+                            <a:srgbClr val="FFFFFF"/>
+                          </a:solidFill>
+                        </a:rPr>
+                        <a:t>Căn cứ</a:t>
+                      </a:r>
+                    </a:p>
+                  </a:txBody>
+                  <a:tcPr marL="45720" marR="45720" marT="18288" marB="18288">
+                    <a:solidFill>
+                      <a:srgbClr val="2E6FB7"/>
+                    </a:solidFill>
+                  </a:tcPr>
+                </a:tc>
               </a:tr>
-              <a:tr h="429767">
-                <a:tc>
-                  <a:txBody>
-                    <a:bodyPr/>
-                    <a:lstStyle/>
-                    <a:p>
-                      <a:r>
-                        <a:rPr sz="1000" b="0">
-                          <a:solidFill>
-                            <a:srgbClr val="555F6B"/>
-                          </a:solidFill>
-                        </a:rPr>
-                        <a:t>Kinh doanh, CSKH (500)</a:t>
+              <a:tr h="502920">
+                <a:tc>
+                  <a:txBody>
+                    <a:bodyPr/>
+                    <a:lstStyle/>
+                    <a:p>
+                      <a:r>
+                        <a:rPr sz="1100" b="0">
+                          <a:solidFill>
+                            <a:srgbClr val="555F6B"/>
+                          </a:solidFill>
+                        </a:rPr>
+                        <a:t>Soạn, trả lời email</a:t>
                       </a:r>
                     </a:p>
                   </a:txBody>
@@ -11560,12 +11161,12 @@
                     <a:lstStyle/>
                     <a:p>
                       <a:r>
-                        <a:rPr sz="1000" b="0">
-                          <a:solidFill>
-                            <a:srgbClr val="555F6B"/>
-                          </a:solidFill>
-                        </a:rPr>
-                        <a:t>Bán hàng, chăm sóc khách hàng</a:t>
+                        <a:rPr sz="1100" b="0">
+                          <a:solidFill>
+                            <a:srgbClr val="555F6B"/>
+                          </a:solidFill>
+                        </a:rPr>
+                        <a:t>1</a:t>
                       </a:r>
                     </a:p>
                   </a:txBody>
@@ -11581,12 +11182,12 @@
                     <a:lstStyle/>
                     <a:p>
                       <a:r>
-                        <a:rPr sz="1000" b="0">
-                          <a:solidFill>
-                            <a:srgbClr val="555F6B"/>
-                          </a:solidFill>
-                        </a:rPr>
-                        <a:t>Phân tích doanh số trên Excel 0,10 · agent chuẩn bị gặp khách 0,10 · ảnh cho báo giá 0,03</a:t>
+                        <a:rPr sz="1100" b="0">
+                          <a:solidFill>
+                            <a:srgbClr val="555F6B"/>
+                          </a:solidFill>
+                        </a:rPr>
+                        <a:t>9,9 email gửi</a:t>
                       </a:r>
                     </a:p>
                   </a:txBody>
@@ -11602,12 +11203,12 @@
                     <a:lstStyle/>
                     <a:p>
                       <a:r>
-                        <a:rPr sz="1000" b="0">
-                          <a:solidFill>
-                            <a:srgbClr val="555F6B"/>
-                          </a:solidFill>
-                        </a:rPr>
-                        <a:t>6,26 + 0,23 = 6,49</a:t>
+                        <a:rPr sz="1100" b="0">
+                          <a:solidFill>
+                            <a:srgbClr val="555F6B"/>
+                          </a:solidFill>
+                        </a:rPr>
+                        <a:t>30%</a:t>
                       </a:r>
                     </a:p>
                   </a:txBody>
@@ -11623,12 +11224,12 @@
                     <a:lstStyle/>
                     <a:p>
                       <a:r>
-                        <a:rPr sz="1000" b="0">
-                          <a:solidFill>
-                            <a:srgbClr val="555F6B"/>
-                          </a:solidFill>
-                        </a:rPr>
-                        <a:t>500 × 6,49 = 3.242</a:t>
+                        <a:rPr sz="1100" b="0">
+                          <a:solidFill>
+                            <a:srgbClr val="555F6B"/>
+                          </a:solidFill>
+                        </a:rPr>
+                        <a:t>2,97</a:t>
                       </a:r>
                     </a:p>
                   </a:txBody>
@@ -11638,20 +11239,41 @@
                     </a:solidFill>
                   </a:tcPr>
                 </a:tc>
+                <a:tc>
+                  <a:txBody>
+                    <a:bodyPr/>
+                    <a:lstStyle/>
+                    <a:p>
+                      <a:r>
+                        <a:rPr sz="1100" b="0">
+                          <a:solidFill>
+                            <a:srgbClr val="555F6B"/>
+                          </a:solidFill>
+                        </a:rPr>
+                        <a:t>Trung bình nhân của 2,9 (Microsoft RCT 2025) và 34 (Radicati). 30% cao hơn mức 10–24% của Liang 2025 vì công ty triển khai chính thức</a:t>
+                      </a:r>
+                    </a:p>
+                  </a:txBody>
+                  <a:tcPr marL="45720" marR="45720" marT="18288" marB="18288">
+                    <a:solidFill>
+                      <a:srgbClr val="EEF3F8"/>
+                    </a:solidFill>
+                  </a:tcPr>
+                </a:tc>
               </a:tr>
-              <a:tr h="429767">
-                <a:tc>
-                  <a:txBody>
-                    <a:bodyPr/>
-                    <a:lstStyle/>
-                    <a:p>
-                      <a:r>
-                        <a:rPr sz="1000" b="0">
-                          <a:solidFill>
-                            <a:srgbClr val="555F6B"/>
-                          </a:solidFill>
-                        </a:rPr>
-                        <a:t>Quản lý dự án, vận hành (300)</a:t>
+              <a:tr h="502920">
+                <a:tc>
+                  <a:txBody>
+                    <a:bodyPr/>
+                    <a:lstStyle/>
+                    <a:p>
+                      <a:r>
+                        <a:rPr sz="1100" b="0">
+                          <a:solidFill>
+                            <a:srgbClr val="555F6B"/>
+                          </a:solidFill>
+                        </a:rPr>
+                        <a:t>Tóm tắt, phân loại email</a:t>
                       </a:r>
                     </a:p>
                   </a:txBody>
@@ -11667,12 +11289,12 @@
                     <a:lstStyle/>
                     <a:p>
                       <a:r>
-                        <a:rPr sz="1000" b="0">
-                          <a:solidFill>
-                            <a:srgbClr val="555F6B"/>
-                          </a:solidFill>
-                        </a:rPr>
-                        <a:t>Điều phối dự án, vận hành hằng ngày</a:t>
+                        <a:rPr sz="1100" b="0">
+                          <a:solidFill>
+                            <a:srgbClr val="555F6B"/>
+                          </a:solidFill>
+                        </a:rPr>
+                        <a:t>1</a:t>
                       </a:r>
                     </a:p>
                   </a:txBody>
@@ -11688,12 +11310,12 @@
                     <a:lstStyle/>
                     <a:p>
                       <a:r>
-                        <a:rPr sz="1000" b="0">
-                          <a:solidFill>
-                            <a:srgbClr val="555F6B"/>
-                          </a:solidFill>
-                        </a:rPr>
-                        <a:t>Agent tạo ticket Jira, trang Confluence 0,90 · phân tích dữ liệu vận hành 0,12 · báo cáo tuần 0,10 · sơ đồ quy trình 0,08</a:t>
+                        <a:rPr sz="1100" b="0">
+                          <a:solidFill>
+                            <a:srgbClr val="555F6B"/>
+                          </a:solidFill>
+                        </a:rPr>
+                        <a:t>32,2 email đọc</a:t>
                       </a:r>
                     </a:p>
                   </a:txBody>
@@ -11709,12 +11331,12 @@
                     <a:lstStyle/>
                     <a:p>
                       <a:r>
-                        <a:rPr sz="1000" b="0">
-                          <a:solidFill>
-                            <a:srgbClr val="555F6B"/>
-                          </a:solidFill>
-                        </a:rPr>
-                        <a:t>6,26 + 1,20 = 7,46</a:t>
+                        <a:rPr sz="1100" b="0">
+                          <a:solidFill>
+                            <a:srgbClr val="555F6B"/>
+                          </a:solidFill>
+                        </a:rPr>
+                        <a:t>5%</a:t>
                       </a:r>
                     </a:p>
                   </a:txBody>
@@ -11730,12 +11352,12 @@
                     <a:lstStyle/>
                     <a:p>
                       <a:r>
-                        <a:rPr sz="1000" b="0">
-                          <a:solidFill>
-                            <a:srgbClr val="555F6B"/>
-                          </a:solidFill>
-                        </a:rPr>
-                        <a:t>300 × 7,46 = 2.237</a:t>
+                        <a:rPr sz="1100" b="0">
+                          <a:solidFill>
+                            <a:srgbClr val="555F6B"/>
+                          </a:solidFill>
+                        </a:rPr>
+                        <a:t>1,61</a:t>
                       </a:r>
                     </a:p>
                   </a:txBody>
@@ -11745,20 +11367,41 @@
                     </a:solidFill>
                   </a:tcPr>
                 </a:tc>
+                <a:tc>
+                  <a:txBody>
+                    <a:bodyPr/>
+                    <a:lstStyle/>
+                    <a:p>
+                      <a:r>
+                        <a:rPr sz="1100" b="0">
+                          <a:solidFill>
+                            <a:srgbClr val="555F6B"/>
+                          </a:solidFill>
+                        </a:rPr>
+                        <a:t>Microsoft RCT 2025: 160,8 email đọc/tuần. Tỉ lệ 5%: giả định của nhóm</a:t>
+                      </a:r>
+                    </a:p>
+                  </a:txBody>
+                  <a:tcPr marL="45720" marR="45720" marT="18288" marB="18288">
+                    <a:solidFill>
+                      <a:srgbClr val="FFFFFF"/>
+                    </a:solidFill>
+                  </a:tcPr>
+                </a:tc>
               </a:tr>
-              <a:tr h="429767">
-                <a:tc>
-                  <a:txBody>
-                    <a:bodyPr/>
-                    <a:lstStyle/>
-                    <a:p>
-                      <a:r>
-                        <a:rPr sz="1000" b="0">
-                          <a:solidFill>
-                            <a:srgbClr val="555F6B"/>
-                          </a:solidFill>
-                        </a:rPr>
-                        <a:t>Kế toán (240)</a:t>
+              <a:tr h="502920">
+                <a:tc>
+                  <a:txBody>
+                    <a:bodyPr/>
+                    <a:lstStyle/>
+                    <a:p>
+                      <a:r>
+                        <a:rPr sz="1100" b="0">
+                          <a:solidFill>
+                            <a:srgbClr val="555F6B"/>
+                          </a:solidFill>
+                        </a:rPr>
+                        <a:t>Hỏi đáp tài liệu nội bộ</a:t>
                       </a:r>
                     </a:p>
                   </a:txBody>
@@ -11774,12 +11417,12 @@
                     <a:lstStyle/>
                     <a:p>
                       <a:r>
-                        <a:rPr sz="1000" b="0">
-                          <a:solidFill>
-                            <a:srgbClr val="555F6B"/>
-                          </a:solidFill>
-                        </a:rPr>
-                        <a:t>Sổ sách, thanh toán, báo cáo tài chính</a:t>
+                        <a:rPr sz="1100" b="0">
+                          <a:solidFill>
+                            <a:srgbClr val="555F6B"/>
+                          </a:solidFill>
+                        </a:rPr>
+                        <a:t>1</a:t>
                       </a:r>
                     </a:p>
                   </a:txBody>
@@ -11795,12 +11438,12 @@
                     <a:lstStyle/>
                     <a:p>
                       <a:r>
-                        <a:rPr sz="1000" b="0">
-                          <a:solidFill>
-                            <a:srgbClr val="555F6B"/>
-                          </a:solidFill>
-                        </a:rPr>
-                        <a:t>Phân tích bảng tính tài chính, đối soát 0,80 · tìm hóa đơn bất thường 0,30 · checklist khóa sổ 0,05</a:t>
+                        <a:rPr sz="1100" b="0">
+                          <a:solidFill>
+                            <a:srgbClr val="555F6B"/>
+                          </a:solidFill>
+                        </a:rPr>
+                        <a:t>4,0 lần tra cứu</a:t>
                       </a:r>
                     </a:p>
                   </a:txBody>
@@ -11816,12 +11459,12 @@
                     <a:lstStyle/>
                     <a:p>
                       <a:r>
-                        <a:rPr sz="1000" b="0">
-                          <a:solidFill>
-                            <a:srgbClr val="555F6B"/>
-                          </a:solidFill>
-                        </a:rPr>
-                        <a:t>6,26 + 1,15 = 7,41</a:t>
+                        <a:rPr sz="1100" b="0">
+                          <a:solidFill>
+                            <a:srgbClr val="555F6B"/>
+                          </a:solidFill>
+                        </a:rPr>
+                        <a:t>30%</a:t>
                       </a:r>
                     </a:p>
                   </a:txBody>
@@ -11837,12 +11480,12 @@
                     <a:lstStyle/>
                     <a:p>
                       <a:r>
-                        <a:rPr sz="1000" b="0">
-                          <a:solidFill>
-                            <a:srgbClr val="555F6B"/>
-                          </a:solidFill>
-                        </a:rPr>
-                        <a:t>240 × 7,41 = 1.777</a:t>
+                        <a:rPr sz="1100" b="0">
+                          <a:solidFill>
+                            <a:srgbClr val="555F6B"/>
+                          </a:solidFill>
+                        </a:rPr>
+                        <a:t>1,20</a:t>
                       </a:r>
                     </a:p>
                   </a:txBody>
@@ -11852,20 +11495,41 @@
                     </a:solidFill>
                   </a:tcPr>
                 </a:tc>
+                <a:tc>
+                  <a:txBody>
+                    <a:bodyPr/>
+                    <a:lstStyle/>
+                    <a:p>
+                      <a:r>
+                        <a:rPr sz="1100" b="0">
+                          <a:solidFill>
+                            <a:srgbClr val="555F6B"/>
+                          </a:solidFill>
+                        </a:rPr>
+                        <a:t>Mỗi người mất 1,6–2 giờ/ngày tìm thông tin (McKinsey, Atlassian). 4 lần và 30%: giả định của nhóm</a:t>
+                      </a:r>
+                    </a:p>
+                  </a:txBody>
+                  <a:tcPr marL="45720" marR="45720" marT="18288" marB="18288">
+                    <a:solidFill>
+                      <a:srgbClr val="EEF3F8"/>
+                    </a:solidFill>
+                  </a:tcPr>
+                </a:tc>
               </a:tr>
-              <a:tr h="429767">
-                <a:tc>
-                  <a:txBody>
-                    <a:bodyPr/>
-                    <a:lstStyle/>
-                    <a:p>
-                      <a:r>
-                        <a:rPr sz="1000" b="0">
-                          <a:solidFill>
-                            <a:srgbClr val="555F6B"/>
-                          </a:solidFill>
-                        </a:rPr>
-                        <a:t>Nhân sự, HC, pháp chế (260)</a:t>
+              <a:tr h="502920">
+                <a:tc>
+                  <a:txBody>
+                    <a:bodyPr/>
+                    <a:lstStyle/>
+                    <a:p>
+                      <a:r>
+                        <a:rPr sz="1100" b="0">
+                          <a:solidFill>
+                            <a:srgbClr val="555F6B"/>
+                          </a:solidFill>
+                        </a:rPr>
+                        <a:t>Biên bản họp → DOCX</a:t>
                       </a:r>
                     </a:p>
                   </a:txBody>
@@ -11881,12 +11545,12 @@
                     <a:lstStyle/>
                     <a:p>
                       <a:r>
-                        <a:rPr sz="1000" b="0">
-                          <a:solidFill>
-                            <a:srgbClr val="555F6B"/>
-                          </a:solidFill>
-                        </a:rPr>
-                        <a:t>Tuyển dụng, chính sách, hợp đồng</a:t>
+                        <a:rPr sz="1100" b="0">
+                          <a:solidFill>
+                            <a:srgbClr val="555F6B"/>
+                          </a:solidFill>
+                        </a:rPr>
+                        <a:t>2</a:t>
                       </a:r>
                     </a:p>
                   </a:txBody>
@@ -11902,12 +11566,12 @@
                     <a:lstStyle/>
                     <a:p>
                       <a:r>
-                        <a:rPr sz="1000" b="0">
-                          <a:solidFill>
-                            <a:srgbClr val="555F6B"/>
-                          </a:solidFill>
-                        </a:rPr>
-                        <a:t>Rà soát hợp đồng 0,15 · soạn mô tả công việc, chính sách 0,09 · tổng hợp chấm công 0,08 · đặt lịch phỏng vấn 0,05</a:t>
+                        <a:rPr sz="1100" b="0">
+                          <a:solidFill>
+                            <a:srgbClr val="555F6B"/>
+                          </a:solidFill>
+                        </a:rPr>
+                        <a:t>2,0 cuộc họp</a:t>
                       </a:r>
                     </a:p>
                   </a:txBody>
@@ -11923,12 +11587,12 @@
                     <a:lstStyle/>
                     <a:p>
                       <a:r>
-                        <a:rPr sz="1000" b="0">
-                          <a:solidFill>
-                            <a:srgbClr val="555F6B"/>
-                          </a:solidFill>
-                        </a:rPr>
-                        <a:t>6,26 + 0,37 = 6,63</a:t>
+                        <a:rPr sz="1100" b="0">
+                          <a:solidFill>
+                            <a:srgbClr val="555F6B"/>
+                          </a:solidFill>
+                        </a:rPr>
+                        <a:t>20%</a:t>
                       </a:r>
                     </a:p>
                   </a:txBody>
@@ -11944,12 +11608,12 @@
                     <a:lstStyle/>
                     <a:p>
                       <a:r>
-                        <a:rPr sz="1000" b="0">
-                          <a:solidFill>
-                            <a:srgbClr val="555F6B"/>
-                          </a:solidFill>
-                        </a:rPr>
-                        <a:t>260 × 6,63 = 1.723</a:t>
+                        <a:rPr sz="1100" b="0">
+                          <a:solidFill>
+                            <a:srgbClr val="555F6B"/>
+                          </a:solidFill>
+                        </a:rPr>
+                        <a:t>0,40</a:t>
                       </a:r>
                     </a:p>
                   </a:txBody>
@@ -11959,20 +11623,41 @@
                     </a:solidFill>
                   </a:tcPr>
                 </a:tc>
+                <a:tc>
+                  <a:txBody>
+                    <a:bodyPr/>
+                    <a:lstStyle/>
+                    <a:p>
+                      <a:r>
+                        <a:rPr sz="1100" b="0">
+                          <a:solidFill>
+                            <a:srgbClr val="555F6B"/>
+                          </a:solidFill>
+                        </a:rPr>
+                        <a:t>Microsoft RCT 2025: 9,9 cuộc họp/tuần. Tỉ lệ 20%: giả định của nhóm</a:t>
+                      </a:r>
+                    </a:p>
+                  </a:txBody>
+                  <a:tcPr marL="45720" marR="45720" marT="18288" marB="18288">
+                    <a:solidFill>
+                      <a:srgbClr val="FFFFFF"/>
+                    </a:solidFill>
+                  </a:tcPr>
+                </a:tc>
               </a:tr>
-              <a:tr h="429767">
-                <a:tc>
-                  <a:txBody>
-                    <a:bodyPr/>
-                    <a:lstStyle/>
-                    <a:p>
-                      <a:r>
-                        <a:rPr sz="1000" b="0">
-                          <a:solidFill>
-                            <a:srgbClr val="555F6B"/>
-                          </a:solidFill>
-                        </a:rPr>
-                        <a:t>Marketing (200)</a:t>
+              <a:tr h="502920">
+                <a:tc>
+                  <a:txBody>
+                    <a:bodyPr/>
+                    <a:lstStyle/>
+                    <a:p>
+                      <a:r>
+                        <a:rPr sz="1100" b="0">
+                          <a:solidFill>
+                            <a:srgbClr val="555F6B"/>
+                          </a:solidFill>
+                        </a:rPr>
+                        <a:t>Báo cáo, đề xuất → DOCX/PPTX</a:t>
                       </a:r>
                     </a:p>
                   </a:txBody>
@@ -11988,12 +11673,12 @@
                     <a:lstStyle/>
                     <a:p>
                       <a:r>
-                        <a:rPr sz="1000" b="0">
-                          <a:solidFill>
-                            <a:srgbClr val="555F6B"/>
-                          </a:solidFill>
-                        </a:rPr>
-                        <a:t>Nội dung, chiến dịch, hình ảnh</a:t>
+                        <a:rPr sz="1100" b="0">
+                          <a:solidFill>
+                            <a:srgbClr val="555F6B"/>
+                          </a:solidFill>
+                        </a:rPr>
+                        <a:t>2</a:t>
                       </a:r>
                     </a:p>
                   </a:txBody>
@@ -12009,12 +11694,12 @@
                     <a:lstStyle/>
                     <a:p>
                       <a:r>
-                        <a:rPr sz="1000" b="0">
-                          <a:solidFill>
-                            <a:srgbClr val="555F6B"/>
-                          </a:solidFill>
-                        </a:rPr>
-                        <a:t>Viết bài đăng, thông cáo 0,80 · ảnh, banner 0,25 · số liệu chiến dịch 0,12 · cập nhật kế hoạch 0,08</a:t>
+                        <a:rPr sz="1100" b="0">
+                          <a:solidFill>
+                            <a:srgbClr val="555F6B"/>
+                          </a:solidFill>
+                        </a:rPr>
+                        <a:t>0,15 tài liệu</a:t>
                       </a:r>
                     </a:p>
                   </a:txBody>
@@ -12030,12 +11715,12 @@
                     <a:lstStyle/>
                     <a:p>
                       <a:r>
-                        <a:rPr sz="1000" b="0">
-                          <a:solidFill>
-                            <a:srgbClr val="555F6B"/>
-                          </a:solidFill>
-                        </a:rPr>
-                        <a:t>6,26 + 1,24 = 7,50</a:t>
+                        <a:rPr sz="1100" b="0">
+                          <a:solidFill>
+                            <a:srgbClr val="555F6B"/>
+                          </a:solidFill>
+                        </a:rPr>
+                        <a:t>50%</a:t>
                       </a:r>
                     </a:p>
                   </a:txBody>
@@ -12051,12 +11736,12 @@
                     <a:lstStyle/>
                     <a:p>
                       <a:r>
-                        <a:rPr sz="1000" b="0">
-                          <a:solidFill>
-                            <a:srgbClr val="555F6B"/>
-                          </a:solidFill>
-                        </a:rPr>
-                        <a:t>200 × 7,50 = 1.500</a:t>
+                        <a:rPr sz="1100" b="0">
+                          <a:solidFill>
+                            <a:srgbClr val="555F6B"/>
+                          </a:solidFill>
+                        </a:rPr>
+                        <a:t>0,08</a:t>
                       </a:r>
                     </a:p>
                   </a:txBody>
@@ -12066,20 +11751,41 @@
                     </a:solidFill>
                   </a:tcPr>
                 </a:tc>
+                <a:tc>
+                  <a:txBody>
+                    <a:bodyPr/>
+                    <a:lstStyle/>
+                    <a:p>
+                      <a:r>
+                        <a:rPr sz="1100" b="0">
+                          <a:solidFill>
+                            <a:srgbClr val="555F6B"/>
+                          </a:solidFill>
+                        </a:rPr>
+                        <a:t>Microsoft RCT 2025: 0,76 tài liệu Word hoàn thành/tuần. Tỉ lệ 50%: giả định của nhóm</a:t>
+                      </a:r>
+                    </a:p>
+                  </a:txBody>
+                  <a:tcPr marL="45720" marR="45720" marT="18288" marB="18288">
+                    <a:solidFill>
+                      <a:srgbClr val="EEF3F8"/>
+                    </a:solidFill>
+                  </a:tcPr>
+                </a:tc>
               </a:tr>
-              <a:tr h="429767">
-                <a:tc>
-                  <a:txBody>
-                    <a:bodyPr/>
-                    <a:lstStyle/>
-                    <a:p>
-                      <a:r>
-                        <a:rPr sz="1000" b="0">
-                          <a:solidFill>
-                            <a:srgbClr val="555F6B"/>
-                          </a:solidFill>
-                        </a:rPr>
-                        <a:t>IT (200)</a:t>
+              <a:tr h="502920">
+                <a:tc>
+                  <a:txBody>
+                    <a:bodyPr/>
+                    <a:lstStyle/>
+                    <a:p>
+                      <a:r>
+                        <a:rPr sz="1100" b="0">
+                          <a:solidFill>
+                            <a:srgbClr val="555F6B"/>
+                          </a:solidFill>
+                        </a:rPr>
+                        <a:t>Cộng</a:t>
                       </a:r>
                     </a:p>
                   </a:txBody>
@@ -12093,16 +11799,7 @@
                   <a:txBody>
                     <a:bodyPr/>
                     <a:lstStyle/>
-                    <a:p>
-                      <a:r>
-                        <a:rPr sz="1000" b="0">
-                          <a:solidFill>
-                            <a:srgbClr val="555F6B"/>
-                          </a:solidFill>
-                        </a:rPr>
-                        <a:t>Phát triển phần mềm, hạ tầng, hỗ trợ</a:t>
-                      </a:r>
-                    </a:p>
+                    <a:p/>
                   </a:txBody>
                   <a:tcPr marL="45720" marR="45720" marT="18288" marB="18288">
                     <a:solidFill>
@@ -12114,16 +11811,7 @@
                   <a:txBody>
                     <a:bodyPr/>
                     <a:lstStyle/>
-                    <a:p>
-                      <a:r>
-                        <a:rPr sz="1000" b="0">
-                          <a:solidFill>
-                            <a:srgbClr val="555F6B"/>
-                          </a:solidFill>
-                        </a:rPr>
-                        <a:t>Tra cứu, phân loại ticket hỗ trợ 0,60 · agent cập nhật Jira, runbook 0,20 · viết code 0,16 · review code 0,08 · sơ đồ 0,05</a:t>
-                      </a:r>
-                    </a:p>
+                    <a:p/>
                   </a:txBody>
                   <a:tcPr marL="45720" marR="45720" marT="18288" marB="18288">
                     <a:solidFill>
@@ -12135,16 +11823,7 @@
                   <a:txBody>
                     <a:bodyPr/>
                     <a:lstStyle/>
-                    <a:p>
-                      <a:r>
-                        <a:rPr sz="1000" b="0">
-                          <a:solidFill>
-                            <a:srgbClr val="555F6B"/>
-                          </a:solidFill>
-                        </a:rPr>
-                        <a:t>6,26 + 1,09 = 7,35</a:t>
-                      </a:r>
-                    </a:p>
+                    <a:p/>
                   </a:txBody>
                   <a:tcPr marL="45720" marR="45720" marT="18288" marB="18288">
                     <a:solidFill>
@@ -12158,12 +11837,12 @@
                     <a:lstStyle/>
                     <a:p>
                       <a:r>
-                        <a:rPr sz="1000" b="0">
-                          <a:solidFill>
-                            <a:srgbClr val="555F6B"/>
-                          </a:solidFill>
-                        </a:rPr>
-                        <a:t>200 × 7,35 = 1.469</a:t>
+                        <a:rPr sz="1100" b="0">
+                          <a:solidFill>
+                            <a:srgbClr val="555F6B"/>
+                          </a:solidFill>
+                        </a:rPr>
+                        <a:t>6,26</a:t>
                       </a:r>
                     </a:p>
                   </a:txBody>
@@ -12173,306 +11852,15 @@
                     </a:solidFill>
                   </a:tcPr>
                 </a:tc>
-              </a:tr>
-              <a:tr h="429767">
-                <a:tc>
-                  <a:txBody>
-                    <a:bodyPr/>
-                    <a:lstStyle/>
-                    <a:p>
-                      <a:r>
-                        <a:rPr sz="1000" b="0">
-                          <a:solidFill>
-                            <a:srgbClr val="555F6B"/>
-                          </a:solidFill>
-                        </a:rPr>
-                        <a:t>Mua hàng, SCM (200)</a:t>
-                      </a:r>
-                    </a:p>
-                  </a:txBody>
-                  <a:tcPr marL="45720" marR="45720" marT="18288" marB="18288">
-                    <a:solidFill>
-                      <a:srgbClr val="EEF3F8"/>
-                    </a:solidFill>
-                  </a:tcPr>
-                </a:tc>
-                <a:tc>
-                  <a:txBody>
-                    <a:bodyPr/>
-                    <a:lstStyle/>
-                    <a:p>
-                      <a:r>
-                        <a:rPr sz="1000" b="0">
-                          <a:solidFill>
-                            <a:srgbClr val="555F6B"/>
-                          </a:solidFill>
-                        </a:rPr>
-                        <a:t>Nhà cung cấp, đặt hàng, giao hàng</a:t>
-                      </a:r>
-                    </a:p>
-                  </a:txBody>
-                  <a:tcPr marL="45720" marR="45720" marT="18288" marB="18288">
-                    <a:solidFill>
-                      <a:srgbClr val="EEF3F8"/>
-                    </a:solidFill>
-                  </a:tcPr>
-                </a:tc>
-                <a:tc>
-                  <a:txBody>
-                    <a:bodyPr/>
-                    <a:lstStyle/>
-                    <a:p>
-                      <a:r>
-                        <a:rPr sz="1000" b="0">
-                          <a:solidFill>
-                            <a:srgbClr val="555F6B"/>
-                          </a:solidFill>
-                        </a:rPr>
-                        <a:t>So sánh báo giá nhà cung cấp 0,56 · agent cập nhật lịch giao hàng 0,05</a:t>
-                      </a:r>
-                    </a:p>
-                  </a:txBody>
-                  <a:tcPr marL="45720" marR="45720" marT="18288" marB="18288">
-                    <a:solidFill>
-                      <a:srgbClr val="EEF3F8"/>
-                    </a:solidFill>
-                  </a:tcPr>
-                </a:tc>
-                <a:tc>
-                  <a:txBody>
-                    <a:bodyPr/>
-                    <a:lstStyle/>
-                    <a:p>
-                      <a:r>
-                        <a:rPr sz="1000" b="0">
-                          <a:solidFill>
-                            <a:srgbClr val="555F6B"/>
-                          </a:solidFill>
-                        </a:rPr>
-                        <a:t>6,26 + 0,61 = 6,87</a:t>
-                      </a:r>
-                    </a:p>
-                  </a:txBody>
-                  <a:tcPr marL="45720" marR="45720" marT="18288" marB="18288">
-                    <a:solidFill>
-                      <a:srgbClr val="EEF3F8"/>
-                    </a:solidFill>
-                  </a:tcPr>
-                </a:tc>
-                <a:tc>
-                  <a:txBody>
-                    <a:bodyPr/>
-                    <a:lstStyle/>
-                    <a:p>
-                      <a:r>
-                        <a:rPr sz="1000" b="0">
-                          <a:solidFill>
-                            <a:srgbClr val="555F6B"/>
-                          </a:solidFill>
-                        </a:rPr>
-                        <a:t>200 × 6,87 = 1.373</a:t>
-                      </a:r>
-                    </a:p>
-                  </a:txBody>
-                  <a:tcPr marL="45720" marR="45720" marT="18288" marB="18288">
-                    <a:solidFill>
-                      <a:srgbClr val="EEF3F8"/>
-                    </a:solidFill>
-                  </a:tcPr>
-                </a:tc>
-              </a:tr>
-              <a:tr h="429767">
-                <a:tc>
-                  <a:txBody>
-                    <a:bodyPr/>
-                    <a:lstStyle/>
-                    <a:p>
-                      <a:r>
-                        <a:rPr sz="1000" b="0">
-                          <a:solidFill>
-                            <a:srgbClr val="555F6B"/>
-                          </a:solidFill>
-                        </a:rPr>
-                        <a:t>Lãnh đạo, trợ lý (100)</a:t>
-                      </a:r>
-                    </a:p>
+                <a:tc>
+                  <a:txBody>
+                    <a:bodyPr/>
+                    <a:lstStyle/>
+                    <a:p/>
                   </a:txBody>
                   <a:tcPr marL="45720" marR="45720" marT="18288" marB="18288">
                     <a:solidFill>
                       <a:srgbClr val="FFFFFF"/>
-                    </a:solidFill>
-                  </a:tcPr>
-                </a:tc>
-                <a:tc>
-                  <a:txBody>
-                    <a:bodyPr/>
-                    <a:lstStyle/>
-                    <a:p>
-                      <a:r>
-                        <a:rPr sz="1000" b="0">
-                          <a:solidFill>
-                            <a:srgbClr val="555F6B"/>
-                          </a:solidFill>
-                        </a:rPr>
-                        <a:t>Ra quyết định, họp nhiều</a:t>
-                      </a:r>
-                    </a:p>
-                  </a:txBody>
-                  <a:tcPr marL="45720" marR="45720" marT="18288" marB="18288">
-                    <a:solidFill>
-                      <a:srgbClr val="FFFFFF"/>
-                    </a:solidFill>
-                  </a:tcPr>
-                </a:tc>
-                <a:tc>
-                  <a:txBody>
-                    <a:bodyPr/>
-                    <a:lstStyle/>
-                    <a:p>
-                      <a:r>
-                        <a:rPr sz="1000" b="0">
-                          <a:solidFill>
-                            <a:srgbClr val="555F6B"/>
-                          </a:solidFill>
-                        </a:rPr>
-                        <a:t>Họp 4,6 cuộc/ngày nên biên bản họp là 0,92 thay vì 0,40 · agent chuẩn bị briefing 0,92 · sắp lịch 0,20 · slide 0,10</a:t>
-                      </a:r>
-                    </a:p>
-                  </a:txBody>
-                  <a:tcPr marL="45720" marR="45720" marT="18288" marB="18288">
-                    <a:solidFill>
-                      <a:srgbClr val="FFFFFF"/>
-                    </a:solidFill>
-                  </a:tcPr>
-                </a:tc>
-                <a:tc>
-                  <a:txBody>
-                    <a:bodyPr/>
-                    <a:lstStyle/>
-                    <a:p>
-                      <a:r>
-                        <a:rPr sz="1000" b="0">
-                          <a:solidFill>
-                            <a:srgbClr val="555F6B"/>
-                          </a:solidFill>
-                        </a:rPr>
-                        <a:t>6,26 + 1,74 = 8,00</a:t>
-                      </a:r>
-                    </a:p>
-                  </a:txBody>
-                  <a:tcPr marL="45720" marR="45720" marT="18288" marB="18288">
-                    <a:solidFill>
-                      <a:srgbClr val="FFFFFF"/>
-                    </a:solidFill>
-                  </a:tcPr>
-                </a:tc>
-                <a:tc>
-                  <a:txBody>
-                    <a:bodyPr/>
-                    <a:lstStyle/>
-                    <a:p>
-                      <a:r>
-                        <a:rPr sz="1000" b="0">
-                          <a:solidFill>
-                            <a:srgbClr val="555F6B"/>
-                          </a:solidFill>
-                        </a:rPr>
-                        <a:t>100 × 8,00 = 800</a:t>
-                      </a:r>
-                    </a:p>
-                  </a:txBody>
-                  <a:tcPr marL="45720" marR="45720" marT="18288" marB="18288">
-                    <a:solidFill>
-                      <a:srgbClr val="FFFFFF"/>
-                    </a:solidFill>
-                  </a:tcPr>
-                </a:tc>
-              </a:tr>
-              <a:tr h="429776">
-                <a:tc>
-                  <a:txBody>
-                    <a:bodyPr/>
-                    <a:lstStyle/>
-                    <a:p>
-                      <a:r>
-                        <a:rPr sz="1000" b="0">
-                          <a:solidFill>
-                            <a:srgbClr val="555F6B"/>
-                          </a:solidFill>
-                        </a:rPr>
-                        <a:t>Toàn công ty (2.000)</a:t>
-                      </a:r>
-                    </a:p>
-                  </a:txBody>
-                  <a:tcPr marL="45720" marR="45720" marT="18288" marB="18288">
-                    <a:solidFill>
-                      <a:srgbClr val="EEF3F8"/>
-                    </a:solidFill>
-                  </a:tcPr>
-                </a:tc>
-                <a:tc>
-                  <a:txBody>
-                    <a:bodyPr/>
-                    <a:lstStyle/>
-                    <a:p/>
-                  </a:txBody>
-                  <a:tcPr marL="45720" marR="45720" marT="18288" marB="18288">
-                    <a:solidFill>
-                      <a:srgbClr val="EEF3F8"/>
-                    </a:solidFill>
-                  </a:tcPr>
-                </a:tc>
-                <a:tc>
-                  <a:txBody>
-                    <a:bodyPr/>
-                    <a:lstStyle/>
-                    <a:p/>
-                  </a:txBody>
-                  <a:tcPr marL="45720" marR="45720" marT="18288" marB="18288">
-                    <a:solidFill>
-                      <a:srgbClr val="EEF3F8"/>
-                    </a:solidFill>
-                  </a:tcPr>
-                </a:tc>
-                <a:tc>
-                  <a:txBody>
-                    <a:bodyPr/>
-                    <a:lstStyle/>
-                    <a:p>
-                      <a:r>
-                        <a:rPr sz="1000" b="0">
-                          <a:solidFill>
-                            <a:srgbClr val="555F6B"/>
-                          </a:solidFill>
-                        </a:rPr>
-                        <a:t>7,06 (trung bình)</a:t>
-                      </a:r>
-                    </a:p>
-                  </a:txBody>
-                  <a:tcPr marL="45720" marR="45720" marT="18288" marB="18288">
-                    <a:solidFill>
-                      <a:srgbClr val="EEF3F8"/>
-                    </a:solidFill>
-                  </a:tcPr>
-                </a:tc>
-                <a:tc>
-                  <a:txBody>
-                    <a:bodyPr/>
-                    <a:lstStyle/>
-                    <a:p>
-                      <a:r>
-                        <a:rPr sz="1000" b="0">
-                          <a:solidFill>
-                            <a:srgbClr val="555F6B"/>
-                          </a:solidFill>
-                        </a:rPr>
-                        <a:t>14.120</a:t>
-                      </a:r>
-                    </a:p>
-                  </a:txBody>
-                  <a:tcPr marL="45720" marR="45720" marT="18288" marB="18288">
-                    <a:solidFill>
-                      <a:srgbClr val="EEF3F8"/>
                     </a:solidFill>
                   </a:tcPr>
                 </a:tc>
@@ -12489,8 +11877,8 @@
         </p:nvSpPr>
         <p:spPr>
           <a:xfrm>
-            <a:off x="457200" y="5897880"/>
-            <a:ext cx="11247120" cy="457200"/>
+            <a:off x="457200" y="5120640"/>
+            <a:ext cx="11247120" cy="1188720"/>
           </a:xfrm>
           <a:prstGeom prst="rect">
             <a:avLst/>
@@ -12509,12 +11897,42 @@
               </a:spcAft>
             </a:pPr>
             <a:r>
-              <a:rPr sz="1000" b="0">
+              <a:rPr sz="1200" b="1">
                 <a:solidFill>
                   <a:srgbClr val="555F6B"/>
                 </a:solidFill>
               </a:rPr>
-              <a:t>Số đã làm tròn 2 chữ số. Nguồn khối lượng việc riêng: APQC (hóa đơn, đơn mua hàng), Graphite (code), MetricNet (ticket IT), HBR 2017 (giờ họp của lãnh đạo); còn lại là giả định của nhóm.</a:t>
+              <a:t>Đọc bảng thế nào</a:t>
+            </a:r>
+          </a:p>
+          <a:p>
+            <a:pPr algn="l">
+              <a:spcAft>
+                <a:spcPts val="400"/>
+              </a:spcAft>
+            </a:pPr>
+            <a:r>
+              <a:rPr sz="1200" b="0">
+                <a:solidFill>
+                  <a:srgbClr val="555F6B"/>
+                </a:solidFill>
+              </a:rPr>
+              <a:t>Ví dụ dòng đầu: mỗi người gửi khoảng 9,9 email/ngày. Nhóm giả định 30% số email đó nhờ AI soạn, nên 9,9 × 30% = 2,97 nhiệm vụ.</a:t>
+            </a:r>
+          </a:p>
+          <a:p>
+            <a:pPr algn="l">
+              <a:spcAft>
+                <a:spcPts val="400"/>
+              </a:spcAft>
+            </a:pPr>
+            <a:r>
+              <a:rPr sz="1200" b="0">
+                <a:solidFill>
+                  <a:srgbClr val="555F6B"/>
+                </a:solidFill>
+              </a:rPr>
+              <a:t>Khối lượng việc lấy từ số đo thật (telemetry, khảo sát). Tỉ lệ giao AI phần lớn là giả định của nhóm; nhóm sẽ đo lại trong pilot 2–4 tuần.</a:t>
             </a:r>
           </a:p>
         </p:txBody>
@@ -14622,6 +14040,1338 @@
                 </a:solidFill>
               </a:rPr>
               <a:t>Chi tiết từng việc, từng phòng ban và nguồn số liệu: Phụ lục C và D.</a:t>
+            </a:r>
+          </a:p>
+        </p:txBody>
+      </p:sp>
+    </p:spTree>
+  </p:cSld>
+  <p:clrMapOvr>
+    <a:masterClrMapping/>
+  </p:clrMapOvr>
+</p:sld>
+</file>
+
+<file path=ppt/slides/slide20.xml><?xml version="1.0" encoding="utf-8"?>
+<p:sld xmlns:a="http://schemas.openxmlformats.org/drawingml/2006/main" xmlns:p="http://schemas.openxmlformats.org/presentationml/2006/main" xmlns:r="http://schemas.openxmlformats.org/officeDocument/2006/relationships">
+  <p:cSld>
+    <p:spTree>
+      <p:nvGrpSpPr>
+        <p:cNvPr id="1" name=""/>
+        <p:cNvGrpSpPr/>
+        <p:nvPr/>
+      </p:nvGrpSpPr>
+      <p:grpSpPr/>
+      <p:sp>
+        <p:nvSpPr>
+          <p:cNvPr id="2" name="Rectangle 1"/>
+          <p:cNvSpPr/>
+          <p:nvPr/>
+        </p:nvSpPr>
+        <p:spPr>
+          <a:xfrm>
+            <a:off x="0" y="0"/>
+            <a:ext cx="12191695" cy="868680"/>
+          </a:xfrm>
+          <a:prstGeom prst="rect">
+            <a:avLst/>
+          </a:prstGeom>
+          <a:solidFill>
+            <a:srgbClr val="1F3A5F"/>
+          </a:solidFill>
+          <a:ln>
+            <a:noFill/>
+          </a:ln>
+        </p:spPr>
+        <p:style>
+          <a:lnRef idx="1">
+            <a:schemeClr val="accent1"/>
+          </a:lnRef>
+          <a:fillRef idx="3">
+            <a:schemeClr val="accent1"/>
+          </a:fillRef>
+          <a:effectRef idx="2">
+            <a:schemeClr val="accent1"/>
+          </a:effectRef>
+          <a:fontRef idx="minor">
+            <a:schemeClr val="lt1"/>
+          </a:fontRef>
+        </p:style>
+        <p:txBody>
+          <a:bodyPr rtlCol="0" anchor="ctr"/>
+          <a:lstStyle/>
+          <a:p>
+            <a:pPr algn="ctr"/>
+          </a:p>
+        </p:txBody>
+      </p:sp>
+      <p:sp>
+        <p:nvSpPr>
+          <p:cNvPr id="3" name="TextBox 2"/>
+          <p:cNvSpPr txBox="1"/>
+          <p:nvPr/>
+        </p:nvSpPr>
+        <p:spPr>
+          <a:xfrm>
+            <a:off x="457200" y="137160"/>
+            <a:ext cx="10515600" cy="640080"/>
+          </a:xfrm>
+          <a:prstGeom prst="rect">
+            <a:avLst/>
+          </a:prstGeom>
+          <a:noFill/>
+        </p:spPr>
+        <p:txBody>
+          <a:bodyPr wrap="square">
+            <a:spAutoFit/>
+          </a:bodyPr>
+          <a:lstStyle/>
+          <a:p>
+            <a:pPr algn="l">
+              <a:spcAft>
+                <a:spcPts val="400"/>
+              </a:spcAft>
+            </a:pPr>
+            <a:r>
+              <a:rPr sz="2600" b="1">
+                <a:solidFill>
+                  <a:srgbClr val="FFFFFF"/>
+                </a:solidFill>
+              </a:rPr>
+              <a:t>Phụ lục D. Việc riêng của từng phòng ban</a:t>
+            </a:r>
+          </a:p>
+        </p:txBody>
+      </p:sp>
+      <p:sp>
+        <p:nvSpPr>
+          <p:cNvPr id="4" name="TextBox 3"/>
+          <p:cNvSpPr txBox="1"/>
+          <p:nvPr/>
+        </p:nvSpPr>
+        <p:spPr>
+          <a:xfrm>
+            <a:off x="457200" y="914400"/>
+            <a:ext cx="11247120" cy="457200"/>
+          </a:xfrm>
+          <a:prstGeom prst="rect">
+            <a:avLst/>
+          </a:prstGeom>
+          <a:noFill/>
+        </p:spPr>
+        <p:txBody>
+          <a:bodyPr wrap="square">
+            <a:spAutoFit/>
+          </a:bodyPr>
+          <a:lstStyle/>
+          <a:p>
+            <a:pPr algn="l">
+              <a:spcAft>
+                <a:spcPts val="400"/>
+              </a:spcAft>
+            </a:pPr>
+            <a:r>
+              <a:rPr sz="1300" b="0">
+                <a:solidFill>
+                  <a:srgbClr val="2E6FB7"/>
+                </a:solidFill>
+              </a:rPr>
+              <a:t>Mỗi người = 6,26 nhiệm vụ việc chung + việc riêng của phòng. Cả phòng = số người × nhiệm vụ mỗi người</a:t>
+            </a:r>
+          </a:p>
+        </p:txBody>
+      </p:sp>
+      <p:sp>
+        <p:nvSpPr>
+          <p:cNvPr id="5" name="TextBox 4"/>
+          <p:cNvSpPr txBox="1"/>
+          <p:nvPr/>
+        </p:nvSpPr>
+        <p:spPr>
+          <a:xfrm>
+            <a:off x="11247120" y="6400800"/>
+            <a:ext cx="822960" cy="365760"/>
+          </a:xfrm>
+          <a:prstGeom prst="rect">
+            <a:avLst/>
+          </a:prstGeom>
+          <a:noFill/>
+        </p:spPr>
+        <p:txBody>
+          <a:bodyPr wrap="square">
+            <a:spAutoFit/>
+          </a:bodyPr>
+          <a:lstStyle/>
+          <a:p>
+            <a:pPr algn="r">
+              <a:spcAft>
+                <a:spcPts val="400"/>
+              </a:spcAft>
+            </a:pPr>
+            <a:r>
+              <a:rPr sz="1100" b="0">
+                <a:solidFill>
+                  <a:srgbClr val="555F6B"/>
+                </a:solidFill>
+              </a:rPr>
+              <a:t>D</a:t>
+            </a:r>
+          </a:p>
+        </p:txBody>
+      </p:sp>
+      <p:sp>
+        <p:nvSpPr>
+          <p:cNvPr id="6" name="TextBox 5"/>
+          <p:cNvSpPr txBox="1"/>
+          <p:nvPr/>
+        </p:nvSpPr>
+        <p:spPr>
+          <a:xfrm>
+            <a:off x="457200" y="6400800"/>
+            <a:ext cx="7315200" cy="365760"/>
+          </a:xfrm>
+          <a:prstGeom prst="rect">
+            <a:avLst/>
+          </a:prstGeom>
+          <a:noFill/>
+        </p:spPr>
+        <p:txBody>
+          <a:bodyPr wrap="square">
+            <a:spAutoFit/>
+          </a:bodyPr>
+          <a:lstStyle/>
+          <a:p>
+            <a:pPr algn="l">
+              <a:spcAft>
+                <a:spcPts val="400"/>
+              </a:spcAft>
+            </a:pPr>
+            <a:r>
+              <a:rPr sz="1000" b="0">
+                <a:solidFill>
+                  <a:srgbClr val="555F6B"/>
+                </a:solidFill>
+              </a:rPr>
+              <a:t>G03 · VBot Workplace · GCP asia-southeast1</a:t>
+            </a:r>
+          </a:p>
+        </p:txBody>
+      </p:sp>
+      <p:graphicFrame>
+        <p:nvGraphicFramePr>
+          <p:cNvPr id="7" name="Table 6"/>
+          <p:cNvGraphicFramePr>
+            <a:graphicFrameLocks noGrp="1"/>
+          </p:cNvGraphicFramePr>
+          <p:nvPr/>
+        </p:nvGraphicFramePr>
+        <p:xfrm>
+          <a:off x="457200" y="1325880"/>
+          <a:ext cx="11247120" cy="4297679"/>
+        </p:xfrm>
+        <a:graphic>
+          <a:graphicData uri="http://schemas.openxmlformats.org/drawingml/2006/table">
+            <a:tbl>
+              <a:tblPr firstRow="1" bandRow="1">
+                <a:tableStyleId>{5C22544A-7EE6-4342-B048-85BDC9FD1C3A}</a:tableStyleId>
+              </a:tblPr>
+              <a:tblGrid>
+                <a:gridCol w="1828800"/>
+                <a:gridCol w="1920240"/>
+                <a:gridCol w="4206240"/>
+                <a:gridCol w="1554480"/>
+                <a:gridCol w="1737360"/>
+              </a:tblGrid>
+              <a:tr h="429767">
+                <a:tc>
+                  <a:txBody>
+                    <a:bodyPr/>
+                    <a:lstStyle/>
+                    <a:p>
+                      <a:r>
+                        <a:rPr sz="1000" b="1">
+                          <a:solidFill>
+                            <a:srgbClr val="FFFFFF"/>
+                          </a:solidFill>
+                        </a:rPr>
+                        <a:t>Phòng ban (số người)</a:t>
+                      </a:r>
+                    </a:p>
+                  </a:txBody>
+                  <a:tcPr marL="45720" marR="45720" marT="18288" marB="18288">
+                    <a:solidFill>
+                      <a:srgbClr val="2E6FB7"/>
+                    </a:solidFill>
+                  </a:tcPr>
+                </a:tc>
+                <a:tc>
+                  <a:txBody>
+                    <a:bodyPr/>
+                    <a:lstStyle/>
+                    <a:p>
+                      <a:r>
+                        <a:rPr sz="1000" b="1">
+                          <a:solidFill>
+                            <a:srgbClr val="FFFFFF"/>
+                          </a:solidFill>
+                        </a:rPr>
+                        <a:t>Phòng làm gì</a:t>
+                      </a:r>
+                    </a:p>
+                  </a:txBody>
+                  <a:tcPr marL="45720" marR="45720" marT="18288" marB="18288">
+                    <a:solidFill>
+                      <a:srgbClr val="2E6FB7"/>
+                    </a:solidFill>
+                  </a:tcPr>
+                </a:tc>
+                <a:tc>
+                  <a:txBody>
+                    <a:bodyPr/>
+                    <a:lstStyle/>
+                    <a:p>
+                      <a:r>
+                        <a:rPr sz="1000" b="1">
+                          <a:solidFill>
+                            <a:srgbClr val="FFFFFF"/>
+                          </a:solidFill>
+                        </a:rPr>
+                        <a:t>Việc riêng giao AI (nhiệm vụ/người/ngày)</a:t>
+                      </a:r>
+                    </a:p>
+                  </a:txBody>
+                  <a:tcPr marL="45720" marR="45720" marT="18288" marB="18288">
+                    <a:solidFill>
+                      <a:srgbClr val="2E6FB7"/>
+                    </a:solidFill>
+                  </a:tcPr>
+                </a:tc>
+                <a:tc>
+                  <a:txBody>
+                    <a:bodyPr/>
+                    <a:lstStyle/>
+                    <a:p>
+                      <a:r>
+                        <a:rPr sz="1000" b="1">
+                          <a:solidFill>
+                            <a:srgbClr val="FFFFFF"/>
+                          </a:solidFill>
+                        </a:rPr>
+                        <a:t>Mỗi người/ngày</a:t>
+                      </a:r>
+                    </a:p>
+                  </a:txBody>
+                  <a:tcPr marL="45720" marR="45720" marT="18288" marB="18288">
+                    <a:solidFill>
+                      <a:srgbClr val="2E6FB7"/>
+                    </a:solidFill>
+                  </a:tcPr>
+                </a:tc>
+                <a:tc>
+                  <a:txBody>
+                    <a:bodyPr/>
+                    <a:lstStyle/>
+                    <a:p>
+                      <a:r>
+                        <a:rPr sz="1000" b="1">
+                          <a:solidFill>
+                            <a:srgbClr val="FFFFFF"/>
+                          </a:solidFill>
+                        </a:rPr>
+                        <a:t>Cả phòng/ngày</a:t>
+                      </a:r>
+                    </a:p>
+                  </a:txBody>
+                  <a:tcPr marL="45720" marR="45720" marT="18288" marB="18288">
+                    <a:solidFill>
+                      <a:srgbClr val="2E6FB7"/>
+                    </a:solidFill>
+                  </a:tcPr>
+                </a:tc>
+              </a:tr>
+              <a:tr h="429767">
+                <a:tc>
+                  <a:txBody>
+                    <a:bodyPr/>
+                    <a:lstStyle/>
+                    <a:p>
+                      <a:r>
+                        <a:rPr sz="1000" b="0">
+                          <a:solidFill>
+                            <a:srgbClr val="555F6B"/>
+                          </a:solidFill>
+                        </a:rPr>
+                        <a:t>Kinh doanh, CSKH (500)</a:t>
+                      </a:r>
+                    </a:p>
+                  </a:txBody>
+                  <a:tcPr marL="45720" marR="45720" marT="18288" marB="18288">
+                    <a:solidFill>
+                      <a:srgbClr val="EEF3F8"/>
+                    </a:solidFill>
+                  </a:tcPr>
+                </a:tc>
+                <a:tc>
+                  <a:txBody>
+                    <a:bodyPr/>
+                    <a:lstStyle/>
+                    <a:p>
+                      <a:r>
+                        <a:rPr sz="1000" b="0">
+                          <a:solidFill>
+                            <a:srgbClr val="555F6B"/>
+                          </a:solidFill>
+                        </a:rPr>
+                        <a:t>Bán hàng, chăm sóc khách hàng</a:t>
+                      </a:r>
+                    </a:p>
+                  </a:txBody>
+                  <a:tcPr marL="45720" marR="45720" marT="18288" marB="18288">
+                    <a:solidFill>
+                      <a:srgbClr val="EEF3F8"/>
+                    </a:solidFill>
+                  </a:tcPr>
+                </a:tc>
+                <a:tc>
+                  <a:txBody>
+                    <a:bodyPr/>
+                    <a:lstStyle/>
+                    <a:p>
+                      <a:r>
+                        <a:rPr sz="1000" b="0">
+                          <a:solidFill>
+                            <a:srgbClr val="555F6B"/>
+                          </a:solidFill>
+                        </a:rPr>
+                        <a:t>Phân tích doanh số trên Excel 0,10 · agent chuẩn bị gặp khách 0,10 · ảnh cho báo giá 0,03</a:t>
+                      </a:r>
+                    </a:p>
+                  </a:txBody>
+                  <a:tcPr marL="45720" marR="45720" marT="18288" marB="18288">
+                    <a:solidFill>
+                      <a:srgbClr val="EEF3F8"/>
+                    </a:solidFill>
+                  </a:tcPr>
+                </a:tc>
+                <a:tc>
+                  <a:txBody>
+                    <a:bodyPr/>
+                    <a:lstStyle/>
+                    <a:p>
+                      <a:r>
+                        <a:rPr sz="1000" b="0">
+                          <a:solidFill>
+                            <a:srgbClr val="555F6B"/>
+                          </a:solidFill>
+                        </a:rPr>
+                        <a:t>6,26 + 0,23 = 6,49</a:t>
+                      </a:r>
+                    </a:p>
+                  </a:txBody>
+                  <a:tcPr marL="45720" marR="45720" marT="18288" marB="18288">
+                    <a:solidFill>
+                      <a:srgbClr val="EEF3F8"/>
+                    </a:solidFill>
+                  </a:tcPr>
+                </a:tc>
+                <a:tc>
+                  <a:txBody>
+                    <a:bodyPr/>
+                    <a:lstStyle/>
+                    <a:p>
+                      <a:r>
+                        <a:rPr sz="1000" b="0">
+                          <a:solidFill>
+                            <a:srgbClr val="555F6B"/>
+                          </a:solidFill>
+                        </a:rPr>
+                        <a:t>500 × 6,49 = 3.242</a:t>
+                      </a:r>
+                    </a:p>
+                  </a:txBody>
+                  <a:tcPr marL="45720" marR="45720" marT="18288" marB="18288">
+                    <a:solidFill>
+                      <a:srgbClr val="EEF3F8"/>
+                    </a:solidFill>
+                  </a:tcPr>
+                </a:tc>
+              </a:tr>
+              <a:tr h="429767">
+                <a:tc>
+                  <a:txBody>
+                    <a:bodyPr/>
+                    <a:lstStyle/>
+                    <a:p>
+                      <a:r>
+                        <a:rPr sz="1000" b="0">
+                          <a:solidFill>
+                            <a:srgbClr val="555F6B"/>
+                          </a:solidFill>
+                        </a:rPr>
+                        <a:t>Quản lý dự án, vận hành (300)</a:t>
+                      </a:r>
+                    </a:p>
+                  </a:txBody>
+                  <a:tcPr marL="45720" marR="45720" marT="18288" marB="18288">
+                    <a:solidFill>
+                      <a:srgbClr val="FFFFFF"/>
+                    </a:solidFill>
+                  </a:tcPr>
+                </a:tc>
+                <a:tc>
+                  <a:txBody>
+                    <a:bodyPr/>
+                    <a:lstStyle/>
+                    <a:p>
+                      <a:r>
+                        <a:rPr sz="1000" b="0">
+                          <a:solidFill>
+                            <a:srgbClr val="555F6B"/>
+                          </a:solidFill>
+                        </a:rPr>
+                        <a:t>Điều phối dự án, vận hành hằng ngày</a:t>
+                      </a:r>
+                    </a:p>
+                  </a:txBody>
+                  <a:tcPr marL="45720" marR="45720" marT="18288" marB="18288">
+                    <a:solidFill>
+                      <a:srgbClr val="FFFFFF"/>
+                    </a:solidFill>
+                  </a:tcPr>
+                </a:tc>
+                <a:tc>
+                  <a:txBody>
+                    <a:bodyPr/>
+                    <a:lstStyle/>
+                    <a:p>
+                      <a:r>
+                        <a:rPr sz="1000" b="0">
+                          <a:solidFill>
+                            <a:srgbClr val="555F6B"/>
+                          </a:solidFill>
+                        </a:rPr>
+                        <a:t>Agent tạo ticket Jira, trang Confluence 0,90 · phân tích dữ liệu vận hành 0,12 · báo cáo tuần 0,10 · sơ đồ quy trình 0,08</a:t>
+                      </a:r>
+                    </a:p>
+                  </a:txBody>
+                  <a:tcPr marL="45720" marR="45720" marT="18288" marB="18288">
+                    <a:solidFill>
+                      <a:srgbClr val="FFFFFF"/>
+                    </a:solidFill>
+                  </a:tcPr>
+                </a:tc>
+                <a:tc>
+                  <a:txBody>
+                    <a:bodyPr/>
+                    <a:lstStyle/>
+                    <a:p>
+                      <a:r>
+                        <a:rPr sz="1000" b="0">
+                          <a:solidFill>
+                            <a:srgbClr val="555F6B"/>
+                          </a:solidFill>
+                        </a:rPr>
+                        <a:t>6,26 + 1,20 = 7,46</a:t>
+                      </a:r>
+                    </a:p>
+                  </a:txBody>
+                  <a:tcPr marL="45720" marR="45720" marT="18288" marB="18288">
+                    <a:solidFill>
+                      <a:srgbClr val="FFFFFF"/>
+                    </a:solidFill>
+                  </a:tcPr>
+                </a:tc>
+                <a:tc>
+                  <a:txBody>
+                    <a:bodyPr/>
+                    <a:lstStyle/>
+                    <a:p>
+                      <a:r>
+                        <a:rPr sz="1000" b="0">
+                          <a:solidFill>
+                            <a:srgbClr val="555F6B"/>
+                          </a:solidFill>
+                        </a:rPr>
+                        <a:t>300 × 7,46 = 2.237</a:t>
+                      </a:r>
+                    </a:p>
+                  </a:txBody>
+                  <a:tcPr marL="45720" marR="45720" marT="18288" marB="18288">
+                    <a:solidFill>
+                      <a:srgbClr val="FFFFFF"/>
+                    </a:solidFill>
+                  </a:tcPr>
+                </a:tc>
+              </a:tr>
+              <a:tr h="429767">
+                <a:tc>
+                  <a:txBody>
+                    <a:bodyPr/>
+                    <a:lstStyle/>
+                    <a:p>
+                      <a:r>
+                        <a:rPr sz="1000" b="0">
+                          <a:solidFill>
+                            <a:srgbClr val="555F6B"/>
+                          </a:solidFill>
+                        </a:rPr>
+                        <a:t>Kế toán (240)</a:t>
+                      </a:r>
+                    </a:p>
+                  </a:txBody>
+                  <a:tcPr marL="45720" marR="45720" marT="18288" marB="18288">
+                    <a:solidFill>
+                      <a:srgbClr val="EEF3F8"/>
+                    </a:solidFill>
+                  </a:tcPr>
+                </a:tc>
+                <a:tc>
+                  <a:txBody>
+                    <a:bodyPr/>
+                    <a:lstStyle/>
+                    <a:p>
+                      <a:r>
+                        <a:rPr sz="1000" b="0">
+                          <a:solidFill>
+                            <a:srgbClr val="555F6B"/>
+                          </a:solidFill>
+                        </a:rPr>
+                        <a:t>Sổ sách, thanh toán, báo cáo tài chính</a:t>
+                      </a:r>
+                    </a:p>
+                  </a:txBody>
+                  <a:tcPr marL="45720" marR="45720" marT="18288" marB="18288">
+                    <a:solidFill>
+                      <a:srgbClr val="EEF3F8"/>
+                    </a:solidFill>
+                  </a:tcPr>
+                </a:tc>
+                <a:tc>
+                  <a:txBody>
+                    <a:bodyPr/>
+                    <a:lstStyle/>
+                    <a:p>
+                      <a:r>
+                        <a:rPr sz="1000" b="0">
+                          <a:solidFill>
+                            <a:srgbClr val="555F6B"/>
+                          </a:solidFill>
+                        </a:rPr>
+                        <a:t>Phân tích bảng tính tài chính, đối soát 0,80 · tìm hóa đơn bất thường 0,30 · checklist khóa sổ 0,05</a:t>
+                      </a:r>
+                    </a:p>
+                  </a:txBody>
+                  <a:tcPr marL="45720" marR="45720" marT="18288" marB="18288">
+                    <a:solidFill>
+                      <a:srgbClr val="EEF3F8"/>
+                    </a:solidFill>
+                  </a:tcPr>
+                </a:tc>
+                <a:tc>
+                  <a:txBody>
+                    <a:bodyPr/>
+                    <a:lstStyle/>
+                    <a:p>
+                      <a:r>
+                        <a:rPr sz="1000" b="0">
+                          <a:solidFill>
+                            <a:srgbClr val="555F6B"/>
+                          </a:solidFill>
+                        </a:rPr>
+                        <a:t>6,26 + 1,15 = 7,41</a:t>
+                      </a:r>
+                    </a:p>
+                  </a:txBody>
+                  <a:tcPr marL="45720" marR="45720" marT="18288" marB="18288">
+                    <a:solidFill>
+                      <a:srgbClr val="EEF3F8"/>
+                    </a:solidFill>
+                  </a:tcPr>
+                </a:tc>
+                <a:tc>
+                  <a:txBody>
+                    <a:bodyPr/>
+                    <a:lstStyle/>
+                    <a:p>
+                      <a:r>
+                        <a:rPr sz="1000" b="0">
+                          <a:solidFill>
+                            <a:srgbClr val="555F6B"/>
+                          </a:solidFill>
+                        </a:rPr>
+                        <a:t>240 × 7,41 = 1.777</a:t>
+                      </a:r>
+                    </a:p>
+                  </a:txBody>
+                  <a:tcPr marL="45720" marR="45720" marT="18288" marB="18288">
+                    <a:solidFill>
+                      <a:srgbClr val="EEF3F8"/>
+                    </a:solidFill>
+                  </a:tcPr>
+                </a:tc>
+              </a:tr>
+              <a:tr h="429767">
+                <a:tc>
+                  <a:txBody>
+                    <a:bodyPr/>
+                    <a:lstStyle/>
+                    <a:p>
+                      <a:r>
+                        <a:rPr sz="1000" b="0">
+                          <a:solidFill>
+                            <a:srgbClr val="555F6B"/>
+                          </a:solidFill>
+                        </a:rPr>
+                        <a:t>Nhân sự, HC, pháp chế (260)</a:t>
+                      </a:r>
+                    </a:p>
+                  </a:txBody>
+                  <a:tcPr marL="45720" marR="45720" marT="18288" marB="18288">
+                    <a:solidFill>
+                      <a:srgbClr val="FFFFFF"/>
+                    </a:solidFill>
+                  </a:tcPr>
+                </a:tc>
+                <a:tc>
+                  <a:txBody>
+                    <a:bodyPr/>
+                    <a:lstStyle/>
+                    <a:p>
+                      <a:r>
+                        <a:rPr sz="1000" b="0">
+                          <a:solidFill>
+                            <a:srgbClr val="555F6B"/>
+                          </a:solidFill>
+                        </a:rPr>
+                        <a:t>Tuyển dụng, chính sách, hợp đồng</a:t>
+                      </a:r>
+                    </a:p>
+                  </a:txBody>
+                  <a:tcPr marL="45720" marR="45720" marT="18288" marB="18288">
+                    <a:solidFill>
+                      <a:srgbClr val="FFFFFF"/>
+                    </a:solidFill>
+                  </a:tcPr>
+                </a:tc>
+                <a:tc>
+                  <a:txBody>
+                    <a:bodyPr/>
+                    <a:lstStyle/>
+                    <a:p>
+                      <a:r>
+                        <a:rPr sz="1000" b="0">
+                          <a:solidFill>
+                            <a:srgbClr val="555F6B"/>
+                          </a:solidFill>
+                        </a:rPr>
+                        <a:t>Rà soát hợp đồng 0,15 · soạn mô tả công việc, chính sách 0,09 · tổng hợp chấm công 0,08 · đặt lịch phỏng vấn 0,05</a:t>
+                      </a:r>
+                    </a:p>
+                  </a:txBody>
+                  <a:tcPr marL="45720" marR="45720" marT="18288" marB="18288">
+                    <a:solidFill>
+                      <a:srgbClr val="FFFFFF"/>
+                    </a:solidFill>
+                  </a:tcPr>
+                </a:tc>
+                <a:tc>
+                  <a:txBody>
+                    <a:bodyPr/>
+                    <a:lstStyle/>
+                    <a:p>
+                      <a:r>
+                        <a:rPr sz="1000" b="0">
+                          <a:solidFill>
+                            <a:srgbClr val="555F6B"/>
+                          </a:solidFill>
+                        </a:rPr>
+                        <a:t>6,26 + 0,37 = 6,63</a:t>
+                      </a:r>
+                    </a:p>
+                  </a:txBody>
+                  <a:tcPr marL="45720" marR="45720" marT="18288" marB="18288">
+                    <a:solidFill>
+                      <a:srgbClr val="FFFFFF"/>
+                    </a:solidFill>
+                  </a:tcPr>
+                </a:tc>
+                <a:tc>
+                  <a:txBody>
+                    <a:bodyPr/>
+                    <a:lstStyle/>
+                    <a:p>
+                      <a:r>
+                        <a:rPr sz="1000" b="0">
+                          <a:solidFill>
+                            <a:srgbClr val="555F6B"/>
+                          </a:solidFill>
+                        </a:rPr>
+                        <a:t>260 × 6,63 = 1.723</a:t>
+                      </a:r>
+                    </a:p>
+                  </a:txBody>
+                  <a:tcPr marL="45720" marR="45720" marT="18288" marB="18288">
+                    <a:solidFill>
+                      <a:srgbClr val="FFFFFF"/>
+                    </a:solidFill>
+                  </a:tcPr>
+                </a:tc>
+              </a:tr>
+              <a:tr h="429767">
+                <a:tc>
+                  <a:txBody>
+                    <a:bodyPr/>
+                    <a:lstStyle/>
+                    <a:p>
+                      <a:r>
+                        <a:rPr sz="1000" b="0">
+                          <a:solidFill>
+                            <a:srgbClr val="555F6B"/>
+                          </a:solidFill>
+                        </a:rPr>
+                        <a:t>Marketing (200)</a:t>
+                      </a:r>
+                    </a:p>
+                  </a:txBody>
+                  <a:tcPr marL="45720" marR="45720" marT="18288" marB="18288">
+                    <a:solidFill>
+                      <a:srgbClr val="EEF3F8"/>
+                    </a:solidFill>
+                  </a:tcPr>
+                </a:tc>
+                <a:tc>
+                  <a:txBody>
+                    <a:bodyPr/>
+                    <a:lstStyle/>
+                    <a:p>
+                      <a:r>
+                        <a:rPr sz="1000" b="0">
+                          <a:solidFill>
+                            <a:srgbClr val="555F6B"/>
+                          </a:solidFill>
+                        </a:rPr>
+                        <a:t>Nội dung, chiến dịch, hình ảnh</a:t>
+                      </a:r>
+                    </a:p>
+                  </a:txBody>
+                  <a:tcPr marL="45720" marR="45720" marT="18288" marB="18288">
+                    <a:solidFill>
+                      <a:srgbClr val="EEF3F8"/>
+                    </a:solidFill>
+                  </a:tcPr>
+                </a:tc>
+                <a:tc>
+                  <a:txBody>
+                    <a:bodyPr/>
+                    <a:lstStyle/>
+                    <a:p>
+                      <a:r>
+                        <a:rPr sz="1000" b="0">
+                          <a:solidFill>
+                            <a:srgbClr val="555F6B"/>
+                          </a:solidFill>
+                        </a:rPr>
+                        <a:t>Viết bài đăng, thông cáo 0,80 · ảnh, banner 0,25 · số liệu chiến dịch 0,12 · cập nhật kế hoạch 0,08</a:t>
+                      </a:r>
+                    </a:p>
+                  </a:txBody>
+                  <a:tcPr marL="45720" marR="45720" marT="18288" marB="18288">
+                    <a:solidFill>
+                      <a:srgbClr val="EEF3F8"/>
+                    </a:solidFill>
+                  </a:tcPr>
+                </a:tc>
+                <a:tc>
+                  <a:txBody>
+                    <a:bodyPr/>
+                    <a:lstStyle/>
+                    <a:p>
+                      <a:r>
+                        <a:rPr sz="1000" b="0">
+                          <a:solidFill>
+                            <a:srgbClr val="555F6B"/>
+                          </a:solidFill>
+                        </a:rPr>
+                        <a:t>6,26 + 1,24 = 7,50</a:t>
+                      </a:r>
+                    </a:p>
+                  </a:txBody>
+                  <a:tcPr marL="45720" marR="45720" marT="18288" marB="18288">
+                    <a:solidFill>
+                      <a:srgbClr val="EEF3F8"/>
+                    </a:solidFill>
+                  </a:tcPr>
+                </a:tc>
+                <a:tc>
+                  <a:txBody>
+                    <a:bodyPr/>
+                    <a:lstStyle/>
+                    <a:p>
+                      <a:r>
+                        <a:rPr sz="1000" b="0">
+                          <a:solidFill>
+                            <a:srgbClr val="555F6B"/>
+                          </a:solidFill>
+                        </a:rPr>
+                        <a:t>200 × 7,50 = 1.500</a:t>
+                      </a:r>
+                    </a:p>
+                  </a:txBody>
+                  <a:tcPr marL="45720" marR="45720" marT="18288" marB="18288">
+                    <a:solidFill>
+                      <a:srgbClr val="EEF3F8"/>
+                    </a:solidFill>
+                  </a:tcPr>
+                </a:tc>
+              </a:tr>
+              <a:tr h="429767">
+                <a:tc>
+                  <a:txBody>
+                    <a:bodyPr/>
+                    <a:lstStyle/>
+                    <a:p>
+                      <a:r>
+                        <a:rPr sz="1000" b="0">
+                          <a:solidFill>
+                            <a:srgbClr val="555F6B"/>
+                          </a:solidFill>
+                        </a:rPr>
+                        <a:t>IT (200)</a:t>
+                      </a:r>
+                    </a:p>
+                  </a:txBody>
+                  <a:tcPr marL="45720" marR="45720" marT="18288" marB="18288">
+                    <a:solidFill>
+                      <a:srgbClr val="FFFFFF"/>
+                    </a:solidFill>
+                  </a:tcPr>
+                </a:tc>
+                <a:tc>
+                  <a:txBody>
+                    <a:bodyPr/>
+                    <a:lstStyle/>
+                    <a:p>
+                      <a:r>
+                        <a:rPr sz="1000" b="0">
+                          <a:solidFill>
+                            <a:srgbClr val="555F6B"/>
+                          </a:solidFill>
+                        </a:rPr>
+                        <a:t>Phát triển phần mềm, hạ tầng, hỗ trợ</a:t>
+                      </a:r>
+                    </a:p>
+                  </a:txBody>
+                  <a:tcPr marL="45720" marR="45720" marT="18288" marB="18288">
+                    <a:solidFill>
+                      <a:srgbClr val="FFFFFF"/>
+                    </a:solidFill>
+                  </a:tcPr>
+                </a:tc>
+                <a:tc>
+                  <a:txBody>
+                    <a:bodyPr/>
+                    <a:lstStyle/>
+                    <a:p>
+                      <a:r>
+                        <a:rPr sz="1000" b="0">
+                          <a:solidFill>
+                            <a:srgbClr val="555F6B"/>
+                          </a:solidFill>
+                        </a:rPr>
+                        <a:t>Tra cứu, phân loại ticket hỗ trợ 0,60 · agent cập nhật Jira, runbook 0,20 · viết code 0,16 · review code 0,08 · sơ đồ 0,05</a:t>
+                      </a:r>
+                    </a:p>
+                  </a:txBody>
+                  <a:tcPr marL="45720" marR="45720" marT="18288" marB="18288">
+                    <a:solidFill>
+                      <a:srgbClr val="FFFFFF"/>
+                    </a:solidFill>
+                  </a:tcPr>
+                </a:tc>
+                <a:tc>
+                  <a:txBody>
+                    <a:bodyPr/>
+                    <a:lstStyle/>
+                    <a:p>
+                      <a:r>
+                        <a:rPr sz="1000" b="0">
+                          <a:solidFill>
+                            <a:srgbClr val="555F6B"/>
+                          </a:solidFill>
+                        </a:rPr>
+                        <a:t>6,26 + 1,09 = 7,35</a:t>
+                      </a:r>
+                    </a:p>
+                  </a:txBody>
+                  <a:tcPr marL="45720" marR="45720" marT="18288" marB="18288">
+                    <a:solidFill>
+                      <a:srgbClr val="FFFFFF"/>
+                    </a:solidFill>
+                  </a:tcPr>
+                </a:tc>
+                <a:tc>
+                  <a:txBody>
+                    <a:bodyPr/>
+                    <a:lstStyle/>
+                    <a:p>
+                      <a:r>
+                        <a:rPr sz="1000" b="0">
+                          <a:solidFill>
+                            <a:srgbClr val="555F6B"/>
+                          </a:solidFill>
+                        </a:rPr>
+                        <a:t>200 × 7,35 = 1.469</a:t>
+                      </a:r>
+                    </a:p>
+                  </a:txBody>
+                  <a:tcPr marL="45720" marR="45720" marT="18288" marB="18288">
+                    <a:solidFill>
+                      <a:srgbClr val="FFFFFF"/>
+                    </a:solidFill>
+                  </a:tcPr>
+                </a:tc>
+              </a:tr>
+              <a:tr h="429767">
+                <a:tc>
+                  <a:txBody>
+                    <a:bodyPr/>
+                    <a:lstStyle/>
+                    <a:p>
+                      <a:r>
+                        <a:rPr sz="1000" b="0">
+                          <a:solidFill>
+                            <a:srgbClr val="555F6B"/>
+                          </a:solidFill>
+                        </a:rPr>
+                        <a:t>Mua hàng, SCM (200)</a:t>
+                      </a:r>
+                    </a:p>
+                  </a:txBody>
+                  <a:tcPr marL="45720" marR="45720" marT="18288" marB="18288">
+                    <a:solidFill>
+                      <a:srgbClr val="EEF3F8"/>
+                    </a:solidFill>
+                  </a:tcPr>
+                </a:tc>
+                <a:tc>
+                  <a:txBody>
+                    <a:bodyPr/>
+                    <a:lstStyle/>
+                    <a:p>
+                      <a:r>
+                        <a:rPr sz="1000" b="0">
+                          <a:solidFill>
+                            <a:srgbClr val="555F6B"/>
+                          </a:solidFill>
+                        </a:rPr>
+                        <a:t>Nhà cung cấp, đặt hàng, giao hàng</a:t>
+                      </a:r>
+                    </a:p>
+                  </a:txBody>
+                  <a:tcPr marL="45720" marR="45720" marT="18288" marB="18288">
+                    <a:solidFill>
+                      <a:srgbClr val="EEF3F8"/>
+                    </a:solidFill>
+                  </a:tcPr>
+                </a:tc>
+                <a:tc>
+                  <a:txBody>
+                    <a:bodyPr/>
+                    <a:lstStyle/>
+                    <a:p>
+                      <a:r>
+                        <a:rPr sz="1000" b="0">
+                          <a:solidFill>
+                            <a:srgbClr val="555F6B"/>
+                          </a:solidFill>
+                        </a:rPr>
+                        <a:t>So sánh báo giá nhà cung cấp 0,56 · agent cập nhật lịch giao hàng 0,05</a:t>
+                      </a:r>
+                    </a:p>
+                  </a:txBody>
+                  <a:tcPr marL="45720" marR="45720" marT="18288" marB="18288">
+                    <a:solidFill>
+                      <a:srgbClr val="EEF3F8"/>
+                    </a:solidFill>
+                  </a:tcPr>
+                </a:tc>
+                <a:tc>
+                  <a:txBody>
+                    <a:bodyPr/>
+                    <a:lstStyle/>
+                    <a:p>
+                      <a:r>
+                        <a:rPr sz="1000" b="0">
+                          <a:solidFill>
+                            <a:srgbClr val="555F6B"/>
+                          </a:solidFill>
+                        </a:rPr>
+                        <a:t>6,26 + 0,61 = 6,87</a:t>
+                      </a:r>
+                    </a:p>
+                  </a:txBody>
+                  <a:tcPr marL="45720" marR="45720" marT="18288" marB="18288">
+                    <a:solidFill>
+                      <a:srgbClr val="EEF3F8"/>
+                    </a:solidFill>
+                  </a:tcPr>
+                </a:tc>
+                <a:tc>
+                  <a:txBody>
+                    <a:bodyPr/>
+                    <a:lstStyle/>
+                    <a:p>
+                      <a:r>
+                        <a:rPr sz="1000" b="0">
+                          <a:solidFill>
+                            <a:srgbClr val="555F6B"/>
+                          </a:solidFill>
+                        </a:rPr>
+                        <a:t>200 × 6,87 = 1.373</a:t>
+                      </a:r>
+                    </a:p>
+                  </a:txBody>
+                  <a:tcPr marL="45720" marR="45720" marT="18288" marB="18288">
+                    <a:solidFill>
+                      <a:srgbClr val="EEF3F8"/>
+                    </a:solidFill>
+                  </a:tcPr>
+                </a:tc>
+              </a:tr>
+              <a:tr h="429767">
+                <a:tc>
+                  <a:txBody>
+                    <a:bodyPr/>
+                    <a:lstStyle/>
+                    <a:p>
+                      <a:r>
+                        <a:rPr sz="1000" b="0">
+                          <a:solidFill>
+                            <a:srgbClr val="555F6B"/>
+                          </a:solidFill>
+                        </a:rPr>
+                        <a:t>Lãnh đạo, trợ lý (100)</a:t>
+                      </a:r>
+                    </a:p>
+                  </a:txBody>
+                  <a:tcPr marL="45720" marR="45720" marT="18288" marB="18288">
+                    <a:solidFill>
+                      <a:srgbClr val="FFFFFF"/>
+                    </a:solidFill>
+                  </a:tcPr>
+                </a:tc>
+                <a:tc>
+                  <a:txBody>
+                    <a:bodyPr/>
+                    <a:lstStyle/>
+                    <a:p>
+                      <a:r>
+                        <a:rPr sz="1000" b="0">
+                          <a:solidFill>
+                            <a:srgbClr val="555F6B"/>
+                          </a:solidFill>
+                        </a:rPr>
+                        <a:t>Ra quyết định, họp nhiều</a:t>
+                      </a:r>
+                    </a:p>
+                  </a:txBody>
+                  <a:tcPr marL="45720" marR="45720" marT="18288" marB="18288">
+                    <a:solidFill>
+                      <a:srgbClr val="FFFFFF"/>
+                    </a:solidFill>
+                  </a:tcPr>
+                </a:tc>
+                <a:tc>
+                  <a:txBody>
+                    <a:bodyPr/>
+                    <a:lstStyle/>
+                    <a:p>
+                      <a:r>
+                        <a:rPr sz="1000" b="0">
+                          <a:solidFill>
+                            <a:srgbClr val="555F6B"/>
+                          </a:solidFill>
+                        </a:rPr>
+                        <a:t>Họp 4,6 cuộc/ngày nên biên bản họp là 0,92 thay vì 0,40 · agent chuẩn bị briefing 0,92 · sắp lịch 0,20 · slide 0,10</a:t>
+                      </a:r>
+                    </a:p>
+                  </a:txBody>
+                  <a:tcPr marL="45720" marR="45720" marT="18288" marB="18288">
+                    <a:solidFill>
+                      <a:srgbClr val="FFFFFF"/>
+                    </a:solidFill>
+                  </a:tcPr>
+                </a:tc>
+                <a:tc>
+                  <a:txBody>
+                    <a:bodyPr/>
+                    <a:lstStyle/>
+                    <a:p>
+                      <a:r>
+                        <a:rPr sz="1000" b="0">
+                          <a:solidFill>
+                            <a:srgbClr val="555F6B"/>
+                          </a:solidFill>
+                        </a:rPr>
+                        <a:t>6,26 + 1,74 = 8,00</a:t>
+                      </a:r>
+                    </a:p>
+                  </a:txBody>
+                  <a:tcPr marL="45720" marR="45720" marT="18288" marB="18288">
+                    <a:solidFill>
+                      <a:srgbClr val="FFFFFF"/>
+                    </a:solidFill>
+                  </a:tcPr>
+                </a:tc>
+                <a:tc>
+                  <a:txBody>
+                    <a:bodyPr/>
+                    <a:lstStyle/>
+                    <a:p>
+                      <a:r>
+                        <a:rPr sz="1000" b="0">
+                          <a:solidFill>
+                            <a:srgbClr val="555F6B"/>
+                          </a:solidFill>
+                        </a:rPr>
+                        <a:t>100 × 8,00 = 800</a:t>
+                      </a:r>
+                    </a:p>
+                  </a:txBody>
+                  <a:tcPr marL="45720" marR="45720" marT="18288" marB="18288">
+                    <a:solidFill>
+                      <a:srgbClr val="FFFFFF"/>
+                    </a:solidFill>
+                  </a:tcPr>
+                </a:tc>
+              </a:tr>
+              <a:tr h="429776">
+                <a:tc>
+                  <a:txBody>
+                    <a:bodyPr/>
+                    <a:lstStyle/>
+                    <a:p>
+                      <a:r>
+                        <a:rPr sz="1000" b="0">
+                          <a:solidFill>
+                            <a:srgbClr val="555F6B"/>
+                          </a:solidFill>
+                        </a:rPr>
+                        <a:t>Toàn công ty (2.000)</a:t>
+                      </a:r>
+                    </a:p>
+                  </a:txBody>
+                  <a:tcPr marL="45720" marR="45720" marT="18288" marB="18288">
+                    <a:solidFill>
+                      <a:srgbClr val="EEF3F8"/>
+                    </a:solidFill>
+                  </a:tcPr>
+                </a:tc>
+                <a:tc>
+                  <a:txBody>
+                    <a:bodyPr/>
+                    <a:lstStyle/>
+                    <a:p/>
+                  </a:txBody>
+                  <a:tcPr marL="45720" marR="45720" marT="18288" marB="18288">
+                    <a:solidFill>
+                      <a:srgbClr val="EEF3F8"/>
+                    </a:solidFill>
+                  </a:tcPr>
+                </a:tc>
+                <a:tc>
+                  <a:txBody>
+                    <a:bodyPr/>
+                    <a:lstStyle/>
+                    <a:p/>
+                  </a:txBody>
+                  <a:tcPr marL="45720" marR="45720" marT="18288" marB="18288">
+                    <a:solidFill>
+                      <a:srgbClr val="EEF3F8"/>
+                    </a:solidFill>
+                  </a:tcPr>
+                </a:tc>
+                <a:tc>
+                  <a:txBody>
+                    <a:bodyPr/>
+                    <a:lstStyle/>
+                    <a:p>
+                      <a:r>
+                        <a:rPr sz="1000" b="0">
+                          <a:solidFill>
+                            <a:srgbClr val="555F6B"/>
+                          </a:solidFill>
+                        </a:rPr>
+                        <a:t>7,06 (trung bình)</a:t>
+                      </a:r>
+                    </a:p>
+                  </a:txBody>
+                  <a:tcPr marL="45720" marR="45720" marT="18288" marB="18288">
+                    <a:solidFill>
+                      <a:srgbClr val="EEF3F8"/>
+                    </a:solidFill>
+                  </a:tcPr>
+                </a:tc>
+                <a:tc>
+                  <a:txBody>
+                    <a:bodyPr/>
+                    <a:lstStyle/>
+                    <a:p>
+                      <a:r>
+                        <a:rPr sz="1000" b="0">
+                          <a:solidFill>
+                            <a:srgbClr val="555F6B"/>
+                          </a:solidFill>
+                        </a:rPr>
+                        <a:t>14.120</a:t>
+                      </a:r>
+                    </a:p>
+                  </a:txBody>
+                  <a:tcPr marL="45720" marR="45720" marT="18288" marB="18288">
+                    <a:solidFill>
+                      <a:srgbClr val="EEF3F8"/>
+                    </a:solidFill>
+                  </a:tcPr>
+                </a:tc>
+              </a:tr>
+            </a:tbl>
+          </a:graphicData>
+        </a:graphic>
+      </p:graphicFrame>
+      <p:sp>
+        <p:nvSpPr>
+          <p:cNvPr id="8" name="TextBox 7"/>
+          <p:cNvSpPr txBox="1"/>
+          <p:nvPr/>
+        </p:nvSpPr>
+        <p:spPr>
+          <a:xfrm>
+            <a:off x="457200" y="5897880"/>
+            <a:ext cx="11247120" cy="457200"/>
+          </a:xfrm>
+          <a:prstGeom prst="rect">
+            <a:avLst/>
+          </a:prstGeom>
+          <a:noFill/>
+        </p:spPr>
+        <p:txBody>
+          <a:bodyPr wrap="square">
+            <a:spAutoFit/>
+          </a:bodyPr>
+          <a:lstStyle/>
+          <a:p>
+            <a:pPr algn="l">
+              <a:spcAft>
+                <a:spcPts val="400"/>
+              </a:spcAft>
+            </a:pPr>
+            <a:r>
+              <a:rPr sz="1000" b="0">
+                <a:solidFill>
+                  <a:srgbClr val="555F6B"/>
+                </a:solidFill>
+              </a:rPr>
+              <a:t>Số đã làm tròn 2 chữ số. Nguồn khối lượng việc riêng: APQC (hóa đơn, đơn mua hàng), Graphite (code), MetricNet (ticket IT), HBR 2017 (giờ họp của lãnh đạo); còn lại là giả định của nhóm.</a:t>
             </a:r>
           </a:p>
         </p:txBody>

--- a/anh-le/G03_slide.pptx
+++ b/anh-le/G03_slide.pptx
@@ -3674,6 +3674,21 @@
               <a:t>Track 2 · Production Capstone · Nhóm G03</a:t>
             </a:r>
           </a:p>
+          <a:p>
+            <a:pPr algn="l">
+              <a:spcAft>
+                <a:spcPts val="400"/>
+              </a:spcAft>
+            </a:pPr>
+            <a:r>
+              <a:rPr sz="1800" b="0">
+                <a:solidFill>
+                  <a:srgbClr val="BFD7EA"/>
+                </a:solidFill>
+              </a:rPr>
+              <a:t>Lê Tuấn Anh · MSSV 2A202602952</a:t>
+            </a:r>
+          </a:p>
         </p:txBody>
       </p:sp>
     </p:spTree>
@@ -3884,7 +3899,7 @@
                   <a:srgbClr val="555F6B"/>
                 </a:solidFill>
               </a:rPr>
-              <a:t>G03 · VBot Workplace · GCP asia-southeast1</a:t>
+              <a:t>G03 · VBot Workplace · Lê Tuấn Anh · MSSV 2A202602952</a:t>
             </a:r>
           </a:p>
         </p:txBody>
@@ -4471,7 +4486,7 @@
                   <a:srgbClr val="555F6B"/>
                 </a:solidFill>
               </a:rPr>
-              <a:t>G03 · VBot Workplace · GCP asia-southeast1</a:t>
+              <a:t>G03 · VBot Workplace · Lê Tuấn Anh · MSSV 2A202602952</a:t>
             </a:r>
           </a:p>
         </p:txBody>
@@ -4978,7 +4993,7 @@
                   <a:srgbClr val="555F6B"/>
                 </a:solidFill>
               </a:rPr>
-              <a:t>G03 · VBot Workplace · GCP asia-southeast1</a:t>
+              <a:t>G03 · VBot Workplace · Lê Tuấn Anh · MSSV 2A202602952</a:t>
             </a:r>
           </a:p>
         </p:txBody>
@@ -5881,7 +5896,7 @@
                   <a:srgbClr val="555F6B"/>
                 </a:solidFill>
               </a:rPr>
-              <a:t>G03 · VBot Workplace · GCP asia-southeast1</a:t>
+              <a:t>G03 · VBot Workplace · Lê Tuấn Anh · MSSV 2A202602952</a:t>
             </a:r>
           </a:p>
         </p:txBody>
@@ -6566,7 +6581,7 @@
                   <a:srgbClr val="555F6B"/>
                 </a:solidFill>
               </a:rPr>
-              <a:t>G03 · VBot Workplace · GCP asia-southeast1</a:t>
+              <a:t>G03 · VBot Workplace · Lê Tuấn Anh · MSSV 2A202602952</a:t>
             </a:r>
           </a:p>
         </p:txBody>
@@ -7595,7 +7610,7 @@
                   <a:srgbClr val="555F6B"/>
                 </a:solidFill>
               </a:rPr>
-              <a:t>G03 · VBot Workplace · GCP asia-southeast1</a:t>
+              <a:t>G03 · VBot Workplace · Lê Tuấn Anh · MSSV 2A202602952</a:t>
             </a:r>
           </a:p>
         </p:txBody>
@@ -8473,7 +8488,7 @@
                   <a:srgbClr val="555F6B"/>
                 </a:solidFill>
               </a:rPr>
-              <a:t>G03 · VBot Workplace · GCP asia-southeast1</a:t>
+              <a:t>G03 · VBot Workplace · Lê Tuấn Anh · MSSV 2A202602952</a:t>
             </a:r>
           </a:p>
         </p:txBody>
@@ -9364,7 +9379,7 @@
                   <a:srgbClr val="555F6B"/>
                 </a:solidFill>
               </a:rPr>
-              <a:t>G03 · VBot Workplace · GCP asia-southeast1</a:t>
+              <a:t>G03 · VBot Workplace · Lê Tuấn Anh · MSSV 2A202602952</a:t>
             </a:r>
           </a:p>
         </p:txBody>
@@ -10603,7 +10618,7 @@
                   <a:srgbClr val="555F6B"/>
                 </a:solidFill>
               </a:rPr>
-              <a:t>G03 · VBot Workplace · GCP asia-southeast1</a:t>
+              <a:t>G03 · VBot Workplace · Lê Tuấn Anh · MSSV 2A202602952</a:t>
             </a:r>
           </a:p>
         </p:txBody>
@@ -10974,7 +10989,7 @@
                   <a:srgbClr val="555F6B"/>
                 </a:solidFill>
               </a:rPr>
-              <a:t>G03 · VBot Workplace · GCP asia-southeast1</a:t>
+              <a:t>G03 · VBot Workplace · Lê Tuấn Anh · MSSV 2A202602952</a:t>
             </a:r>
           </a:p>
         </p:txBody>
@@ -12145,7 +12160,7 @@
                   <a:srgbClr val="555F6B"/>
                 </a:solidFill>
               </a:rPr>
-              <a:t>G03 · VBot Workplace · GCP asia-southeast1</a:t>
+              <a:t>G03 · VBot Workplace · Lê Tuấn Anh · MSSV 2A202602952</a:t>
             </a:r>
           </a:p>
         </p:txBody>
@@ -14252,7 +14267,7 @@
                   <a:srgbClr val="555F6B"/>
                 </a:solidFill>
               </a:rPr>
-              <a:t>G03 · VBot Workplace · GCP asia-southeast1</a:t>
+              <a:t>G03 · VBot Workplace · Lê Tuấn Anh · MSSV 2A202602952</a:t>
             </a:r>
           </a:p>
         </p:txBody>
@@ -15584,7 +15599,7 @@
                   <a:srgbClr val="555F6B"/>
                 </a:solidFill>
               </a:rPr>
-              <a:t>G03 · VBot Workplace · GCP asia-southeast1</a:t>
+              <a:t>G03 · VBot Workplace · Lê Tuấn Anh · MSSV 2A202602952</a:t>
             </a:r>
           </a:p>
         </p:txBody>
@@ -16397,7 +16412,7 @@
                   <a:srgbClr val="555F6B"/>
                 </a:solidFill>
               </a:rPr>
-              <a:t>G03 · VBot Workplace · GCP asia-southeast1</a:t>
+              <a:t>G03 · VBot Workplace · Lê Tuấn Anh · MSSV 2A202602952</a:t>
             </a:r>
           </a:p>
         </p:txBody>
@@ -18311,7 +18326,7 @@
                   <a:srgbClr val="555F6B"/>
                 </a:solidFill>
               </a:rPr>
-              <a:t>G03 · VBot Workplace · GCP asia-southeast1</a:t>
+              <a:t>G03 · VBot Workplace · Lê Tuấn Anh · MSSV 2A202602952</a:t>
             </a:r>
           </a:p>
         </p:txBody>
@@ -18727,7 +18742,7 @@
                   <a:srgbClr val="555F6B"/>
                 </a:solidFill>
               </a:rPr>
-              <a:t>G03 · VBot Workplace · GCP asia-southeast1</a:t>
+              <a:t>G03 · VBot Workplace · Lê Tuấn Anh · MSSV 2A202602952</a:t>
             </a:r>
           </a:p>
         </p:txBody>
@@ -20085,7 +20100,7 @@
                   <a:srgbClr val="555F6B"/>
                 </a:solidFill>
               </a:rPr>
-              <a:t>G03 · VBot Workplace · GCP asia-southeast1</a:t>
+              <a:t>G03 · VBot Workplace · Lê Tuấn Anh · MSSV 2A202602952</a:t>
             </a:r>
           </a:p>
         </p:txBody>
@@ -21052,7 +21067,7 @@
                   <a:srgbClr val="555F6B"/>
                 </a:solidFill>
               </a:rPr>
-              <a:t>G03 · VBot Workplace · GCP asia-southeast1</a:t>
+              <a:t>G03 · VBot Workplace · Lê Tuấn Anh · MSSV 2A202602952</a:t>
             </a:r>
           </a:p>
         </p:txBody>
@@ -21800,7 +21815,7 @@
                   <a:srgbClr val="555F6B"/>
                 </a:solidFill>
               </a:rPr>
-              <a:t>G03 · VBot Workplace · GCP asia-southeast1</a:t>
+              <a:t>G03 · VBot Workplace · Lê Tuấn Anh · MSSV 2A202602952</a:t>
             </a:r>
           </a:p>
         </p:txBody>

--- a/anh-le/G03_slide.pptx
+++ b/anh-le/G03_slide.pptx
@@ -3555,7 +3555,7 @@
         </p:nvSpPr>
         <p:spPr>
           <a:xfrm>
-            <a:off x="731520" y="1828800"/>
+            <a:off x="731520" y="1280160"/>
             <a:ext cx="10515600" cy="1097280"/>
           </a:xfrm>
           <a:prstGeom prst="rect">
@@ -3593,7 +3593,7 @@
         </p:nvSpPr>
         <p:spPr>
           <a:xfrm>
-            <a:off x="731520" y="2834640"/>
+            <a:off x="731520" y="2286000"/>
             <a:ext cx="10515600" cy="731520"/>
           </a:xfrm>
           <a:prstGeom prst="rect">
@@ -3631,7 +3631,7 @@
         </p:nvSpPr>
         <p:spPr>
           <a:xfrm>
-            <a:off x="731520" y="3931920"/>
+            <a:off x="731520" y="3291840"/>
             <a:ext cx="10515600" cy="1097280"/>
           </a:xfrm>
           <a:prstGeom prst="rect">
@@ -3674,6 +3674,29 @@
               <a:t>Track 2 · Production Capstone · Nhóm G03</a:t>
             </a:r>
           </a:p>
+        </p:txBody>
+      </p:sp>
+      <p:sp>
+        <p:nvSpPr>
+          <p:cNvPr id="6" name="TextBox 5"/>
+          <p:cNvSpPr txBox="1"/>
+          <p:nvPr/>
+        </p:nvSpPr>
+        <p:spPr>
+          <a:xfrm>
+            <a:off x="731520" y="4389120"/>
+            <a:ext cx="10515600" cy="1645920"/>
+          </a:xfrm>
+          <a:prstGeom prst="rect">
+            <a:avLst/>
+          </a:prstGeom>
+          <a:noFill/>
+        </p:spPr>
+        <p:txBody>
+          <a:bodyPr wrap="square">
+            <a:spAutoFit/>
+          </a:bodyPr>
+          <a:lstStyle/>
           <a:p>
             <a:pPr algn="l">
               <a:spcAft>
@@ -3681,12 +3704,57 @@
               </a:spcAft>
             </a:pPr>
             <a:r>
-              <a:rPr sz="1800" b="0">
-                <a:solidFill>
-                  <a:srgbClr val="BFD7EA"/>
+              <a:rPr sz="1600" b="1">
+                <a:solidFill>
+                  <a:srgbClr val="FFFFFF"/>
+                </a:solidFill>
+              </a:rPr>
+              <a:t>Thành viên</a:t>
+            </a:r>
+          </a:p>
+          <a:p>
+            <a:pPr algn="l">
+              <a:spcAft>
+                <a:spcPts val="400"/>
+              </a:spcAft>
+            </a:pPr>
+            <a:r>
+              <a:rPr sz="1600" b="0">
+                <a:solidFill>
+                  <a:srgbClr val="FFFFFF"/>
                 </a:solidFill>
               </a:rPr>
               <a:t>Lê Tuấn Anh · MSSV 2A202602952</a:t>
+            </a:r>
+          </a:p>
+          <a:p>
+            <a:pPr algn="l">
+              <a:spcAft>
+                <a:spcPts val="400"/>
+              </a:spcAft>
+            </a:pPr>
+            <a:r>
+              <a:rPr sz="1600" b="0">
+                <a:solidFill>
+                  <a:srgbClr val="FFFFFF"/>
+                </a:solidFill>
+              </a:rPr>
+              <a:t>Hồ Thái Hòa · MSSV 2A202602915</a:t>
+            </a:r>
+          </a:p>
+          <a:p>
+            <a:pPr algn="l">
+              <a:spcAft>
+                <a:spcPts val="400"/>
+              </a:spcAft>
+            </a:pPr>
+            <a:r>
+              <a:rPr sz="1600" b="0">
+                <a:solidFill>
+                  <a:srgbClr val="FFFFFF"/>
+                </a:solidFill>
+              </a:rPr>
+              <a:t>Nguyễn Đình Lâm Phúc · MSSV 2A202602986</a:t>
             </a:r>
           </a:p>
         </p:txBody>
@@ -3875,7 +3943,7 @@
         <p:spPr>
           <a:xfrm>
             <a:off x="457200" y="6400800"/>
-            <a:ext cx="7315200" cy="365760"/>
+            <a:ext cx="9144000" cy="365760"/>
           </a:xfrm>
           <a:prstGeom prst="rect">
             <a:avLst/>
@@ -3899,7 +3967,7 @@
                   <a:srgbClr val="555F6B"/>
                 </a:solidFill>
               </a:rPr>
-              <a:t>G03 · VBot Workplace · Lê Tuấn Anh · MSSV 2A202602952</a:t>
+              <a:t>G03 · Lê Tuấn Anh (2A202602952) · Hồ Thái Hòa (2A202602915) · Nguyễn Đình Lâm Phúc (2A202602986)</a:t>
             </a:r>
           </a:p>
         </p:txBody>
@@ -4462,7 +4530,7 @@
         <p:spPr>
           <a:xfrm>
             <a:off x="457200" y="6400800"/>
-            <a:ext cx="7315200" cy="365760"/>
+            <a:ext cx="9144000" cy="365760"/>
           </a:xfrm>
           <a:prstGeom prst="rect">
             <a:avLst/>
@@ -4486,7 +4554,7 @@
                   <a:srgbClr val="555F6B"/>
                 </a:solidFill>
               </a:rPr>
-              <a:t>G03 · VBot Workplace · Lê Tuấn Anh · MSSV 2A202602952</a:t>
+              <a:t>G03 · Lê Tuấn Anh (2A202602952) · Hồ Thái Hòa (2A202602915) · Nguyễn Đình Lâm Phúc (2A202602986)</a:t>
             </a:r>
           </a:p>
         </p:txBody>
@@ -4969,7 +5037,7 @@
         <p:spPr>
           <a:xfrm>
             <a:off x="457200" y="6400800"/>
-            <a:ext cx="7315200" cy="365760"/>
+            <a:ext cx="9144000" cy="365760"/>
           </a:xfrm>
           <a:prstGeom prst="rect">
             <a:avLst/>
@@ -4993,7 +5061,7 @@
                   <a:srgbClr val="555F6B"/>
                 </a:solidFill>
               </a:rPr>
-              <a:t>G03 · VBot Workplace · Lê Tuấn Anh · MSSV 2A202602952</a:t>
+              <a:t>G03 · Lê Tuấn Anh (2A202602952) · Hồ Thái Hòa (2A202602915) · Nguyễn Đình Lâm Phúc (2A202602986)</a:t>
             </a:r>
           </a:p>
         </p:txBody>
@@ -5872,7 +5940,7 @@
         <p:spPr>
           <a:xfrm>
             <a:off x="457200" y="6400800"/>
-            <a:ext cx="7315200" cy="365760"/>
+            <a:ext cx="9144000" cy="365760"/>
           </a:xfrm>
           <a:prstGeom prst="rect">
             <a:avLst/>
@@ -5896,7 +5964,7 @@
                   <a:srgbClr val="555F6B"/>
                 </a:solidFill>
               </a:rPr>
-              <a:t>G03 · VBot Workplace · Lê Tuấn Anh · MSSV 2A202602952</a:t>
+              <a:t>G03 · Lê Tuấn Anh (2A202602952) · Hồ Thái Hòa (2A202602915) · Nguyễn Đình Lâm Phúc (2A202602986)</a:t>
             </a:r>
           </a:p>
         </p:txBody>
@@ -6557,7 +6625,7 @@
         <p:spPr>
           <a:xfrm>
             <a:off x="457200" y="6400800"/>
-            <a:ext cx="7315200" cy="365760"/>
+            <a:ext cx="9144000" cy="365760"/>
           </a:xfrm>
           <a:prstGeom prst="rect">
             <a:avLst/>
@@ -6581,7 +6649,7 @@
                   <a:srgbClr val="555F6B"/>
                 </a:solidFill>
               </a:rPr>
-              <a:t>G03 · VBot Workplace · Lê Tuấn Anh · MSSV 2A202602952</a:t>
+              <a:t>G03 · Lê Tuấn Anh (2A202602952) · Hồ Thái Hòa (2A202602915) · Nguyễn Đình Lâm Phúc (2A202602986)</a:t>
             </a:r>
           </a:p>
         </p:txBody>
@@ -7586,7 +7654,7 @@
         <p:spPr>
           <a:xfrm>
             <a:off x="457200" y="6400800"/>
-            <a:ext cx="7315200" cy="365760"/>
+            <a:ext cx="9144000" cy="365760"/>
           </a:xfrm>
           <a:prstGeom prst="rect">
             <a:avLst/>
@@ -7610,7 +7678,7 @@
                   <a:srgbClr val="555F6B"/>
                 </a:solidFill>
               </a:rPr>
-              <a:t>G03 · VBot Workplace · Lê Tuấn Anh · MSSV 2A202602952</a:t>
+              <a:t>G03 · Lê Tuấn Anh (2A202602952) · Hồ Thái Hòa (2A202602915) · Nguyễn Đình Lâm Phúc (2A202602986)</a:t>
             </a:r>
           </a:p>
         </p:txBody>
@@ -8464,7 +8532,7 @@
         <p:spPr>
           <a:xfrm>
             <a:off x="457200" y="6400800"/>
-            <a:ext cx="7315200" cy="365760"/>
+            <a:ext cx="9144000" cy="365760"/>
           </a:xfrm>
           <a:prstGeom prst="rect">
             <a:avLst/>
@@ -8488,7 +8556,7 @@
                   <a:srgbClr val="555F6B"/>
                 </a:solidFill>
               </a:rPr>
-              <a:t>G03 · VBot Workplace · Lê Tuấn Anh · MSSV 2A202602952</a:t>
+              <a:t>G03 · Lê Tuấn Anh (2A202602952) · Hồ Thái Hòa (2A202602915) · Nguyễn Đình Lâm Phúc (2A202602986)</a:t>
             </a:r>
           </a:p>
         </p:txBody>
@@ -9355,7 +9423,7 @@
         <p:spPr>
           <a:xfrm>
             <a:off x="457200" y="6400800"/>
-            <a:ext cx="7315200" cy="365760"/>
+            <a:ext cx="9144000" cy="365760"/>
           </a:xfrm>
           <a:prstGeom prst="rect">
             <a:avLst/>
@@ -9379,7 +9447,7 @@
                   <a:srgbClr val="555F6B"/>
                 </a:solidFill>
               </a:rPr>
-              <a:t>G03 · VBot Workplace · Lê Tuấn Anh · MSSV 2A202602952</a:t>
+              <a:t>G03 · Lê Tuấn Anh (2A202602952) · Hồ Thái Hòa (2A202602915) · Nguyễn Đình Lâm Phúc (2A202602986)</a:t>
             </a:r>
           </a:p>
         </p:txBody>
@@ -10594,7 +10662,7 @@
         <p:spPr>
           <a:xfrm>
             <a:off x="457200" y="6400800"/>
-            <a:ext cx="7315200" cy="365760"/>
+            <a:ext cx="9144000" cy="365760"/>
           </a:xfrm>
           <a:prstGeom prst="rect">
             <a:avLst/>
@@ -10618,7 +10686,7 @@
                   <a:srgbClr val="555F6B"/>
                 </a:solidFill>
               </a:rPr>
-              <a:t>G03 · VBot Workplace · Lê Tuấn Anh · MSSV 2A202602952</a:t>
+              <a:t>G03 · Lê Tuấn Anh (2A202602952) · Hồ Thái Hòa (2A202602915) · Nguyễn Đình Lâm Phúc (2A202602986)</a:t>
             </a:r>
           </a:p>
         </p:txBody>
@@ -10965,7 +11033,7 @@
         <p:spPr>
           <a:xfrm>
             <a:off x="457200" y="6400800"/>
-            <a:ext cx="7315200" cy="365760"/>
+            <a:ext cx="9144000" cy="365760"/>
           </a:xfrm>
           <a:prstGeom prst="rect">
             <a:avLst/>
@@ -10989,7 +11057,7 @@
                   <a:srgbClr val="555F6B"/>
                 </a:solidFill>
               </a:rPr>
-              <a:t>G03 · VBot Workplace · Lê Tuấn Anh · MSSV 2A202602952</a:t>
+              <a:t>G03 · Lê Tuấn Anh (2A202602952) · Hồ Thái Hòa (2A202602915) · Nguyễn Đình Lâm Phúc (2A202602986)</a:t>
             </a:r>
           </a:p>
         </p:txBody>
@@ -12136,7 +12204,7 @@
         <p:spPr>
           <a:xfrm>
             <a:off x="457200" y="6400800"/>
-            <a:ext cx="7315200" cy="365760"/>
+            <a:ext cx="9144000" cy="365760"/>
           </a:xfrm>
           <a:prstGeom prst="rect">
             <a:avLst/>
@@ -12160,7 +12228,7 @@
                   <a:srgbClr val="555F6B"/>
                 </a:solidFill>
               </a:rPr>
-              <a:t>G03 · VBot Workplace · Lê Tuấn Anh · MSSV 2A202602952</a:t>
+              <a:t>G03 · Lê Tuấn Anh (2A202602952) · Hồ Thái Hòa (2A202602915) · Nguyễn Đình Lâm Phúc (2A202602986)</a:t>
             </a:r>
           </a:p>
         </p:txBody>
@@ -14243,7 +14311,7 @@
         <p:spPr>
           <a:xfrm>
             <a:off x="457200" y="6400800"/>
-            <a:ext cx="7315200" cy="365760"/>
+            <a:ext cx="9144000" cy="365760"/>
           </a:xfrm>
           <a:prstGeom prst="rect">
             <a:avLst/>
@@ -14267,7 +14335,7 @@
                   <a:srgbClr val="555F6B"/>
                 </a:solidFill>
               </a:rPr>
-              <a:t>G03 · VBot Workplace · Lê Tuấn Anh · MSSV 2A202602952</a:t>
+              <a:t>G03 · Lê Tuấn Anh (2A202602952) · Hồ Thái Hòa (2A202602915) · Nguyễn Đình Lâm Phúc (2A202602986)</a:t>
             </a:r>
           </a:p>
         </p:txBody>
@@ -15575,7 +15643,7 @@
         <p:spPr>
           <a:xfrm>
             <a:off x="457200" y="6400800"/>
-            <a:ext cx="7315200" cy="365760"/>
+            <a:ext cx="9144000" cy="365760"/>
           </a:xfrm>
           <a:prstGeom prst="rect">
             <a:avLst/>
@@ -15599,7 +15667,7 @@
                   <a:srgbClr val="555F6B"/>
                 </a:solidFill>
               </a:rPr>
-              <a:t>G03 · VBot Workplace · Lê Tuấn Anh · MSSV 2A202602952</a:t>
+              <a:t>G03 · Lê Tuấn Anh (2A202602952) · Hồ Thái Hòa (2A202602915) · Nguyễn Đình Lâm Phúc (2A202602986)</a:t>
             </a:r>
           </a:p>
         </p:txBody>
@@ -16388,7 +16456,7 @@
         <p:spPr>
           <a:xfrm>
             <a:off x="457200" y="6400800"/>
-            <a:ext cx="7315200" cy="365760"/>
+            <a:ext cx="9144000" cy="365760"/>
           </a:xfrm>
           <a:prstGeom prst="rect">
             <a:avLst/>
@@ -16412,7 +16480,7 @@
                   <a:srgbClr val="555F6B"/>
                 </a:solidFill>
               </a:rPr>
-              <a:t>G03 · VBot Workplace · Lê Tuấn Anh · MSSV 2A202602952</a:t>
+              <a:t>G03 · Lê Tuấn Anh (2A202602952) · Hồ Thái Hòa (2A202602915) · Nguyễn Đình Lâm Phúc (2A202602986)</a:t>
             </a:r>
           </a:p>
         </p:txBody>
@@ -18302,7 +18370,7 @@
         <p:spPr>
           <a:xfrm>
             <a:off x="457200" y="6400800"/>
-            <a:ext cx="7315200" cy="365760"/>
+            <a:ext cx="9144000" cy="365760"/>
           </a:xfrm>
           <a:prstGeom prst="rect">
             <a:avLst/>
@@ -18326,7 +18394,7 @@
                   <a:srgbClr val="555F6B"/>
                 </a:solidFill>
               </a:rPr>
-              <a:t>G03 · VBot Workplace · Lê Tuấn Anh · MSSV 2A202602952</a:t>
+              <a:t>G03 · Lê Tuấn Anh (2A202602952) · Hồ Thái Hòa (2A202602915) · Nguyễn Đình Lâm Phúc (2A202602986)</a:t>
             </a:r>
           </a:p>
         </p:txBody>
@@ -18718,7 +18786,7 @@
         <p:spPr>
           <a:xfrm>
             <a:off x="457200" y="6400800"/>
-            <a:ext cx="7315200" cy="365760"/>
+            <a:ext cx="9144000" cy="365760"/>
           </a:xfrm>
           <a:prstGeom prst="rect">
             <a:avLst/>
@@ -18742,7 +18810,7 @@
                   <a:srgbClr val="555F6B"/>
                 </a:solidFill>
               </a:rPr>
-              <a:t>G03 · VBot Workplace · Lê Tuấn Anh · MSSV 2A202602952</a:t>
+              <a:t>G03 · Lê Tuấn Anh (2A202602952) · Hồ Thái Hòa (2A202602915) · Nguyễn Đình Lâm Phúc (2A202602986)</a:t>
             </a:r>
           </a:p>
         </p:txBody>
@@ -20076,7 +20144,7 @@
         <p:spPr>
           <a:xfrm>
             <a:off x="457200" y="6400800"/>
-            <a:ext cx="7315200" cy="365760"/>
+            <a:ext cx="9144000" cy="365760"/>
           </a:xfrm>
           <a:prstGeom prst="rect">
             <a:avLst/>
@@ -20100,7 +20168,7 @@
                   <a:srgbClr val="555F6B"/>
                 </a:solidFill>
               </a:rPr>
-              <a:t>G03 · VBot Workplace · Lê Tuấn Anh · MSSV 2A202602952</a:t>
+              <a:t>G03 · Lê Tuấn Anh (2A202602952) · Hồ Thái Hòa (2A202602915) · Nguyễn Đình Lâm Phúc (2A202602986)</a:t>
             </a:r>
           </a:p>
         </p:txBody>
@@ -21043,7 +21111,7 @@
         <p:spPr>
           <a:xfrm>
             <a:off x="457200" y="6400800"/>
-            <a:ext cx="7315200" cy="365760"/>
+            <a:ext cx="9144000" cy="365760"/>
           </a:xfrm>
           <a:prstGeom prst="rect">
             <a:avLst/>
@@ -21067,7 +21135,7 @@
                   <a:srgbClr val="555F6B"/>
                 </a:solidFill>
               </a:rPr>
-              <a:t>G03 · VBot Workplace · Lê Tuấn Anh · MSSV 2A202602952</a:t>
+              <a:t>G03 · Lê Tuấn Anh (2A202602952) · Hồ Thái Hòa (2A202602915) · Nguyễn Đình Lâm Phúc (2A202602986)</a:t>
             </a:r>
           </a:p>
         </p:txBody>
@@ -21791,7 +21859,7 @@
         <p:spPr>
           <a:xfrm>
             <a:off x="457200" y="6400800"/>
-            <a:ext cx="7315200" cy="365760"/>
+            <a:ext cx="9144000" cy="365760"/>
           </a:xfrm>
           <a:prstGeom prst="rect">
             <a:avLst/>
@@ -21815,7 +21883,7 @@
                   <a:srgbClr val="555F6B"/>
                 </a:solidFill>
               </a:rPr>
-              <a:t>G03 · VBot Workplace · Lê Tuấn Anh · MSSV 2A202602952</a:t>
+              <a:t>G03 · Lê Tuấn Anh (2A202602952) · Hồ Thái Hòa (2A202602915) · Nguyễn Đình Lâm Phúc (2A202602986)</a:t>
             </a:r>
           </a:p>
         </p:txBody>

--- a/anh-le/G03_slide.pptx
+++ b/anh-le/G03_slide.pptx
@@ -3656,7 +3656,7 @@
                   <a:srgbClr val="BFD7EA"/>
                 </a:solidFill>
               </a:rPr>
-              <a:t>Tổng chi phí: 6.821,44 USD/tháng, tức 3,41 USD cho mỗi người dùng hoạt động (DAU)</a:t>
+              <a:t>Tổng chi phí: 3.421,44 USD/tháng, tức 1,71 USD cho mỗi người dùng hoạt động (DAU)</a:t>
             </a:r>
           </a:p>
           <a:p>
@@ -6535,7 +6535,7 @@
                   <a:srgbClr val="FFFFFF"/>
                 </a:solidFill>
               </a:rPr>
-              <a:t>11. Chi phí: một nửa là nhân sự, LLM chỉ 16%</a:t>
+              <a:t>11. Chi phí: LLM 32%, governance 24%</a:t>
             </a:r>
           </a:p>
         </p:txBody>
@@ -6573,7 +6573,7 @@
                   <a:srgbClr val="2E6FB7"/>
                 </a:solidFill>
               </a:rPr>
-              <a:t>Tổng 6.821,44 USD/tháng, tức 3,41 USD/DAU. Bảng dưới giải thích vì sao mỗi khoản ra con số này</a:t>
+              <a:t>Tổng 3.421,44 USD/tháng, tức 1,71 USD/DAU. Bảng dưới giải thích vì sao mỗi khoản ra con số này</a:t>
             </a:r>
           </a:p>
         </p:txBody>
@@ -6798,7 +6798,7 @@
                             <a:srgbClr val="555F6B"/>
                           </a:solidFill>
                         </a:rPr>
-                        <a:t>ops_labor (nhân sự)</a:t>
+                        <a:t>llm</a:t>
                       </a:r>
                     </a:p>
                   </a:txBody>
@@ -6819,7 +6819,7 @@
                             <a:srgbClr val="555F6B"/>
                           </a:solidFill>
                         </a:rPr>
-                        <a:t>3.400</a:t>
+                        <a:t>1.093</a:t>
                       </a:r>
                     </a:p>
                   </a:txBody>
@@ -6840,7 +6840,7 @@
                             <a:srgbClr val="555F6B"/>
                           </a:solidFill>
                         </a:rPr>
-                        <a:t>50%</a:t>
+                        <a:t>32%</a:t>
                       </a:r>
                     </a:p>
                   </a:txBody>
@@ -6861,7 +6861,7 @@
                             <a:srgbClr val="555F6B"/>
                           </a:solidFill>
                         </a:rPr>
-                        <a:t>2 kỹ sư trực luân phiên: SRE 5–8 năm (53,85 triệu VND) + AI/MLOps 3–4 năm (34,1 triệu VND) = 87,95 triệu VND ÷ 25.870 VND/USD</a:t>
+                        <a:t>Lượt × số lần gọi model × token × giá. Cấp 1: 386 · cấp 2: 288 · cấp 3: 161 · cấp 4: 105 · cấp 5: 7 + ảnh 147 (4.312 ảnh × 0,034)</a:t>
                       </a:r>
                     </a:p>
                   </a:txBody>
@@ -6882,7 +6882,7 @@
                             <a:srgbClr val="555F6B"/>
                           </a:solidFill>
                         </a:rPr>
-                        <a:t>Lớn nhất vì cố định: cần người trực để giữ 99,5% (H7), vận hành LiteLLM và eval. Không giảm khi ít người dùng</a:t>
+                        <a:t>Lớn nhất vì tăng theo lượt dùng. Vẫn nhỏ nhờ Haiku rẻ (0,10 USD/1M token vào) và 61% token vào đọc từ cache với giá 0,01</a:t>
                       </a:r>
                     </a:p>
                   </a:txBody>
@@ -6905,7 +6905,7 @@
                             <a:srgbClr val="555F6B"/>
                           </a:solidFill>
                         </a:rPr>
-                        <a:t>llm</a:t>
+                        <a:t>governance</a:t>
                       </a:r>
                     </a:p>
                   </a:txBody>
@@ -6926,7 +6926,7 @@
                             <a:srgbClr val="555F6B"/>
                           </a:solidFill>
                         </a:rPr>
-                        <a:t>1.093</a:t>
+                        <a:t>806</a:t>
                       </a:r>
                     </a:p>
                   </a:txBody>
@@ -6947,7 +6947,7 @@
                             <a:srgbClr val="555F6B"/>
                           </a:solidFill>
                         </a:rPr>
-                        <a:t>16%</a:t>
+                        <a:t>24%</a:t>
                       </a:r>
                     </a:p>
                   </a:txBody>
@@ -6968,7 +6968,7 @@
                             <a:srgbClr val="555F6B"/>
                           </a:solidFill>
                         </a:rPr>
-                        <a:t>Lượt × số lần gọi model × token × giá. Cấp 1: 386 · cấp 2: 288 · cấp 3: 161 · cấp 4: 105 · cấp 5: 7 + ảnh 147 (4.312 ảnh × 0,034)</a:t>
+                        <a:t>Guardrail: 2,81 tỉ token × 0,10 USD/1M = 281. Eval gate: 4 lần/tháng × 5 cấp × 100 nhiệm vụ = 525</a:t>
                       </a:r>
                     </a:p>
                   </a:txBody>
@@ -6989,7 +6989,7 @@
                             <a:srgbClr val="555F6B"/>
                           </a:solidFill>
                         </a:rPr>
-                        <a:t>Nhỏ vì Haiku rẻ (0,10 USD/1M token vào) và 61% token vào đọc từ cache với giá 0,01</a:t>
+                        <a:t>Eval đắt hơn guardrail vì Opus 5.5 vừa làm bài mẫu vừa chấm điểm</a:t>
                       </a:r>
                     </a:p>
                   </a:txBody>
@@ -7012,7 +7012,7 @@
                             <a:srgbClr val="555F6B"/>
                           </a:solidFill>
                         </a:rPr>
-                        <a:t>governance</a:t>
+                        <a:t>database</a:t>
                       </a:r>
                     </a:p>
                   </a:txBody>
@@ -7033,7 +7033,7 @@
                             <a:srgbClr val="555F6B"/>
                           </a:solidFill>
                         </a:rPr>
-                        <a:t>806</a:t>
+                        <a:t>467</a:t>
                       </a:r>
                     </a:p>
                   </a:txBody>
@@ -7054,7 +7054,7 @@
                             <a:srgbClr val="555F6B"/>
                           </a:solidFill>
                         </a:rPr>
-                        <a:t>12%</a:t>
+                        <a:t>14%</a:t>
                       </a:r>
                     </a:p>
                   </a:txBody>
@@ -7075,7 +7075,7 @@
                             <a:srgbClr val="555F6B"/>
                           </a:solidFill>
                         </a:rPr>
-                        <a:t>Guardrail: 2,81 tỉ token × 0,10 USD/1M = 281. Eval gate: 4 lần/tháng × 5 cấp × 100 nhiệm vụ = 525</a:t>
+                        <a:t>Postgres HA 2 vCPU, 13 GB × 730 giờ = 355 · SSD 150 GB = 71 · database staging = 41</a:t>
                       </a:r>
                     </a:p>
                   </a:txBody>
@@ -7096,7 +7096,7 @@
                             <a:srgbClr val="555F6B"/>
                           </a:solidFill>
                         </a:rPr>
-                        <a:t>Eval đắt hơn guardrail vì Opus 5.5 vừa làm bài mẫu vừa chấm điểm</a:t>
+                        <a:t>Chạy 24/7, có bản dự phòng ở zone khác. Chứa luôn vector và token, nên không cần dịch vụ riêng</a:t>
                       </a:r>
                     </a:p>
                   </a:txBody>
@@ -7119,7 +7119,7 @@
                             <a:srgbClr val="555F6B"/>
                           </a:solidFill>
                         </a:rPr>
-                        <a:t>database</a:t>
+                        <a:t>sandbox</a:t>
                       </a:r>
                     </a:p>
                   </a:txBody>
@@ -7140,7 +7140,7 @@
                             <a:srgbClr val="555F6B"/>
                           </a:solidFill>
                         </a:rPr>
-                        <a:t>467</a:t>
+                        <a:t>315</a:t>
                       </a:r>
                     </a:p>
                   </a:txBody>
@@ -7161,7 +7161,7 @@
                             <a:srgbClr val="555F6B"/>
                           </a:solidFill>
                         </a:rPr>
-                        <a:t>7%</a:t>
+                        <a:t>9%</a:t>
                       </a:r>
                     </a:p>
                   </a:txBody>
@@ -7182,7 +7182,7 @@
                             <a:srgbClr val="555F6B"/>
                           </a:solidFill>
                         </a:rPr>
-                        <a:t>Postgres HA 2 vCPU, 13 GB × 730 giờ = 355 · SSD 150 GB = 71 · database staging = 41</a:t>
+                        <a:t>140.800 lượt × 2 phút = 4.693 vCPU-giờ × 0,0549 + 9.386 GB-giờ × 0,0061</a:t>
                       </a:r>
                     </a:p>
                   </a:txBody>
@@ -7203,7 +7203,7 @@
                             <a:srgbClr val="555F6B"/>
                           </a:solidFill>
                         </a:rPr>
-                        <a:t>Chạy 24/7, có bản dự phòng ở zone khác. Chứa luôn vector và token, nên không cần dịch vụ riêng</a:t>
+                        <a:t>Là cận trên: thời gian chạy thật chưa đo, nên mỗi lượt tính đủ 2 phút tối đa</a:t>
                       </a:r>
                     </a:p>
                   </a:txBody>
@@ -7226,7 +7226,7 @@
                             <a:srgbClr val="555F6B"/>
                           </a:solidFill>
                         </a:rPr>
-                        <a:t>sandbox</a:t>
+                        <a:t>compute</a:t>
                       </a:r>
                     </a:p>
                   </a:txBody>
@@ -7247,7 +7247,7 @@
                             <a:srgbClr val="555F6B"/>
                           </a:solidFill>
                         </a:rPr>
-                        <a:t>315</a:t>
+                        <a:t>284</a:t>
                       </a:r>
                     </a:p>
                   </a:txBody>
@@ -7268,7 +7268,7 @@
                             <a:srgbClr val="555F6B"/>
                           </a:solidFill>
                         </a:rPr>
-                        <a:t>5%</a:t>
+                        <a:t>8%</a:t>
                       </a:r>
                     </a:p>
                   </a:txBody>
@@ -7289,7 +7289,7 @@
                             <a:srgbClr val="555F6B"/>
                           </a:solidFill>
                         </a:rPr>
-                        <a:t>140.800 lượt × 2 phút = 4.693 vCPU-giờ × 0,0549 + 9.386 GB-giờ × 0,0061</a:t>
+                        <a:t>Phí cụm GKE 0,10 USD/giờ × 730 = 73 · 3 loại pod (web, LiteLLM, worker): 2.970 vCPU-giờ + 7.920 GB-giờ = 211</a:t>
                       </a:r>
                     </a:p>
                   </a:txBody>
@@ -7310,7 +7310,7 @@
                             <a:srgbClr val="555F6B"/>
                           </a:solidFill>
                         </a:rPr>
-                        <a:t>Là cận trên: thời gian chạy thật chưa đo, nên mỗi lượt tính đủ 2 phút tối đa</a:t>
+                        <a:t>Nhỏ vì giờ hành chính chạy 2 pod mỗi loại, ngoài giờ chỉ 1 pod</a:t>
                       </a:r>
                     </a:p>
                   </a:txBody>
@@ -7333,7 +7333,7 @@
                             <a:srgbClr val="555F6B"/>
                           </a:solidFill>
                         </a:rPr>
-                        <a:t>10 khoản còn lại</a:t>
+                        <a:t>9 khoản còn lại</a:t>
                       </a:r>
                     </a:p>
                   </a:txBody>
@@ -7354,7 +7354,7 @@
                             <a:srgbClr val="555F6B"/>
                           </a:solidFill>
                         </a:rPr>
-                        <a:t>741</a:t>
+                        <a:t>457</a:t>
                       </a:r>
                     </a:p>
                   </a:txBody>
@@ -7375,7 +7375,7 @@
                             <a:srgbClr val="555F6B"/>
                           </a:solidFill>
                         </a:rPr>
-                        <a:t>11%</a:t>
+                        <a:t>13%</a:t>
                       </a:r>
                     </a:p>
                   </a:txBody>
@@ -7396,7 +7396,7 @@
                             <a:srgbClr val="555F6B"/>
                           </a:solidFill>
                         </a:rPr>
-                        <a:t>compute 284 · backup_dr 164 · object_storage 83 · network 64 · cache_queue 56 · …</a:t>
+                        <a:t>backup_dr 164 · object_storage 83 · network 64 · cache_queue 56 · load_balancer 29 · …</a:t>
                       </a:r>
                     </a:p>
                   </a:txBody>
@@ -7417,7 +7417,7 @@
                             <a:srgbClr val="555F6B"/>
                           </a:solidFill>
                         </a:rPr>
-                        <a:t>Hạ tầng gọn: 1 cụm GKE, 1 region, phần lớn chỉ chạy đủ trong giờ hành chính</a:t>
+                        <a:t>Hạ tầng gọn: 1 cụm GKE, 1 region</a:t>
                       </a:r>
                     </a:p>
                   </a:txBody>
@@ -7465,7 +7465,7 @@
                   <a:srgbClr val="555F6B"/>
                 </a:solidFill>
               </a:rPr>
-              <a:t>Đơn giá và bằng chứng từng dòng: Phụ lục A và G03_baogia.xlsx. Không dùng free tier, credit hay giá khuyến mãi.</a:t>
+              <a:t>Không gồm chi phí nhân sự vận hành (theo hướng dẫn của coach). Đơn giá và bằng chứng từng dòng: Phụ lục A và G03_baogia.xlsx.</a:t>
             </a:r>
           </a:p>
         </p:txBody>
@@ -8480,7 +8480,7 @@
                   <a:srgbClr val="2E6FB7"/>
                 </a:solidFill>
               </a:rPr>
-              <a:t>Khi đó chi phí lên 11.526 USD/tháng. Nhóm đã tính sẵn; LiteLLM đổi model bằng 1 dòng cấu hình</a:t>
+              <a:t>Khi đó chi phí lên 8.126 USD/tháng. Nhóm đã tính sẵn; LiteLLM đổi model bằng 1 dòng cấu hình</a:t>
             </a:r>
           </a:p>
         </p:txBody>
@@ -8682,7 +8682,7 @@
                             <a:srgbClr val="555F6B"/>
                           </a:solidFill>
                         </a:rPr>
-                        <a:t>6.821</a:t>
+                        <a:t>3.421</a:t>
                       </a:r>
                     </a:p>
                   </a:txBody>
@@ -8703,7 +8703,7 @@
                             <a:srgbClr val="555F6B"/>
                           </a:solidFill>
                         </a:rPr>
-                        <a:t>3,41</a:t>
+                        <a:t>1,71</a:t>
                       </a:r>
                     </a:p>
                   </a:txBody>
@@ -8747,7 +8747,7 @@
                             <a:srgbClr val="555F6B"/>
                           </a:solidFill>
                         </a:rPr>
-                        <a:t>8.826</a:t>
+                        <a:t>5.426</a:t>
                       </a:r>
                     </a:p>
                   </a:txBody>
@@ -8768,7 +8768,7 @@
                             <a:srgbClr val="555F6B"/>
                           </a:solidFill>
                         </a:rPr>
-                        <a:t>2,21</a:t>
+                        <a:t>1,36</a:t>
                       </a:r>
                     </a:p>
                   </a:txBody>
@@ -8812,7 +8812,7 @@
                             <a:srgbClr val="555F6B"/>
                           </a:solidFill>
                         </a:rPr>
-                        <a:t>7.263</a:t>
+                        <a:t>3.863</a:t>
                       </a:r>
                     </a:p>
                   </a:txBody>
@@ -8833,7 +8833,7 @@
                             <a:srgbClr val="555F6B"/>
                           </a:solidFill>
                         </a:rPr>
-                        <a:t>3,63</a:t>
+                        <a:t>1,93</a:t>
                       </a:r>
                     </a:p>
                   </a:txBody>
@@ -8877,7 +8877,7 @@
                             <a:srgbClr val="555F6B"/>
                           </a:solidFill>
                         </a:rPr>
-                        <a:t>6.085</a:t>
+                        <a:t>2.685</a:t>
                       </a:r>
                     </a:p>
                   </a:txBody>
@@ -8898,7 +8898,7 @@
                             <a:srgbClr val="555F6B"/>
                           </a:solidFill>
                         </a:rPr>
-                        <a:t>3,04</a:t>
+                        <a:t>1,34</a:t>
                       </a:r>
                     </a:p>
                   </a:txBody>
@@ -8942,7 +8942,7 @@
                             <a:srgbClr val="555F6B"/>
                           </a:solidFill>
                         </a:rPr>
-                        <a:t>11.526</a:t>
+                        <a:t>8.126</a:t>
                       </a:r>
                     </a:p>
                   </a:txBody>
@@ -8963,7 +8963,7 @@
                             <a:srgbClr val="555F6B"/>
                           </a:solidFill>
                         </a:rPr>
-                        <a:t>5,76</a:t>
+                        <a:t>4,06</a:t>
                       </a:r>
                     </a:p>
                   </a:txBody>
@@ -9106,7 +9106,7 @@
                   <a:srgbClr val="555F6B"/>
                 </a:solidFill>
               </a:rPr>
-              <a:t>Gần như cố định: 2 kỹ sư, cụm GKE, database, cache, cân bằng tải</a:t>
+              <a:t>Gần như cố định: cụm GKE, database, cache, cân bằng tải</a:t>
             </a:r>
           </a:p>
           <a:p>
@@ -9204,7 +9204,7 @@
                   <a:srgbClr val="555F6B"/>
                 </a:solidFill>
               </a:rPr>
-              <a:t>LiteLLM là open source, không có SLA → 2 kỹ sư trực, cố định phiên bản, test trên staging</a:t>
+              <a:t>LiteLLM là open source, không có SLA → đội vận hành trực, cố định phiên bản, test trên staging</a:t>
             </a:r>
           </a:p>
           <a:p>
@@ -10457,7 +10457,7 @@
                             <a:srgbClr val="555F6B"/>
                           </a:solidFill>
                         </a:rPr>
-                        <a:t>3.400,00</a:t>
+                        <a:t>0,00</a:t>
                       </a:r>
                     </a:p>
                   </a:txBody>
@@ -10501,7 +10501,7 @@
                             <a:srgbClr val="555F6B"/>
                           </a:solidFill>
                         </a:rPr>
-                        <a:t>6.821,44</a:t>
+                        <a:t>3.421,44</a:t>
                       </a:r>
                     </a:p>
                   </a:txBody>
@@ -16404,7 +16404,7 @@
                   <a:srgbClr val="2E6FB7"/>
                 </a:solidFill>
               </a:rPr>
-              <a:t>GCP Singapore vì rẻ nhất trong 3 cloud (6.821 USD/tháng; AWS 8.643, Azure 14.484). Số tròn là bước ở slide 3; chữ xanh là mã dòng trong báo giá</a:t>
+              <a:t>GCP Singapore vì rẻ nhất trong 3 cloud (3.421 USD/tháng; AWS 5.243, Azure 11.084). Số tròn là bước ở slide 3; chữ xanh là mã dòng trong báo giá</a:t>
             </a:r>
           </a:p>
         </p:txBody>
@@ -17765,71 +17765,7 @@
       </p:sp>
       <p:sp>
         <p:nvSpPr>
-          <p:cNvPr id="29" name="Rounded Rectangle 28"/>
-          <p:cNvSpPr/>
-          <p:nvPr/>
-        </p:nvSpPr>
-        <p:spPr>
-          <a:xfrm>
-            <a:off x="10149840" y="4480560"/>
-            <a:ext cx="1645920" cy="914400"/>
-          </a:xfrm>
-          <a:prstGeom prst="roundRect">
-            <a:avLst/>
-          </a:prstGeom>
-          <a:solidFill>
-            <a:srgbClr val="EEF3F8"/>
-          </a:solidFill>
-          <a:ln w="15875">
-            <a:solidFill>
-              <a:srgbClr val="2E6FB7"/>
-            </a:solidFill>
-          </a:ln>
-        </p:spPr>
-        <p:style>
-          <a:lnRef idx="1">
-            <a:schemeClr val="accent1"/>
-          </a:lnRef>
-          <a:fillRef idx="3">
-            <a:schemeClr val="accent1"/>
-          </a:fillRef>
-          <a:effectRef idx="2">
-            <a:schemeClr val="accent1"/>
-          </a:effectRef>
-          <a:fontRef idx="minor">
-            <a:schemeClr val="lt1"/>
-          </a:fontRef>
-        </p:style>
-        <p:txBody>
-          <a:bodyPr rtlCol="0" anchor="ctr" wrap="square" lIns="45720" rIns="45720"/>
-          <a:lstStyle/>
-          <a:p>
-            <a:pPr algn="ctr"/>
-            <a:r>
-              <a:rPr sz="1100" b="1">
-                <a:solidFill>
-                  <a:srgbClr val="1F3A5F"/>
-                </a:solidFill>
-              </a:rPr>
-              <a:t>2 kỹ sư vận hành</a:t>
-            </a:r>
-          </a:p>
-          <a:p>
-            <a:pPr algn="ctr"/>
-            <a:r>
-              <a:rPr sz="900" b="1">
-                <a:solidFill>
-                  <a:srgbClr val="1A8F7A"/>
-                </a:solidFill>
-              </a:rPr>
-              <a:t>ops_labor</a:t>
-            </a:r>
-          </a:p>
-        </p:txBody>
-      </p:sp>
-      <p:sp>
-        <p:nvSpPr>
-          <p:cNvPr id="30" name="Oval 29"/>
+          <p:cNvPr id="29" name="Oval 28"/>
           <p:cNvSpPr/>
           <p:nvPr/>
         </p:nvSpPr>
@@ -17880,7 +17816,7 @@
       </p:sp>
       <p:sp>
         <p:nvSpPr>
-          <p:cNvPr id="31" name="Oval 30"/>
+          <p:cNvPr id="30" name="Oval 29"/>
           <p:cNvSpPr/>
           <p:nvPr/>
         </p:nvSpPr>
@@ -17931,7 +17867,7 @@
       </p:sp>
       <p:sp>
         <p:nvSpPr>
-          <p:cNvPr id="32" name="Oval 31"/>
+          <p:cNvPr id="31" name="Oval 30"/>
           <p:cNvSpPr/>
           <p:nvPr/>
         </p:nvSpPr>
@@ -17982,7 +17918,7 @@
       </p:sp>
       <p:sp>
         <p:nvSpPr>
-          <p:cNvPr id="33" name="Oval 32"/>
+          <p:cNvPr id="32" name="Oval 31"/>
           <p:cNvSpPr/>
           <p:nvPr/>
         </p:nvSpPr>
@@ -18033,7 +17969,7 @@
       </p:sp>
       <p:sp>
         <p:nvSpPr>
-          <p:cNvPr id="34" name="Oval 33"/>
+          <p:cNvPr id="33" name="Oval 32"/>
           <p:cNvSpPr/>
           <p:nvPr/>
         </p:nvSpPr>
@@ -18084,7 +18020,7 @@
       </p:sp>
       <p:sp>
         <p:nvSpPr>
-          <p:cNvPr id="35" name="Oval 34"/>
+          <p:cNvPr id="34" name="Oval 33"/>
           <p:cNvSpPr/>
           <p:nvPr/>
         </p:nvSpPr>
@@ -18135,7 +18071,7 @@
       </p:sp>
       <p:sp>
         <p:nvSpPr>
-          <p:cNvPr id="36" name="TextBox 35"/>
+          <p:cNvPr id="35" name="TextBox 34"/>
           <p:cNvSpPr txBox="1"/>
           <p:nvPr/>
         </p:nvSpPr>
@@ -20316,7 +20252,7 @@
                             <a:srgbClr val="555F6B"/>
                           </a:solidFill>
                         </a:rPr>
-                        <a:t>GCP: 6.821 (tổng)</a:t>
+                        <a:t>GCP: 3.421 (tổng)</a:t>
                       </a:r>
                     </a:p>
                   </a:txBody>
@@ -20337,7 +20273,7 @@
                             <a:srgbClr val="555F6B"/>
                           </a:solidFill>
                         </a:rPr>
-                        <a:t>AWS 8.643 · Azure 14.484</a:t>
+                        <a:t>AWS 5.243 · Azure 11.084</a:t>
                       </a:r>
                     </a:p>
                   </a:txBody>
@@ -21261,7 +21197,7 @@
                             <a:srgbClr val="555F6B"/>
                           </a:solidFill>
                         </a:rPr>
-                        <a:t>GCP 6.821 = tổng 20 dòng của báo giá (Phụ lục A)</a:t>
+                        <a:t>GCP 3.421 = tổng các dòng của báo giá (Phụ lục A)</a:t>
                       </a:r>
                     </a:p>
                   </a:txBody>
@@ -21282,7 +21218,7 @@
                             <a:srgbClr val="555F6B"/>
                           </a:solidFill>
                         </a:rPr>
-                        <a:t>AWS 8.643, Azure 14.484: cùng khối lượng, tính theo giá của AWS, Azure. Nếu bỏ dòng governance, 3 cloud chênh nhau dưới 8%. Chênh lệch nằm ở guardrail + che PII: GCP 281, AWS ~1.910, Azure ~7.534</a:t>
+                        <a:t>AWS 5.243, Azure 11.084: cùng khối lượng, tính theo giá của AWS, Azure. Nếu bỏ dòng governance, 3 cloud chênh nhau dưới 16%. Chênh lệch nằm ở guardrail + che PII: GCP 281, AWS ~1.910, Azure ~7.534</a:t>
                       </a:r>
                     </a:p>
                   </a:txBody>

--- a/anh-le/G03_slide.pptx
+++ b/anh-le/G03_slide.pptx
@@ -9371,7 +9371,7 @@
                   <a:srgbClr val="2E6FB7"/>
                 </a:solidFill>
               </a:rPr>
-              <a:t>Chi tiết từng dòng (đơn giá × số lượng, kèm bằng chứng) nằm trong G03_baogia.xlsx</a:t>
+              <a:t>Sắp xếp từ cao tới thấp. Chi tiết từng dòng (đơn giá × số lượng, kèm bằng chứng) nằm trong G03_baogia.xlsx</a:t>
             </a:r>
           </a:p>
         </p:txBody>
@@ -9471,8 +9471,9 @@
                 <a:tableStyleId>{5C22544A-7EE6-4342-B048-85BDC9FD1C3A}</a:tableStyleId>
               </a:tblPr>
               <a:tblGrid>
-                <a:gridCol w="3200400"/>
-                <a:gridCol w="2286000"/>
+                <a:gridCol w="2743200"/>
+                <a:gridCol w="1645920"/>
+                <a:gridCol w="1097280"/>
               </a:tblGrid>
               <a:tr h="384048">
                 <a:tc>
@@ -9517,6 +9518,27 @@
                     </a:solidFill>
                   </a:tcPr>
                 </a:tc>
+                <a:tc>
+                  <a:txBody>
+                    <a:bodyPr/>
+                    <a:lstStyle/>
+                    <a:p>
+                      <a:r>
+                        <a:rPr sz="1200" b="1">
+                          <a:solidFill>
+                            <a:srgbClr val="FFFFFF"/>
+                          </a:solidFill>
+                        </a:rPr>
+                        <a:t>%</a:t>
+                      </a:r>
+                    </a:p>
+                  </a:txBody>
+                  <a:tcPr marL="45720" marR="45720" marT="18288" marB="18288">
+                    <a:solidFill>
+                      <a:srgbClr val="2E6FB7"/>
+                    </a:solidFill>
+                  </a:tcPr>
+                </a:tc>
               </a:tr>
               <a:tr h="384048">
                 <a:tc>
@@ -9530,7 +9552,7 @@
                             <a:srgbClr val="555F6B"/>
                           </a:solidFill>
                         </a:rPr>
-                        <a:t>compute</a:t>
+                        <a:t>llm</a:t>
                       </a:r>
                     </a:p>
                   </a:txBody>
@@ -9551,7 +9573,28 @@
                             <a:srgbClr val="555F6B"/>
                           </a:solidFill>
                         </a:rPr>
-                        <a:t>284,15</a:t>
+                        <a:t>1.093,34</a:t>
+                      </a:r>
+                    </a:p>
+                  </a:txBody>
+                  <a:tcPr marL="45720" marR="45720" marT="18288" marB="18288">
+                    <a:solidFill>
+                      <a:srgbClr val="EEF3F8"/>
+                    </a:solidFill>
+                  </a:tcPr>
+                </a:tc>
+                <a:tc>
+                  <a:txBody>
+                    <a:bodyPr/>
+                    <a:lstStyle/>
+                    <a:p>
+                      <a:r>
+                        <a:rPr sz="1200" b="0">
+                          <a:solidFill>
+                            <a:srgbClr val="555F6B"/>
+                          </a:solidFill>
+                        </a:rPr>
+                        <a:t>32,0%</a:t>
                       </a:r>
                     </a:p>
                   </a:txBody>
@@ -9574,7 +9617,7 @@
                             <a:srgbClr val="555F6B"/>
                           </a:solidFill>
                         </a:rPr>
-                        <a:t>llm</a:t>
+                        <a:t>governance</a:t>
                       </a:r>
                     </a:p>
                   </a:txBody>
@@ -9595,7 +9638,28 @@
                             <a:srgbClr val="555F6B"/>
                           </a:solidFill>
                         </a:rPr>
-                        <a:t>1.093,34</a:t>
+                        <a:t>805,98</a:t>
+                      </a:r>
+                    </a:p>
+                  </a:txBody>
+                  <a:tcPr marL="45720" marR="45720" marT="18288" marB="18288">
+                    <a:solidFill>
+                      <a:srgbClr val="FFFFFF"/>
+                    </a:solidFill>
+                  </a:tcPr>
+                </a:tc>
+                <a:tc>
+                  <a:txBody>
+                    <a:bodyPr/>
+                    <a:lstStyle/>
+                    <a:p>
+                      <a:r>
+                        <a:rPr sz="1200" b="0">
+                          <a:solidFill>
+                            <a:srgbClr val="555F6B"/>
+                          </a:solidFill>
+                        </a:rPr>
+                        <a:t>23,6%</a:t>
                       </a:r>
                     </a:p>
                   </a:txBody>
@@ -9618,7 +9682,7 @@
                             <a:srgbClr val="555F6B"/>
                           </a:solidFill>
                         </a:rPr>
-                        <a:t>embedding</a:t>
+                        <a:t>database</a:t>
                       </a:r>
                     </a:p>
                   </a:txBody>
@@ -9639,7 +9703,28 @@
                             <a:srgbClr val="555F6B"/>
                           </a:solidFill>
                         </a:rPr>
-                        <a:t>19,50</a:t>
+                        <a:t>466,71</a:t>
+                      </a:r>
+                    </a:p>
+                  </a:txBody>
+                  <a:tcPr marL="45720" marR="45720" marT="18288" marB="18288">
+                    <a:solidFill>
+                      <a:srgbClr val="EEF3F8"/>
+                    </a:solidFill>
+                  </a:tcPr>
+                </a:tc>
+                <a:tc>
+                  <a:txBody>
+                    <a:bodyPr/>
+                    <a:lstStyle/>
+                    <a:p>
+                      <a:r>
+                        <a:rPr sz="1200" b="0">
+                          <a:solidFill>
+                            <a:srgbClr val="555F6B"/>
+                          </a:solidFill>
+                        </a:rPr>
+                        <a:t>13,6%</a:t>
                       </a:r>
                     </a:p>
                   </a:txBody>
@@ -9662,7 +9747,7 @@
                             <a:srgbClr val="555F6B"/>
                           </a:solidFill>
                         </a:rPr>
-                        <a:t>gateway</a:t>
+                        <a:t>sandbox</a:t>
                       </a:r>
                     </a:p>
                   </a:txBody>
@@ -9683,7 +9768,28 @@
                             <a:srgbClr val="555F6B"/>
                           </a:solidFill>
                         </a:rPr>
-                        <a:t>0,00</a:t>
+                        <a:t>314,64</a:t>
+                      </a:r>
+                    </a:p>
+                  </a:txBody>
+                  <a:tcPr marL="45720" marR="45720" marT="18288" marB="18288">
+                    <a:solidFill>
+                      <a:srgbClr val="FFFFFF"/>
+                    </a:solidFill>
+                  </a:tcPr>
+                </a:tc>
+                <a:tc>
+                  <a:txBody>
+                    <a:bodyPr/>
+                    <a:lstStyle/>
+                    <a:p>
+                      <a:r>
+                        <a:rPr sz="1200" b="0">
+                          <a:solidFill>
+                            <a:srgbClr val="555F6B"/>
+                          </a:solidFill>
+                        </a:rPr>
+                        <a:t>9,2%</a:t>
                       </a:r>
                     </a:p>
                   </a:txBody>
@@ -9706,7 +9812,7 @@
                             <a:srgbClr val="555F6B"/>
                           </a:solidFill>
                         </a:rPr>
-                        <a:t>load_balancer</a:t>
+                        <a:t>compute</a:t>
                       </a:r>
                     </a:p>
                   </a:txBody>
@@ -9727,7 +9833,28 @@
                             <a:srgbClr val="555F6B"/>
                           </a:solidFill>
                         </a:rPr>
-                        <a:t>29,44</a:t>
+                        <a:t>284,15</a:t>
+                      </a:r>
+                    </a:p>
+                  </a:txBody>
+                  <a:tcPr marL="45720" marR="45720" marT="18288" marB="18288">
+                    <a:solidFill>
+                      <a:srgbClr val="EEF3F8"/>
+                    </a:solidFill>
+                  </a:tcPr>
+                </a:tc>
+                <a:tc>
+                  <a:txBody>
+                    <a:bodyPr/>
+                    <a:lstStyle/>
+                    <a:p>
+                      <a:r>
+                        <a:rPr sz="1200" b="0">
+                          <a:solidFill>
+                            <a:srgbClr val="555F6B"/>
+                          </a:solidFill>
+                        </a:rPr>
+                        <a:t>8,3%</a:t>
                       </a:r>
                     </a:p>
                   </a:txBody>
@@ -9750,7 +9877,7 @@
                             <a:srgbClr val="555F6B"/>
                           </a:solidFill>
                         </a:rPr>
-                        <a:t>authn</a:t>
+                        <a:t>backup_dr</a:t>
                       </a:r>
                     </a:p>
                   </a:txBody>
@@ -9771,7 +9898,28 @@
                             <a:srgbClr val="555F6B"/>
                           </a:solidFill>
                         </a:rPr>
-                        <a:t>0,00</a:t>
+                        <a:t>164,40</a:t>
+                      </a:r>
+                    </a:p>
+                  </a:txBody>
+                  <a:tcPr marL="45720" marR="45720" marT="18288" marB="18288">
+                    <a:solidFill>
+                      <a:srgbClr val="FFFFFF"/>
+                    </a:solidFill>
+                  </a:tcPr>
+                </a:tc>
+                <a:tc>
+                  <a:txBody>
+                    <a:bodyPr/>
+                    <a:lstStyle/>
+                    <a:p>
+                      <a:r>
+                        <a:rPr sz="1200" b="0">
+                          <a:solidFill>
+                            <a:srgbClr val="555F6B"/>
+                          </a:solidFill>
+                        </a:rPr>
+                        <a:t>4,8%</a:t>
                       </a:r>
                     </a:p>
                   </a:txBody>
@@ -9794,7 +9942,7 @@
                             <a:srgbClr val="555F6B"/>
                           </a:solidFill>
                         </a:rPr>
-                        <a:t>authz</a:t>
+                        <a:t>object_storage</a:t>
                       </a:r>
                     </a:p>
                   </a:txBody>
@@ -9815,7 +9963,28 @@
                             <a:srgbClr val="555F6B"/>
                           </a:solidFill>
                         </a:rPr>
-                        <a:t>0,00</a:t>
+                        <a:t>82,80</a:t>
+                      </a:r>
+                    </a:p>
+                  </a:txBody>
+                  <a:tcPr marL="45720" marR="45720" marT="18288" marB="18288">
+                    <a:solidFill>
+                      <a:srgbClr val="EEF3F8"/>
+                    </a:solidFill>
+                  </a:tcPr>
+                </a:tc>
+                <a:tc>
+                  <a:txBody>
+                    <a:bodyPr/>
+                    <a:lstStyle/>
+                    <a:p>
+                      <a:r>
+                        <a:rPr sz="1200" b="0">
+                          <a:solidFill>
+                            <a:srgbClr val="555F6B"/>
+                          </a:solidFill>
+                        </a:rPr>
+                        <a:t>2,4%</a:t>
                       </a:r>
                     </a:p>
                   </a:txBody>
@@ -9838,7 +10007,7 @@
                             <a:srgbClr val="555F6B"/>
                           </a:solidFill>
                         </a:rPr>
-                        <a:t>database</a:t>
+                        <a:t>network</a:t>
                       </a:r>
                     </a:p>
                   </a:txBody>
@@ -9859,7 +10028,28 @@
                             <a:srgbClr val="555F6B"/>
                           </a:solidFill>
                         </a:rPr>
-                        <a:t>466,71</a:t>
+                        <a:t>64,26</a:t>
+                      </a:r>
+                    </a:p>
+                  </a:txBody>
+                  <a:tcPr marL="45720" marR="45720" marT="18288" marB="18288">
+                    <a:solidFill>
+                      <a:srgbClr val="FFFFFF"/>
+                    </a:solidFill>
+                  </a:tcPr>
+                </a:tc>
+                <a:tc>
+                  <a:txBody>
+                    <a:bodyPr/>
+                    <a:lstStyle/>
+                    <a:p>
+                      <a:r>
+                        <a:rPr sz="1200" b="0">
+                          <a:solidFill>
+                            <a:srgbClr val="555F6B"/>
+                          </a:solidFill>
+                        </a:rPr>
+                        <a:t>1,9%</a:t>
                       </a:r>
                     </a:p>
                   </a:txBody>
@@ -9882,7 +10072,7 @@
                             <a:srgbClr val="555F6B"/>
                           </a:solidFill>
                         </a:rPr>
-                        <a:t>vector_db</a:t>
+                        <a:t>cache_queue</a:t>
                       </a:r>
                     </a:p>
                   </a:txBody>
@@ -9903,7 +10093,28 @@
                             <a:srgbClr val="555F6B"/>
                           </a:solidFill>
                         </a:rPr>
-                        <a:t>0,00</a:t>
+                        <a:t>55,75</a:t>
+                      </a:r>
+                    </a:p>
+                  </a:txBody>
+                  <a:tcPr marL="45720" marR="45720" marT="18288" marB="18288">
+                    <a:solidFill>
+                      <a:srgbClr val="EEF3F8"/>
+                    </a:solidFill>
+                  </a:tcPr>
+                </a:tc>
+                <a:tc>
+                  <a:txBody>
+                    <a:bodyPr/>
+                    <a:lstStyle/>
+                    <a:p>
+                      <a:r>
+                        <a:rPr sz="1200" b="0">
+                          <a:solidFill>
+                            <a:srgbClr val="555F6B"/>
+                          </a:solidFill>
+                        </a:rPr>
+                        <a:t>1,6%</a:t>
                       </a:r>
                     </a:p>
                   </a:txBody>
@@ -9926,7 +10137,7 @@
                             <a:srgbClr val="555F6B"/>
                           </a:solidFill>
                         </a:rPr>
-                        <a:t>object_storage</a:t>
+                        <a:t>load_balancer</a:t>
                       </a:r>
                     </a:p>
                   </a:txBody>
@@ -9947,7 +10158,28 @@
                             <a:srgbClr val="555F6B"/>
                           </a:solidFill>
                         </a:rPr>
-                        <a:t>82,80</a:t>
+                        <a:t>29,44</a:t>
+                      </a:r>
+                    </a:p>
+                  </a:txBody>
+                  <a:tcPr marL="45720" marR="45720" marT="18288" marB="18288">
+                    <a:solidFill>
+                      <a:srgbClr val="FFFFFF"/>
+                    </a:solidFill>
+                  </a:tcPr>
+                </a:tc>
+                <a:tc>
+                  <a:txBody>
+                    <a:bodyPr/>
+                    <a:lstStyle/>
+                    <a:p>
+                      <a:r>
+                        <a:rPr sz="1200" b="0">
+                          <a:solidFill>
+                            <a:srgbClr val="555F6B"/>
+                          </a:solidFill>
+                        </a:rPr>
+                        <a:t>0,9%</a:t>
                       </a:r>
                     </a:p>
                   </a:txBody>
@@ -9981,8 +10213,9 @@
                 <a:tableStyleId>{5C22544A-7EE6-4342-B048-85BDC9FD1C3A}</a:tableStyleId>
               </a:tblPr>
               <a:tblGrid>
-                <a:gridCol w="3200400"/>
-                <a:gridCol w="2286000"/>
+                <a:gridCol w="2743200"/>
+                <a:gridCol w="1645920"/>
+                <a:gridCol w="1097280"/>
               </a:tblGrid>
               <a:tr h="384048">
                 <a:tc>
@@ -10027,6 +10260,27 @@
                     </a:solidFill>
                   </a:tcPr>
                 </a:tc>
+                <a:tc>
+                  <a:txBody>
+                    <a:bodyPr/>
+                    <a:lstStyle/>
+                    <a:p>
+                      <a:r>
+                        <a:rPr sz="1200" b="1">
+                          <a:solidFill>
+                            <a:srgbClr val="FFFFFF"/>
+                          </a:solidFill>
+                        </a:rPr>
+                        <a:t>%</a:t>
+                      </a:r>
+                    </a:p>
+                  </a:txBody>
+                  <a:tcPr marL="45720" marR="45720" marT="18288" marB="18288">
+                    <a:solidFill>
+                      <a:srgbClr val="2E6FB7"/>
+                    </a:solidFill>
+                  </a:tcPr>
+                </a:tc>
               </a:tr>
               <a:tr h="384048">
                 <a:tc>
@@ -10040,7 +10294,7 @@
                             <a:srgbClr val="555F6B"/>
                           </a:solidFill>
                         </a:rPr>
-                        <a:t>cache_queue</a:t>
+                        <a:t>monitoring</a:t>
                       </a:r>
                     </a:p>
                   </a:txBody>
@@ -10061,7 +10315,28 @@
                             <a:srgbClr val="555F6B"/>
                           </a:solidFill>
                         </a:rPr>
-                        <a:t>55,75</a:t>
+                        <a:t>22,51</a:t>
+                      </a:r>
+                    </a:p>
+                  </a:txBody>
+                  <a:tcPr marL="45720" marR="45720" marT="18288" marB="18288">
+                    <a:solidFill>
+                      <a:srgbClr val="EEF3F8"/>
+                    </a:solidFill>
+                  </a:tcPr>
+                </a:tc>
+                <a:tc>
+                  <a:txBody>
+                    <a:bodyPr/>
+                    <a:lstStyle/>
+                    <a:p>
+                      <a:r>
+                        <a:rPr sz="1200" b="0">
+                          <a:solidFill>
+                            <a:srgbClr val="555F6B"/>
+                          </a:solidFill>
+                        </a:rPr>
+                        <a:t>0,7%</a:t>
                       </a:r>
                     </a:p>
                   </a:txBody>
@@ -10084,7 +10359,7 @@
                             <a:srgbClr val="555F6B"/>
                           </a:solidFill>
                         </a:rPr>
-                        <a:t>sandbox</a:t>
+                        <a:t>embedding</a:t>
                       </a:r>
                     </a:p>
                   </a:txBody>
@@ -10105,7 +10380,28 @@
                             <a:srgbClr val="555F6B"/>
                           </a:solidFill>
                         </a:rPr>
-                        <a:t>314,64</a:t>
+                        <a:t>19,50</a:t>
+                      </a:r>
+                    </a:p>
+                  </a:txBody>
+                  <a:tcPr marL="45720" marR="45720" marT="18288" marB="18288">
+                    <a:solidFill>
+                      <a:srgbClr val="FFFFFF"/>
+                    </a:solidFill>
+                  </a:tcPr>
+                </a:tc>
+                <a:tc>
+                  <a:txBody>
+                    <a:bodyPr/>
+                    <a:lstStyle/>
+                    <a:p>
+                      <a:r>
+                        <a:rPr sz="1200" b="0">
+                          <a:solidFill>
+                            <a:srgbClr val="555F6B"/>
+                          </a:solidFill>
+                        </a:rPr>
+                        <a:t>0,6%</a:t>
                       </a:r>
                     </a:p>
                   </a:txBody>
@@ -10128,7 +10424,7 @@
                             <a:srgbClr val="555F6B"/>
                           </a:solidFill>
                         </a:rPr>
-                        <a:t>connectors</a:t>
+                        <a:t>cicd</a:t>
                       </a:r>
                     </a:p>
                   </a:txBody>
@@ -10149,7 +10445,28 @@
                             <a:srgbClr val="555F6B"/>
                           </a:solidFill>
                         </a:rPr>
-                        <a:t>0,00</a:t>
+                        <a:t>14,00</a:t>
+                      </a:r>
+                    </a:p>
+                  </a:txBody>
+                  <a:tcPr marL="45720" marR="45720" marT="18288" marB="18288">
+                    <a:solidFill>
+                      <a:srgbClr val="EEF3F8"/>
+                    </a:solidFill>
+                  </a:tcPr>
+                </a:tc>
+                <a:tc>
+                  <a:txBody>
+                    <a:bodyPr/>
+                    <a:lstStyle/>
+                    <a:p>
+                      <a:r>
+                        <a:rPr sz="1200" b="0">
+                          <a:solidFill>
+                            <a:srgbClr val="555F6B"/>
+                          </a:solidFill>
+                        </a:rPr>
+                        <a:t>0,4%</a:t>
                       </a:r>
                     </a:p>
                   </a:txBody>
@@ -10203,6 +10520,27 @@
                     </a:solidFill>
                   </a:tcPr>
                 </a:tc>
+                <a:tc>
+                  <a:txBody>
+                    <a:bodyPr/>
+                    <a:lstStyle/>
+                    <a:p>
+                      <a:r>
+                        <a:rPr sz="1200" b="0">
+                          <a:solidFill>
+                            <a:srgbClr val="555F6B"/>
+                          </a:solidFill>
+                        </a:rPr>
+                        <a:t>0,1%</a:t>
+                      </a:r>
+                    </a:p>
+                  </a:txBody>
+                  <a:tcPr marL="45720" marR="45720" marT="18288" marB="18288">
+                    <a:solidFill>
+                      <a:srgbClr val="FFFFFF"/>
+                    </a:solidFill>
+                  </a:tcPr>
+                </a:tc>
               </a:tr>
               <a:tr h="384048">
                 <a:tc>
@@ -10216,7 +10554,7 @@
                             <a:srgbClr val="555F6B"/>
                           </a:solidFill>
                         </a:rPr>
-                        <a:t>backup_dr</a:t>
+                        <a:t>authn</a:t>
                       </a:r>
                     </a:p>
                   </a:txBody>
@@ -10237,7 +10575,28 @@
                             <a:srgbClr val="555F6B"/>
                           </a:solidFill>
                         </a:rPr>
-                        <a:t>164,40</a:t>
+                        <a:t>0,00</a:t>
+                      </a:r>
+                    </a:p>
+                  </a:txBody>
+                  <a:tcPr marL="45720" marR="45720" marT="18288" marB="18288">
+                    <a:solidFill>
+                      <a:srgbClr val="EEF3F8"/>
+                    </a:solidFill>
+                  </a:tcPr>
+                </a:tc>
+                <a:tc>
+                  <a:txBody>
+                    <a:bodyPr/>
+                    <a:lstStyle/>
+                    <a:p>
+                      <a:r>
+                        <a:rPr sz="1200" b="0">
+                          <a:solidFill>
+                            <a:srgbClr val="555F6B"/>
+                          </a:solidFill>
+                        </a:rPr>
+                        <a:t>0,0%</a:t>
                       </a:r>
                     </a:p>
                   </a:txBody>
@@ -10260,7 +10619,7 @@
                             <a:srgbClr val="555F6B"/>
                           </a:solidFill>
                         </a:rPr>
-                        <a:t>monitoring</a:t>
+                        <a:t>authz</a:t>
                       </a:r>
                     </a:p>
                   </a:txBody>
@@ -10281,7 +10640,28 @@
                             <a:srgbClr val="555F6B"/>
                           </a:solidFill>
                         </a:rPr>
-                        <a:t>22,51</a:t>
+                        <a:t>0,00</a:t>
+                      </a:r>
+                    </a:p>
+                  </a:txBody>
+                  <a:tcPr marL="45720" marR="45720" marT="18288" marB="18288">
+                    <a:solidFill>
+                      <a:srgbClr val="FFFFFF"/>
+                    </a:solidFill>
+                  </a:tcPr>
+                </a:tc>
+                <a:tc>
+                  <a:txBody>
+                    <a:bodyPr/>
+                    <a:lstStyle/>
+                    <a:p>
+                      <a:r>
+                        <a:rPr sz="1200" b="0">
+                          <a:solidFill>
+                            <a:srgbClr val="555F6B"/>
+                          </a:solidFill>
+                        </a:rPr>
+                        <a:t>0,0%</a:t>
                       </a:r>
                     </a:p>
                   </a:txBody>
@@ -10304,7 +10684,7 @@
                             <a:srgbClr val="555F6B"/>
                           </a:solidFill>
                         </a:rPr>
-                        <a:t>governance</a:t>
+                        <a:t>connectors</a:t>
                       </a:r>
                     </a:p>
                   </a:txBody>
@@ -10325,7 +10705,28 @@
                             <a:srgbClr val="555F6B"/>
                           </a:solidFill>
                         </a:rPr>
-                        <a:t>805,98</a:t>
+                        <a:t>0,00</a:t>
+                      </a:r>
+                    </a:p>
+                  </a:txBody>
+                  <a:tcPr marL="45720" marR="45720" marT="18288" marB="18288">
+                    <a:solidFill>
+                      <a:srgbClr val="EEF3F8"/>
+                    </a:solidFill>
+                  </a:tcPr>
+                </a:tc>
+                <a:tc>
+                  <a:txBody>
+                    <a:bodyPr/>
+                    <a:lstStyle/>
+                    <a:p>
+                      <a:r>
+                        <a:rPr sz="1200" b="0">
+                          <a:solidFill>
+                            <a:srgbClr val="555F6B"/>
+                          </a:solidFill>
+                        </a:rPr>
+                        <a:t>0,0%</a:t>
                       </a:r>
                     </a:p>
                   </a:txBody>
@@ -10348,7 +10749,7 @@
                             <a:srgbClr val="555F6B"/>
                           </a:solidFill>
                         </a:rPr>
-                        <a:t>network</a:t>
+                        <a:t>gateway</a:t>
                       </a:r>
                     </a:p>
                   </a:txBody>
@@ -10369,7 +10770,28 @@
                             <a:srgbClr val="555F6B"/>
                           </a:solidFill>
                         </a:rPr>
-                        <a:t>64,26</a:t>
+                        <a:t>0,00</a:t>
+                      </a:r>
+                    </a:p>
+                  </a:txBody>
+                  <a:tcPr marL="45720" marR="45720" marT="18288" marB="18288">
+                    <a:solidFill>
+                      <a:srgbClr val="FFFFFF"/>
+                    </a:solidFill>
+                  </a:tcPr>
+                </a:tc>
+                <a:tc>
+                  <a:txBody>
+                    <a:bodyPr/>
+                    <a:lstStyle/>
+                    <a:p>
+                      <a:r>
+                        <a:rPr sz="1200" b="0">
+                          <a:solidFill>
+                            <a:srgbClr val="555F6B"/>
+                          </a:solidFill>
+                        </a:rPr>
+                        <a:t>0,0%</a:t>
                       </a:r>
                     </a:p>
                   </a:txBody>
@@ -10392,7 +10814,7 @@
                             <a:srgbClr val="555F6B"/>
                           </a:solidFill>
                         </a:rPr>
-                        <a:t>cicd</a:t>
+                        <a:t>ops_labor</a:t>
                       </a:r>
                     </a:p>
                   </a:txBody>
@@ -10413,7 +10835,28 @@
                             <a:srgbClr val="555F6B"/>
                           </a:solidFill>
                         </a:rPr>
-                        <a:t>14,00</a:t>
+                        <a:t>0,00</a:t>
+                      </a:r>
+                    </a:p>
+                  </a:txBody>
+                  <a:tcPr marL="45720" marR="45720" marT="18288" marB="18288">
+                    <a:solidFill>
+                      <a:srgbClr val="EEF3F8"/>
+                    </a:solidFill>
+                  </a:tcPr>
+                </a:tc>
+                <a:tc>
+                  <a:txBody>
+                    <a:bodyPr/>
+                    <a:lstStyle/>
+                    <a:p>
+                      <a:r>
+                        <a:rPr sz="1200" b="0">
+                          <a:solidFill>
+                            <a:srgbClr val="555F6B"/>
+                          </a:solidFill>
+                        </a:rPr>
+                        <a:t>0,0%</a:t>
                       </a:r>
                     </a:p>
                   </a:txBody>
@@ -10436,7 +10879,7 @@
                             <a:srgbClr val="555F6B"/>
                           </a:solidFill>
                         </a:rPr>
-                        <a:t>ops_labor</a:t>
+                        <a:t>vector_db</a:t>
                       </a:r>
                     </a:p>
                   </a:txBody>
@@ -10458,6 +10901,27 @@
                           </a:solidFill>
                         </a:rPr>
                         <a:t>0,00</a:t>
+                      </a:r>
+                    </a:p>
+                  </a:txBody>
+                  <a:tcPr marL="45720" marR="45720" marT="18288" marB="18288">
+                    <a:solidFill>
+                      <a:srgbClr val="FFFFFF"/>
+                    </a:solidFill>
+                  </a:tcPr>
+                </a:tc>
+                <a:tc>
+                  <a:txBody>
+                    <a:bodyPr/>
+                    <a:lstStyle/>
+                    <a:p>
+                      <a:r>
+                        <a:rPr sz="1200" b="0">
+                          <a:solidFill>
+                            <a:srgbClr val="555F6B"/>
+                          </a:solidFill>
+                        </a:rPr>
+                        <a:t>0,0%</a:t>
                       </a:r>
                     </a:p>
                   </a:txBody>
@@ -10502,6 +10966,27 @@
                           </a:solidFill>
                         </a:rPr>
                         <a:t>3.421,44</a:t>
+                      </a:r>
+                    </a:p>
+                  </a:txBody>
+                  <a:tcPr marL="45720" marR="45720" marT="18288" marB="18288">
+                    <a:solidFill>
+                      <a:srgbClr val="EEF3F8"/>
+                    </a:solidFill>
+                  </a:tcPr>
+                </a:tc>
+                <a:tc>
+                  <a:txBody>
+                    <a:bodyPr/>
+                    <a:lstStyle/>
+                    <a:p>
+                      <a:r>
+                        <a:rPr sz="1200" b="0">
+                          <a:solidFill>
+                            <a:srgbClr val="555F6B"/>
+                          </a:solidFill>
+                        </a:rPr>
+                        <a:t>100%</a:t>
                       </a:r>
                     </a:p>
                   </a:txBody>
